--- a/ppt/08.C언어-배열과문자열.pptx
+++ b/ppt/08.C언어-배열과문자열.pptx
@@ -1,11 +1,11 @@
 
 <file path=ppt/presentation.xml><?xml version="1.0" encoding="utf-8"?>
-<p:presentation xmlns:a="http://schemas.openxmlformats.org/drawingml/2006/main" xmlns:r="http://schemas.openxmlformats.org/officeDocument/2006/relationships" xmlns:p="http://schemas.openxmlformats.org/presentationml/2006/main" saveSubsetFonts="1">
+<p:presentation xmlns:a="http://schemas.openxmlformats.org/drawingml/2006/main" xmlns:r="http://schemas.openxmlformats.org/officeDocument/2006/relationships" xmlns:p="http://schemas.openxmlformats.org/presentationml/2006/main" embedTrueTypeFonts="1" saveSubsetFonts="1">
   <p:sldMasterIdLst>
     <p:sldMasterId id="2147483648" r:id="rId1"/>
   </p:sldMasterIdLst>
   <p:notesMasterIdLst>
-    <p:notesMasterId r:id="rId46"/>
+    <p:notesMasterId r:id="rId47"/>
   </p:notesMasterIdLst>
   <p:sldIdLst>
     <p:sldId id="272" r:id="rId2"/>
@@ -43,18 +43,41 @@
     <p:sldId id="337" r:id="rId34"/>
     <p:sldId id="338" r:id="rId35"/>
     <p:sldId id="339" r:id="rId36"/>
-    <p:sldId id="340" r:id="rId37"/>
-    <p:sldId id="341" r:id="rId38"/>
-    <p:sldId id="342" r:id="rId39"/>
-    <p:sldId id="343" r:id="rId40"/>
-    <p:sldId id="344" r:id="rId41"/>
-    <p:sldId id="345" r:id="rId42"/>
-    <p:sldId id="346" r:id="rId43"/>
-    <p:sldId id="347" r:id="rId44"/>
-    <p:sldId id="348" r:id="rId45"/>
+    <p:sldId id="349" r:id="rId37"/>
+    <p:sldId id="340" r:id="rId38"/>
+    <p:sldId id="341" r:id="rId39"/>
+    <p:sldId id="342" r:id="rId40"/>
+    <p:sldId id="343" r:id="rId41"/>
+    <p:sldId id="344" r:id="rId42"/>
+    <p:sldId id="345" r:id="rId43"/>
+    <p:sldId id="346" r:id="rId44"/>
+    <p:sldId id="347" r:id="rId45"/>
+    <p:sldId id="348" r:id="rId46"/>
   </p:sldIdLst>
   <p:sldSz cx="9144000" cy="6858000" type="screen4x3"/>
   <p:notesSz cx="6858000" cy="9144000"/>
+  <p:embeddedFontLst>
+    <p:embeddedFont>
+      <p:font typeface="Consolas" panose="020B0609020204030204" pitchFamily="49" charset="0"/>
+      <p:regular r:id="rId48"/>
+      <p:bold r:id="rId49"/>
+      <p:italic r:id="rId50"/>
+      <p:boldItalic r:id="rId51"/>
+    </p:embeddedFont>
+    <p:embeddedFont>
+      <p:font typeface="HY견고딕" panose="02030600000101010101" pitchFamily="18" charset="-127"/>
+      <p:regular r:id="rId52"/>
+    </p:embeddedFont>
+    <p:embeddedFont>
+      <p:font typeface="가을체" panose="02030600000101010101" pitchFamily="18" charset="-127"/>
+      <p:regular r:id="rId53"/>
+    </p:embeddedFont>
+    <p:embeddedFont>
+      <p:font typeface="맑은 고딕" panose="020B0503020000020004" pitchFamily="50" charset="-127"/>
+      <p:regular r:id="rId54"/>
+      <p:bold r:id="rId55"/>
+    </p:embeddedFont>
+  </p:embeddedFontLst>
   <p:defaultTextStyle>
     <a:defPPr>
       <a:defRPr lang="ko-KR"/>
@@ -14340,18 +14363,6 @@
           <a:p>
             <a:pPr lvl="1"/>
             <a:r>
-              <a:rPr lang="en-US" altLang="ko-KR" sz="2000" dirty="0"/>
-              <a:t>sizeof </a:t>
-            </a:r>
-            <a:r>
-              <a:rPr lang="ko-KR" altLang="en-US" sz="2000" dirty="0"/>
-              <a:t>→ 배열 전체 크기 확인</a:t>
-            </a:r>
-            <a:endParaRPr lang="ko-KR" altLang="en-US" sz="2400" dirty="0"/>
-          </a:p>
-          <a:p>
-            <a:pPr lvl="1"/>
-            <a:r>
               <a:rPr lang="ko-KR" altLang="en-US" sz="2000" dirty="0"/>
               <a:t>인덱스로 직접 접근</a:t>
             </a:r>
@@ -14365,22 +14376,34 @@
             </a:r>
             <a:r>
               <a:rPr lang="en-US" altLang="ko-KR" sz="2000" dirty="0"/>
-              <a:t>access). </a:t>
-            </a:r>
-            <a:r>
-              <a:rPr lang="ko-KR" altLang="en-US" sz="2000" dirty="0"/>
-              <a:t>접근 속도 일정 → </a:t>
-            </a:r>
-            <a:r>
-              <a:rPr lang="en-US" altLang="ko-KR" sz="2000" dirty="0"/>
-              <a:t>O(1)</a:t>
+              <a:t>access)</a:t>
             </a:r>
             <a:br>
               <a:rPr lang="en-US" altLang="ko-KR" sz="2000" dirty="0"/>
             </a:br>
             <a:r>
               <a:rPr lang="ko-KR" altLang="en-US" sz="2000" dirty="0"/>
+              <a:t>접근 속도 일정 → </a:t>
+            </a:r>
+            <a:r>
+              <a:rPr lang="en-US" altLang="ko-KR" sz="2000" dirty="0"/>
+              <a:t>O(1). </a:t>
+            </a:r>
+            <a:r>
+              <a:rPr lang="ko-KR" altLang="en-US" sz="2000" dirty="0"/>
               <a:t>가장 빠른 접근 자료 구조</a:t>
+            </a:r>
+            <a:endParaRPr lang="en-US" altLang="ko-KR" sz="2000" dirty="0"/>
+          </a:p>
+          <a:p>
+            <a:pPr lvl="1"/>
+            <a:r>
+              <a:rPr lang="en-US" altLang="ko-KR" sz="2000" dirty="0"/>
+              <a:t>sizeof </a:t>
+            </a:r>
+            <a:r>
+              <a:rPr lang="ko-KR" altLang="en-US" sz="2000" dirty="0"/>
+              <a:t>→ 배열 전체 크기 확인</a:t>
             </a:r>
             <a:endParaRPr lang="en-US" altLang="ko-KR" sz="2000" dirty="0"/>
           </a:p>
@@ -31546,7 +31569,7 @@
             </a:r>
             <a:r>
               <a:rPr lang="en-US" altLang="ko-KR" sz="2000" dirty="0"/>
-              <a:t>(array-to-pointer decay)</a:t>
+              <a:t>(Array-to-pointer conversion, array-to-pointer decay)</a:t>
             </a:r>
           </a:p>
           <a:p>
@@ -32035,6 +32058,534 @@
   <p:cSld>
     <p:spTree>
       <p:nvGrpSpPr>
+        <p:cNvPr id="1" name="">
+          <a:extLst>
+            <a:ext uri="{FF2B5EF4-FFF2-40B4-BE49-F238E27FC236}">
+              <a16:creationId xmlns:a16="http://schemas.microsoft.com/office/drawing/2014/main" id="{07F4A708-B869-6947-4D40-534847CE5B73}"/>
+            </a:ext>
+          </a:extLst>
+        </p:cNvPr>
+        <p:cNvGrpSpPr/>
+        <p:nvPr/>
+      </p:nvGrpSpPr>
+      <p:grpSpPr>
+        <a:xfrm>
+          <a:off x="0" y="0"/>
+          <a:ext cx="0" cy="0"/>
+          <a:chOff x="0" y="0"/>
+          <a:chExt cx="0" cy="0"/>
+        </a:xfrm>
+      </p:grpSpPr>
+      <p:sp>
+        <p:nvSpPr>
+          <p:cNvPr id="2" name="제목 1">
+            <a:extLst>
+              <a:ext uri="{FF2B5EF4-FFF2-40B4-BE49-F238E27FC236}">
+                <a16:creationId xmlns:a16="http://schemas.microsoft.com/office/drawing/2014/main" id="{AC52D6FB-DB77-5DB9-80B0-B443A725B5DE}"/>
+              </a:ext>
+            </a:extLst>
+          </p:cNvPr>
+          <p:cNvSpPr>
+            <a:spLocks noGrp="1"/>
+          </p:cNvSpPr>
+          <p:nvPr>
+            <p:ph type="title"/>
+          </p:nvPr>
+        </p:nvSpPr>
+        <p:spPr/>
+        <p:txBody>
+          <a:bodyPr/>
+          <a:lstStyle/>
+          <a:p>
+            <a:r>
+              <a:rPr lang="en-US" altLang="ko-KR" b="0" dirty="0"/>
+              <a:t>8.3.1 </a:t>
+            </a:r>
+            <a:r>
+              <a:rPr lang="ko-KR" altLang="en-US" b="0" dirty="0"/>
+              <a:t>함수에서 배열 인수 전달</a:t>
+            </a:r>
+            <a:endParaRPr lang="ko-KR" altLang="en-US" dirty="0"/>
+          </a:p>
+        </p:txBody>
+      </p:sp>
+      <p:sp>
+        <p:nvSpPr>
+          <p:cNvPr id="3" name="내용 개체 틀 2">
+            <a:extLst>
+              <a:ext uri="{FF2B5EF4-FFF2-40B4-BE49-F238E27FC236}">
+                <a16:creationId xmlns:a16="http://schemas.microsoft.com/office/drawing/2014/main" id="{93739387-3216-6C02-F369-B52C7D4FEBCD}"/>
+              </a:ext>
+            </a:extLst>
+          </p:cNvPr>
+          <p:cNvSpPr>
+            <a:spLocks noGrp="1"/>
+          </p:cNvSpPr>
+          <p:nvPr>
+            <p:ph idx="1"/>
+          </p:nvPr>
+        </p:nvSpPr>
+        <p:spPr/>
+        <p:txBody>
+          <a:bodyPr/>
+          <a:lstStyle/>
+          <a:p>
+            <a:r>
+              <a:rPr lang="ko-KR" altLang="en-US" dirty="0"/>
+              <a:t>함수의 인수</a:t>
+            </a:r>
+            <a:endParaRPr lang="en-US" altLang="ko-KR" dirty="0"/>
+          </a:p>
+          <a:p>
+            <a:pPr lvl="1"/>
+            <a:r>
+              <a:rPr lang="ko-KR" altLang="en-US" dirty="0"/>
+              <a:t>배열은 포인터로 변환되어 전달</a:t>
+            </a:r>
+            <a:br>
+              <a:rPr lang="en-US" altLang="ko-KR" dirty="0"/>
+            </a:br>
+            <a:r>
+              <a:rPr lang="en-US" altLang="ko-KR" dirty="0"/>
+              <a:t>(array-to-pointer conversion) </a:t>
+            </a:r>
+          </a:p>
+          <a:p>
+            <a:pPr lvl="1"/>
+            <a:r>
+              <a:rPr lang="ko-KR" altLang="en-US" dirty="0"/>
+              <a:t>전달 시 </a:t>
+            </a:r>
+            <a:r>
+              <a:rPr lang="en-US" altLang="ko-KR" dirty="0"/>
+              <a:t>0-</a:t>
+            </a:r>
+            <a:r>
+              <a:rPr lang="ko-KR" altLang="en-US" dirty="0"/>
+              <a:t>요소의 주소</a:t>
+            </a:r>
+            <a:r>
+              <a:rPr lang="en-US" altLang="ko-KR" dirty="0"/>
+              <a:t>(&amp;arr[0])</a:t>
+            </a:r>
+            <a:r>
+              <a:rPr lang="ko-KR" altLang="en-US" dirty="0"/>
+              <a:t>로 변환 </a:t>
+            </a:r>
+          </a:p>
+          <a:p>
+            <a:pPr lvl="1"/>
+            <a:r>
+              <a:rPr lang="ko-KR" altLang="en-US" dirty="0"/>
+              <a:t>포인터로 전달되므로 배열의 크기 정보는 전달 안됨</a:t>
+            </a:r>
+            <a:endParaRPr lang="en-US" altLang="ko-KR" sz="2800" dirty="0"/>
+          </a:p>
+          <a:p>
+            <a:endParaRPr lang="en-US" altLang="ko-KR" sz="2400" dirty="0"/>
+          </a:p>
+        </p:txBody>
+      </p:sp>
+      <p:sp>
+        <p:nvSpPr>
+          <p:cNvPr id="4" name="바닥글 개체 틀 3">
+            <a:extLst>
+              <a:ext uri="{FF2B5EF4-FFF2-40B4-BE49-F238E27FC236}">
+                <a16:creationId xmlns:a16="http://schemas.microsoft.com/office/drawing/2014/main" id="{A7CE6F61-1430-15BC-5CF5-7A9FCF97A149}"/>
+              </a:ext>
+            </a:extLst>
+          </p:cNvPr>
+          <p:cNvSpPr>
+            <a:spLocks noGrp="1"/>
+          </p:cNvSpPr>
+          <p:nvPr>
+            <p:ph type="ftr" sz="quarter" idx="10"/>
+          </p:nvPr>
+        </p:nvSpPr>
+        <p:spPr/>
+        <p:txBody>
+          <a:bodyPr/>
+          <a:lstStyle/>
+          <a:p>
+            <a:pPr>
+              <a:defRPr/>
+            </a:pPr>
+            <a:r>
+              <a:rPr lang="ko-KR" altLang="en-US"/>
+              <a:t>게임 프로그래밍 교육과정</a:t>
+            </a:r>
+            <a:endParaRPr lang="ko-KR" altLang="en-US" dirty="0"/>
+          </a:p>
+        </p:txBody>
+      </p:sp>
+      <p:sp>
+        <p:nvSpPr>
+          <p:cNvPr id="6" name="TextBox 5">
+            <a:extLst>
+              <a:ext uri="{FF2B5EF4-FFF2-40B4-BE49-F238E27FC236}">
+                <a16:creationId xmlns:a16="http://schemas.microsoft.com/office/drawing/2014/main" id="{56D50AF4-4679-BE59-ED48-7213D8B757AD}"/>
+              </a:ext>
+            </a:extLst>
+          </p:cNvPr>
+          <p:cNvSpPr txBox="1"/>
+          <p:nvPr/>
+        </p:nvSpPr>
+        <p:spPr>
+          <a:xfrm>
+            <a:off x="256359" y="3321305"/>
+            <a:ext cx="4987324" cy="584775"/>
+          </a:xfrm>
+          <a:prstGeom prst="rect">
+            <a:avLst/>
+          </a:prstGeom>
+          <a:noFill/>
+          <a:ln w="25400">
+            <a:solidFill>
+              <a:schemeClr val="bg1">
+                <a:lumMod val="65000"/>
+              </a:schemeClr>
+            </a:solidFill>
+            <a:prstDash val="sysDot"/>
+          </a:ln>
+        </p:spPr>
+        <p:txBody>
+          <a:bodyPr wrap="square">
+            <a:spAutoFit/>
+          </a:bodyPr>
+          <a:lstStyle/>
+          <a:p>
+            <a:r>
+              <a:rPr lang="en-US" altLang="ko-KR" sz="2000" b="0" i="0" u="none" strike="noStrike" dirty="0">
+                <a:solidFill>
+                  <a:srgbClr val="A626A4"/>
+                </a:solidFill>
+                <a:effectLst/>
+                <a:latin typeface="Consolas" panose="020B0609020204030204" pitchFamily="49" charset="0"/>
+              </a:rPr>
+              <a:t>void</a:t>
+            </a:r>
+            <a:r>
+              <a:rPr lang="en-US" altLang="ko-KR" sz="2000" b="0" i="0" u="none" strike="noStrike" dirty="0">
+                <a:solidFill>
+                  <a:srgbClr val="383A42"/>
+                </a:solidFill>
+                <a:effectLst/>
+                <a:latin typeface="Consolas" panose="020B0609020204030204" pitchFamily="49" charset="0"/>
+              </a:rPr>
+              <a:t> </a:t>
+            </a:r>
+            <a:r>
+              <a:rPr lang="en-US" altLang="ko-KR" sz="2000" b="0" i="0" u="none" strike="noStrike" dirty="0">
+                <a:solidFill>
+                  <a:srgbClr val="4078F2"/>
+                </a:solidFill>
+                <a:effectLst/>
+                <a:latin typeface="Consolas" panose="020B0609020204030204" pitchFamily="49" charset="0"/>
+              </a:rPr>
+              <a:t>Func</a:t>
+            </a:r>
+            <a:r>
+              <a:rPr lang="en-US" altLang="ko-KR" sz="2000" b="0" i="0" u="none" strike="noStrike" dirty="0">
+                <a:solidFill>
+                  <a:srgbClr val="383A42"/>
+                </a:solidFill>
+                <a:effectLst/>
+                <a:latin typeface="Consolas" panose="020B0609020204030204" pitchFamily="49" charset="0"/>
+              </a:rPr>
+              <a:t>(</a:t>
+            </a:r>
+            <a:r>
+              <a:rPr lang="en-US" altLang="ko-KR" sz="3200" b="1" i="0" u="none" strike="noStrike" dirty="0">
+                <a:solidFill>
+                  <a:srgbClr val="A626A4"/>
+                </a:solidFill>
+                <a:effectLst/>
+                <a:latin typeface="Consolas" panose="020B0609020204030204" pitchFamily="49" charset="0"/>
+              </a:rPr>
+              <a:t>int</a:t>
+            </a:r>
+            <a:r>
+              <a:rPr lang="en-US" altLang="ko-KR" sz="3200" b="1" i="0" u="none" strike="noStrike" dirty="0">
+                <a:solidFill>
+                  <a:srgbClr val="383A42"/>
+                </a:solidFill>
+                <a:effectLst/>
+                <a:latin typeface="Consolas" panose="020B0609020204030204" pitchFamily="49" charset="0"/>
+              </a:rPr>
+              <a:t> arr[]</a:t>
+            </a:r>
+            <a:r>
+              <a:rPr lang="en-US" altLang="ko-KR" sz="2000" b="0" i="0" u="none" strike="noStrike" dirty="0">
+                <a:solidFill>
+                  <a:srgbClr val="383A42"/>
+                </a:solidFill>
+                <a:effectLst/>
+                <a:latin typeface="Consolas" panose="020B0609020204030204" pitchFamily="49" charset="0"/>
+              </a:rPr>
+              <a:t>)</a:t>
+            </a:r>
+            <a:endParaRPr lang="ko-KR" altLang="en-US" sz="2000" dirty="0"/>
+          </a:p>
+        </p:txBody>
+      </p:sp>
+      <p:sp>
+        <p:nvSpPr>
+          <p:cNvPr id="5" name="TextBox 4">
+            <a:extLst>
+              <a:ext uri="{FF2B5EF4-FFF2-40B4-BE49-F238E27FC236}">
+                <a16:creationId xmlns:a16="http://schemas.microsoft.com/office/drawing/2014/main" id="{B0C22AD9-54D0-5E0B-9909-2203B44A8519}"/>
+              </a:ext>
+            </a:extLst>
+          </p:cNvPr>
+          <p:cNvSpPr txBox="1"/>
+          <p:nvPr/>
+        </p:nvSpPr>
+        <p:spPr>
+          <a:xfrm>
+            <a:off x="256359" y="4077072"/>
+            <a:ext cx="8631282" cy="584775"/>
+          </a:xfrm>
+          <a:prstGeom prst="rect">
+            <a:avLst/>
+          </a:prstGeom>
+          <a:noFill/>
+          <a:ln w="25400">
+            <a:solidFill>
+              <a:schemeClr val="bg1">
+                <a:lumMod val="65000"/>
+              </a:schemeClr>
+            </a:solidFill>
+            <a:prstDash val="sysDot"/>
+          </a:ln>
+        </p:spPr>
+        <p:txBody>
+          <a:bodyPr wrap="square">
+            <a:spAutoFit/>
+          </a:bodyPr>
+          <a:lstStyle/>
+          <a:p>
+            <a:r>
+              <a:rPr lang="en-US" altLang="ko-KR" sz="2000" b="0" i="0" u="none" strike="noStrike" dirty="0">
+                <a:solidFill>
+                  <a:srgbClr val="A626A4"/>
+                </a:solidFill>
+                <a:effectLst/>
+                <a:latin typeface="Consolas" panose="020B0609020204030204" pitchFamily="49" charset="0"/>
+              </a:rPr>
+              <a:t>void</a:t>
+            </a:r>
+            <a:r>
+              <a:rPr lang="en-US" altLang="ko-KR" sz="2000" b="0" i="0" u="none" strike="noStrike" dirty="0">
+                <a:solidFill>
+                  <a:srgbClr val="383A42"/>
+                </a:solidFill>
+                <a:effectLst/>
+                <a:latin typeface="Consolas" panose="020B0609020204030204" pitchFamily="49" charset="0"/>
+              </a:rPr>
+              <a:t> </a:t>
+            </a:r>
+            <a:r>
+              <a:rPr lang="en-US" altLang="ko-KR" sz="2000" b="0" i="0" u="none" strike="noStrike" dirty="0">
+                <a:solidFill>
+                  <a:srgbClr val="4078F2"/>
+                </a:solidFill>
+                <a:effectLst/>
+                <a:latin typeface="Consolas" panose="020B0609020204030204" pitchFamily="49" charset="0"/>
+              </a:rPr>
+              <a:t>Func</a:t>
+            </a:r>
+            <a:r>
+              <a:rPr lang="en-US" altLang="ko-KR" sz="2000" b="0" i="0" u="none" strike="noStrike" dirty="0">
+                <a:solidFill>
+                  <a:srgbClr val="383A42"/>
+                </a:solidFill>
+                <a:effectLst/>
+                <a:latin typeface="Consolas" panose="020B0609020204030204" pitchFamily="49" charset="0"/>
+              </a:rPr>
+              <a:t>(</a:t>
+            </a:r>
+            <a:r>
+              <a:rPr lang="en-US" altLang="ko-KR" sz="3200" b="1" i="0" u="none" strike="noStrike" dirty="0">
+                <a:solidFill>
+                  <a:srgbClr val="A626A4"/>
+                </a:solidFill>
+                <a:effectLst/>
+                <a:latin typeface="Consolas" panose="020B0609020204030204" pitchFamily="49" charset="0"/>
+              </a:rPr>
+              <a:t>int</a:t>
+            </a:r>
+            <a:r>
+              <a:rPr lang="en-US" altLang="ko-KR" sz="3200" b="1" i="0" u="none" strike="noStrike" dirty="0">
+                <a:solidFill>
+                  <a:srgbClr val="383A42"/>
+                </a:solidFill>
+                <a:effectLst/>
+                <a:latin typeface="Consolas" panose="020B0609020204030204" pitchFamily="49" charset="0"/>
+              </a:rPr>
+              <a:t> arr[10000]</a:t>
+            </a:r>
+            <a:r>
+              <a:rPr lang="en-US" altLang="ko-KR" sz="2000" b="0" i="0" u="none" strike="noStrike" dirty="0">
+                <a:solidFill>
+                  <a:srgbClr val="383A42"/>
+                </a:solidFill>
+                <a:effectLst/>
+                <a:latin typeface="Consolas" panose="020B0609020204030204" pitchFamily="49" charset="0"/>
+              </a:rPr>
+              <a:t>) // </a:t>
+            </a:r>
+            <a:r>
+              <a:rPr lang="ko-KR" altLang="en-US" sz="2000" b="0" i="0" u="none" strike="noStrike" dirty="0">
+                <a:solidFill>
+                  <a:srgbClr val="383A42"/>
+                </a:solidFill>
+                <a:effectLst/>
+                <a:latin typeface="Consolas" panose="020B0609020204030204" pitchFamily="49" charset="0"/>
+              </a:rPr>
+              <a:t>배열크기 정보는 전달 안됨</a:t>
+            </a:r>
+            <a:endParaRPr lang="ko-KR" altLang="en-US" sz="2000" dirty="0"/>
+          </a:p>
+        </p:txBody>
+      </p:sp>
+      <p:sp>
+        <p:nvSpPr>
+          <p:cNvPr id="7" name="TextBox 6">
+            <a:extLst>
+              <a:ext uri="{FF2B5EF4-FFF2-40B4-BE49-F238E27FC236}">
+                <a16:creationId xmlns:a16="http://schemas.microsoft.com/office/drawing/2014/main" id="{A11DDB66-21F1-F65D-7263-ED72C2F24E42}"/>
+              </a:ext>
+            </a:extLst>
+          </p:cNvPr>
+          <p:cNvSpPr txBox="1"/>
+          <p:nvPr/>
+        </p:nvSpPr>
+        <p:spPr>
+          <a:xfrm>
+            <a:off x="256359" y="4832838"/>
+            <a:ext cx="4987324" cy="584775"/>
+          </a:xfrm>
+          <a:prstGeom prst="rect">
+            <a:avLst/>
+          </a:prstGeom>
+          <a:noFill/>
+          <a:ln w="25400">
+            <a:solidFill>
+              <a:schemeClr val="bg1">
+                <a:lumMod val="65000"/>
+              </a:schemeClr>
+            </a:solidFill>
+            <a:prstDash val="sysDot"/>
+          </a:ln>
+        </p:spPr>
+        <p:txBody>
+          <a:bodyPr wrap="square">
+            <a:spAutoFit/>
+          </a:bodyPr>
+          <a:lstStyle/>
+          <a:p>
+            <a:r>
+              <a:rPr lang="en-US" altLang="ko-KR" sz="2000" b="0" i="0" u="none" strike="noStrike" dirty="0">
+                <a:solidFill>
+                  <a:srgbClr val="A626A4"/>
+                </a:solidFill>
+                <a:effectLst/>
+                <a:latin typeface="Consolas" panose="020B0609020204030204" pitchFamily="49" charset="0"/>
+              </a:rPr>
+              <a:t>void</a:t>
+            </a:r>
+            <a:r>
+              <a:rPr lang="en-US" altLang="ko-KR" sz="2000" b="0" i="0" u="none" strike="noStrike" dirty="0">
+                <a:solidFill>
+                  <a:srgbClr val="383A42"/>
+                </a:solidFill>
+                <a:effectLst/>
+                <a:latin typeface="Consolas" panose="020B0609020204030204" pitchFamily="49" charset="0"/>
+              </a:rPr>
+              <a:t> </a:t>
+            </a:r>
+            <a:r>
+              <a:rPr lang="en-US" altLang="ko-KR" sz="2000" b="0" i="0" u="none" strike="noStrike" dirty="0">
+                <a:solidFill>
+                  <a:srgbClr val="4078F2"/>
+                </a:solidFill>
+                <a:effectLst/>
+                <a:latin typeface="Consolas" panose="020B0609020204030204" pitchFamily="49" charset="0"/>
+              </a:rPr>
+              <a:t>Func</a:t>
+            </a:r>
+            <a:r>
+              <a:rPr lang="en-US" altLang="ko-KR" sz="2000" b="0" i="0" u="none" strike="noStrike" dirty="0">
+                <a:solidFill>
+                  <a:srgbClr val="383A42"/>
+                </a:solidFill>
+                <a:effectLst/>
+                <a:latin typeface="Consolas" panose="020B0609020204030204" pitchFamily="49" charset="0"/>
+              </a:rPr>
+              <a:t>(</a:t>
+            </a:r>
+            <a:r>
+              <a:rPr lang="en-US" altLang="ko-KR" sz="3200" b="1" i="0" u="none" strike="noStrike" dirty="0">
+                <a:solidFill>
+                  <a:srgbClr val="A626A4"/>
+                </a:solidFill>
+                <a:effectLst/>
+                <a:latin typeface="Consolas" panose="020B0609020204030204" pitchFamily="49" charset="0"/>
+              </a:rPr>
+              <a:t>int</a:t>
+            </a:r>
+            <a:r>
+              <a:rPr lang="en-US" altLang="ko-KR" sz="3200" b="1" i="0" u="none" strike="noStrike" dirty="0">
+                <a:solidFill>
+                  <a:srgbClr val="0000FF"/>
+                </a:solidFill>
+                <a:effectLst/>
+                <a:latin typeface="Consolas" panose="020B0609020204030204" pitchFamily="49" charset="0"/>
+              </a:rPr>
+              <a:t>*</a:t>
+            </a:r>
+            <a:r>
+              <a:rPr lang="en-US" altLang="ko-KR" sz="3200" b="1" i="0" u="none" strike="noStrike" dirty="0">
+                <a:solidFill>
+                  <a:srgbClr val="383A42"/>
+                </a:solidFill>
+                <a:effectLst/>
+                <a:latin typeface="Consolas" panose="020B0609020204030204" pitchFamily="49" charset="0"/>
+              </a:rPr>
+              <a:t> arr</a:t>
+            </a:r>
+            <a:r>
+              <a:rPr lang="en-US" altLang="ko-KR" sz="2000" b="0" i="0" u="none" strike="noStrike" dirty="0">
+                <a:solidFill>
+                  <a:srgbClr val="383A42"/>
+                </a:solidFill>
+                <a:effectLst/>
+                <a:latin typeface="Consolas" panose="020B0609020204030204" pitchFamily="49" charset="0"/>
+              </a:rPr>
+              <a:t>)</a:t>
+            </a:r>
+            <a:endParaRPr lang="ko-KR" altLang="en-US" sz="2000" dirty="0"/>
+          </a:p>
+        </p:txBody>
+      </p:sp>
+    </p:spTree>
+    <p:extLst>
+      <p:ext uri="{BB962C8B-B14F-4D97-AF65-F5344CB8AC3E}">
+        <p14:creationId xmlns:p14="http://schemas.microsoft.com/office/powerpoint/2010/main" val="2859149505"/>
+      </p:ext>
+    </p:extLst>
+  </p:cSld>
+  <p:clrMapOvr>
+    <a:masterClrMapping/>
+  </p:clrMapOvr>
+</p:sld>
+</file>
+
+<file path=ppt/slides/slide37.xml><?xml version="1.0" encoding="utf-8"?>
+<p:sld xmlns:a="http://schemas.openxmlformats.org/drawingml/2006/main" xmlns:r="http://schemas.openxmlformats.org/officeDocument/2006/relationships" xmlns:p="http://schemas.openxmlformats.org/presentationml/2006/main">
+  <p:cSld>
+    <p:spTree>
+      <p:nvGrpSpPr>
         <p:cNvPr id="1" name=""/>
         <p:cNvGrpSpPr/>
         <p:nvPr/>
@@ -32342,7 +32893,7 @@
 </p:sld>
 </file>
 
-<file path=ppt/slides/slide37.xml><?xml version="1.0" encoding="utf-8"?>
+<file path=ppt/slides/slide38.xml><?xml version="1.0" encoding="utf-8"?>
 <p:sld xmlns:a="http://schemas.openxmlformats.org/drawingml/2006/main" xmlns:r="http://schemas.openxmlformats.org/officeDocument/2006/relationships" xmlns:p="http://schemas.openxmlformats.org/presentationml/2006/main">
   <p:cSld>
     <p:spTree>
@@ -33724,7 +34275,7 @@
 </p:sld>
 </file>
 
-<file path=ppt/slides/slide38.xml><?xml version="1.0" encoding="utf-8"?>
+<file path=ppt/slides/slide39.xml><?xml version="1.0" encoding="utf-8"?>
 <p:sld xmlns:a="http://schemas.openxmlformats.org/drawingml/2006/main" xmlns:r="http://schemas.openxmlformats.org/officeDocument/2006/relationships" xmlns:p="http://schemas.openxmlformats.org/presentationml/2006/main">
   <p:cSld>
     <p:spTree>
@@ -34561,1196 +35112,6 @@
     <p:extLst>
       <p:ext uri="{BB962C8B-B14F-4D97-AF65-F5344CB8AC3E}">
         <p14:creationId xmlns:p14="http://schemas.microsoft.com/office/powerpoint/2010/main" val="3957507229"/>
-      </p:ext>
-    </p:extLst>
-  </p:cSld>
-  <p:clrMapOvr>
-    <a:masterClrMapping/>
-  </p:clrMapOvr>
-</p:sld>
-</file>
-
-<file path=ppt/slides/slide39.xml><?xml version="1.0" encoding="utf-8"?>
-<p:sld xmlns:a="http://schemas.openxmlformats.org/drawingml/2006/main" xmlns:r="http://schemas.openxmlformats.org/officeDocument/2006/relationships" xmlns:p="http://schemas.openxmlformats.org/presentationml/2006/main">
-  <p:cSld>
-    <p:spTree>
-      <p:nvGrpSpPr>
-        <p:cNvPr id="1" name="">
-          <a:extLst>
-            <a:ext uri="{FF2B5EF4-FFF2-40B4-BE49-F238E27FC236}">
-              <a16:creationId xmlns:a16="http://schemas.microsoft.com/office/drawing/2014/main" id="{47B8AB45-5BBC-D997-3987-FBE56A8FF282}"/>
-            </a:ext>
-          </a:extLst>
-        </p:cNvPr>
-        <p:cNvGrpSpPr/>
-        <p:nvPr/>
-      </p:nvGrpSpPr>
-      <p:grpSpPr>
-        <a:xfrm>
-          <a:off x="0" y="0"/>
-          <a:ext cx="0" cy="0"/>
-          <a:chOff x="0" y="0"/>
-          <a:chExt cx="0" cy="0"/>
-        </a:xfrm>
-      </p:grpSpPr>
-      <p:sp>
-        <p:nvSpPr>
-          <p:cNvPr id="2" name="제목 1">
-            <a:extLst>
-              <a:ext uri="{FF2B5EF4-FFF2-40B4-BE49-F238E27FC236}">
-                <a16:creationId xmlns:a16="http://schemas.microsoft.com/office/drawing/2014/main" id="{28B13EFC-99FB-614F-9AD2-27A43714C86F}"/>
-              </a:ext>
-            </a:extLst>
-          </p:cNvPr>
-          <p:cNvSpPr>
-            <a:spLocks noGrp="1"/>
-          </p:cNvSpPr>
-          <p:nvPr>
-            <p:ph type="title"/>
-          </p:nvPr>
-        </p:nvSpPr>
-        <p:spPr/>
-        <p:txBody>
-          <a:bodyPr/>
-          <a:lstStyle/>
-          <a:p>
-            <a:r>
-              <a:rPr lang="en-US" altLang="ko-KR" b="0" dirty="0"/>
-              <a:t>8.3.4 </a:t>
-            </a:r>
-            <a:r>
-              <a:rPr lang="ko-KR" altLang="en-US" b="0" dirty="0"/>
-              <a:t>문자열 복사하기 </a:t>
-            </a:r>
-            <a:r>
-              <a:rPr lang="en-US" altLang="ko-KR" b="0" dirty="0"/>
-              <a:t>– </a:t>
-            </a:r>
-            <a:r>
-              <a:rPr lang="en-US" altLang="ko-KR" b="0" dirty="0" err="1"/>
-              <a:t>myStrCpy</a:t>
-            </a:r>
-            <a:endParaRPr lang="ko-KR" altLang="en-US" dirty="0"/>
-          </a:p>
-        </p:txBody>
-      </p:sp>
-      <p:sp>
-        <p:nvSpPr>
-          <p:cNvPr id="3" name="내용 개체 틀 2">
-            <a:extLst>
-              <a:ext uri="{FF2B5EF4-FFF2-40B4-BE49-F238E27FC236}">
-                <a16:creationId xmlns:a16="http://schemas.microsoft.com/office/drawing/2014/main" id="{98585783-F4BB-268A-3A73-567E1B96687A}"/>
-              </a:ext>
-            </a:extLst>
-          </p:cNvPr>
-          <p:cNvSpPr>
-            <a:spLocks noGrp="1"/>
-          </p:cNvSpPr>
-          <p:nvPr>
-            <p:ph idx="1"/>
-          </p:nvPr>
-        </p:nvSpPr>
-        <p:spPr/>
-        <p:txBody>
-          <a:bodyPr/>
-          <a:lstStyle/>
-          <a:p>
-            <a:r>
-              <a:rPr lang="ko-KR" altLang="en-US" sz="2400" dirty="0"/>
-              <a:t>문자열 끝 → </a:t>
-            </a:r>
-            <a:r>
-              <a:rPr lang="en-US" altLang="ko-KR" sz="2400" dirty="0"/>
-              <a:t>'</a:t>
-            </a:r>
-            <a:r>
-              <a:rPr lang="en-US" altLang="ko-KR" sz="2400" dirty="0">
-                <a:latin typeface="Consolas" panose="020B0609020204030204" pitchFamily="49" charset="0"/>
-              </a:rPr>
-              <a:t>\0</a:t>
-            </a:r>
-            <a:r>
-              <a:rPr lang="en-US" altLang="ko-KR" sz="2400" dirty="0"/>
-              <a:t>'</a:t>
-            </a:r>
-          </a:p>
-          <a:p>
-            <a:r>
-              <a:rPr lang="ko-KR" altLang="en-US" sz="2400" dirty="0"/>
-              <a:t>문자열 길이 → </a:t>
-            </a:r>
-            <a:r>
-              <a:rPr lang="en-US" altLang="ko-KR" sz="2400" dirty="0"/>
-              <a:t>'</a:t>
-            </a:r>
-            <a:r>
-              <a:rPr lang="en-US" altLang="ko-KR" sz="2400" dirty="0">
-                <a:latin typeface="Consolas" panose="020B0609020204030204" pitchFamily="49" charset="0"/>
-              </a:rPr>
-              <a:t>\0</a:t>
-            </a:r>
-            <a:r>
-              <a:rPr lang="en-US" altLang="ko-KR" sz="2400" dirty="0"/>
-              <a:t>' </a:t>
-            </a:r>
-            <a:r>
-              <a:rPr lang="ko-KR" altLang="en-US" sz="2400" dirty="0"/>
-              <a:t>이전까지</a:t>
-            </a:r>
-            <a:endParaRPr lang="en-US" altLang="ko-KR" sz="2400" dirty="0"/>
-          </a:p>
-        </p:txBody>
-      </p:sp>
-      <p:sp>
-        <p:nvSpPr>
-          <p:cNvPr id="4" name="바닥글 개체 틀 3">
-            <a:extLst>
-              <a:ext uri="{FF2B5EF4-FFF2-40B4-BE49-F238E27FC236}">
-                <a16:creationId xmlns:a16="http://schemas.microsoft.com/office/drawing/2014/main" id="{8A211DE7-6BC0-26E8-91C2-7FB661E7012C}"/>
-              </a:ext>
-            </a:extLst>
-          </p:cNvPr>
-          <p:cNvSpPr>
-            <a:spLocks noGrp="1"/>
-          </p:cNvSpPr>
-          <p:nvPr>
-            <p:ph type="ftr" sz="quarter" idx="10"/>
-          </p:nvPr>
-        </p:nvSpPr>
-        <p:spPr/>
-        <p:txBody>
-          <a:bodyPr/>
-          <a:lstStyle/>
-          <a:p>
-            <a:pPr>
-              <a:defRPr/>
-            </a:pPr>
-            <a:r>
-              <a:rPr lang="ko-KR" altLang="en-US"/>
-              <a:t>게임 프로그래밍 교육과정</a:t>
-            </a:r>
-            <a:endParaRPr lang="ko-KR" altLang="en-US" dirty="0"/>
-          </a:p>
-        </p:txBody>
-      </p:sp>
-      <p:sp>
-        <p:nvSpPr>
-          <p:cNvPr id="9" name="TextBox 8">
-            <a:extLst>
-              <a:ext uri="{FF2B5EF4-FFF2-40B4-BE49-F238E27FC236}">
-                <a16:creationId xmlns:a16="http://schemas.microsoft.com/office/drawing/2014/main" id="{6788BB81-769A-8F83-C3DD-68226736CF0A}"/>
-              </a:ext>
-            </a:extLst>
-          </p:cNvPr>
-          <p:cNvSpPr txBox="1"/>
-          <p:nvPr/>
-        </p:nvSpPr>
-        <p:spPr>
-          <a:xfrm>
-            <a:off x="539750" y="1700808"/>
-            <a:ext cx="8064500" cy="3600986"/>
-          </a:xfrm>
-          <a:prstGeom prst="rect">
-            <a:avLst/>
-          </a:prstGeom>
-          <a:noFill/>
-          <a:ln w="25400">
-            <a:solidFill>
-              <a:schemeClr val="bg1">
-                <a:lumMod val="65000"/>
-              </a:schemeClr>
-            </a:solidFill>
-            <a:prstDash val="sysDot"/>
-          </a:ln>
-        </p:spPr>
-        <p:txBody>
-          <a:bodyPr wrap="square">
-            <a:spAutoFit/>
-          </a:bodyPr>
-          <a:lstStyle/>
-          <a:p>
-            <a:pPr rtl="0">
-              <a:buNone/>
-            </a:pPr>
-            <a:r>
-              <a:rPr lang="en-US" altLang="ko-KR" sz="1600" b="0" i="0" u="none" strike="noStrike" dirty="0" err="1">
-                <a:solidFill>
-                  <a:srgbClr val="A626A4"/>
-                </a:solidFill>
-                <a:effectLst/>
-                <a:latin typeface="Consolas" panose="020B0609020204030204" pitchFamily="49" charset="0"/>
-              </a:rPr>
-              <a:t>size_t</a:t>
-            </a:r>
-            <a:r>
-              <a:rPr lang="en-US" altLang="ko-KR" sz="1600" b="0" i="0" u="none" strike="noStrike" dirty="0">
-                <a:solidFill>
-                  <a:srgbClr val="383A42"/>
-                </a:solidFill>
-                <a:effectLst/>
-                <a:latin typeface="Consolas" panose="020B0609020204030204" pitchFamily="49" charset="0"/>
-              </a:rPr>
-              <a:t> </a:t>
-            </a:r>
-            <a:r>
-              <a:rPr lang="en-US" altLang="ko-KR" sz="1600" b="0" i="0" u="none" strike="noStrike" dirty="0" err="1">
-                <a:solidFill>
-                  <a:srgbClr val="383A42"/>
-                </a:solidFill>
-                <a:effectLst/>
-                <a:latin typeface="Consolas" panose="020B0609020204030204" pitchFamily="49" charset="0"/>
-              </a:rPr>
-              <a:t>myStrCpy</a:t>
-            </a:r>
-            <a:r>
-              <a:rPr lang="en-US" altLang="ko-KR" sz="1600" b="0" i="0" u="none" strike="noStrike" dirty="0">
-                <a:solidFill>
-                  <a:srgbClr val="383A42"/>
-                </a:solidFill>
-                <a:effectLst/>
-                <a:latin typeface="Consolas" panose="020B0609020204030204" pitchFamily="49" charset="0"/>
-              </a:rPr>
-              <a:t>(</a:t>
-            </a:r>
-            <a:r>
-              <a:rPr lang="en-US" altLang="ko-KR" sz="1600" b="0" i="0" u="none" strike="noStrike" dirty="0">
-                <a:solidFill>
-                  <a:srgbClr val="A626A4"/>
-                </a:solidFill>
-                <a:effectLst/>
-                <a:latin typeface="Consolas" panose="020B0609020204030204" pitchFamily="49" charset="0"/>
-              </a:rPr>
-              <a:t>char</a:t>
-            </a:r>
-            <a:r>
-              <a:rPr lang="en-US" altLang="ko-KR" sz="1600" b="0" i="0" u="none" strike="noStrike" dirty="0">
-                <a:solidFill>
-                  <a:srgbClr val="383A42"/>
-                </a:solidFill>
-                <a:effectLst/>
-                <a:latin typeface="Consolas" panose="020B0609020204030204" pitchFamily="49" charset="0"/>
-              </a:rPr>
-              <a:t> </a:t>
-            </a:r>
-            <a:r>
-              <a:rPr lang="en-US" altLang="ko-KR" sz="1600" b="0" i="0" u="none" strike="noStrike" dirty="0" err="1">
-                <a:solidFill>
-                  <a:srgbClr val="383A42"/>
-                </a:solidFill>
-                <a:effectLst/>
-                <a:latin typeface="Consolas" panose="020B0609020204030204" pitchFamily="49" charset="0"/>
-              </a:rPr>
-              <a:t>dst</a:t>
-            </a:r>
-            <a:r>
-              <a:rPr lang="en-US" altLang="ko-KR" sz="1600" b="0" i="0" u="none" strike="noStrike" dirty="0">
-                <a:solidFill>
-                  <a:srgbClr val="383A42"/>
-                </a:solidFill>
-                <a:effectLst/>
-                <a:latin typeface="Consolas" panose="020B0609020204030204" pitchFamily="49" charset="0"/>
-              </a:rPr>
-              <a:t>[], </a:t>
-            </a:r>
-            <a:r>
-              <a:rPr lang="en-US" altLang="ko-KR" sz="1600" b="0" i="0" u="none" strike="noStrike" dirty="0" err="1">
-                <a:solidFill>
-                  <a:srgbClr val="A626A4"/>
-                </a:solidFill>
-                <a:effectLst/>
-                <a:latin typeface="Consolas" panose="020B0609020204030204" pitchFamily="49" charset="0"/>
-              </a:rPr>
-              <a:t>size_t</a:t>
-            </a:r>
-            <a:r>
-              <a:rPr lang="en-US" altLang="ko-KR" sz="1600" b="0" i="0" u="none" strike="noStrike" dirty="0">
-                <a:solidFill>
-                  <a:srgbClr val="383A42"/>
-                </a:solidFill>
-                <a:effectLst/>
-                <a:latin typeface="Consolas" panose="020B0609020204030204" pitchFamily="49" charset="0"/>
-              </a:rPr>
-              <a:t> </a:t>
-            </a:r>
-            <a:r>
-              <a:rPr lang="en-US" altLang="ko-KR" sz="1600" b="0" i="0" u="none" strike="noStrike" dirty="0" err="1">
-                <a:solidFill>
-                  <a:srgbClr val="383A42"/>
-                </a:solidFill>
-                <a:effectLst/>
-                <a:latin typeface="Consolas" panose="020B0609020204030204" pitchFamily="49" charset="0"/>
-              </a:rPr>
-              <a:t>dest_size</a:t>
-            </a:r>
-            <a:r>
-              <a:rPr lang="en-US" altLang="ko-KR" sz="1600" b="0" i="0" u="none" strike="noStrike" dirty="0">
-                <a:solidFill>
-                  <a:srgbClr val="383A42"/>
-                </a:solidFill>
-                <a:effectLst/>
-                <a:latin typeface="Consolas" panose="020B0609020204030204" pitchFamily="49" charset="0"/>
-              </a:rPr>
-              <a:t>, </a:t>
-            </a:r>
-            <a:r>
-              <a:rPr lang="en-US" altLang="ko-KR" sz="1600" b="0" i="0" u="none" strike="noStrike" dirty="0">
-                <a:solidFill>
-                  <a:srgbClr val="A626A4"/>
-                </a:solidFill>
-                <a:effectLst/>
-                <a:latin typeface="Consolas" panose="020B0609020204030204" pitchFamily="49" charset="0"/>
-              </a:rPr>
-              <a:t>const</a:t>
-            </a:r>
-            <a:r>
-              <a:rPr lang="en-US" altLang="ko-KR" sz="1600" b="0" i="0" u="none" strike="noStrike" dirty="0">
-                <a:solidFill>
-                  <a:srgbClr val="383A42"/>
-                </a:solidFill>
-                <a:effectLst/>
-                <a:latin typeface="Consolas" panose="020B0609020204030204" pitchFamily="49" charset="0"/>
-              </a:rPr>
-              <a:t> </a:t>
-            </a:r>
-            <a:r>
-              <a:rPr lang="en-US" altLang="ko-KR" sz="1600" b="0" i="0" u="none" strike="noStrike" dirty="0">
-                <a:solidFill>
-                  <a:srgbClr val="A626A4"/>
-                </a:solidFill>
-                <a:effectLst/>
-                <a:latin typeface="Consolas" panose="020B0609020204030204" pitchFamily="49" charset="0"/>
-              </a:rPr>
-              <a:t>char</a:t>
-            </a:r>
-            <a:r>
-              <a:rPr lang="en-US" altLang="ko-KR" sz="1600" b="0" i="0" u="none" strike="noStrike" dirty="0">
-                <a:solidFill>
-                  <a:srgbClr val="383A42"/>
-                </a:solidFill>
-                <a:effectLst/>
-                <a:latin typeface="Consolas" panose="020B0609020204030204" pitchFamily="49" charset="0"/>
-              </a:rPr>
-              <a:t> </a:t>
-            </a:r>
-            <a:r>
-              <a:rPr lang="en-US" altLang="ko-KR" sz="1600" b="0" i="0" u="none" strike="noStrike" dirty="0" err="1">
-                <a:solidFill>
-                  <a:srgbClr val="383A42"/>
-                </a:solidFill>
-                <a:effectLst/>
-                <a:latin typeface="Consolas" panose="020B0609020204030204" pitchFamily="49" charset="0"/>
-              </a:rPr>
-              <a:t>src</a:t>
-            </a:r>
-            <a:r>
-              <a:rPr lang="en-US" altLang="ko-KR" sz="1600" b="0" i="0" u="none" strike="noStrike" dirty="0">
-                <a:solidFill>
-                  <a:srgbClr val="383A42"/>
-                </a:solidFill>
-                <a:effectLst/>
-                <a:latin typeface="Consolas" panose="020B0609020204030204" pitchFamily="49" charset="0"/>
-              </a:rPr>
-              <a:t>[])</a:t>
-            </a:r>
-            <a:br>
-              <a:rPr lang="en-US" altLang="ko-KR" sz="1600" b="0" i="0" u="none" strike="noStrike" dirty="0">
-                <a:solidFill>
-                  <a:srgbClr val="383A42"/>
-                </a:solidFill>
-                <a:effectLst/>
-                <a:latin typeface="Consolas" panose="020B0609020204030204" pitchFamily="49" charset="0"/>
-              </a:rPr>
-            </a:br>
-            <a:r>
-              <a:rPr lang="en-US" altLang="ko-KR" sz="1600" b="0" i="0" u="none" strike="noStrike" dirty="0">
-                <a:solidFill>
-                  <a:srgbClr val="383A42"/>
-                </a:solidFill>
-                <a:effectLst/>
-                <a:latin typeface="Consolas" panose="020B0609020204030204" pitchFamily="49" charset="0"/>
-              </a:rPr>
-              <a:t>{</a:t>
-            </a:r>
-            <a:br>
-              <a:rPr lang="en-US" altLang="ko-KR" sz="1600" b="0" i="0" u="none" strike="noStrike" dirty="0">
-                <a:solidFill>
-                  <a:srgbClr val="383A42"/>
-                </a:solidFill>
-                <a:effectLst/>
-                <a:latin typeface="Consolas" panose="020B0609020204030204" pitchFamily="49" charset="0"/>
-              </a:rPr>
-            </a:br>
-            <a:r>
-              <a:rPr lang="en-US" altLang="ko-KR" sz="1600" b="0" i="0" u="none" strike="noStrike" dirty="0">
-                <a:solidFill>
-                  <a:srgbClr val="383A42"/>
-                </a:solidFill>
-                <a:effectLst/>
-                <a:latin typeface="Consolas" panose="020B0609020204030204" pitchFamily="49" charset="0"/>
-              </a:rPr>
-              <a:t>    </a:t>
-            </a:r>
-            <a:r>
-              <a:rPr lang="en-US" altLang="ko-KR" sz="1600" b="0" i="0" u="none" strike="noStrike" dirty="0">
-                <a:solidFill>
-                  <a:srgbClr val="A626A4"/>
-                </a:solidFill>
-                <a:effectLst/>
-                <a:latin typeface="Consolas" panose="020B0609020204030204" pitchFamily="49" charset="0"/>
-              </a:rPr>
-              <a:t>if</a:t>
-            </a:r>
-            <a:r>
-              <a:rPr lang="en-US" altLang="ko-KR" sz="1600" b="0" i="0" u="none" strike="noStrike" dirty="0">
-                <a:solidFill>
-                  <a:srgbClr val="383A42"/>
-                </a:solidFill>
-                <a:effectLst/>
-                <a:latin typeface="Consolas" panose="020B0609020204030204" pitchFamily="49" charset="0"/>
-              </a:rPr>
-              <a:t>(</a:t>
-            </a:r>
-            <a:r>
-              <a:rPr lang="en-US" altLang="ko-KR" sz="1600" b="0" i="0" u="none" strike="noStrike" dirty="0">
-                <a:solidFill>
-                  <a:srgbClr val="986801"/>
-                </a:solidFill>
-                <a:effectLst/>
-                <a:latin typeface="Consolas" panose="020B0609020204030204" pitchFamily="49" charset="0"/>
-              </a:rPr>
-              <a:t>0</a:t>
-            </a:r>
-            <a:r>
-              <a:rPr lang="en-US" altLang="ko-KR" sz="1600" b="0" i="0" u="none" strike="noStrike" dirty="0">
-                <a:solidFill>
-                  <a:srgbClr val="383A42"/>
-                </a:solidFill>
-                <a:effectLst/>
-                <a:latin typeface="Consolas" panose="020B0609020204030204" pitchFamily="49" charset="0"/>
-              </a:rPr>
-              <a:t> == </a:t>
-            </a:r>
-            <a:r>
-              <a:rPr lang="en-US" altLang="ko-KR" sz="1600" b="0" i="0" u="none" strike="noStrike" dirty="0" err="1">
-                <a:solidFill>
-                  <a:srgbClr val="383A42"/>
-                </a:solidFill>
-                <a:effectLst/>
-                <a:latin typeface="Consolas" panose="020B0609020204030204" pitchFamily="49" charset="0"/>
-              </a:rPr>
-              <a:t>dest_size</a:t>
-            </a:r>
-            <a:r>
-              <a:rPr lang="en-US" altLang="ko-KR" sz="1600" b="0" i="0" u="none" strike="noStrike" dirty="0">
-                <a:solidFill>
-                  <a:srgbClr val="383A42"/>
-                </a:solidFill>
-                <a:effectLst/>
-                <a:latin typeface="Consolas" panose="020B0609020204030204" pitchFamily="49" charset="0"/>
-              </a:rPr>
-              <a:t>)  </a:t>
-            </a:r>
-            <a:r>
-              <a:rPr lang="en-US" altLang="ko-KR" sz="1600" b="0" i="1" u="none" strike="noStrike" dirty="0">
-                <a:solidFill>
-                  <a:srgbClr val="A0A1A7"/>
-                </a:solidFill>
-                <a:effectLst/>
-                <a:latin typeface="Consolas" panose="020B0609020204030204" pitchFamily="49" charset="0"/>
-              </a:rPr>
-              <a:t>// </a:t>
-            </a:r>
-            <a:r>
-              <a:rPr lang="ko-KR" altLang="en-US" sz="1600" b="0" i="1" u="none" strike="noStrike" dirty="0">
-                <a:solidFill>
-                  <a:srgbClr val="A0A1A7"/>
-                </a:solidFill>
-                <a:effectLst/>
-                <a:latin typeface="Consolas" panose="020B0609020204030204" pitchFamily="49" charset="0"/>
-              </a:rPr>
-              <a:t>크기 </a:t>
-            </a:r>
-            <a:r>
-              <a:rPr lang="en-US" altLang="ko-KR" sz="1600" b="0" i="1" u="none" strike="noStrike" dirty="0">
-                <a:solidFill>
-                  <a:srgbClr val="A0A1A7"/>
-                </a:solidFill>
-                <a:effectLst/>
-                <a:latin typeface="Consolas" panose="020B0609020204030204" pitchFamily="49" charset="0"/>
-              </a:rPr>
-              <a:t>0</a:t>
-            </a:r>
-            <a:r>
-              <a:rPr lang="ko-KR" altLang="en-US" sz="1600" b="0" i="1" u="none" strike="noStrike" dirty="0">
-                <a:solidFill>
-                  <a:srgbClr val="A0A1A7"/>
-                </a:solidFill>
-                <a:effectLst/>
-                <a:latin typeface="Consolas" panose="020B0609020204030204" pitchFamily="49" charset="0"/>
-              </a:rPr>
-              <a:t>이면 복사할 수 없으므로 </a:t>
-            </a:r>
-            <a:r>
-              <a:rPr lang="en-US" altLang="ko-KR" sz="1600" b="0" i="1" u="none" strike="noStrike" dirty="0">
-                <a:solidFill>
-                  <a:srgbClr val="A0A1A7"/>
-                </a:solidFill>
-                <a:effectLst/>
-                <a:latin typeface="Consolas" panose="020B0609020204030204" pitchFamily="49" charset="0"/>
-              </a:rPr>
-              <a:t>0 </a:t>
-            </a:r>
-            <a:r>
-              <a:rPr lang="ko-KR" altLang="en-US" sz="1600" b="0" i="1" u="none" strike="noStrike" dirty="0">
-                <a:solidFill>
-                  <a:srgbClr val="A0A1A7"/>
-                </a:solidFill>
-                <a:effectLst/>
-                <a:latin typeface="Consolas" panose="020B0609020204030204" pitchFamily="49" charset="0"/>
-              </a:rPr>
-              <a:t>반환</a:t>
-            </a:r>
-            <a:r>
-              <a:rPr lang="en-US" altLang="ko-KR" sz="1600" b="0" i="1" u="none" strike="noStrike" dirty="0">
-                <a:solidFill>
-                  <a:srgbClr val="A0A1A7"/>
-                </a:solidFill>
-                <a:effectLst/>
-                <a:latin typeface="Consolas" panose="020B0609020204030204" pitchFamily="49" charset="0"/>
-              </a:rPr>
-              <a:t>.</a:t>
-            </a:r>
-            <a:br>
-              <a:rPr lang="ko-KR" altLang="en-US" sz="1600" b="0" i="0" u="none" strike="noStrike" dirty="0">
-                <a:solidFill>
-                  <a:srgbClr val="383A42"/>
-                </a:solidFill>
-                <a:effectLst/>
-                <a:latin typeface="Consolas" panose="020B0609020204030204" pitchFamily="49" charset="0"/>
-              </a:rPr>
-            </a:br>
-            <a:r>
-              <a:rPr lang="ko-KR" altLang="en-US" sz="1600" b="0" i="0" u="none" strike="noStrike" dirty="0">
-                <a:solidFill>
-                  <a:srgbClr val="383A42"/>
-                </a:solidFill>
-                <a:effectLst/>
-                <a:latin typeface="Consolas" panose="020B0609020204030204" pitchFamily="49" charset="0"/>
-              </a:rPr>
-              <a:t>        </a:t>
-            </a:r>
-            <a:r>
-              <a:rPr lang="en-US" altLang="ko-KR" sz="1600" b="0" i="0" u="none" strike="noStrike" dirty="0">
-                <a:solidFill>
-                  <a:srgbClr val="A626A4"/>
-                </a:solidFill>
-                <a:effectLst/>
-                <a:latin typeface="Consolas" panose="020B0609020204030204" pitchFamily="49" charset="0"/>
-              </a:rPr>
-              <a:t>return</a:t>
-            </a:r>
-            <a:r>
-              <a:rPr lang="en-US" altLang="ko-KR" sz="1600" b="0" i="0" u="none" strike="noStrike" dirty="0">
-                <a:solidFill>
-                  <a:srgbClr val="383A42"/>
-                </a:solidFill>
-                <a:effectLst/>
-                <a:latin typeface="Consolas" panose="020B0609020204030204" pitchFamily="49" charset="0"/>
-              </a:rPr>
-              <a:t> </a:t>
-            </a:r>
-            <a:r>
-              <a:rPr lang="en-US" altLang="ko-KR" sz="1600" b="0" i="0" u="none" strike="noStrike" dirty="0">
-                <a:solidFill>
-                  <a:srgbClr val="986801"/>
-                </a:solidFill>
-                <a:effectLst/>
-                <a:latin typeface="Consolas" panose="020B0609020204030204" pitchFamily="49" charset="0"/>
-              </a:rPr>
-              <a:t>0</a:t>
-            </a:r>
-            <a:r>
-              <a:rPr lang="en-US" altLang="ko-KR" sz="1600" b="0" i="0" u="none" strike="noStrike" dirty="0">
-                <a:solidFill>
-                  <a:srgbClr val="383A42"/>
-                </a:solidFill>
-                <a:effectLst/>
-                <a:latin typeface="Consolas" panose="020B0609020204030204" pitchFamily="49" charset="0"/>
-              </a:rPr>
-              <a:t>;</a:t>
-            </a:r>
-            <a:endParaRPr lang="en-US" altLang="ko-KR" sz="1600" b="0" dirty="0">
-              <a:effectLst/>
-            </a:endParaRPr>
-          </a:p>
-          <a:p>
-            <a:pPr>
-              <a:buNone/>
-            </a:pPr>
-            <a:br>
-              <a:rPr lang="en-US" altLang="ko-KR" sz="1600" b="0" i="0" u="none" strike="noStrike" dirty="0">
-                <a:solidFill>
-                  <a:srgbClr val="383A42"/>
-                </a:solidFill>
-                <a:effectLst/>
-                <a:latin typeface="Consolas" panose="020B0609020204030204" pitchFamily="49" charset="0"/>
-              </a:rPr>
-            </a:br>
-            <a:r>
-              <a:rPr lang="en-US" altLang="ko-KR" sz="1600" b="0" i="0" u="none" strike="noStrike" dirty="0">
-                <a:solidFill>
-                  <a:srgbClr val="383A42"/>
-                </a:solidFill>
-                <a:effectLst/>
-                <a:latin typeface="Consolas" panose="020B0609020204030204" pitchFamily="49" charset="0"/>
-              </a:rPr>
-              <a:t>    </a:t>
-            </a:r>
-            <a:r>
-              <a:rPr lang="en-US" altLang="ko-KR" sz="1600" b="0" i="0" u="none" strike="noStrike" dirty="0" err="1">
-                <a:solidFill>
-                  <a:srgbClr val="A626A4"/>
-                </a:solidFill>
-                <a:effectLst/>
-                <a:latin typeface="Consolas" panose="020B0609020204030204" pitchFamily="49" charset="0"/>
-              </a:rPr>
-              <a:t>size_t</a:t>
-            </a:r>
-            <a:r>
-              <a:rPr lang="en-US" altLang="ko-KR" sz="1600" b="0" i="0" u="none" strike="noStrike" dirty="0">
-                <a:solidFill>
-                  <a:srgbClr val="383A42"/>
-                </a:solidFill>
-                <a:effectLst/>
-                <a:latin typeface="Consolas" panose="020B0609020204030204" pitchFamily="49" charset="0"/>
-              </a:rPr>
-              <a:t> n=</a:t>
-            </a:r>
-            <a:r>
-              <a:rPr lang="en-US" altLang="ko-KR" sz="1600" b="0" i="0" u="none" strike="noStrike" dirty="0">
-                <a:solidFill>
-                  <a:srgbClr val="986801"/>
-                </a:solidFill>
-                <a:effectLst/>
-                <a:latin typeface="Consolas" panose="020B0609020204030204" pitchFamily="49" charset="0"/>
-              </a:rPr>
-              <a:t>0</a:t>
-            </a:r>
-            <a:r>
-              <a:rPr lang="en-US" altLang="ko-KR" sz="1600" b="0" i="0" u="none" strike="noStrike" dirty="0">
-                <a:solidFill>
-                  <a:srgbClr val="383A42"/>
-                </a:solidFill>
-                <a:effectLst/>
-                <a:latin typeface="Consolas" panose="020B0609020204030204" pitchFamily="49" charset="0"/>
-              </a:rPr>
-              <a:t>;</a:t>
-            </a:r>
-            <a:br>
-              <a:rPr lang="en-US" altLang="ko-KR" sz="1600" b="0" i="0" u="none" strike="noStrike" dirty="0">
-                <a:solidFill>
-                  <a:srgbClr val="383A42"/>
-                </a:solidFill>
-                <a:effectLst/>
-                <a:latin typeface="Consolas" panose="020B0609020204030204" pitchFamily="49" charset="0"/>
-              </a:rPr>
-            </a:br>
-            <a:r>
-              <a:rPr lang="en-US" altLang="ko-KR" sz="1600" b="0" i="0" u="none" strike="noStrike" dirty="0">
-                <a:solidFill>
-                  <a:srgbClr val="383A42"/>
-                </a:solidFill>
-                <a:effectLst/>
-                <a:latin typeface="Consolas" panose="020B0609020204030204" pitchFamily="49" charset="0"/>
-              </a:rPr>
-              <a:t>    --</a:t>
-            </a:r>
-            <a:r>
-              <a:rPr lang="en-US" altLang="ko-KR" sz="1600" b="0" i="0" u="none" strike="noStrike" dirty="0" err="1">
-                <a:solidFill>
-                  <a:srgbClr val="383A42"/>
-                </a:solidFill>
-                <a:effectLst/>
-                <a:latin typeface="Consolas" panose="020B0609020204030204" pitchFamily="49" charset="0"/>
-              </a:rPr>
-              <a:t>dest_size</a:t>
-            </a:r>
-            <a:r>
-              <a:rPr lang="en-US" altLang="ko-KR" sz="1600" b="0" i="0" u="none" strike="noStrike" dirty="0">
-                <a:solidFill>
-                  <a:srgbClr val="383A42"/>
-                </a:solidFill>
-                <a:effectLst/>
-                <a:latin typeface="Consolas" panose="020B0609020204030204" pitchFamily="49" charset="0"/>
-              </a:rPr>
-              <a:t>;        </a:t>
-            </a:r>
-            <a:r>
-              <a:rPr lang="en-US" altLang="ko-KR" sz="1600" b="0" i="1" u="none" strike="noStrike" dirty="0">
-                <a:solidFill>
-                  <a:srgbClr val="A0A1A7"/>
-                </a:solidFill>
-                <a:effectLst/>
-                <a:latin typeface="Consolas" panose="020B0609020204030204" pitchFamily="49" charset="0"/>
-              </a:rPr>
-              <a:t>// </a:t>
-            </a:r>
-            <a:r>
-              <a:rPr lang="ko-KR" altLang="en-US" sz="1600" b="0" i="1" u="none" strike="noStrike" dirty="0" err="1">
-                <a:solidFill>
-                  <a:srgbClr val="A0A1A7"/>
-                </a:solidFill>
-                <a:effectLst/>
-                <a:latin typeface="Consolas" panose="020B0609020204030204" pitchFamily="49" charset="0"/>
-              </a:rPr>
-              <a:t>널문자</a:t>
-            </a:r>
-            <a:r>
-              <a:rPr lang="ko-KR" altLang="en-US" sz="1600" b="0" i="1" u="none" strike="noStrike" dirty="0">
-                <a:solidFill>
-                  <a:srgbClr val="A0A1A7"/>
-                </a:solidFill>
-                <a:effectLst/>
-                <a:latin typeface="Consolas" panose="020B0609020204030204" pitchFamily="49" charset="0"/>
-              </a:rPr>
-              <a:t> 저장 공간을 위해 </a:t>
-            </a:r>
-            <a:r>
-              <a:rPr lang="en-US" altLang="ko-KR" sz="1600" b="0" i="1" u="none" strike="noStrike" dirty="0">
-                <a:solidFill>
-                  <a:srgbClr val="A0A1A7"/>
-                </a:solidFill>
-                <a:effectLst/>
-                <a:latin typeface="Consolas" panose="020B0609020204030204" pitchFamily="49" charset="0"/>
-              </a:rPr>
-              <a:t>1 </a:t>
-            </a:r>
-            <a:r>
-              <a:rPr lang="ko-KR" altLang="en-US" sz="1600" b="0" i="1" u="none" strike="noStrike" dirty="0">
-                <a:solidFill>
-                  <a:srgbClr val="A0A1A7"/>
-                </a:solidFill>
-                <a:effectLst/>
-                <a:latin typeface="Consolas" panose="020B0609020204030204" pitchFamily="49" charset="0"/>
-              </a:rPr>
-              <a:t>감소</a:t>
-            </a:r>
-            <a:r>
-              <a:rPr lang="en-US" altLang="ko-KR" sz="1600" b="0" i="1" u="none" strike="noStrike" dirty="0">
-                <a:solidFill>
-                  <a:srgbClr val="A0A1A7"/>
-                </a:solidFill>
-                <a:effectLst/>
-                <a:latin typeface="Consolas" panose="020B0609020204030204" pitchFamily="49" charset="0"/>
-              </a:rPr>
-              <a:t>.</a:t>
-            </a:r>
-            <a:br>
-              <a:rPr lang="ko-KR" altLang="en-US" sz="1600" b="0" i="0" u="none" strike="noStrike" dirty="0">
-                <a:solidFill>
-                  <a:srgbClr val="383A42"/>
-                </a:solidFill>
-                <a:effectLst/>
-                <a:latin typeface="Consolas" panose="020B0609020204030204" pitchFamily="49" charset="0"/>
-              </a:rPr>
-            </a:br>
-            <a:r>
-              <a:rPr lang="ko-KR" altLang="en-US" sz="1600" b="0" i="0" u="none" strike="noStrike" dirty="0">
-                <a:solidFill>
-                  <a:srgbClr val="383A42"/>
-                </a:solidFill>
-                <a:effectLst/>
-                <a:latin typeface="Consolas" panose="020B0609020204030204" pitchFamily="49" charset="0"/>
-              </a:rPr>
-              <a:t>    </a:t>
-            </a:r>
-            <a:r>
-              <a:rPr lang="en-US" altLang="ko-KR" sz="1600" b="0" i="0" u="none" strike="noStrike" dirty="0">
-                <a:solidFill>
-                  <a:srgbClr val="A626A4"/>
-                </a:solidFill>
-                <a:effectLst/>
-                <a:latin typeface="Consolas" panose="020B0609020204030204" pitchFamily="49" charset="0"/>
-              </a:rPr>
-              <a:t>for</a:t>
-            </a:r>
-            <a:r>
-              <a:rPr lang="en-US" altLang="ko-KR" sz="2000" b="1" i="0" u="none" strike="noStrike" dirty="0">
-                <a:solidFill>
-                  <a:srgbClr val="383A42"/>
-                </a:solidFill>
-                <a:effectLst/>
-                <a:latin typeface="Consolas" panose="020B0609020204030204" pitchFamily="49" charset="0"/>
-              </a:rPr>
-              <a:t>(;</a:t>
-            </a:r>
-            <a:r>
-              <a:rPr lang="en-US" altLang="ko-KR" sz="2000" b="1" i="0" u="none" strike="noStrike" dirty="0">
-                <a:solidFill>
-                  <a:srgbClr val="50A14F"/>
-                </a:solidFill>
-                <a:effectLst/>
-                <a:latin typeface="Consolas" panose="020B0609020204030204" pitchFamily="49" charset="0"/>
-              </a:rPr>
-              <a:t>'\0'</a:t>
-            </a:r>
-            <a:r>
-              <a:rPr lang="en-US" altLang="ko-KR" sz="2000" b="1" i="0" u="none" strike="noStrike" dirty="0">
-                <a:solidFill>
-                  <a:srgbClr val="383A42"/>
-                </a:solidFill>
-                <a:effectLst/>
-                <a:latin typeface="Consolas" panose="020B0609020204030204" pitchFamily="49" charset="0"/>
-              </a:rPr>
-              <a:t> != </a:t>
-            </a:r>
-            <a:r>
-              <a:rPr lang="en-US" altLang="ko-KR" sz="2000" b="1" i="0" u="none" strike="noStrike" dirty="0" err="1">
-                <a:solidFill>
-                  <a:srgbClr val="383A42"/>
-                </a:solidFill>
-                <a:effectLst/>
-                <a:latin typeface="Consolas" panose="020B0609020204030204" pitchFamily="49" charset="0"/>
-              </a:rPr>
-              <a:t>src</a:t>
-            </a:r>
-            <a:r>
-              <a:rPr lang="en-US" altLang="ko-KR" sz="2000" b="1" i="0" u="none" strike="noStrike" dirty="0">
-                <a:solidFill>
-                  <a:srgbClr val="383A42"/>
-                </a:solidFill>
-                <a:effectLst/>
-                <a:latin typeface="Consolas" panose="020B0609020204030204" pitchFamily="49" charset="0"/>
-              </a:rPr>
-              <a:t>[n] &amp;&amp; </a:t>
-            </a:r>
-            <a:r>
-              <a:rPr lang="en-US" altLang="ko-KR" sz="2000" b="1" i="0" u="none" strike="noStrike" dirty="0">
-                <a:solidFill>
-                  <a:srgbClr val="986801"/>
-                </a:solidFill>
-                <a:effectLst/>
-                <a:latin typeface="Consolas" panose="020B0609020204030204" pitchFamily="49" charset="0"/>
-              </a:rPr>
-              <a:t>0</a:t>
-            </a:r>
-            <a:r>
-              <a:rPr lang="en-US" altLang="ko-KR" sz="2000" b="1" i="0" u="none" strike="noStrike" dirty="0">
-                <a:solidFill>
-                  <a:srgbClr val="383A42"/>
-                </a:solidFill>
-                <a:effectLst/>
-                <a:latin typeface="Consolas" panose="020B0609020204030204" pitchFamily="49" charset="0"/>
-              </a:rPr>
-              <a:t>&lt;</a:t>
-            </a:r>
-            <a:r>
-              <a:rPr lang="en-US" altLang="ko-KR" sz="2000" b="1" i="0" u="none" strike="noStrike" dirty="0" err="1">
-                <a:solidFill>
-                  <a:srgbClr val="383A42"/>
-                </a:solidFill>
-                <a:effectLst/>
-                <a:latin typeface="Consolas" panose="020B0609020204030204" pitchFamily="49" charset="0"/>
-              </a:rPr>
-              <a:t>dest_size</a:t>
-            </a:r>
-            <a:r>
-              <a:rPr lang="en-US" altLang="ko-KR" sz="2000" b="1" i="0" u="none" strike="noStrike" dirty="0">
-                <a:solidFill>
-                  <a:srgbClr val="383A42"/>
-                </a:solidFill>
-                <a:effectLst/>
-                <a:latin typeface="Consolas" panose="020B0609020204030204" pitchFamily="49" charset="0"/>
-              </a:rPr>
-              <a:t>; ++n, --</a:t>
-            </a:r>
-            <a:r>
-              <a:rPr lang="en-US" altLang="ko-KR" sz="2000" b="1" i="0" u="none" strike="noStrike" dirty="0" err="1">
-                <a:solidFill>
-                  <a:srgbClr val="383A42"/>
-                </a:solidFill>
-                <a:effectLst/>
-                <a:latin typeface="Consolas" panose="020B0609020204030204" pitchFamily="49" charset="0"/>
-              </a:rPr>
-              <a:t>dest_size</a:t>
-            </a:r>
-            <a:r>
-              <a:rPr lang="en-US" altLang="ko-KR" sz="1600" b="0" i="0" u="none" strike="noStrike" dirty="0">
-                <a:solidFill>
-                  <a:srgbClr val="383A42"/>
-                </a:solidFill>
-                <a:effectLst/>
-                <a:latin typeface="Consolas" panose="020B0609020204030204" pitchFamily="49" charset="0"/>
-              </a:rPr>
-              <a:t>)</a:t>
-            </a:r>
-            <a:br>
-              <a:rPr lang="en-US" altLang="ko-KR" sz="1600" b="0" i="0" u="none" strike="noStrike" dirty="0">
-                <a:solidFill>
-                  <a:srgbClr val="383A42"/>
-                </a:solidFill>
-                <a:effectLst/>
-                <a:latin typeface="Consolas" panose="020B0609020204030204" pitchFamily="49" charset="0"/>
-              </a:rPr>
-            </a:br>
-            <a:r>
-              <a:rPr lang="en-US" altLang="ko-KR" sz="1600" b="0" i="0" u="none" strike="noStrike" dirty="0">
-                <a:solidFill>
-                  <a:srgbClr val="383A42"/>
-                </a:solidFill>
-                <a:effectLst/>
-                <a:latin typeface="Consolas" panose="020B0609020204030204" pitchFamily="49" charset="0"/>
-              </a:rPr>
-              <a:t>    {</a:t>
-            </a:r>
-            <a:br>
-              <a:rPr lang="en-US" altLang="ko-KR" sz="1600" b="0" i="0" u="none" strike="noStrike" dirty="0">
-                <a:solidFill>
-                  <a:srgbClr val="383A42"/>
-                </a:solidFill>
-                <a:effectLst/>
-                <a:latin typeface="Consolas" panose="020B0609020204030204" pitchFamily="49" charset="0"/>
-              </a:rPr>
-            </a:br>
-            <a:r>
-              <a:rPr lang="en-US" altLang="ko-KR" sz="1600" b="0" i="0" u="none" strike="noStrike" dirty="0">
-                <a:solidFill>
-                  <a:srgbClr val="383A42"/>
-                </a:solidFill>
-                <a:effectLst/>
-                <a:latin typeface="Consolas" panose="020B0609020204030204" pitchFamily="49" charset="0"/>
-              </a:rPr>
-              <a:t>        </a:t>
-            </a:r>
-            <a:r>
-              <a:rPr lang="en-US" altLang="ko-KR" sz="1600" b="0" i="0" u="none" strike="noStrike" dirty="0" err="1">
-                <a:solidFill>
-                  <a:srgbClr val="383A42"/>
-                </a:solidFill>
-                <a:effectLst/>
-                <a:latin typeface="Consolas" panose="020B0609020204030204" pitchFamily="49" charset="0"/>
-              </a:rPr>
-              <a:t>dst</a:t>
-            </a:r>
-            <a:r>
-              <a:rPr lang="en-US" altLang="ko-KR" sz="1600" b="0" i="0" u="none" strike="noStrike" dirty="0">
-                <a:solidFill>
-                  <a:srgbClr val="383A42"/>
-                </a:solidFill>
-                <a:effectLst/>
-                <a:latin typeface="Consolas" panose="020B0609020204030204" pitchFamily="49" charset="0"/>
-              </a:rPr>
-              <a:t>[n] = </a:t>
-            </a:r>
-            <a:r>
-              <a:rPr lang="en-US" altLang="ko-KR" sz="1600" b="0" i="0" u="none" strike="noStrike" dirty="0" err="1">
-                <a:solidFill>
-                  <a:srgbClr val="383A42"/>
-                </a:solidFill>
-                <a:effectLst/>
-                <a:latin typeface="Consolas" panose="020B0609020204030204" pitchFamily="49" charset="0"/>
-              </a:rPr>
-              <a:t>src</a:t>
-            </a:r>
-            <a:r>
-              <a:rPr lang="en-US" altLang="ko-KR" sz="1600" b="0" i="0" u="none" strike="noStrike" dirty="0">
-                <a:solidFill>
-                  <a:srgbClr val="383A42"/>
-                </a:solidFill>
-                <a:effectLst/>
-                <a:latin typeface="Consolas" panose="020B0609020204030204" pitchFamily="49" charset="0"/>
-              </a:rPr>
-              <a:t>[n];</a:t>
-            </a:r>
-            <a:br>
-              <a:rPr lang="en-US" altLang="ko-KR" sz="1600" b="0" i="0" u="none" strike="noStrike" dirty="0">
-                <a:solidFill>
-                  <a:srgbClr val="383A42"/>
-                </a:solidFill>
-                <a:effectLst/>
-                <a:latin typeface="Consolas" panose="020B0609020204030204" pitchFamily="49" charset="0"/>
-              </a:rPr>
-            </a:br>
-            <a:r>
-              <a:rPr lang="en-US" altLang="ko-KR" sz="1600" b="0" i="0" u="none" strike="noStrike" dirty="0">
-                <a:solidFill>
-                  <a:srgbClr val="383A42"/>
-                </a:solidFill>
-                <a:effectLst/>
-                <a:latin typeface="Consolas" panose="020B0609020204030204" pitchFamily="49" charset="0"/>
-              </a:rPr>
-              <a:t>    }</a:t>
-            </a:r>
-            <a:br>
-              <a:rPr lang="en-US" altLang="ko-KR" sz="1600" b="0" i="0" u="none" strike="noStrike" dirty="0">
-                <a:solidFill>
-                  <a:srgbClr val="383A42"/>
-                </a:solidFill>
-                <a:effectLst/>
-                <a:latin typeface="Consolas" panose="020B0609020204030204" pitchFamily="49" charset="0"/>
-              </a:rPr>
-            </a:br>
-            <a:r>
-              <a:rPr lang="en-US" altLang="ko-KR" sz="1600" b="0" i="0" u="none" strike="noStrike" dirty="0">
-                <a:solidFill>
-                  <a:srgbClr val="383A42"/>
-                </a:solidFill>
-                <a:effectLst/>
-                <a:latin typeface="Consolas" panose="020B0609020204030204" pitchFamily="49" charset="0"/>
-              </a:rPr>
-              <a:t>    </a:t>
-            </a:r>
-            <a:r>
-              <a:rPr lang="en-US" altLang="ko-KR" sz="1600" b="0" i="0" u="none" strike="noStrike" dirty="0" err="1">
-                <a:solidFill>
-                  <a:srgbClr val="383A42"/>
-                </a:solidFill>
-                <a:effectLst/>
-                <a:latin typeface="Consolas" panose="020B0609020204030204" pitchFamily="49" charset="0"/>
-              </a:rPr>
-              <a:t>dst</a:t>
-            </a:r>
-            <a:r>
-              <a:rPr lang="en-US" altLang="ko-KR" sz="1600" b="0" i="0" u="none" strike="noStrike" dirty="0">
-                <a:solidFill>
-                  <a:srgbClr val="383A42"/>
-                </a:solidFill>
-                <a:effectLst/>
-                <a:latin typeface="Consolas" panose="020B0609020204030204" pitchFamily="49" charset="0"/>
-              </a:rPr>
-              <a:t>[n] = </a:t>
-            </a:r>
-            <a:r>
-              <a:rPr lang="en-US" altLang="ko-KR" sz="1600" b="0" i="0" u="none" strike="noStrike" dirty="0">
-                <a:solidFill>
-                  <a:srgbClr val="50A14F"/>
-                </a:solidFill>
-                <a:effectLst/>
-                <a:latin typeface="Consolas" panose="020B0609020204030204" pitchFamily="49" charset="0"/>
-              </a:rPr>
-              <a:t>'\0'</a:t>
-            </a:r>
-            <a:r>
-              <a:rPr lang="en-US" altLang="ko-KR" sz="1600" b="0" i="0" u="none" strike="noStrike" dirty="0">
-                <a:solidFill>
-                  <a:srgbClr val="383A42"/>
-                </a:solidFill>
-                <a:effectLst/>
-                <a:latin typeface="Consolas" panose="020B0609020204030204" pitchFamily="49" charset="0"/>
-              </a:rPr>
-              <a:t>;</a:t>
-            </a:r>
-            <a:r>
-              <a:rPr lang="en-US" altLang="ko-KR" sz="1600" dirty="0">
-                <a:solidFill>
-                  <a:srgbClr val="383A42"/>
-                </a:solidFill>
-                <a:latin typeface="Consolas" panose="020B0609020204030204" pitchFamily="49" charset="0"/>
-              </a:rPr>
-              <a:t>      </a:t>
-            </a:r>
-            <a:r>
-              <a:rPr lang="en-US" altLang="ko-KR" sz="1600" i="1" dirty="0">
-                <a:solidFill>
-                  <a:srgbClr val="A0A1A7"/>
-                </a:solidFill>
-                <a:latin typeface="Consolas" panose="020B0609020204030204" pitchFamily="49" charset="0"/>
-              </a:rPr>
-              <a:t>// </a:t>
-            </a:r>
-            <a:r>
-              <a:rPr lang="ko-KR" altLang="en-US" sz="1600" i="1" dirty="0" err="1">
-                <a:solidFill>
-                  <a:srgbClr val="A0A1A7"/>
-                </a:solidFill>
-                <a:latin typeface="Consolas" panose="020B0609020204030204" pitchFamily="49" charset="0"/>
-              </a:rPr>
-              <a:t>널문자</a:t>
-            </a:r>
-            <a:r>
-              <a:rPr lang="ko-KR" altLang="en-US" sz="1600" i="1" dirty="0">
-                <a:solidFill>
-                  <a:srgbClr val="A0A1A7"/>
-                </a:solidFill>
-                <a:latin typeface="Consolas" panose="020B0609020204030204" pitchFamily="49" charset="0"/>
-              </a:rPr>
-              <a:t> 저장</a:t>
-            </a:r>
-            <a:r>
-              <a:rPr lang="en-US" altLang="ko-KR" sz="1600" i="1" dirty="0">
-                <a:solidFill>
-                  <a:srgbClr val="A0A1A7"/>
-                </a:solidFill>
-                <a:latin typeface="Consolas" panose="020B0609020204030204" pitchFamily="49" charset="0"/>
-              </a:rPr>
-              <a:t>.</a:t>
-            </a:r>
-            <a:br>
-              <a:rPr lang="en-US" altLang="ko-KR" sz="1600" b="0" i="0" u="none" strike="noStrike" dirty="0">
-                <a:solidFill>
-                  <a:srgbClr val="383A42"/>
-                </a:solidFill>
-                <a:effectLst/>
-                <a:latin typeface="Consolas" panose="020B0609020204030204" pitchFamily="49" charset="0"/>
-              </a:rPr>
-            </a:br>
-            <a:r>
-              <a:rPr lang="en-US" altLang="ko-KR" sz="1600" b="0" i="0" u="none" strike="noStrike" dirty="0">
-                <a:solidFill>
-                  <a:srgbClr val="383A42"/>
-                </a:solidFill>
-                <a:effectLst/>
-                <a:latin typeface="Consolas" panose="020B0609020204030204" pitchFamily="49" charset="0"/>
-              </a:rPr>
-              <a:t>    </a:t>
-            </a:r>
-            <a:r>
-              <a:rPr lang="en-US" altLang="ko-KR" sz="1600" b="0" i="0" u="none" strike="noStrike" dirty="0">
-                <a:solidFill>
-                  <a:srgbClr val="A626A4"/>
-                </a:solidFill>
-                <a:effectLst/>
-                <a:latin typeface="Consolas" panose="020B0609020204030204" pitchFamily="49" charset="0"/>
-              </a:rPr>
-              <a:t>return</a:t>
-            </a:r>
-            <a:r>
-              <a:rPr lang="en-US" altLang="ko-KR" sz="1600" b="0" i="0" u="none" strike="noStrike" dirty="0">
-                <a:solidFill>
-                  <a:srgbClr val="383A42"/>
-                </a:solidFill>
-                <a:effectLst/>
-                <a:latin typeface="Consolas" panose="020B0609020204030204" pitchFamily="49" charset="0"/>
-              </a:rPr>
-              <a:t> n;</a:t>
-            </a:r>
-            <a:br>
-              <a:rPr lang="en-US" altLang="ko-KR" sz="1600" b="0" i="0" u="none" strike="noStrike" dirty="0">
-                <a:solidFill>
-                  <a:srgbClr val="383A42"/>
-                </a:solidFill>
-                <a:effectLst/>
-                <a:latin typeface="Consolas" panose="020B0609020204030204" pitchFamily="49" charset="0"/>
-              </a:rPr>
-            </a:br>
-            <a:r>
-              <a:rPr lang="en-US" altLang="ko-KR" sz="1600" b="0" i="0" u="none" strike="noStrike" dirty="0">
-                <a:solidFill>
-                  <a:srgbClr val="383A42"/>
-                </a:solidFill>
-                <a:effectLst/>
-                <a:latin typeface="Consolas" panose="020B0609020204030204" pitchFamily="49" charset="0"/>
-              </a:rPr>
-              <a:t>}</a:t>
-            </a:r>
-            <a:endParaRPr lang="ko-KR" altLang="en-US" sz="1600" dirty="0"/>
-          </a:p>
-        </p:txBody>
-      </p:sp>
-    </p:spTree>
-    <p:extLst>
-      <p:ext uri="{BB962C8B-B14F-4D97-AF65-F5344CB8AC3E}">
-        <p14:creationId xmlns:p14="http://schemas.microsoft.com/office/powerpoint/2010/main" val="3781586448"/>
       </p:ext>
     </p:extLst>
   </p:cSld>
@@ -35907,7 +35268,7 @@
             </a:r>
             <a:r>
               <a:rPr lang="en-US" altLang="ko-KR" sz="2000" dirty="0"/>
-              <a:t>× sizeof(</a:t>
+              <a:t>* sizeof(</a:t>
             </a:r>
             <a:r>
               <a:rPr lang="ko-KR" altLang="en-US" sz="2000" dirty="0"/>
@@ -35967,10 +35328,10 @@
       </p:sp>
       <p:sp>
         <p:nvSpPr>
-          <p:cNvPr id="6" name="TextBox 5">
+          <p:cNvPr id="7" name="TextBox 6">
             <a:extLst>
               <a:ext uri="{FF2B5EF4-FFF2-40B4-BE49-F238E27FC236}">
-                <a16:creationId xmlns:a16="http://schemas.microsoft.com/office/drawing/2014/main" id="{7815BEF5-5BBD-875F-D32A-5322B82E5D3F}"/>
+                <a16:creationId xmlns:a16="http://schemas.microsoft.com/office/drawing/2014/main" id="{248F665E-743D-AD01-63AA-F04668747F6F}"/>
               </a:ext>
             </a:extLst>
           </p:cNvPr>
@@ -35979,8 +35340,8 @@
         </p:nvSpPr>
         <p:spPr>
           <a:xfrm>
-            <a:off x="899592" y="2636912"/>
-            <a:ext cx="6228692" cy="2554545"/>
+            <a:off x="683568" y="2708920"/>
+            <a:ext cx="7488634" cy="3046988"/>
           </a:xfrm>
           <a:prstGeom prst="rect">
             <a:avLst/>
@@ -35989,7 +35350,7 @@
           <a:ln w="25400">
             <a:solidFill>
               <a:schemeClr val="bg1">
-                <a:lumMod val="50000"/>
+                <a:lumMod val="75000"/>
               </a:schemeClr>
             </a:solidFill>
             <a:prstDash val="sysDot"/>
@@ -36002,7 +35363,7 @@
           <a:lstStyle/>
           <a:p>
             <a:r>
-              <a:rPr lang="en-US" altLang="ko-KR" sz="2000" b="0" i="0" u="none" strike="noStrike" dirty="0">
+              <a:rPr lang="en-US" altLang="ko-KR" sz="2400" b="0" i="0" u="none" strike="noStrike" dirty="0">
                 <a:solidFill>
                   <a:srgbClr val="383A42"/>
                 </a:solidFill>
@@ -36012,7 +35373,7 @@
               <a:t>arr = </a:t>
             </a:r>
             <a:r>
-              <a:rPr lang="en-US" altLang="ko-KR" sz="2000" b="0" i="0" u="none" strike="noStrike" dirty="0">
+              <a:rPr lang="en-US" altLang="ko-KR" sz="2400" b="0" i="0" u="none" strike="noStrike" dirty="0">
                 <a:solidFill>
                   <a:srgbClr val="986801"/>
                 </a:solidFill>
@@ -36022,7 +35383,7 @@
               <a:t>1000</a:t>
             </a:r>
             <a:r>
-              <a:rPr lang="ko-KR" altLang="en-US" sz="2000" b="0" i="0" u="none" strike="noStrike" dirty="0">
+              <a:rPr lang="ko-KR" altLang="en-US" sz="2400" b="0" i="0" u="none" strike="noStrike" dirty="0">
                 <a:solidFill>
                   <a:srgbClr val="383A42"/>
                 </a:solidFill>
@@ -36032,7 +35393,7 @@
               <a:t>번지 </a:t>
             </a:r>
             <a:r>
-              <a:rPr lang="en-US" altLang="ko-KR" sz="2000" b="0" i="0" u="none" strike="noStrike" dirty="0">
+              <a:rPr lang="en-US" altLang="ko-KR" sz="2400" b="0" i="0" u="none" strike="noStrike" dirty="0">
                 <a:solidFill>
                   <a:srgbClr val="383A42"/>
                 </a:solidFill>
@@ -36042,7 +35403,7 @@
               <a:t>(</a:t>
             </a:r>
             <a:r>
-              <a:rPr lang="en-US" altLang="ko-KR" sz="2000" b="0" i="0" u="none" strike="noStrike" dirty="0">
+              <a:rPr lang="en-US" altLang="ko-KR" sz="2400" b="0" i="0" u="none" strike="noStrike" dirty="0">
                 <a:solidFill>
                   <a:srgbClr val="A626A4"/>
                 </a:solidFill>
@@ -36052,7 +35413,7 @@
               <a:t>int</a:t>
             </a:r>
             <a:r>
-              <a:rPr lang="en-US" altLang="ko-KR" sz="2000" b="0" i="0" u="none" strike="noStrike" dirty="0">
+              <a:rPr lang="en-US" altLang="ko-KR" sz="2400" b="0" i="0" u="none" strike="noStrike" dirty="0">
                 <a:solidFill>
                   <a:srgbClr val="383A42"/>
                 </a:solidFill>
@@ -36062,7 +35423,7 @@
               <a:t> = </a:t>
             </a:r>
             <a:r>
-              <a:rPr lang="en-US" altLang="ko-KR" sz="2000" b="0" i="0" u="none" strike="noStrike" dirty="0">
+              <a:rPr lang="en-US" altLang="ko-KR" sz="2400" b="0" i="0" u="none" strike="noStrike" dirty="0">
                 <a:solidFill>
                   <a:srgbClr val="986801"/>
                 </a:solidFill>
@@ -36072,7 +35433,7 @@
               <a:t>4</a:t>
             </a:r>
             <a:r>
-              <a:rPr lang="ko-KR" altLang="en-US" sz="2000" b="0" i="0" u="none" strike="noStrike" dirty="0">
+              <a:rPr lang="ko-KR" altLang="en-US" sz="2400" b="0" i="0" u="none" strike="noStrike" dirty="0">
                 <a:solidFill>
                   <a:srgbClr val="383A42"/>
                 </a:solidFill>
@@ -36082,7 +35443,7 @@
               <a:t>바이트</a:t>
             </a:r>
             <a:r>
-              <a:rPr lang="en-US" altLang="ko-KR" sz="2000" b="0" i="0" u="none" strike="noStrike" dirty="0">
+              <a:rPr lang="en-US" altLang="ko-KR" sz="2400" b="0" i="0" u="none" strike="noStrike" dirty="0">
                 <a:solidFill>
                   <a:srgbClr val="383A42"/>
                 </a:solidFill>
@@ -36092,7 +35453,7 @@
               <a:t>)</a:t>
             </a:r>
             <a:br>
-              <a:rPr lang="en-US" altLang="ko-KR" sz="2000" b="0" i="0" u="none" strike="noStrike" dirty="0">
+              <a:rPr lang="en-US" altLang="ko-KR" sz="2400" b="0" i="0" u="none" strike="noStrike" dirty="0">
                 <a:solidFill>
                   <a:srgbClr val="383A42"/>
                 </a:solidFill>
@@ -36101,7 +35462,7 @@
               </a:rPr>
             </a:br>
             <a:r>
-              <a:rPr lang="en-US" altLang="ko-KR" sz="2000" b="0" i="0" u="none" strike="noStrike" dirty="0">
+              <a:rPr lang="en-US" altLang="ko-KR" sz="2400" b="0" i="0" u="none" strike="noStrike" dirty="0">
                 <a:solidFill>
                   <a:srgbClr val="383A42"/>
                 </a:solidFill>
@@ -36111,7 +35472,7 @@
               <a:t>    ┌────────┬────────┬────────┬────────┐</a:t>
             </a:r>
             <a:br>
-              <a:rPr lang="en-US" altLang="ko-KR" sz="2000" b="0" i="0" u="none" strike="noStrike" dirty="0">
+              <a:rPr lang="en-US" altLang="ko-KR" sz="2400" b="0" i="0" u="none" strike="noStrike" dirty="0">
                 <a:solidFill>
                   <a:srgbClr val="383A42"/>
                 </a:solidFill>
@@ -36120,7 +35481,7 @@
               </a:rPr>
             </a:br>
             <a:r>
-              <a:rPr lang="en-US" altLang="ko-KR" sz="2000" b="0" i="0" u="none" strike="noStrike" dirty="0">
+              <a:rPr lang="en-US" altLang="ko-KR" sz="2400" b="0" i="0" u="none" strike="noStrike" dirty="0">
                 <a:solidFill>
                   <a:srgbClr val="383A42"/>
                 </a:solidFill>
@@ -36130,7 +35491,7 @@
               <a:t>    │ arr[</a:t>
             </a:r>
             <a:r>
-              <a:rPr lang="en-US" altLang="ko-KR" sz="2000" b="0" i="0" u="none" strike="noStrike" dirty="0">
+              <a:rPr lang="en-US" altLang="ko-KR" sz="2400" b="0" i="0" u="none" strike="noStrike" dirty="0">
                 <a:solidFill>
                   <a:srgbClr val="986801"/>
                 </a:solidFill>
@@ -36140,7 +35501,7 @@
               <a:t>0</a:t>
             </a:r>
             <a:r>
-              <a:rPr lang="en-US" altLang="ko-KR" sz="2000" b="0" i="0" u="none" strike="noStrike" dirty="0">
+              <a:rPr lang="en-US" altLang="ko-KR" sz="2400" b="0" i="0" u="none" strike="noStrike" dirty="0">
                 <a:solidFill>
                   <a:srgbClr val="383A42"/>
                 </a:solidFill>
@@ -36150,7 +35511,7 @@
               <a:t>] │ arr[</a:t>
             </a:r>
             <a:r>
-              <a:rPr lang="en-US" altLang="ko-KR" sz="2000" b="0" i="0" u="none" strike="noStrike" dirty="0">
+              <a:rPr lang="en-US" altLang="ko-KR" sz="2400" b="0" i="0" u="none" strike="noStrike" dirty="0">
                 <a:solidFill>
                   <a:srgbClr val="986801"/>
                 </a:solidFill>
@@ -36160,7 +35521,7 @@
               <a:t>1</a:t>
             </a:r>
             <a:r>
-              <a:rPr lang="en-US" altLang="ko-KR" sz="2000" b="0" i="0" u="none" strike="noStrike" dirty="0">
+              <a:rPr lang="en-US" altLang="ko-KR" sz="2400" b="0" i="0" u="none" strike="noStrike" dirty="0">
                 <a:solidFill>
                   <a:srgbClr val="383A42"/>
                 </a:solidFill>
@@ -36170,7 +35531,7 @@
               <a:t>] │ arr[</a:t>
             </a:r>
             <a:r>
-              <a:rPr lang="en-US" altLang="ko-KR" sz="2000" b="0" i="0" u="none" strike="noStrike" dirty="0">
+              <a:rPr lang="en-US" altLang="ko-KR" sz="2400" b="0" i="0" u="none" strike="noStrike" dirty="0">
                 <a:solidFill>
                   <a:srgbClr val="986801"/>
                 </a:solidFill>
@@ -36180,7 +35541,7 @@
               <a:t>2</a:t>
             </a:r>
             <a:r>
-              <a:rPr lang="en-US" altLang="ko-KR" sz="2000" b="0" i="0" u="none" strike="noStrike" dirty="0">
+              <a:rPr lang="en-US" altLang="ko-KR" sz="2400" b="0" i="0" u="none" strike="noStrike" dirty="0">
                 <a:solidFill>
                   <a:srgbClr val="383A42"/>
                 </a:solidFill>
@@ -36190,7 +35551,7 @@
               <a:t>] │ arr[</a:t>
             </a:r>
             <a:r>
-              <a:rPr lang="en-US" altLang="ko-KR" sz="2000" b="0" i="0" u="none" strike="noStrike" dirty="0">
+              <a:rPr lang="en-US" altLang="ko-KR" sz="2400" b="0" i="0" u="none" strike="noStrike" dirty="0">
                 <a:solidFill>
                   <a:srgbClr val="986801"/>
                 </a:solidFill>
@@ -36200,7 +35561,7 @@
               <a:t>3</a:t>
             </a:r>
             <a:r>
-              <a:rPr lang="en-US" altLang="ko-KR" sz="2000" b="0" i="0" u="none" strike="noStrike" dirty="0">
+              <a:rPr lang="en-US" altLang="ko-KR" sz="2400" b="0" i="0" u="none" strike="noStrike" dirty="0">
                 <a:solidFill>
                   <a:srgbClr val="383A42"/>
                 </a:solidFill>
@@ -36210,7 +35571,7 @@
               <a:t>] │</a:t>
             </a:r>
             <a:br>
-              <a:rPr lang="en-US" altLang="ko-KR" sz="2000" b="0" i="0" u="none" strike="noStrike" dirty="0">
+              <a:rPr lang="en-US" altLang="ko-KR" sz="2400" b="0" i="0" u="none" strike="noStrike" dirty="0">
                 <a:solidFill>
                   <a:srgbClr val="383A42"/>
                 </a:solidFill>
@@ -36219,7 +35580,7 @@
               </a:rPr>
             </a:br>
             <a:r>
-              <a:rPr lang="en-US" altLang="ko-KR" sz="2000" b="0" i="0" u="none" strike="noStrike" dirty="0">
+              <a:rPr lang="en-US" altLang="ko-KR" sz="2400" b="0" i="0" u="none" strike="noStrike" dirty="0">
                 <a:solidFill>
                   <a:srgbClr val="383A42"/>
                 </a:solidFill>
@@ -36229,7 +35590,7 @@
               <a:t>    └────────┴────────┴────────┴────────┘</a:t>
             </a:r>
             <a:br>
-              <a:rPr lang="en-US" altLang="ko-KR" sz="2000" b="0" i="0" u="none" strike="noStrike" dirty="0">
+              <a:rPr lang="en-US" altLang="ko-KR" sz="2400" b="0" i="0" u="none" strike="noStrike" dirty="0">
                 <a:solidFill>
                   <a:srgbClr val="383A42"/>
                 </a:solidFill>
@@ -36238,7 +35599,7 @@
               </a:rPr>
             </a:br>
             <a:r>
-              <a:rPr lang="ko-KR" altLang="en-US" sz="2000" b="0" i="0" u="none" strike="noStrike" dirty="0">
+              <a:rPr lang="ko-KR" altLang="en-US" sz="2400" b="0" i="0" u="none" strike="noStrike" dirty="0">
                 <a:solidFill>
                   <a:srgbClr val="383A42"/>
                 </a:solidFill>
@@ -36248,7 +35609,7 @@
               <a:t>주소</a:t>
             </a:r>
             <a:r>
-              <a:rPr lang="en-US" altLang="ko-KR" sz="2000" b="0" i="0" u="none" strike="noStrike" dirty="0">
+              <a:rPr lang="en-US" altLang="ko-KR" sz="2400" b="0" i="0" u="none" strike="noStrike" dirty="0">
                 <a:solidFill>
                   <a:srgbClr val="383A42"/>
                 </a:solidFill>
@@ -36258,7 +35619,7 @@
               <a:t>:   </a:t>
             </a:r>
             <a:r>
-              <a:rPr lang="en-US" altLang="ko-KR" sz="2000" b="0" i="0" u="none" strike="noStrike" dirty="0">
+              <a:rPr lang="en-US" altLang="ko-KR" sz="2400" b="0" i="0" u="none" strike="noStrike" dirty="0">
                 <a:solidFill>
                   <a:srgbClr val="986801"/>
                 </a:solidFill>
@@ -36268,7 +35629,7 @@
               <a:t>1000</a:t>
             </a:r>
             <a:r>
-              <a:rPr lang="ko-KR" altLang="en-US" sz="2000" b="0" i="0" u="none" strike="noStrike" dirty="0">
+              <a:rPr lang="ko-KR" altLang="en-US" sz="2400" b="0" i="0" u="none" strike="noStrike" dirty="0">
                 <a:solidFill>
                   <a:srgbClr val="383A42"/>
                 </a:solidFill>
@@ -36278,7 +35639,7 @@
               <a:t>    </a:t>
             </a:r>
             <a:r>
-              <a:rPr lang="en-US" altLang="ko-KR" sz="2000" b="0" i="0" u="none" strike="noStrike" dirty="0">
+              <a:rPr lang="en-US" altLang="ko-KR" sz="2400" b="0" i="0" u="none" strike="noStrike" dirty="0">
                 <a:solidFill>
                   <a:srgbClr val="986801"/>
                 </a:solidFill>
@@ -36288,7 +35649,7 @@
               <a:t>1004</a:t>
             </a:r>
             <a:r>
-              <a:rPr lang="ko-KR" altLang="en-US" sz="2000" b="0" i="0" u="none" strike="noStrike" dirty="0">
+              <a:rPr lang="ko-KR" altLang="en-US" sz="2400" b="0" i="0" u="none" strike="noStrike" dirty="0">
                 <a:solidFill>
                   <a:srgbClr val="383A42"/>
                 </a:solidFill>
@@ -36298,7 +35659,7 @@
               <a:t>     </a:t>
             </a:r>
             <a:r>
-              <a:rPr lang="en-US" altLang="ko-KR" sz="2000" b="0" i="0" u="none" strike="noStrike" dirty="0">
+              <a:rPr lang="en-US" altLang="ko-KR" sz="2400" b="0" i="0" u="none" strike="noStrike" dirty="0">
                 <a:solidFill>
                   <a:srgbClr val="986801"/>
                 </a:solidFill>
@@ -36308,7 +35669,7 @@
               <a:t>1008</a:t>
             </a:r>
             <a:r>
-              <a:rPr lang="ko-KR" altLang="en-US" sz="2000" b="0" i="0" u="none" strike="noStrike" dirty="0">
+              <a:rPr lang="ko-KR" altLang="en-US" sz="2400" b="0" i="0" u="none" strike="noStrike" dirty="0">
                 <a:solidFill>
                   <a:srgbClr val="383A42"/>
                 </a:solidFill>
@@ -36318,7 +35679,7 @@
               <a:t>     </a:t>
             </a:r>
             <a:r>
-              <a:rPr lang="en-US" altLang="ko-KR" sz="2000" b="0" i="0" u="none" strike="noStrike" dirty="0">
+              <a:rPr lang="en-US" altLang="ko-KR" sz="2400" b="0" i="0" u="none" strike="noStrike" dirty="0">
                 <a:solidFill>
                   <a:srgbClr val="986801"/>
                 </a:solidFill>
@@ -36328,7 +35689,7 @@
               <a:t>1012</a:t>
             </a:r>
             <a:br>
-              <a:rPr lang="ko-KR" altLang="en-US" sz="2000" b="0" i="0" u="none" strike="noStrike" dirty="0">
+              <a:rPr lang="ko-KR" altLang="en-US" sz="2400" b="0" i="0" u="none" strike="noStrike" dirty="0">
                 <a:solidFill>
                   <a:srgbClr val="383A42"/>
                 </a:solidFill>
@@ -36337,7 +35698,7 @@
               </a:rPr>
             </a:br>
             <a:br>
-              <a:rPr lang="ko-KR" altLang="en-US" sz="2000" b="0" i="0" u="none" strike="noStrike" dirty="0">
+              <a:rPr lang="ko-KR" altLang="en-US" sz="2400" b="0" i="0" u="none" strike="noStrike" dirty="0">
                 <a:solidFill>
                   <a:srgbClr val="383A42"/>
                 </a:solidFill>
@@ -36346,7 +35707,7 @@
               </a:rPr>
             </a:br>
             <a:r>
-              <a:rPr lang="ko-KR" altLang="en-US" sz="2000" b="0" i="0" u="none" strike="noStrike" dirty="0">
+              <a:rPr lang="ko-KR" altLang="en-US" sz="2400" b="0" i="0" u="none" strike="noStrike" dirty="0">
                 <a:solidFill>
                   <a:srgbClr val="383A42"/>
                 </a:solidFill>
@@ -36356,7 +35717,7 @@
               <a:t>계산 방식</a:t>
             </a:r>
             <a:r>
-              <a:rPr lang="en-US" altLang="ko-KR" sz="2000" b="0" i="0" u="none" strike="noStrike" dirty="0">
+              <a:rPr lang="en-US" altLang="ko-KR" sz="2400" b="0" i="0" u="none" strike="noStrike" dirty="0">
                 <a:solidFill>
                   <a:srgbClr val="383A42"/>
                 </a:solidFill>
@@ -36366,7 +35727,7 @@
               <a:t>:</a:t>
             </a:r>
             <a:br>
-              <a:rPr lang="en-US" altLang="ko-KR" sz="2000" b="0" i="0" u="none" strike="noStrike" dirty="0">
+              <a:rPr lang="en-US" altLang="ko-KR" sz="2400" b="0" i="0" u="none" strike="noStrike" dirty="0">
                 <a:solidFill>
                   <a:srgbClr val="383A42"/>
                 </a:solidFill>
@@ -36375,36 +35736,58 @@
               </a:rPr>
             </a:br>
             <a:r>
-              <a:rPr lang="en-US" altLang="ko-KR" sz="2000" b="0" i="0" u="none" strike="noStrike" dirty="0">
-                <a:solidFill>
-                  <a:srgbClr val="383A42"/>
-                </a:solidFill>
-                <a:effectLst/>
-                <a:latin typeface="Consolas" panose="020B0609020204030204" pitchFamily="49" charset="0"/>
-              </a:rPr>
-              <a:t>arr[index] = base + (index × </a:t>
-            </a:r>
-            <a:r>
-              <a:rPr lang="en-US" altLang="ko-KR" sz="2000" b="0" i="0" u="none" strike="noStrike" dirty="0">
-                <a:solidFill>
-                  <a:srgbClr val="986801"/>
-                </a:solidFill>
-                <a:effectLst/>
-                <a:latin typeface="Consolas" panose="020B0609020204030204" pitchFamily="49" charset="0"/>
-              </a:rPr>
-              <a:t>4</a:t>
-            </a:r>
-            <a:r>
-              <a:rPr lang="en-US" altLang="ko-KR" sz="2000" b="0" i="0" u="none" strike="noStrike" dirty="0">
-                <a:solidFill>
-                  <a:srgbClr val="383A42"/>
-                </a:solidFill>
-                <a:effectLst/>
-                <a:latin typeface="Consolas" panose="020B0609020204030204" pitchFamily="49" charset="0"/>
-              </a:rPr>
-              <a:t>)</a:t>
-            </a:r>
-            <a:endParaRPr lang="ko-KR" altLang="en-US" sz="2000" dirty="0"/>
+              <a:rPr lang="en-US" altLang="ko-KR" sz="2400" b="0" i="0" u="none" strike="noStrike" dirty="0">
+                <a:solidFill>
+                  <a:srgbClr val="383A42"/>
+                </a:solidFill>
+                <a:effectLst/>
+                <a:latin typeface="Consolas" panose="020B0609020204030204" pitchFamily="49" charset="0"/>
+              </a:rPr>
+              <a:t>arr[index] = base + (index * </a:t>
+            </a:r>
+            <a:r>
+              <a:rPr lang="en-US" altLang="ko-KR" sz="2400" b="0" i="0" u="none" strike="noStrike" dirty="0">
+                <a:solidFill>
+                  <a:srgbClr val="A626A4"/>
+                </a:solidFill>
+                <a:effectLst/>
+                <a:latin typeface="Consolas" panose="020B0609020204030204" pitchFamily="49" charset="0"/>
+              </a:rPr>
+              <a:t>sizeof</a:t>
+            </a:r>
+            <a:r>
+              <a:rPr lang="en-US" altLang="ko-KR" sz="2400" b="0" i="0" u="none" strike="noStrike" dirty="0">
+                <a:solidFill>
+                  <a:srgbClr val="383A42"/>
+                </a:solidFill>
+                <a:effectLst/>
+                <a:latin typeface="Consolas" panose="020B0609020204030204" pitchFamily="49" charset="0"/>
+              </a:rPr>
+              <a:t>(</a:t>
+            </a:r>
+            <a:r>
+              <a:rPr lang="en-US" altLang="ko-KR" sz="2400" b="0" i="0" u="none" strike="noStrike" dirty="0">
+                <a:solidFill>
+                  <a:srgbClr val="A626A4"/>
+                </a:solidFill>
+                <a:effectLst/>
+                <a:latin typeface="Consolas" panose="020B0609020204030204" pitchFamily="49" charset="0"/>
+              </a:rPr>
+              <a:t>int</a:t>
+            </a:r>
+            <a:r>
+              <a:rPr lang="en-US" altLang="ko-KR" sz="2400" b="0" i="0" u="none" strike="noStrike" dirty="0">
+                <a:solidFill>
+                  <a:srgbClr val="383A42"/>
+                </a:solidFill>
+                <a:effectLst/>
+                <a:latin typeface="Consolas" panose="020B0609020204030204" pitchFamily="49" charset="0"/>
+              </a:rPr>
+              <a:t>))</a:t>
+            </a:r>
+            <a:endParaRPr lang="ko-KR" altLang="en-US" dirty="0">
+              <a:latin typeface="Consolas" panose="020B0609020204030204" pitchFamily="49" charset="0"/>
+            </a:endParaRPr>
           </a:p>
         </p:txBody>
       </p:sp>
@@ -36422,6 +35805,1196 @@
 </file>
 
 <file path=ppt/slides/slide40.xml><?xml version="1.0" encoding="utf-8"?>
+<p:sld xmlns:a="http://schemas.openxmlformats.org/drawingml/2006/main" xmlns:r="http://schemas.openxmlformats.org/officeDocument/2006/relationships" xmlns:p="http://schemas.openxmlformats.org/presentationml/2006/main">
+  <p:cSld>
+    <p:spTree>
+      <p:nvGrpSpPr>
+        <p:cNvPr id="1" name="">
+          <a:extLst>
+            <a:ext uri="{FF2B5EF4-FFF2-40B4-BE49-F238E27FC236}">
+              <a16:creationId xmlns:a16="http://schemas.microsoft.com/office/drawing/2014/main" id="{47B8AB45-5BBC-D997-3987-FBE56A8FF282}"/>
+            </a:ext>
+          </a:extLst>
+        </p:cNvPr>
+        <p:cNvGrpSpPr/>
+        <p:nvPr/>
+      </p:nvGrpSpPr>
+      <p:grpSpPr>
+        <a:xfrm>
+          <a:off x="0" y="0"/>
+          <a:ext cx="0" cy="0"/>
+          <a:chOff x="0" y="0"/>
+          <a:chExt cx="0" cy="0"/>
+        </a:xfrm>
+      </p:grpSpPr>
+      <p:sp>
+        <p:nvSpPr>
+          <p:cNvPr id="2" name="제목 1">
+            <a:extLst>
+              <a:ext uri="{FF2B5EF4-FFF2-40B4-BE49-F238E27FC236}">
+                <a16:creationId xmlns:a16="http://schemas.microsoft.com/office/drawing/2014/main" id="{28B13EFC-99FB-614F-9AD2-27A43714C86F}"/>
+              </a:ext>
+            </a:extLst>
+          </p:cNvPr>
+          <p:cNvSpPr>
+            <a:spLocks noGrp="1"/>
+          </p:cNvSpPr>
+          <p:nvPr>
+            <p:ph type="title"/>
+          </p:nvPr>
+        </p:nvSpPr>
+        <p:spPr/>
+        <p:txBody>
+          <a:bodyPr/>
+          <a:lstStyle/>
+          <a:p>
+            <a:r>
+              <a:rPr lang="en-US" altLang="ko-KR" b="0" dirty="0"/>
+              <a:t>8.3.4 </a:t>
+            </a:r>
+            <a:r>
+              <a:rPr lang="ko-KR" altLang="en-US" b="0" dirty="0"/>
+              <a:t>문자열 복사하기 </a:t>
+            </a:r>
+            <a:r>
+              <a:rPr lang="en-US" altLang="ko-KR" b="0" dirty="0"/>
+              <a:t>– </a:t>
+            </a:r>
+            <a:r>
+              <a:rPr lang="en-US" altLang="ko-KR" b="0" dirty="0" err="1"/>
+              <a:t>myStrCpy</a:t>
+            </a:r>
+            <a:endParaRPr lang="ko-KR" altLang="en-US" dirty="0"/>
+          </a:p>
+        </p:txBody>
+      </p:sp>
+      <p:sp>
+        <p:nvSpPr>
+          <p:cNvPr id="3" name="내용 개체 틀 2">
+            <a:extLst>
+              <a:ext uri="{FF2B5EF4-FFF2-40B4-BE49-F238E27FC236}">
+                <a16:creationId xmlns:a16="http://schemas.microsoft.com/office/drawing/2014/main" id="{98585783-F4BB-268A-3A73-567E1B96687A}"/>
+              </a:ext>
+            </a:extLst>
+          </p:cNvPr>
+          <p:cNvSpPr>
+            <a:spLocks noGrp="1"/>
+          </p:cNvSpPr>
+          <p:nvPr>
+            <p:ph idx="1"/>
+          </p:nvPr>
+        </p:nvSpPr>
+        <p:spPr/>
+        <p:txBody>
+          <a:bodyPr/>
+          <a:lstStyle/>
+          <a:p>
+            <a:r>
+              <a:rPr lang="ko-KR" altLang="en-US" sz="2400" dirty="0"/>
+              <a:t>문자열 끝 → </a:t>
+            </a:r>
+            <a:r>
+              <a:rPr lang="en-US" altLang="ko-KR" sz="2400" dirty="0"/>
+              <a:t>'</a:t>
+            </a:r>
+            <a:r>
+              <a:rPr lang="en-US" altLang="ko-KR" sz="2400" dirty="0">
+                <a:latin typeface="Consolas" panose="020B0609020204030204" pitchFamily="49" charset="0"/>
+              </a:rPr>
+              <a:t>\0</a:t>
+            </a:r>
+            <a:r>
+              <a:rPr lang="en-US" altLang="ko-KR" sz="2400" dirty="0"/>
+              <a:t>'</a:t>
+            </a:r>
+          </a:p>
+          <a:p>
+            <a:r>
+              <a:rPr lang="ko-KR" altLang="en-US" sz="2400" dirty="0"/>
+              <a:t>문자열 길이 → </a:t>
+            </a:r>
+            <a:r>
+              <a:rPr lang="en-US" altLang="ko-KR" sz="2400" dirty="0"/>
+              <a:t>'</a:t>
+            </a:r>
+            <a:r>
+              <a:rPr lang="en-US" altLang="ko-KR" sz="2400" dirty="0">
+                <a:latin typeface="Consolas" panose="020B0609020204030204" pitchFamily="49" charset="0"/>
+              </a:rPr>
+              <a:t>\0</a:t>
+            </a:r>
+            <a:r>
+              <a:rPr lang="en-US" altLang="ko-KR" sz="2400" dirty="0"/>
+              <a:t>' </a:t>
+            </a:r>
+            <a:r>
+              <a:rPr lang="ko-KR" altLang="en-US" sz="2400" dirty="0"/>
+              <a:t>이전까지</a:t>
+            </a:r>
+            <a:endParaRPr lang="en-US" altLang="ko-KR" sz="2400" dirty="0"/>
+          </a:p>
+        </p:txBody>
+      </p:sp>
+      <p:sp>
+        <p:nvSpPr>
+          <p:cNvPr id="4" name="바닥글 개체 틀 3">
+            <a:extLst>
+              <a:ext uri="{FF2B5EF4-FFF2-40B4-BE49-F238E27FC236}">
+                <a16:creationId xmlns:a16="http://schemas.microsoft.com/office/drawing/2014/main" id="{8A211DE7-6BC0-26E8-91C2-7FB661E7012C}"/>
+              </a:ext>
+            </a:extLst>
+          </p:cNvPr>
+          <p:cNvSpPr>
+            <a:spLocks noGrp="1"/>
+          </p:cNvSpPr>
+          <p:nvPr>
+            <p:ph type="ftr" sz="quarter" idx="10"/>
+          </p:nvPr>
+        </p:nvSpPr>
+        <p:spPr/>
+        <p:txBody>
+          <a:bodyPr/>
+          <a:lstStyle/>
+          <a:p>
+            <a:pPr>
+              <a:defRPr/>
+            </a:pPr>
+            <a:r>
+              <a:rPr lang="ko-KR" altLang="en-US"/>
+              <a:t>게임 프로그래밍 교육과정</a:t>
+            </a:r>
+            <a:endParaRPr lang="ko-KR" altLang="en-US" dirty="0"/>
+          </a:p>
+        </p:txBody>
+      </p:sp>
+      <p:sp>
+        <p:nvSpPr>
+          <p:cNvPr id="9" name="TextBox 8">
+            <a:extLst>
+              <a:ext uri="{FF2B5EF4-FFF2-40B4-BE49-F238E27FC236}">
+                <a16:creationId xmlns:a16="http://schemas.microsoft.com/office/drawing/2014/main" id="{6788BB81-769A-8F83-C3DD-68226736CF0A}"/>
+              </a:ext>
+            </a:extLst>
+          </p:cNvPr>
+          <p:cNvSpPr txBox="1"/>
+          <p:nvPr/>
+        </p:nvSpPr>
+        <p:spPr>
+          <a:xfrm>
+            <a:off x="539750" y="1700808"/>
+            <a:ext cx="8064500" cy="3600986"/>
+          </a:xfrm>
+          <a:prstGeom prst="rect">
+            <a:avLst/>
+          </a:prstGeom>
+          <a:noFill/>
+          <a:ln w="25400">
+            <a:solidFill>
+              <a:schemeClr val="bg1">
+                <a:lumMod val="65000"/>
+              </a:schemeClr>
+            </a:solidFill>
+            <a:prstDash val="sysDot"/>
+          </a:ln>
+        </p:spPr>
+        <p:txBody>
+          <a:bodyPr wrap="square">
+            <a:spAutoFit/>
+          </a:bodyPr>
+          <a:lstStyle/>
+          <a:p>
+            <a:pPr rtl="0">
+              <a:buNone/>
+            </a:pPr>
+            <a:r>
+              <a:rPr lang="en-US" altLang="ko-KR" sz="1600" b="0" i="0" u="none" strike="noStrike" dirty="0" err="1">
+                <a:solidFill>
+                  <a:srgbClr val="A626A4"/>
+                </a:solidFill>
+                <a:effectLst/>
+                <a:latin typeface="Consolas" panose="020B0609020204030204" pitchFamily="49" charset="0"/>
+              </a:rPr>
+              <a:t>size_t</a:t>
+            </a:r>
+            <a:r>
+              <a:rPr lang="en-US" altLang="ko-KR" sz="1600" b="0" i="0" u="none" strike="noStrike" dirty="0">
+                <a:solidFill>
+                  <a:srgbClr val="383A42"/>
+                </a:solidFill>
+                <a:effectLst/>
+                <a:latin typeface="Consolas" panose="020B0609020204030204" pitchFamily="49" charset="0"/>
+              </a:rPr>
+              <a:t> </a:t>
+            </a:r>
+            <a:r>
+              <a:rPr lang="en-US" altLang="ko-KR" sz="1600" b="0" i="0" u="none" strike="noStrike" dirty="0" err="1">
+                <a:solidFill>
+                  <a:srgbClr val="383A42"/>
+                </a:solidFill>
+                <a:effectLst/>
+                <a:latin typeface="Consolas" panose="020B0609020204030204" pitchFamily="49" charset="0"/>
+              </a:rPr>
+              <a:t>myStrCpy</a:t>
+            </a:r>
+            <a:r>
+              <a:rPr lang="en-US" altLang="ko-KR" sz="1600" b="0" i="0" u="none" strike="noStrike" dirty="0">
+                <a:solidFill>
+                  <a:srgbClr val="383A42"/>
+                </a:solidFill>
+                <a:effectLst/>
+                <a:latin typeface="Consolas" panose="020B0609020204030204" pitchFamily="49" charset="0"/>
+              </a:rPr>
+              <a:t>(</a:t>
+            </a:r>
+            <a:r>
+              <a:rPr lang="en-US" altLang="ko-KR" sz="1600" b="0" i="0" u="none" strike="noStrike" dirty="0">
+                <a:solidFill>
+                  <a:srgbClr val="A626A4"/>
+                </a:solidFill>
+                <a:effectLst/>
+                <a:latin typeface="Consolas" panose="020B0609020204030204" pitchFamily="49" charset="0"/>
+              </a:rPr>
+              <a:t>char</a:t>
+            </a:r>
+            <a:r>
+              <a:rPr lang="en-US" altLang="ko-KR" sz="1600" b="0" i="0" u="none" strike="noStrike" dirty="0">
+                <a:solidFill>
+                  <a:srgbClr val="383A42"/>
+                </a:solidFill>
+                <a:effectLst/>
+                <a:latin typeface="Consolas" panose="020B0609020204030204" pitchFamily="49" charset="0"/>
+              </a:rPr>
+              <a:t> </a:t>
+            </a:r>
+            <a:r>
+              <a:rPr lang="en-US" altLang="ko-KR" sz="1600" b="0" i="0" u="none" strike="noStrike" dirty="0" err="1">
+                <a:solidFill>
+                  <a:srgbClr val="383A42"/>
+                </a:solidFill>
+                <a:effectLst/>
+                <a:latin typeface="Consolas" panose="020B0609020204030204" pitchFamily="49" charset="0"/>
+              </a:rPr>
+              <a:t>dst</a:t>
+            </a:r>
+            <a:r>
+              <a:rPr lang="en-US" altLang="ko-KR" sz="1600" b="0" i="0" u="none" strike="noStrike" dirty="0">
+                <a:solidFill>
+                  <a:srgbClr val="383A42"/>
+                </a:solidFill>
+                <a:effectLst/>
+                <a:latin typeface="Consolas" panose="020B0609020204030204" pitchFamily="49" charset="0"/>
+              </a:rPr>
+              <a:t>[], </a:t>
+            </a:r>
+            <a:r>
+              <a:rPr lang="en-US" altLang="ko-KR" sz="1600" b="0" i="0" u="none" strike="noStrike" dirty="0" err="1">
+                <a:solidFill>
+                  <a:srgbClr val="A626A4"/>
+                </a:solidFill>
+                <a:effectLst/>
+                <a:latin typeface="Consolas" panose="020B0609020204030204" pitchFamily="49" charset="0"/>
+              </a:rPr>
+              <a:t>size_t</a:t>
+            </a:r>
+            <a:r>
+              <a:rPr lang="en-US" altLang="ko-KR" sz="1600" b="0" i="0" u="none" strike="noStrike" dirty="0">
+                <a:solidFill>
+                  <a:srgbClr val="383A42"/>
+                </a:solidFill>
+                <a:effectLst/>
+                <a:latin typeface="Consolas" panose="020B0609020204030204" pitchFamily="49" charset="0"/>
+              </a:rPr>
+              <a:t> </a:t>
+            </a:r>
+            <a:r>
+              <a:rPr lang="en-US" altLang="ko-KR" sz="1600" b="0" i="0" u="none" strike="noStrike" dirty="0" err="1">
+                <a:solidFill>
+                  <a:srgbClr val="383A42"/>
+                </a:solidFill>
+                <a:effectLst/>
+                <a:latin typeface="Consolas" panose="020B0609020204030204" pitchFamily="49" charset="0"/>
+              </a:rPr>
+              <a:t>dest_size</a:t>
+            </a:r>
+            <a:r>
+              <a:rPr lang="en-US" altLang="ko-KR" sz="1600" b="0" i="0" u="none" strike="noStrike" dirty="0">
+                <a:solidFill>
+                  <a:srgbClr val="383A42"/>
+                </a:solidFill>
+                <a:effectLst/>
+                <a:latin typeface="Consolas" panose="020B0609020204030204" pitchFamily="49" charset="0"/>
+              </a:rPr>
+              <a:t>, </a:t>
+            </a:r>
+            <a:r>
+              <a:rPr lang="en-US" altLang="ko-KR" sz="1600" b="0" i="0" u="none" strike="noStrike" dirty="0">
+                <a:solidFill>
+                  <a:srgbClr val="A626A4"/>
+                </a:solidFill>
+                <a:effectLst/>
+                <a:latin typeface="Consolas" panose="020B0609020204030204" pitchFamily="49" charset="0"/>
+              </a:rPr>
+              <a:t>const</a:t>
+            </a:r>
+            <a:r>
+              <a:rPr lang="en-US" altLang="ko-KR" sz="1600" b="0" i="0" u="none" strike="noStrike" dirty="0">
+                <a:solidFill>
+                  <a:srgbClr val="383A42"/>
+                </a:solidFill>
+                <a:effectLst/>
+                <a:latin typeface="Consolas" panose="020B0609020204030204" pitchFamily="49" charset="0"/>
+              </a:rPr>
+              <a:t> </a:t>
+            </a:r>
+            <a:r>
+              <a:rPr lang="en-US" altLang="ko-KR" sz="1600" b="0" i="0" u="none" strike="noStrike" dirty="0">
+                <a:solidFill>
+                  <a:srgbClr val="A626A4"/>
+                </a:solidFill>
+                <a:effectLst/>
+                <a:latin typeface="Consolas" panose="020B0609020204030204" pitchFamily="49" charset="0"/>
+              </a:rPr>
+              <a:t>char</a:t>
+            </a:r>
+            <a:r>
+              <a:rPr lang="en-US" altLang="ko-KR" sz="1600" b="0" i="0" u="none" strike="noStrike" dirty="0">
+                <a:solidFill>
+                  <a:srgbClr val="383A42"/>
+                </a:solidFill>
+                <a:effectLst/>
+                <a:latin typeface="Consolas" panose="020B0609020204030204" pitchFamily="49" charset="0"/>
+              </a:rPr>
+              <a:t> </a:t>
+            </a:r>
+            <a:r>
+              <a:rPr lang="en-US" altLang="ko-KR" sz="1600" b="0" i="0" u="none" strike="noStrike" dirty="0" err="1">
+                <a:solidFill>
+                  <a:srgbClr val="383A42"/>
+                </a:solidFill>
+                <a:effectLst/>
+                <a:latin typeface="Consolas" panose="020B0609020204030204" pitchFamily="49" charset="0"/>
+              </a:rPr>
+              <a:t>src</a:t>
+            </a:r>
+            <a:r>
+              <a:rPr lang="en-US" altLang="ko-KR" sz="1600" b="0" i="0" u="none" strike="noStrike" dirty="0">
+                <a:solidFill>
+                  <a:srgbClr val="383A42"/>
+                </a:solidFill>
+                <a:effectLst/>
+                <a:latin typeface="Consolas" panose="020B0609020204030204" pitchFamily="49" charset="0"/>
+              </a:rPr>
+              <a:t>[])</a:t>
+            </a:r>
+            <a:br>
+              <a:rPr lang="en-US" altLang="ko-KR" sz="1600" b="0" i="0" u="none" strike="noStrike" dirty="0">
+                <a:solidFill>
+                  <a:srgbClr val="383A42"/>
+                </a:solidFill>
+                <a:effectLst/>
+                <a:latin typeface="Consolas" panose="020B0609020204030204" pitchFamily="49" charset="0"/>
+              </a:rPr>
+            </a:br>
+            <a:r>
+              <a:rPr lang="en-US" altLang="ko-KR" sz="1600" b="0" i="0" u="none" strike="noStrike" dirty="0">
+                <a:solidFill>
+                  <a:srgbClr val="383A42"/>
+                </a:solidFill>
+                <a:effectLst/>
+                <a:latin typeface="Consolas" panose="020B0609020204030204" pitchFamily="49" charset="0"/>
+              </a:rPr>
+              <a:t>{</a:t>
+            </a:r>
+            <a:br>
+              <a:rPr lang="en-US" altLang="ko-KR" sz="1600" b="0" i="0" u="none" strike="noStrike" dirty="0">
+                <a:solidFill>
+                  <a:srgbClr val="383A42"/>
+                </a:solidFill>
+                <a:effectLst/>
+                <a:latin typeface="Consolas" panose="020B0609020204030204" pitchFamily="49" charset="0"/>
+              </a:rPr>
+            </a:br>
+            <a:r>
+              <a:rPr lang="en-US" altLang="ko-KR" sz="1600" b="0" i="0" u="none" strike="noStrike" dirty="0">
+                <a:solidFill>
+                  <a:srgbClr val="383A42"/>
+                </a:solidFill>
+                <a:effectLst/>
+                <a:latin typeface="Consolas" panose="020B0609020204030204" pitchFamily="49" charset="0"/>
+              </a:rPr>
+              <a:t>    </a:t>
+            </a:r>
+            <a:r>
+              <a:rPr lang="en-US" altLang="ko-KR" sz="1600" b="0" i="0" u="none" strike="noStrike" dirty="0">
+                <a:solidFill>
+                  <a:srgbClr val="A626A4"/>
+                </a:solidFill>
+                <a:effectLst/>
+                <a:latin typeface="Consolas" panose="020B0609020204030204" pitchFamily="49" charset="0"/>
+              </a:rPr>
+              <a:t>if</a:t>
+            </a:r>
+            <a:r>
+              <a:rPr lang="en-US" altLang="ko-KR" sz="1600" b="0" i="0" u="none" strike="noStrike" dirty="0">
+                <a:solidFill>
+                  <a:srgbClr val="383A42"/>
+                </a:solidFill>
+                <a:effectLst/>
+                <a:latin typeface="Consolas" panose="020B0609020204030204" pitchFamily="49" charset="0"/>
+              </a:rPr>
+              <a:t>(</a:t>
+            </a:r>
+            <a:r>
+              <a:rPr lang="en-US" altLang="ko-KR" sz="1600" b="0" i="0" u="none" strike="noStrike" dirty="0">
+                <a:solidFill>
+                  <a:srgbClr val="986801"/>
+                </a:solidFill>
+                <a:effectLst/>
+                <a:latin typeface="Consolas" panose="020B0609020204030204" pitchFamily="49" charset="0"/>
+              </a:rPr>
+              <a:t>0</a:t>
+            </a:r>
+            <a:r>
+              <a:rPr lang="en-US" altLang="ko-KR" sz="1600" b="0" i="0" u="none" strike="noStrike" dirty="0">
+                <a:solidFill>
+                  <a:srgbClr val="383A42"/>
+                </a:solidFill>
+                <a:effectLst/>
+                <a:latin typeface="Consolas" panose="020B0609020204030204" pitchFamily="49" charset="0"/>
+              </a:rPr>
+              <a:t> == </a:t>
+            </a:r>
+            <a:r>
+              <a:rPr lang="en-US" altLang="ko-KR" sz="1600" b="0" i="0" u="none" strike="noStrike" dirty="0" err="1">
+                <a:solidFill>
+                  <a:srgbClr val="383A42"/>
+                </a:solidFill>
+                <a:effectLst/>
+                <a:latin typeface="Consolas" panose="020B0609020204030204" pitchFamily="49" charset="0"/>
+              </a:rPr>
+              <a:t>dest_size</a:t>
+            </a:r>
+            <a:r>
+              <a:rPr lang="en-US" altLang="ko-KR" sz="1600" b="0" i="0" u="none" strike="noStrike" dirty="0">
+                <a:solidFill>
+                  <a:srgbClr val="383A42"/>
+                </a:solidFill>
+                <a:effectLst/>
+                <a:latin typeface="Consolas" panose="020B0609020204030204" pitchFamily="49" charset="0"/>
+              </a:rPr>
+              <a:t>)  </a:t>
+            </a:r>
+            <a:r>
+              <a:rPr lang="en-US" altLang="ko-KR" sz="1600" b="0" i="1" u="none" strike="noStrike" dirty="0">
+                <a:solidFill>
+                  <a:srgbClr val="A0A1A7"/>
+                </a:solidFill>
+                <a:effectLst/>
+                <a:latin typeface="Consolas" panose="020B0609020204030204" pitchFamily="49" charset="0"/>
+              </a:rPr>
+              <a:t>// </a:t>
+            </a:r>
+            <a:r>
+              <a:rPr lang="ko-KR" altLang="en-US" sz="1600" b="0" i="1" u="none" strike="noStrike" dirty="0">
+                <a:solidFill>
+                  <a:srgbClr val="A0A1A7"/>
+                </a:solidFill>
+                <a:effectLst/>
+                <a:latin typeface="Consolas" panose="020B0609020204030204" pitchFamily="49" charset="0"/>
+              </a:rPr>
+              <a:t>크기 </a:t>
+            </a:r>
+            <a:r>
+              <a:rPr lang="en-US" altLang="ko-KR" sz="1600" b="0" i="1" u="none" strike="noStrike" dirty="0">
+                <a:solidFill>
+                  <a:srgbClr val="A0A1A7"/>
+                </a:solidFill>
+                <a:effectLst/>
+                <a:latin typeface="Consolas" panose="020B0609020204030204" pitchFamily="49" charset="0"/>
+              </a:rPr>
+              <a:t>0</a:t>
+            </a:r>
+            <a:r>
+              <a:rPr lang="ko-KR" altLang="en-US" sz="1600" b="0" i="1" u="none" strike="noStrike" dirty="0">
+                <a:solidFill>
+                  <a:srgbClr val="A0A1A7"/>
+                </a:solidFill>
+                <a:effectLst/>
+                <a:latin typeface="Consolas" panose="020B0609020204030204" pitchFamily="49" charset="0"/>
+              </a:rPr>
+              <a:t>이면 복사할 수 없으므로 </a:t>
+            </a:r>
+            <a:r>
+              <a:rPr lang="en-US" altLang="ko-KR" sz="1600" b="0" i="1" u="none" strike="noStrike" dirty="0">
+                <a:solidFill>
+                  <a:srgbClr val="A0A1A7"/>
+                </a:solidFill>
+                <a:effectLst/>
+                <a:latin typeface="Consolas" panose="020B0609020204030204" pitchFamily="49" charset="0"/>
+              </a:rPr>
+              <a:t>0 </a:t>
+            </a:r>
+            <a:r>
+              <a:rPr lang="ko-KR" altLang="en-US" sz="1600" b="0" i="1" u="none" strike="noStrike" dirty="0">
+                <a:solidFill>
+                  <a:srgbClr val="A0A1A7"/>
+                </a:solidFill>
+                <a:effectLst/>
+                <a:latin typeface="Consolas" panose="020B0609020204030204" pitchFamily="49" charset="0"/>
+              </a:rPr>
+              <a:t>반환</a:t>
+            </a:r>
+            <a:r>
+              <a:rPr lang="en-US" altLang="ko-KR" sz="1600" b="0" i="1" u="none" strike="noStrike" dirty="0">
+                <a:solidFill>
+                  <a:srgbClr val="A0A1A7"/>
+                </a:solidFill>
+                <a:effectLst/>
+                <a:latin typeface="Consolas" panose="020B0609020204030204" pitchFamily="49" charset="0"/>
+              </a:rPr>
+              <a:t>.</a:t>
+            </a:r>
+            <a:br>
+              <a:rPr lang="ko-KR" altLang="en-US" sz="1600" b="0" i="0" u="none" strike="noStrike" dirty="0">
+                <a:solidFill>
+                  <a:srgbClr val="383A42"/>
+                </a:solidFill>
+                <a:effectLst/>
+                <a:latin typeface="Consolas" panose="020B0609020204030204" pitchFamily="49" charset="0"/>
+              </a:rPr>
+            </a:br>
+            <a:r>
+              <a:rPr lang="ko-KR" altLang="en-US" sz="1600" b="0" i="0" u="none" strike="noStrike" dirty="0">
+                <a:solidFill>
+                  <a:srgbClr val="383A42"/>
+                </a:solidFill>
+                <a:effectLst/>
+                <a:latin typeface="Consolas" panose="020B0609020204030204" pitchFamily="49" charset="0"/>
+              </a:rPr>
+              <a:t>        </a:t>
+            </a:r>
+            <a:r>
+              <a:rPr lang="en-US" altLang="ko-KR" sz="1600" b="0" i="0" u="none" strike="noStrike" dirty="0">
+                <a:solidFill>
+                  <a:srgbClr val="A626A4"/>
+                </a:solidFill>
+                <a:effectLst/>
+                <a:latin typeface="Consolas" panose="020B0609020204030204" pitchFamily="49" charset="0"/>
+              </a:rPr>
+              <a:t>return</a:t>
+            </a:r>
+            <a:r>
+              <a:rPr lang="en-US" altLang="ko-KR" sz="1600" b="0" i="0" u="none" strike="noStrike" dirty="0">
+                <a:solidFill>
+                  <a:srgbClr val="383A42"/>
+                </a:solidFill>
+                <a:effectLst/>
+                <a:latin typeface="Consolas" panose="020B0609020204030204" pitchFamily="49" charset="0"/>
+              </a:rPr>
+              <a:t> </a:t>
+            </a:r>
+            <a:r>
+              <a:rPr lang="en-US" altLang="ko-KR" sz="1600" b="0" i="0" u="none" strike="noStrike" dirty="0">
+                <a:solidFill>
+                  <a:srgbClr val="986801"/>
+                </a:solidFill>
+                <a:effectLst/>
+                <a:latin typeface="Consolas" panose="020B0609020204030204" pitchFamily="49" charset="0"/>
+              </a:rPr>
+              <a:t>0</a:t>
+            </a:r>
+            <a:r>
+              <a:rPr lang="en-US" altLang="ko-KR" sz="1600" b="0" i="0" u="none" strike="noStrike" dirty="0">
+                <a:solidFill>
+                  <a:srgbClr val="383A42"/>
+                </a:solidFill>
+                <a:effectLst/>
+                <a:latin typeface="Consolas" panose="020B0609020204030204" pitchFamily="49" charset="0"/>
+              </a:rPr>
+              <a:t>;</a:t>
+            </a:r>
+            <a:endParaRPr lang="en-US" altLang="ko-KR" sz="1600" b="0" dirty="0">
+              <a:effectLst/>
+            </a:endParaRPr>
+          </a:p>
+          <a:p>
+            <a:pPr>
+              <a:buNone/>
+            </a:pPr>
+            <a:br>
+              <a:rPr lang="en-US" altLang="ko-KR" sz="1600" b="0" i="0" u="none" strike="noStrike" dirty="0">
+                <a:solidFill>
+                  <a:srgbClr val="383A42"/>
+                </a:solidFill>
+                <a:effectLst/>
+                <a:latin typeface="Consolas" panose="020B0609020204030204" pitchFamily="49" charset="0"/>
+              </a:rPr>
+            </a:br>
+            <a:r>
+              <a:rPr lang="en-US" altLang="ko-KR" sz="1600" b="0" i="0" u="none" strike="noStrike" dirty="0">
+                <a:solidFill>
+                  <a:srgbClr val="383A42"/>
+                </a:solidFill>
+                <a:effectLst/>
+                <a:latin typeface="Consolas" panose="020B0609020204030204" pitchFamily="49" charset="0"/>
+              </a:rPr>
+              <a:t>    </a:t>
+            </a:r>
+            <a:r>
+              <a:rPr lang="en-US" altLang="ko-KR" sz="1600" b="0" i="0" u="none" strike="noStrike" dirty="0" err="1">
+                <a:solidFill>
+                  <a:srgbClr val="A626A4"/>
+                </a:solidFill>
+                <a:effectLst/>
+                <a:latin typeface="Consolas" panose="020B0609020204030204" pitchFamily="49" charset="0"/>
+              </a:rPr>
+              <a:t>size_t</a:t>
+            </a:r>
+            <a:r>
+              <a:rPr lang="en-US" altLang="ko-KR" sz="1600" b="0" i="0" u="none" strike="noStrike" dirty="0">
+                <a:solidFill>
+                  <a:srgbClr val="383A42"/>
+                </a:solidFill>
+                <a:effectLst/>
+                <a:latin typeface="Consolas" panose="020B0609020204030204" pitchFamily="49" charset="0"/>
+              </a:rPr>
+              <a:t> n=</a:t>
+            </a:r>
+            <a:r>
+              <a:rPr lang="en-US" altLang="ko-KR" sz="1600" b="0" i="0" u="none" strike="noStrike" dirty="0">
+                <a:solidFill>
+                  <a:srgbClr val="986801"/>
+                </a:solidFill>
+                <a:effectLst/>
+                <a:latin typeface="Consolas" panose="020B0609020204030204" pitchFamily="49" charset="0"/>
+              </a:rPr>
+              <a:t>0</a:t>
+            </a:r>
+            <a:r>
+              <a:rPr lang="en-US" altLang="ko-KR" sz="1600" b="0" i="0" u="none" strike="noStrike" dirty="0">
+                <a:solidFill>
+                  <a:srgbClr val="383A42"/>
+                </a:solidFill>
+                <a:effectLst/>
+                <a:latin typeface="Consolas" panose="020B0609020204030204" pitchFamily="49" charset="0"/>
+              </a:rPr>
+              <a:t>;</a:t>
+            </a:r>
+            <a:br>
+              <a:rPr lang="en-US" altLang="ko-KR" sz="1600" b="0" i="0" u="none" strike="noStrike" dirty="0">
+                <a:solidFill>
+                  <a:srgbClr val="383A42"/>
+                </a:solidFill>
+                <a:effectLst/>
+                <a:latin typeface="Consolas" panose="020B0609020204030204" pitchFamily="49" charset="0"/>
+              </a:rPr>
+            </a:br>
+            <a:r>
+              <a:rPr lang="en-US" altLang="ko-KR" sz="1600" b="0" i="0" u="none" strike="noStrike" dirty="0">
+                <a:solidFill>
+                  <a:srgbClr val="383A42"/>
+                </a:solidFill>
+                <a:effectLst/>
+                <a:latin typeface="Consolas" panose="020B0609020204030204" pitchFamily="49" charset="0"/>
+              </a:rPr>
+              <a:t>    --</a:t>
+            </a:r>
+            <a:r>
+              <a:rPr lang="en-US" altLang="ko-KR" sz="1600" b="0" i="0" u="none" strike="noStrike" dirty="0" err="1">
+                <a:solidFill>
+                  <a:srgbClr val="383A42"/>
+                </a:solidFill>
+                <a:effectLst/>
+                <a:latin typeface="Consolas" panose="020B0609020204030204" pitchFamily="49" charset="0"/>
+              </a:rPr>
+              <a:t>dest_size</a:t>
+            </a:r>
+            <a:r>
+              <a:rPr lang="en-US" altLang="ko-KR" sz="1600" b="0" i="0" u="none" strike="noStrike" dirty="0">
+                <a:solidFill>
+                  <a:srgbClr val="383A42"/>
+                </a:solidFill>
+                <a:effectLst/>
+                <a:latin typeface="Consolas" panose="020B0609020204030204" pitchFamily="49" charset="0"/>
+              </a:rPr>
+              <a:t>;        </a:t>
+            </a:r>
+            <a:r>
+              <a:rPr lang="en-US" altLang="ko-KR" sz="1600" b="0" i="1" u="none" strike="noStrike" dirty="0">
+                <a:solidFill>
+                  <a:srgbClr val="A0A1A7"/>
+                </a:solidFill>
+                <a:effectLst/>
+                <a:latin typeface="Consolas" panose="020B0609020204030204" pitchFamily="49" charset="0"/>
+              </a:rPr>
+              <a:t>// </a:t>
+            </a:r>
+            <a:r>
+              <a:rPr lang="ko-KR" altLang="en-US" sz="1600" b="0" i="1" u="none" strike="noStrike" dirty="0" err="1">
+                <a:solidFill>
+                  <a:srgbClr val="A0A1A7"/>
+                </a:solidFill>
+                <a:effectLst/>
+                <a:latin typeface="Consolas" panose="020B0609020204030204" pitchFamily="49" charset="0"/>
+              </a:rPr>
+              <a:t>널문자</a:t>
+            </a:r>
+            <a:r>
+              <a:rPr lang="ko-KR" altLang="en-US" sz="1600" b="0" i="1" u="none" strike="noStrike" dirty="0">
+                <a:solidFill>
+                  <a:srgbClr val="A0A1A7"/>
+                </a:solidFill>
+                <a:effectLst/>
+                <a:latin typeface="Consolas" panose="020B0609020204030204" pitchFamily="49" charset="0"/>
+              </a:rPr>
+              <a:t> 저장 공간을 위해 </a:t>
+            </a:r>
+            <a:r>
+              <a:rPr lang="en-US" altLang="ko-KR" sz="1600" b="0" i="1" u="none" strike="noStrike" dirty="0">
+                <a:solidFill>
+                  <a:srgbClr val="A0A1A7"/>
+                </a:solidFill>
+                <a:effectLst/>
+                <a:latin typeface="Consolas" panose="020B0609020204030204" pitchFamily="49" charset="0"/>
+              </a:rPr>
+              <a:t>1 </a:t>
+            </a:r>
+            <a:r>
+              <a:rPr lang="ko-KR" altLang="en-US" sz="1600" b="0" i="1" u="none" strike="noStrike" dirty="0">
+                <a:solidFill>
+                  <a:srgbClr val="A0A1A7"/>
+                </a:solidFill>
+                <a:effectLst/>
+                <a:latin typeface="Consolas" panose="020B0609020204030204" pitchFamily="49" charset="0"/>
+              </a:rPr>
+              <a:t>감소</a:t>
+            </a:r>
+            <a:r>
+              <a:rPr lang="en-US" altLang="ko-KR" sz="1600" b="0" i="1" u="none" strike="noStrike" dirty="0">
+                <a:solidFill>
+                  <a:srgbClr val="A0A1A7"/>
+                </a:solidFill>
+                <a:effectLst/>
+                <a:latin typeface="Consolas" panose="020B0609020204030204" pitchFamily="49" charset="0"/>
+              </a:rPr>
+              <a:t>.</a:t>
+            </a:r>
+            <a:br>
+              <a:rPr lang="ko-KR" altLang="en-US" sz="1600" b="0" i="0" u="none" strike="noStrike" dirty="0">
+                <a:solidFill>
+                  <a:srgbClr val="383A42"/>
+                </a:solidFill>
+                <a:effectLst/>
+                <a:latin typeface="Consolas" panose="020B0609020204030204" pitchFamily="49" charset="0"/>
+              </a:rPr>
+            </a:br>
+            <a:r>
+              <a:rPr lang="ko-KR" altLang="en-US" sz="1600" b="0" i="0" u="none" strike="noStrike" dirty="0">
+                <a:solidFill>
+                  <a:srgbClr val="383A42"/>
+                </a:solidFill>
+                <a:effectLst/>
+                <a:latin typeface="Consolas" panose="020B0609020204030204" pitchFamily="49" charset="0"/>
+              </a:rPr>
+              <a:t>    </a:t>
+            </a:r>
+            <a:r>
+              <a:rPr lang="en-US" altLang="ko-KR" sz="1600" b="0" i="0" u="none" strike="noStrike" dirty="0">
+                <a:solidFill>
+                  <a:srgbClr val="A626A4"/>
+                </a:solidFill>
+                <a:effectLst/>
+                <a:latin typeface="Consolas" panose="020B0609020204030204" pitchFamily="49" charset="0"/>
+              </a:rPr>
+              <a:t>for</a:t>
+            </a:r>
+            <a:r>
+              <a:rPr lang="en-US" altLang="ko-KR" sz="2000" b="1" i="0" u="none" strike="noStrike" dirty="0">
+                <a:solidFill>
+                  <a:srgbClr val="383A42"/>
+                </a:solidFill>
+                <a:effectLst/>
+                <a:latin typeface="Consolas" panose="020B0609020204030204" pitchFamily="49" charset="0"/>
+              </a:rPr>
+              <a:t>(;</a:t>
+            </a:r>
+            <a:r>
+              <a:rPr lang="en-US" altLang="ko-KR" sz="2000" b="1" i="0" u="none" strike="noStrike" dirty="0">
+                <a:solidFill>
+                  <a:srgbClr val="50A14F"/>
+                </a:solidFill>
+                <a:effectLst/>
+                <a:latin typeface="Consolas" panose="020B0609020204030204" pitchFamily="49" charset="0"/>
+              </a:rPr>
+              <a:t>'\0'</a:t>
+            </a:r>
+            <a:r>
+              <a:rPr lang="en-US" altLang="ko-KR" sz="2000" b="1" i="0" u="none" strike="noStrike" dirty="0">
+                <a:solidFill>
+                  <a:srgbClr val="383A42"/>
+                </a:solidFill>
+                <a:effectLst/>
+                <a:latin typeface="Consolas" panose="020B0609020204030204" pitchFamily="49" charset="0"/>
+              </a:rPr>
+              <a:t> != </a:t>
+            </a:r>
+            <a:r>
+              <a:rPr lang="en-US" altLang="ko-KR" sz="2000" b="1" i="0" u="none" strike="noStrike" dirty="0" err="1">
+                <a:solidFill>
+                  <a:srgbClr val="383A42"/>
+                </a:solidFill>
+                <a:effectLst/>
+                <a:latin typeface="Consolas" panose="020B0609020204030204" pitchFamily="49" charset="0"/>
+              </a:rPr>
+              <a:t>src</a:t>
+            </a:r>
+            <a:r>
+              <a:rPr lang="en-US" altLang="ko-KR" sz="2000" b="1" i="0" u="none" strike="noStrike" dirty="0">
+                <a:solidFill>
+                  <a:srgbClr val="383A42"/>
+                </a:solidFill>
+                <a:effectLst/>
+                <a:latin typeface="Consolas" panose="020B0609020204030204" pitchFamily="49" charset="0"/>
+              </a:rPr>
+              <a:t>[n] &amp;&amp; </a:t>
+            </a:r>
+            <a:r>
+              <a:rPr lang="en-US" altLang="ko-KR" sz="2000" b="1" i="0" u="none" strike="noStrike" dirty="0">
+                <a:solidFill>
+                  <a:srgbClr val="986801"/>
+                </a:solidFill>
+                <a:effectLst/>
+                <a:latin typeface="Consolas" panose="020B0609020204030204" pitchFamily="49" charset="0"/>
+              </a:rPr>
+              <a:t>0</a:t>
+            </a:r>
+            <a:r>
+              <a:rPr lang="en-US" altLang="ko-KR" sz="2000" b="1" i="0" u="none" strike="noStrike" dirty="0">
+                <a:solidFill>
+                  <a:srgbClr val="383A42"/>
+                </a:solidFill>
+                <a:effectLst/>
+                <a:latin typeface="Consolas" panose="020B0609020204030204" pitchFamily="49" charset="0"/>
+              </a:rPr>
+              <a:t>&lt;</a:t>
+            </a:r>
+            <a:r>
+              <a:rPr lang="en-US" altLang="ko-KR" sz="2000" b="1" i="0" u="none" strike="noStrike" dirty="0" err="1">
+                <a:solidFill>
+                  <a:srgbClr val="383A42"/>
+                </a:solidFill>
+                <a:effectLst/>
+                <a:latin typeface="Consolas" panose="020B0609020204030204" pitchFamily="49" charset="0"/>
+              </a:rPr>
+              <a:t>dest_size</a:t>
+            </a:r>
+            <a:r>
+              <a:rPr lang="en-US" altLang="ko-KR" sz="2000" b="1" i="0" u="none" strike="noStrike" dirty="0">
+                <a:solidFill>
+                  <a:srgbClr val="383A42"/>
+                </a:solidFill>
+                <a:effectLst/>
+                <a:latin typeface="Consolas" panose="020B0609020204030204" pitchFamily="49" charset="0"/>
+              </a:rPr>
+              <a:t>; ++n, --</a:t>
+            </a:r>
+            <a:r>
+              <a:rPr lang="en-US" altLang="ko-KR" sz="2000" b="1" i="0" u="none" strike="noStrike" dirty="0" err="1">
+                <a:solidFill>
+                  <a:srgbClr val="383A42"/>
+                </a:solidFill>
+                <a:effectLst/>
+                <a:latin typeface="Consolas" panose="020B0609020204030204" pitchFamily="49" charset="0"/>
+              </a:rPr>
+              <a:t>dest_size</a:t>
+            </a:r>
+            <a:r>
+              <a:rPr lang="en-US" altLang="ko-KR" sz="1600" b="0" i="0" u="none" strike="noStrike" dirty="0">
+                <a:solidFill>
+                  <a:srgbClr val="383A42"/>
+                </a:solidFill>
+                <a:effectLst/>
+                <a:latin typeface="Consolas" panose="020B0609020204030204" pitchFamily="49" charset="0"/>
+              </a:rPr>
+              <a:t>)</a:t>
+            </a:r>
+            <a:br>
+              <a:rPr lang="en-US" altLang="ko-KR" sz="1600" b="0" i="0" u="none" strike="noStrike" dirty="0">
+                <a:solidFill>
+                  <a:srgbClr val="383A42"/>
+                </a:solidFill>
+                <a:effectLst/>
+                <a:latin typeface="Consolas" panose="020B0609020204030204" pitchFamily="49" charset="0"/>
+              </a:rPr>
+            </a:br>
+            <a:r>
+              <a:rPr lang="en-US" altLang="ko-KR" sz="1600" b="0" i="0" u="none" strike="noStrike" dirty="0">
+                <a:solidFill>
+                  <a:srgbClr val="383A42"/>
+                </a:solidFill>
+                <a:effectLst/>
+                <a:latin typeface="Consolas" panose="020B0609020204030204" pitchFamily="49" charset="0"/>
+              </a:rPr>
+              <a:t>    {</a:t>
+            </a:r>
+            <a:br>
+              <a:rPr lang="en-US" altLang="ko-KR" sz="1600" b="0" i="0" u="none" strike="noStrike" dirty="0">
+                <a:solidFill>
+                  <a:srgbClr val="383A42"/>
+                </a:solidFill>
+                <a:effectLst/>
+                <a:latin typeface="Consolas" panose="020B0609020204030204" pitchFamily="49" charset="0"/>
+              </a:rPr>
+            </a:br>
+            <a:r>
+              <a:rPr lang="en-US" altLang="ko-KR" sz="1600" b="0" i="0" u="none" strike="noStrike" dirty="0">
+                <a:solidFill>
+                  <a:srgbClr val="383A42"/>
+                </a:solidFill>
+                <a:effectLst/>
+                <a:latin typeface="Consolas" panose="020B0609020204030204" pitchFamily="49" charset="0"/>
+              </a:rPr>
+              <a:t>        </a:t>
+            </a:r>
+            <a:r>
+              <a:rPr lang="en-US" altLang="ko-KR" sz="1600" b="0" i="0" u="none" strike="noStrike" dirty="0" err="1">
+                <a:solidFill>
+                  <a:srgbClr val="383A42"/>
+                </a:solidFill>
+                <a:effectLst/>
+                <a:latin typeface="Consolas" panose="020B0609020204030204" pitchFamily="49" charset="0"/>
+              </a:rPr>
+              <a:t>dst</a:t>
+            </a:r>
+            <a:r>
+              <a:rPr lang="en-US" altLang="ko-KR" sz="1600" b="0" i="0" u="none" strike="noStrike" dirty="0">
+                <a:solidFill>
+                  <a:srgbClr val="383A42"/>
+                </a:solidFill>
+                <a:effectLst/>
+                <a:latin typeface="Consolas" panose="020B0609020204030204" pitchFamily="49" charset="0"/>
+              </a:rPr>
+              <a:t>[n] = </a:t>
+            </a:r>
+            <a:r>
+              <a:rPr lang="en-US" altLang="ko-KR" sz="1600" b="0" i="0" u="none" strike="noStrike" dirty="0" err="1">
+                <a:solidFill>
+                  <a:srgbClr val="383A42"/>
+                </a:solidFill>
+                <a:effectLst/>
+                <a:latin typeface="Consolas" panose="020B0609020204030204" pitchFamily="49" charset="0"/>
+              </a:rPr>
+              <a:t>src</a:t>
+            </a:r>
+            <a:r>
+              <a:rPr lang="en-US" altLang="ko-KR" sz="1600" b="0" i="0" u="none" strike="noStrike" dirty="0">
+                <a:solidFill>
+                  <a:srgbClr val="383A42"/>
+                </a:solidFill>
+                <a:effectLst/>
+                <a:latin typeface="Consolas" panose="020B0609020204030204" pitchFamily="49" charset="0"/>
+              </a:rPr>
+              <a:t>[n];</a:t>
+            </a:r>
+            <a:br>
+              <a:rPr lang="en-US" altLang="ko-KR" sz="1600" b="0" i="0" u="none" strike="noStrike" dirty="0">
+                <a:solidFill>
+                  <a:srgbClr val="383A42"/>
+                </a:solidFill>
+                <a:effectLst/>
+                <a:latin typeface="Consolas" panose="020B0609020204030204" pitchFamily="49" charset="0"/>
+              </a:rPr>
+            </a:br>
+            <a:r>
+              <a:rPr lang="en-US" altLang="ko-KR" sz="1600" b="0" i="0" u="none" strike="noStrike" dirty="0">
+                <a:solidFill>
+                  <a:srgbClr val="383A42"/>
+                </a:solidFill>
+                <a:effectLst/>
+                <a:latin typeface="Consolas" panose="020B0609020204030204" pitchFamily="49" charset="0"/>
+              </a:rPr>
+              <a:t>    }</a:t>
+            </a:r>
+            <a:br>
+              <a:rPr lang="en-US" altLang="ko-KR" sz="1600" b="0" i="0" u="none" strike="noStrike" dirty="0">
+                <a:solidFill>
+                  <a:srgbClr val="383A42"/>
+                </a:solidFill>
+                <a:effectLst/>
+                <a:latin typeface="Consolas" panose="020B0609020204030204" pitchFamily="49" charset="0"/>
+              </a:rPr>
+            </a:br>
+            <a:r>
+              <a:rPr lang="en-US" altLang="ko-KR" sz="1600" b="0" i="0" u="none" strike="noStrike" dirty="0">
+                <a:solidFill>
+                  <a:srgbClr val="383A42"/>
+                </a:solidFill>
+                <a:effectLst/>
+                <a:latin typeface="Consolas" panose="020B0609020204030204" pitchFamily="49" charset="0"/>
+              </a:rPr>
+              <a:t>    </a:t>
+            </a:r>
+            <a:r>
+              <a:rPr lang="en-US" altLang="ko-KR" sz="1600" b="0" i="0" u="none" strike="noStrike" dirty="0" err="1">
+                <a:solidFill>
+                  <a:srgbClr val="383A42"/>
+                </a:solidFill>
+                <a:effectLst/>
+                <a:latin typeface="Consolas" panose="020B0609020204030204" pitchFamily="49" charset="0"/>
+              </a:rPr>
+              <a:t>dst</a:t>
+            </a:r>
+            <a:r>
+              <a:rPr lang="en-US" altLang="ko-KR" sz="1600" b="0" i="0" u="none" strike="noStrike" dirty="0">
+                <a:solidFill>
+                  <a:srgbClr val="383A42"/>
+                </a:solidFill>
+                <a:effectLst/>
+                <a:latin typeface="Consolas" panose="020B0609020204030204" pitchFamily="49" charset="0"/>
+              </a:rPr>
+              <a:t>[n] = </a:t>
+            </a:r>
+            <a:r>
+              <a:rPr lang="en-US" altLang="ko-KR" sz="1600" b="0" i="0" u="none" strike="noStrike" dirty="0">
+                <a:solidFill>
+                  <a:srgbClr val="50A14F"/>
+                </a:solidFill>
+                <a:effectLst/>
+                <a:latin typeface="Consolas" panose="020B0609020204030204" pitchFamily="49" charset="0"/>
+              </a:rPr>
+              <a:t>'\0'</a:t>
+            </a:r>
+            <a:r>
+              <a:rPr lang="en-US" altLang="ko-KR" sz="1600" b="0" i="0" u="none" strike="noStrike" dirty="0">
+                <a:solidFill>
+                  <a:srgbClr val="383A42"/>
+                </a:solidFill>
+                <a:effectLst/>
+                <a:latin typeface="Consolas" panose="020B0609020204030204" pitchFamily="49" charset="0"/>
+              </a:rPr>
+              <a:t>;</a:t>
+            </a:r>
+            <a:r>
+              <a:rPr lang="en-US" altLang="ko-KR" sz="1600" dirty="0">
+                <a:solidFill>
+                  <a:srgbClr val="383A42"/>
+                </a:solidFill>
+                <a:latin typeface="Consolas" panose="020B0609020204030204" pitchFamily="49" charset="0"/>
+              </a:rPr>
+              <a:t>      </a:t>
+            </a:r>
+            <a:r>
+              <a:rPr lang="en-US" altLang="ko-KR" sz="1600" i="1" dirty="0">
+                <a:solidFill>
+                  <a:srgbClr val="A0A1A7"/>
+                </a:solidFill>
+                <a:latin typeface="Consolas" panose="020B0609020204030204" pitchFamily="49" charset="0"/>
+              </a:rPr>
+              <a:t>// </a:t>
+            </a:r>
+            <a:r>
+              <a:rPr lang="ko-KR" altLang="en-US" sz="1600" i="1" dirty="0" err="1">
+                <a:solidFill>
+                  <a:srgbClr val="A0A1A7"/>
+                </a:solidFill>
+                <a:latin typeface="Consolas" panose="020B0609020204030204" pitchFamily="49" charset="0"/>
+              </a:rPr>
+              <a:t>널문자</a:t>
+            </a:r>
+            <a:r>
+              <a:rPr lang="ko-KR" altLang="en-US" sz="1600" i="1" dirty="0">
+                <a:solidFill>
+                  <a:srgbClr val="A0A1A7"/>
+                </a:solidFill>
+                <a:latin typeface="Consolas" panose="020B0609020204030204" pitchFamily="49" charset="0"/>
+              </a:rPr>
+              <a:t> 저장</a:t>
+            </a:r>
+            <a:r>
+              <a:rPr lang="en-US" altLang="ko-KR" sz="1600" i="1" dirty="0">
+                <a:solidFill>
+                  <a:srgbClr val="A0A1A7"/>
+                </a:solidFill>
+                <a:latin typeface="Consolas" panose="020B0609020204030204" pitchFamily="49" charset="0"/>
+              </a:rPr>
+              <a:t>.</a:t>
+            </a:r>
+            <a:br>
+              <a:rPr lang="en-US" altLang="ko-KR" sz="1600" b="0" i="0" u="none" strike="noStrike" dirty="0">
+                <a:solidFill>
+                  <a:srgbClr val="383A42"/>
+                </a:solidFill>
+                <a:effectLst/>
+                <a:latin typeface="Consolas" panose="020B0609020204030204" pitchFamily="49" charset="0"/>
+              </a:rPr>
+            </a:br>
+            <a:r>
+              <a:rPr lang="en-US" altLang="ko-KR" sz="1600" b="0" i="0" u="none" strike="noStrike" dirty="0">
+                <a:solidFill>
+                  <a:srgbClr val="383A42"/>
+                </a:solidFill>
+                <a:effectLst/>
+                <a:latin typeface="Consolas" panose="020B0609020204030204" pitchFamily="49" charset="0"/>
+              </a:rPr>
+              <a:t>    </a:t>
+            </a:r>
+            <a:r>
+              <a:rPr lang="en-US" altLang="ko-KR" sz="1600" b="0" i="0" u="none" strike="noStrike" dirty="0">
+                <a:solidFill>
+                  <a:srgbClr val="A626A4"/>
+                </a:solidFill>
+                <a:effectLst/>
+                <a:latin typeface="Consolas" panose="020B0609020204030204" pitchFamily="49" charset="0"/>
+              </a:rPr>
+              <a:t>return</a:t>
+            </a:r>
+            <a:r>
+              <a:rPr lang="en-US" altLang="ko-KR" sz="1600" b="0" i="0" u="none" strike="noStrike" dirty="0">
+                <a:solidFill>
+                  <a:srgbClr val="383A42"/>
+                </a:solidFill>
+                <a:effectLst/>
+                <a:latin typeface="Consolas" panose="020B0609020204030204" pitchFamily="49" charset="0"/>
+              </a:rPr>
+              <a:t> n;</a:t>
+            </a:r>
+            <a:br>
+              <a:rPr lang="en-US" altLang="ko-KR" sz="1600" b="0" i="0" u="none" strike="noStrike" dirty="0">
+                <a:solidFill>
+                  <a:srgbClr val="383A42"/>
+                </a:solidFill>
+                <a:effectLst/>
+                <a:latin typeface="Consolas" panose="020B0609020204030204" pitchFamily="49" charset="0"/>
+              </a:rPr>
+            </a:br>
+            <a:r>
+              <a:rPr lang="en-US" altLang="ko-KR" sz="1600" b="0" i="0" u="none" strike="noStrike" dirty="0">
+                <a:solidFill>
+                  <a:srgbClr val="383A42"/>
+                </a:solidFill>
+                <a:effectLst/>
+                <a:latin typeface="Consolas" panose="020B0609020204030204" pitchFamily="49" charset="0"/>
+              </a:rPr>
+              <a:t>}</a:t>
+            </a:r>
+            <a:endParaRPr lang="ko-KR" altLang="en-US" sz="1600" dirty="0"/>
+          </a:p>
+        </p:txBody>
+      </p:sp>
+    </p:spTree>
+    <p:extLst>
+      <p:ext uri="{BB962C8B-B14F-4D97-AF65-F5344CB8AC3E}">
+        <p14:creationId xmlns:p14="http://schemas.microsoft.com/office/powerpoint/2010/main" val="3781586448"/>
+      </p:ext>
+    </p:extLst>
+  </p:cSld>
+  <p:clrMapOvr>
+    <a:masterClrMapping/>
+  </p:clrMapOvr>
+</p:sld>
+</file>
+
+<file path=ppt/slides/slide41.xml><?xml version="1.0" encoding="utf-8"?>
 <p:sld xmlns:a="http://schemas.openxmlformats.org/drawingml/2006/main" xmlns:r="http://schemas.openxmlformats.org/officeDocument/2006/relationships" xmlns:p="http://schemas.openxmlformats.org/presentationml/2006/main">
   <p:cSld>
     <p:spTree>
@@ -37517,7 +38090,7 @@
 </p:sld>
 </file>
 
-<file path=ppt/slides/slide41.xml><?xml version="1.0" encoding="utf-8"?>
+<file path=ppt/slides/slide42.xml><?xml version="1.0" encoding="utf-8"?>
 <p:sld xmlns:a="http://schemas.openxmlformats.org/drawingml/2006/main" xmlns:r="http://schemas.openxmlformats.org/officeDocument/2006/relationships" xmlns:p="http://schemas.openxmlformats.org/presentationml/2006/main">
   <p:cSld>
     <p:spTree>
@@ -37762,7 +38335,7 @@
 </p:sld>
 </file>
 
-<file path=ppt/slides/slide42.xml><?xml version="1.0" encoding="utf-8"?>
+<file path=ppt/slides/slide43.xml><?xml version="1.0" encoding="utf-8"?>
 <p:sld xmlns:a="http://schemas.openxmlformats.org/drawingml/2006/main" xmlns:r="http://schemas.openxmlformats.org/officeDocument/2006/relationships" xmlns:p="http://schemas.openxmlformats.org/presentationml/2006/main">
   <p:cSld>
     <p:spTree>
@@ -38210,7 +38783,7 @@
 </p:sld>
 </file>
 
-<file path=ppt/slides/slide43.xml><?xml version="1.0" encoding="utf-8"?>
+<file path=ppt/slides/slide44.xml><?xml version="1.0" encoding="utf-8"?>
 <p:sld xmlns:a="http://schemas.openxmlformats.org/drawingml/2006/main" xmlns:r="http://schemas.openxmlformats.org/officeDocument/2006/relationships" xmlns:p="http://schemas.openxmlformats.org/presentationml/2006/main">
   <p:cSld>
     <p:spTree>
@@ -38535,7 +39108,7 @@
 </p:sld>
 </file>
 
-<file path=ppt/slides/slide44.xml><?xml version="1.0" encoding="utf-8"?>
+<file path=ppt/slides/slide45.xml><?xml version="1.0" encoding="utf-8"?>
 <p:sld xmlns:a="http://schemas.openxmlformats.org/drawingml/2006/main" xmlns:r="http://schemas.openxmlformats.org/officeDocument/2006/relationships" xmlns:p="http://schemas.openxmlformats.org/presentationml/2006/main">
   <p:cSld>
     <p:spTree>
@@ -39030,14 +39603,16 @@
                 <a:solidFill>
                   <a:srgbClr val="0000FF"/>
                 </a:solidFill>
-              </a:rPr>
-              <a:t>&amp;[0]</a:t>
+                <a:latin typeface="Consolas" panose="020B0609020204030204" pitchFamily="49" charset="0"/>
+              </a:rPr>
+              <a:t>&amp;</a:t>
             </a:r>
             <a:r>
               <a:rPr lang="en-US" altLang="ko-KR" sz="2000" dirty="0" err="1">
                 <a:solidFill>
                   <a:srgbClr val="0000FF"/>
                 </a:solidFill>
+                <a:latin typeface="Consolas" panose="020B0609020204030204" pitchFamily="49" charset="0"/>
               </a:rPr>
               <a:t>arrayVal</a:t>
             </a:r>
@@ -39046,8 +39621,9 @@
                 <a:solidFill>
                   <a:srgbClr val="0000FF"/>
                 </a:solidFill>
-              </a:rPr>
-              <a:t>;</a:t>
+                <a:latin typeface="Consolas" panose="020B0609020204030204" pitchFamily="49" charset="0"/>
+              </a:rPr>
+              <a:t>[0];</a:t>
             </a:r>
           </a:p>
           <a:p>

--- a/ppt/08.C언어-배열과문자열.pptx
+++ b/ppt/08.C언어-배열과문자열.pptx
@@ -5,7 +5,7 @@
     <p:sldMasterId id="2147483648" r:id="rId1"/>
   </p:sldMasterIdLst>
   <p:notesMasterIdLst>
-    <p:notesMasterId r:id="rId47"/>
+    <p:notesMasterId r:id="rId46"/>
   </p:notesMasterIdLst>
   <p:sldIdLst>
     <p:sldId id="272" r:id="rId2"/>
@@ -38,44 +38,48 @@
     <p:sldId id="332" r:id="rId29"/>
     <p:sldId id="333" r:id="rId30"/>
     <p:sldId id="334" r:id="rId31"/>
-    <p:sldId id="335" r:id="rId32"/>
-    <p:sldId id="336" r:id="rId33"/>
-    <p:sldId id="337" r:id="rId34"/>
-    <p:sldId id="338" r:id="rId35"/>
-    <p:sldId id="339" r:id="rId36"/>
-    <p:sldId id="349" r:id="rId37"/>
-    <p:sldId id="340" r:id="rId38"/>
-    <p:sldId id="341" r:id="rId39"/>
-    <p:sldId id="342" r:id="rId40"/>
-    <p:sldId id="343" r:id="rId41"/>
-    <p:sldId id="344" r:id="rId42"/>
-    <p:sldId id="345" r:id="rId43"/>
-    <p:sldId id="346" r:id="rId44"/>
-    <p:sldId id="347" r:id="rId45"/>
-    <p:sldId id="348" r:id="rId46"/>
+    <p:sldId id="336" r:id="rId32"/>
+    <p:sldId id="337" r:id="rId33"/>
+    <p:sldId id="338" r:id="rId34"/>
+    <p:sldId id="339" r:id="rId35"/>
+    <p:sldId id="349" r:id="rId36"/>
+    <p:sldId id="340" r:id="rId37"/>
+    <p:sldId id="341" r:id="rId38"/>
+    <p:sldId id="342" r:id="rId39"/>
+    <p:sldId id="343" r:id="rId40"/>
+    <p:sldId id="344" r:id="rId41"/>
+    <p:sldId id="345" r:id="rId42"/>
+    <p:sldId id="346" r:id="rId43"/>
+    <p:sldId id="347" r:id="rId44"/>
+    <p:sldId id="348" r:id="rId45"/>
   </p:sldIdLst>
   <p:sldSz cx="9144000" cy="6858000" type="screen4x3"/>
   <p:notesSz cx="6858000" cy="9144000"/>
   <p:embeddedFontLst>
     <p:embeddedFont>
       <p:font typeface="Consolas" panose="020B0609020204030204" pitchFamily="49" charset="0"/>
-      <p:regular r:id="rId48"/>
-      <p:bold r:id="rId49"/>
-      <p:italic r:id="rId50"/>
-      <p:boldItalic r:id="rId51"/>
+      <p:regular r:id="rId47"/>
+      <p:bold r:id="rId48"/>
+      <p:italic r:id="rId49"/>
+      <p:boldItalic r:id="rId50"/>
     </p:embeddedFont>
     <p:embeddedFont>
       <p:font typeface="HY견고딕" panose="02030600000101010101" pitchFamily="18" charset="-127"/>
+      <p:regular r:id="rId51"/>
+    </p:embeddedFont>
+    <p:embeddedFont>
+      <p:font typeface="가을체" panose="02030600000101010101" pitchFamily="18" charset="-127"/>
       <p:regular r:id="rId52"/>
     </p:embeddedFont>
     <p:embeddedFont>
-      <p:font typeface="가을체" panose="02030600000101010101" pitchFamily="18" charset="-127"/>
+      <p:font typeface="나눔바른고딕" panose="020B0603020101020101" pitchFamily="50" charset="-127"/>
       <p:regular r:id="rId53"/>
+      <p:bold r:id="rId54"/>
     </p:embeddedFont>
     <p:embeddedFont>
       <p:font typeface="맑은 고딕" panose="020B0503020000020004" pitchFamily="50" charset="-127"/>
-      <p:regular r:id="rId54"/>
-      <p:bold r:id="rId55"/>
+      <p:regular r:id="rId55"/>
+      <p:bold r:id="rId56"/>
     </p:embeddedFont>
   </p:embeddedFontLst>
   <p:defaultTextStyle>
@@ -1491,9 +1495,11 @@
           <a:bodyPr/>
           <a:lstStyle>
             <a:lvl1pPr>
+              <a:buSzPct val="80000"/>
               <a:defRPr b="1"/>
             </a:lvl1pPr>
             <a:lvl2pPr>
+              <a:buSzPct val="60000"/>
               <a:defRPr b="1"/>
             </a:lvl2pPr>
             <a:lvl3pPr>
@@ -4000,22 +4006,21 @@
           <a:lstStyle/>
           <a:p>
             <a:r>
-              <a:rPr lang="en-US" altLang="ko-KR" b="0" dirty="0"/>
+              <a:rPr lang="en-US" altLang="ko-KR" dirty="0"/>
               <a:t>8.1.5 1</a:t>
             </a:r>
             <a:r>
-              <a:rPr lang="ko-KR" altLang="en-US" b="0" dirty="0"/>
+              <a:rPr lang="ko-KR" altLang="en-US" dirty="0"/>
               <a:t>차원 배열의 최대값 </a:t>
             </a:r>
             <a:r>
-              <a:rPr lang="en-US" altLang="ko-KR" b="0" dirty="0"/>
+              <a:rPr lang="en-US" altLang="ko-KR" dirty="0"/>
               <a:t>/ </a:t>
             </a:r>
             <a:r>
-              <a:rPr lang="ko-KR" altLang="en-US" b="0" dirty="0"/>
+              <a:rPr lang="ko-KR" altLang="en-US" dirty="0"/>
               <a:t>최소값 찾기</a:t>
             </a:r>
-            <a:endParaRPr lang="ko-KR" altLang="en-US" dirty="0"/>
           </a:p>
         </p:txBody>
       </p:sp>
@@ -4078,10 +4083,9 @@
               <a:defRPr/>
             </a:pPr>
             <a:r>
-              <a:rPr lang="ko-KR" altLang="en-US"/>
+              <a:rPr lang="ko-KR" altLang="en-US" dirty="0"/>
               <a:t>게임 프로그래밍 교육과정</a:t>
             </a:r>
-            <a:endParaRPr lang="ko-KR" altLang="en-US" dirty="0"/>
           </a:p>
         </p:txBody>
       </p:sp>
@@ -4171,27 +4175,7 @@
                 <a:effectLst/>
                 <a:latin typeface="Consolas" panose="020B0609020204030204" pitchFamily="49" charset="0"/>
               </a:rPr>
-              <a:t>&lt;</a:t>
-            </a:r>
-            <a:r>
-              <a:rPr lang="en-US" altLang="ko-KR" sz="1200" b="0" i="0" u="none" strike="noStrike" dirty="0" err="1">
-                <a:solidFill>
-                  <a:srgbClr val="50A14F"/>
-                </a:solidFill>
-                <a:effectLst/>
-                <a:latin typeface="Consolas" panose="020B0609020204030204" pitchFamily="49" charset="0"/>
-              </a:rPr>
-              <a:t>stdlib.h</a:t>
-            </a:r>
-            <a:r>
-              <a:rPr lang="en-US" altLang="ko-KR" sz="1200" b="0" i="0" u="none" strike="noStrike" dirty="0">
-                <a:solidFill>
-                  <a:srgbClr val="50A14F"/>
-                </a:solidFill>
-                <a:effectLst/>
-                <a:latin typeface="Consolas" panose="020B0609020204030204" pitchFamily="49" charset="0"/>
-              </a:rPr>
-              <a:t>&gt;</a:t>
+              <a:t>&lt;stdlib.h&gt;</a:t>
             </a:r>
             <a:br>
               <a:rPr lang="en-US" altLang="ko-KR" sz="1200" b="0" i="0" u="none" strike="noStrike" dirty="0">
@@ -4566,27 +4550,7 @@
                 <a:effectLst/>
                 <a:latin typeface="Consolas" panose="020B0609020204030204" pitchFamily="49" charset="0"/>
               </a:rPr>
-              <a:t> </a:t>
-            </a:r>
-            <a:r>
-              <a:rPr lang="en-US" altLang="ko-KR" sz="1200" b="0" i="0" u="none" strike="noStrike" dirty="0" err="1">
-                <a:solidFill>
-                  <a:srgbClr val="383A42"/>
-                </a:solidFill>
-                <a:effectLst/>
-                <a:latin typeface="Consolas" panose="020B0609020204030204" pitchFamily="49" charset="0"/>
-              </a:rPr>
-              <a:t>arr_count</a:t>
-            </a:r>
-            <a:r>
-              <a:rPr lang="en-US" altLang="ko-KR" sz="1200" b="0" i="0" u="none" strike="noStrike" dirty="0">
-                <a:solidFill>
-                  <a:srgbClr val="383A42"/>
-                </a:solidFill>
-                <a:effectLst/>
-                <a:latin typeface="Consolas" panose="020B0609020204030204" pitchFamily="49" charset="0"/>
-              </a:rPr>
-              <a:t> = </a:t>
+              <a:t> arr_count = </a:t>
             </a:r>
             <a:r>
               <a:rPr lang="en-US" altLang="ko-KR" sz="1200" b="0" i="0" u="none" strike="noStrike" dirty="0">
@@ -4782,27 +4746,7 @@
                 <a:effectLst/>
                 <a:latin typeface="Consolas" panose="020B0609020204030204" pitchFamily="49" charset="0"/>
               </a:rPr>
-              <a:t>; i &lt; </a:t>
-            </a:r>
-            <a:r>
-              <a:rPr lang="en-US" altLang="ko-KR" sz="1200" b="0" i="0" u="none" strike="noStrike" dirty="0" err="1">
-                <a:solidFill>
-                  <a:srgbClr val="383A42"/>
-                </a:solidFill>
-                <a:effectLst/>
-                <a:latin typeface="Consolas" panose="020B0609020204030204" pitchFamily="49" charset="0"/>
-              </a:rPr>
-              <a:t>arr_count</a:t>
-            </a:r>
-            <a:r>
-              <a:rPr lang="en-US" altLang="ko-KR" sz="1200" b="0" i="0" u="none" strike="noStrike" dirty="0">
-                <a:solidFill>
-                  <a:srgbClr val="383A42"/>
-                </a:solidFill>
-                <a:effectLst/>
-                <a:latin typeface="Consolas" panose="020B0609020204030204" pitchFamily="49" charset="0"/>
-              </a:rPr>
-              <a:t>; ++i)</a:t>
+              <a:t>; i &lt; arr_count; ++i)</a:t>
             </a:r>
             <a:br>
               <a:rPr lang="en-US" altLang="ko-KR" sz="1200" b="0" i="0" u="none" strike="noStrike" dirty="0">
@@ -5167,27 +5111,7 @@
                 <a:effectLst/>
                 <a:latin typeface="Consolas" panose="020B0609020204030204" pitchFamily="49" charset="0"/>
               </a:rPr>
-              <a:t>; i &lt; </a:t>
-            </a:r>
-            <a:r>
-              <a:rPr lang="en-US" altLang="ko-KR" sz="1200" b="1" i="0" u="none" strike="noStrike" dirty="0" err="1">
-                <a:solidFill>
-                  <a:srgbClr val="383A42"/>
-                </a:solidFill>
-                <a:effectLst/>
-                <a:latin typeface="Consolas" panose="020B0609020204030204" pitchFamily="49" charset="0"/>
-              </a:rPr>
-              <a:t>arr_count</a:t>
-            </a:r>
-            <a:r>
-              <a:rPr lang="en-US" altLang="ko-KR" sz="1200" b="1" i="0" u="none" strike="noStrike" dirty="0">
-                <a:solidFill>
-                  <a:srgbClr val="383A42"/>
-                </a:solidFill>
-                <a:effectLst/>
-                <a:latin typeface="Consolas" panose="020B0609020204030204" pitchFamily="49" charset="0"/>
-              </a:rPr>
-              <a:t>; ++i)</a:t>
+              <a:t>; i &lt; arr_count; ++i)</a:t>
             </a:r>
             <a:br>
               <a:rPr lang="en-US" altLang="ko-KR" sz="1200" b="1" i="0" u="none" strike="noStrike" dirty="0">
@@ -5719,14 +5643,13 @@
           <a:lstStyle/>
           <a:p>
             <a:r>
-              <a:rPr lang="en-US" altLang="ko-KR" b="0" dirty="0"/>
+              <a:rPr lang="en-US" altLang="ko-KR" dirty="0"/>
               <a:t>8.1.6 1</a:t>
             </a:r>
             <a:r>
-              <a:rPr lang="ko-KR" altLang="en-US" b="0" dirty="0"/>
+              <a:rPr lang="ko-KR" altLang="en-US" dirty="0"/>
               <a:t>차원 배열 접근</a:t>
             </a:r>
-            <a:endParaRPr lang="ko-KR" altLang="en-US" dirty="0"/>
           </a:p>
         </p:txBody>
       </p:sp>
@@ -5820,10 +5743,9 @@
               <a:defRPr/>
             </a:pPr>
             <a:r>
-              <a:rPr lang="ko-KR" altLang="en-US"/>
+              <a:rPr lang="ko-KR" altLang="en-US" dirty="0"/>
               <a:t>게임 프로그래밍 교육과정</a:t>
             </a:r>
-            <a:endParaRPr lang="ko-KR" altLang="en-US" dirty="0"/>
           </a:p>
         </p:txBody>
       </p:sp>
@@ -6077,27 +5999,7 @@
                 <a:effectLst/>
                 <a:latin typeface="Consolas" panose="020B0609020204030204" pitchFamily="49" charset="0"/>
               </a:rPr>
-              <a:t> </a:t>
-            </a:r>
-            <a:r>
-              <a:rPr lang="en-US" altLang="ko-KR" sz="1200" b="0" i="0" u="none" strike="noStrike" dirty="0" err="1">
-                <a:solidFill>
-                  <a:srgbClr val="383A42"/>
-                </a:solidFill>
-                <a:effectLst/>
-                <a:latin typeface="Consolas" panose="020B0609020204030204" pitchFamily="49" charset="0"/>
-              </a:rPr>
-              <a:t>arr_count</a:t>
-            </a:r>
-            <a:r>
-              <a:rPr lang="en-US" altLang="ko-KR" sz="1200" b="0" i="0" u="none" strike="noStrike" dirty="0">
-                <a:solidFill>
-                  <a:srgbClr val="383A42"/>
-                </a:solidFill>
-                <a:effectLst/>
-                <a:latin typeface="Consolas" panose="020B0609020204030204" pitchFamily="49" charset="0"/>
-              </a:rPr>
-              <a:t> = </a:t>
+              <a:t> arr_count = </a:t>
             </a:r>
             <a:r>
               <a:rPr lang="en-US" altLang="ko-KR" sz="1200" b="0" i="0" u="none" strike="noStrike" dirty="0">
@@ -6274,27 +6176,7 @@
                 <a:effectLst/>
                 <a:latin typeface="Consolas" panose="020B0609020204030204" pitchFamily="49" charset="0"/>
               </a:rPr>
-              <a:t>; i &lt; </a:t>
-            </a:r>
-            <a:r>
-              <a:rPr lang="en-US" altLang="ko-KR" sz="1200" b="0" i="0" u="none" strike="noStrike" dirty="0" err="1">
-                <a:solidFill>
-                  <a:srgbClr val="383A42"/>
-                </a:solidFill>
-                <a:effectLst/>
-                <a:latin typeface="Consolas" panose="020B0609020204030204" pitchFamily="49" charset="0"/>
-              </a:rPr>
-              <a:t>arr_count</a:t>
-            </a:r>
-            <a:r>
-              <a:rPr lang="en-US" altLang="ko-KR" sz="1200" b="0" i="0" u="none" strike="noStrike" dirty="0">
-                <a:solidFill>
-                  <a:srgbClr val="383A42"/>
-                </a:solidFill>
-                <a:effectLst/>
-                <a:latin typeface="Consolas" panose="020B0609020204030204" pitchFamily="49" charset="0"/>
-              </a:rPr>
-              <a:t>; ++i)</a:t>
+              <a:t>; i &lt; arr_count; ++i)</a:t>
             </a:r>
             <a:br>
               <a:rPr lang="en-US" altLang="ko-KR" sz="1200" b="0" i="0" u="none" strike="noStrike" dirty="0">
@@ -6473,27 +6355,7 @@
                 <a:effectLst/>
                 <a:latin typeface="Consolas" panose="020B0609020204030204" pitchFamily="49" charset="0"/>
               </a:rPr>
-              <a:t> </a:t>
-            </a:r>
-            <a:r>
-              <a:rPr lang="en-US" altLang="ko-KR" sz="1200" b="0" i="0" u="none" strike="noStrike" dirty="0" err="1">
-                <a:solidFill>
-                  <a:srgbClr val="383A42"/>
-                </a:solidFill>
-                <a:effectLst/>
-                <a:latin typeface="Consolas" panose="020B0609020204030204" pitchFamily="49" charset="0"/>
-              </a:rPr>
-              <a:t>positive_count</a:t>
-            </a:r>
-            <a:r>
-              <a:rPr lang="en-US" altLang="ko-KR" sz="1200" b="0" i="0" u="none" strike="noStrike" dirty="0">
-                <a:solidFill>
-                  <a:srgbClr val="383A42"/>
-                </a:solidFill>
-                <a:effectLst/>
-                <a:latin typeface="Consolas" panose="020B0609020204030204" pitchFamily="49" charset="0"/>
-              </a:rPr>
-              <a:t> = </a:t>
+              <a:t> positive_count = </a:t>
             </a:r>
             <a:r>
               <a:rPr lang="en-US" altLang="ko-KR" sz="1200" b="0" i="0" u="none" strike="noStrike" dirty="0">
@@ -6562,27 +6424,7 @@
                 <a:effectLst/>
                 <a:latin typeface="Consolas" panose="020B0609020204030204" pitchFamily="49" charset="0"/>
               </a:rPr>
-              <a:t> </a:t>
-            </a:r>
-            <a:r>
-              <a:rPr lang="en-US" altLang="ko-KR" sz="1200" b="0" i="0" u="none" strike="noStrike" dirty="0" err="1">
-                <a:solidFill>
-                  <a:srgbClr val="383A42"/>
-                </a:solidFill>
-                <a:effectLst/>
-                <a:latin typeface="Consolas" panose="020B0609020204030204" pitchFamily="49" charset="0"/>
-              </a:rPr>
-              <a:t>negative_count</a:t>
-            </a:r>
-            <a:r>
-              <a:rPr lang="en-US" altLang="ko-KR" sz="1200" b="0" i="0" u="none" strike="noStrike" dirty="0">
-                <a:solidFill>
-                  <a:srgbClr val="383A42"/>
-                </a:solidFill>
-                <a:effectLst/>
-                <a:latin typeface="Consolas" panose="020B0609020204030204" pitchFamily="49" charset="0"/>
-              </a:rPr>
-              <a:t> = </a:t>
+              <a:t> negative_count = </a:t>
             </a:r>
             <a:r>
               <a:rPr lang="en-US" altLang="ko-KR" sz="1200" b="0" i="0" u="none" strike="noStrike" dirty="0">
@@ -6651,27 +6493,7 @@
                 <a:effectLst/>
                 <a:latin typeface="Consolas" panose="020B0609020204030204" pitchFamily="49" charset="0"/>
               </a:rPr>
-              <a:t> </a:t>
-            </a:r>
-            <a:r>
-              <a:rPr lang="en-US" altLang="ko-KR" sz="1200" b="0" i="0" u="none" strike="noStrike" dirty="0" err="1">
-                <a:solidFill>
-                  <a:srgbClr val="383A42"/>
-                </a:solidFill>
-                <a:effectLst/>
-                <a:latin typeface="Consolas" panose="020B0609020204030204" pitchFamily="49" charset="0"/>
-              </a:rPr>
-              <a:t>even_count</a:t>
-            </a:r>
-            <a:r>
-              <a:rPr lang="en-US" altLang="ko-KR" sz="1200" b="0" i="0" u="none" strike="noStrike" dirty="0">
-                <a:solidFill>
-                  <a:srgbClr val="383A42"/>
-                </a:solidFill>
-                <a:effectLst/>
-                <a:latin typeface="Consolas" panose="020B0609020204030204" pitchFamily="49" charset="0"/>
-              </a:rPr>
-              <a:t> = </a:t>
+              <a:t> even_count = </a:t>
             </a:r>
             <a:r>
               <a:rPr lang="en-US" altLang="ko-KR" sz="1200" b="0" i="0" u="none" strike="noStrike" dirty="0">
@@ -6740,27 +6562,7 @@
                 <a:effectLst/>
                 <a:latin typeface="Consolas" panose="020B0609020204030204" pitchFamily="49" charset="0"/>
               </a:rPr>
-              <a:t> </a:t>
-            </a:r>
-            <a:r>
-              <a:rPr lang="en-US" altLang="ko-KR" sz="1200" b="0" i="0" u="none" strike="noStrike" dirty="0" err="1">
-                <a:solidFill>
-                  <a:srgbClr val="383A42"/>
-                </a:solidFill>
-                <a:effectLst/>
-                <a:latin typeface="Consolas" panose="020B0609020204030204" pitchFamily="49" charset="0"/>
-              </a:rPr>
-              <a:t>odd_count</a:t>
-            </a:r>
-            <a:r>
-              <a:rPr lang="en-US" altLang="ko-KR" sz="1200" b="0" i="0" u="none" strike="noStrike" dirty="0">
-                <a:solidFill>
-                  <a:srgbClr val="383A42"/>
-                </a:solidFill>
-                <a:effectLst/>
-                <a:latin typeface="Consolas" panose="020B0609020204030204" pitchFamily="49" charset="0"/>
-              </a:rPr>
-              <a:t> = </a:t>
+              <a:t> odd_count = </a:t>
             </a:r>
             <a:r>
               <a:rPr lang="en-US" altLang="ko-KR" sz="1200" b="0" i="0" u="none" strike="noStrike" dirty="0">
@@ -6878,27 +6680,7 @@
                 <a:effectLst/>
                 <a:latin typeface="Consolas" panose="020B0609020204030204" pitchFamily="49" charset="0"/>
               </a:rPr>
-              <a:t>; i &lt; </a:t>
-            </a:r>
-            <a:r>
-              <a:rPr lang="en-US" altLang="ko-KR" sz="1200" b="0" i="0" u="none" strike="noStrike" dirty="0" err="1">
-                <a:solidFill>
-                  <a:srgbClr val="383A42"/>
-                </a:solidFill>
-                <a:effectLst/>
-                <a:latin typeface="Consolas" panose="020B0609020204030204" pitchFamily="49" charset="0"/>
-              </a:rPr>
-              <a:t>arr_count</a:t>
-            </a:r>
-            <a:r>
-              <a:rPr lang="en-US" altLang="ko-KR" sz="1200" b="0" i="0" u="none" strike="noStrike" dirty="0">
-                <a:solidFill>
-                  <a:srgbClr val="383A42"/>
-                </a:solidFill>
-                <a:effectLst/>
-                <a:latin typeface="Consolas" panose="020B0609020204030204" pitchFamily="49" charset="0"/>
-              </a:rPr>
-              <a:t>; ++i)</a:t>
+              <a:t>; i &lt; arr_count; ++i)</a:t>
             </a:r>
             <a:br>
               <a:rPr lang="en-US" altLang="ko-KR" sz="1200" b="0" i="0" u="none" strike="noStrike" dirty="0">
@@ -7025,27 +6807,7 @@
                 <a:effectLst/>
                 <a:latin typeface="Consolas" panose="020B0609020204030204" pitchFamily="49" charset="0"/>
               </a:rPr>
-              <a:t>++</a:t>
-            </a:r>
-            <a:r>
-              <a:rPr lang="en-US" altLang="ko-KR" sz="1200" b="0" i="0" u="none" strike="noStrike" dirty="0" err="1">
-                <a:solidFill>
-                  <a:srgbClr val="383A42"/>
-                </a:solidFill>
-                <a:effectLst/>
-                <a:latin typeface="Consolas" panose="020B0609020204030204" pitchFamily="49" charset="0"/>
-              </a:rPr>
-              <a:t>positive_count</a:t>
-            </a:r>
-            <a:r>
-              <a:rPr lang="en-US" altLang="ko-KR" sz="1200" b="0" i="0" u="none" strike="noStrike" dirty="0">
-                <a:solidFill>
-                  <a:srgbClr val="383A42"/>
-                </a:solidFill>
-                <a:effectLst/>
-                <a:latin typeface="Consolas" panose="020B0609020204030204" pitchFamily="49" charset="0"/>
-              </a:rPr>
-              <a:t>;</a:t>
+              <a:t>++positive_count;</a:t>
             </a:r>
             <a:br>
               <a:rPr lang="en-US" altLang="ko-KR" sz="1200" b="0" i="0" u="none" strike="noStrike" dirty="0">
@@ -7173,27 +6935,7 @@
                 <a:effectLst/>
                 <a:latin typeface="Consolas" panose="020B0609020204030204" pitchFamily="49" charset="0"/>
               </a:rPr>
-              <a:t>++</a:t>
-            </a:r>
-            <a:r>
-              <a:rPr lang="en-US" altLang="ko-KR" sz="1200" b="0" i="0" u="none" strike="noStrike" dirty="0" err="1">
-                <a:solidFill>
-                  <a:srgbClr val="383A42"/>
-                </a:solidFill>
-                <a:effectLst/>
-                <a:latin typeface="Consolas" panose="020B0609020204030204" pitchFamily="49" charset="0"/>
-              </a:rPr>
-              <a:t>negative_count</a:t>
-            </a:r>
-            <a:r>
-              <a:rPr lang="en-US" altLang="ko-KR" sz="1200" b="0" i="0" u="none" strike="noStrike" dirty="0">
-                <a:solidFill>
-                  <a:srgbClr val="383A42"/>
-                </a:solidFill>
-                <a:effectLst/>
-                <a:latin typeface="Consolas" panose="020B0609020204030204" pitchFamily="49" charset="0"/>
-              </a:rPr>
-              <a:t>;</a:t>
+              <a:t>++negative_count;</a:t>
             </a:r>
             <a:br>
               <a:rPr lang="en-US" altLang="ko-KR" sz="1200" b="0" i="0" u="none" strike="noStrike" dirty="0">
@@ -7330,27 +7072,7 @@
                 <a:effectLst/>
                 <a:latin typeface="Consolas" panose="020B0609020204030204" pitchFamily="49" charset="0"/>
               </a:rPr>
-              <a:t>++</a:t>
-            </a:r>
-            <a:r>
-              <a:rPr lang="en-US" altLang="ko-KR" sz="1200" b="0" i="0" u="none" strike="noStrike" dirty="0" err="1">
-                <a:solidFill>
-                  <a:srgbClr val="383A42"/>
-                </a:solidFill>
-                <a:effectLst/>
-                <a:latin typeface="Consolas" panose="020B0609020204030204" pitchFamily="49" charset="0"/>
-              </a:rPr>
-              <a:t>even_count</a:t>
-            </a:r>
-            <a:r>
-              <a:rPr lang="en-US" altLang="ko-KR" sz="1200" b="0" i="0" u="none" strike="noStrike" dirty="0">
-                <a:solidFill>
-                  <a:srgbClr val="383A42"/>
-                </a:solidFill>
-                <a:effectLst/>
-                <a:latin typeface="Consolas" panose="020B0609020204030204" pitchFamily="49" charset="0"/>
-              </a:rPr>
-              <a:t>;</a:t>
+              <a:t>++even_count;</a:t>
             </a:r>
             <a:br>
               <a:rPr lang="en-US" altLang="ko-KR" sz="1200" b="0" i="0" u="none" strike="noStrike" dirty="0">
@@ -7398,27 +7120,7 @@
                 <a:effectLst/>
                 <a:latin typeface="Consolas" panose="020B0609020204030204" pitchFamily="49" charset="0"/>
               </a:rPr>
-              <a:t>        ++</a:t>
-            </a:r>
-            <a:r>
-              <a:rPr lang="en-US" altLang="ko-KR" sz="1200" b="0" i="0" u="none" strike="noStrike" dirty="0" err="1">
-                <a:solidFill>
-                  <a:srgbClr val="383A42"/>
-                </a:solidFill>
-                <a:effectLst/>
-                <a:latin typeface="Consolas" panose="020B0609020204030204" pitchFamily="49" charset="0"/>
-              </a:rPr>
-              <a:t>odd_count</a:t>
-            </a:r>
-            <a:r>
-              <a:rPr lang="en-US" altLang="ko-KR" sz="1200" b="0" i="0" u="none" strike="noStrike" dirty="0">
-                <a:solidFill>
-                  <a:srgbClr val="383A42"/>
-                </a:solidFill>
-                <a:effectLst/>
-                <a:latin typeface="Consolas" panose="020B0609020204030204" pitchFamily="49" charset="0"/>
-              </a:rPr>
-              <a:t>;</a:t>
+              <a:t>        ++odd_count;</a:t>
             </a:r>
             <a:br>
               <a:rPr lang="en-US" altLang="ko-KR" sz="1200" b="0" i="0" u="none" strike="noStrike" dirty="0">
@@ -7515,27 +7217,7 @@
                 <a:effectLst/>
                 <a:latin typeface="Consolas" panose="020B0609020204030204" pitchFamily="49" charset="0"/>
               </a:rPr>
-              <a:t>, </a:t>
-            </a:r>
-            <a:r>
-              <a:rPr lang="en-US" altLang="ko-KR" sz="1200" b="0" i="0" u="none" strike="noStrike" dirty="0" err="1">
-                <a:solidFill>
-                  <a:srgbClr val="383A42"/>
-                </a:solidFill>
-                <a:effectLst/>
-                <a:latin typeface="Consolas" panose="020B0609020204030204" pitchFamily="49" charset="0"/>
-              </a:rPr>
-              <a:t>positive_count</a:t>
-            </a:r>
-            <a:r>
-              <a:rPr lang="en-US" altLang="ko-KR" sz="1200" b="0" i="0" u="none" strike="noStrike" dirty="0">
-                <a:solidFill>
-                  <a:srgbClr val="383A42"/>
-                </a:solidFill>
-                <a:effectLst/>
-                <a:latin typeface="Consolas" panose="020B0609020204030204" pitchFamily="49" charset="0"/>
-              </a:rPr>
-              <a:t>);</a:t>
+              <a:t>, positive_count);</a:t>
             </a:r>
             <a:br>
               <a:rPr lang="en-US" altLang="ko-KR" sz="1200" b="0" i="0" u="none" strike="noStrike" dirty="0">
@@ -7604,27 +7286,7 @@
                 <a:effectLst/>
                 <a:latin typeface="Consolas" panose="020B0609020204030204" pitchFamily="49" charset="0"/>
               </a:rPr>
-              <a:t>, </a:t>
-            </a:r>
-            <a:r>
-              <a:rPr lang="en-US" altLang="ko-KR" sz="1200" b="0" i="0" u="none" strike="noStrike" dirty="0" err="1">
-                <a:solidFill>
-                  <a:srgbClr val="383A42"/>
-                </a:solidFill>
-                <a:effectLst/>
-                <a:latin typeface="Consolas" panose="020B0609020204030204" pitchFamily="49" charset="0"/>
-              </a:rPr>
-              <a:t>negative_count</a:t>
-            </a:r>
-            <a:r>
-              <a:rPr lang="en-US" altLang="ko-KR" sz="1200" b="0" i="0" u="none" strike="noStrike" dirty="0">
-                <a:solidFill>
-                  <a:srgbClr val="383A42"/>
-                </a:solidFill>
-                <a:effectLst/>
-                <a:latin typeface="Consolas" panose="020B0609020204030204" pitchFamily="49" charset="0"/>
-              </a:rPr>
-              <a:t>);</a:t>
+              <a:t>, negative_count);</a:t>
             </a:r>
             <a:br>
               <a:rPr lang="en-US" altLang="ko-KR" sz="1200" b="0" i="0" u="none" strike="noStrike" dirty="0">
@@ -7693,27 +7355,7 @@
                 <a:effectLst/>
                 <a:latin typeface="Consolas" panose="020B0609020204030204" pitchFamily="49" charset="0"/>
               </a:rPr>
-              <a:t>, </a:t>
-            </a:r>
-            <a:r>
-              <a:rPr lang="en-US" altLang="ko-KR" sz="1200" b="0" i="0" u="none" strike="noStrike" dirty="0" err="1">
-                <a:solidFill>
-                  <a:srgbClr val="383A42"/>
-                </a:solidFill>
-                <a:effectLst/>
-                <a:latin typeface="Consolas" panose="020B0609020204030204" pitchFamily="49" charset="0"/>
-              </a:rPr>
-              <a:t>even_count</a:t>
-            </a:r>
-            <a:r>
-              <a:rPr lang="en-US" altLang="ko-KR" sz="1200" b="0" i="0" u="none" strike="noStrike" dirty="0">
-                <a:solidFill>
-                  <a:srgbClr val="383A42"/>
-                </a:solidFill>
-                <a:effectLst/>
-                <a:latin typeface="Consolas" panose="020B0609020204030204" pitchFamily="49" charset="0"/>
-              </a:rPr>
-              <a:t>);</a:t>
+              <a:t>, even_count);</a:t>
             </a:r>
             <a:br>
               <a:rPr lang="en-US" altLang="ko-KR" sz="1200" b="0" i="0" u="none" strike="noStrike" dirty="0">
@@ -7782,27 +7424,7 @@
                 <a:effectLst/>
                 <a:latin typeface="Consolas" panose="020B0609020204030204" pitchFamily="49" charset="0"/>
               </a:rPr>
-              <a:t>, </a:t>
-            </a:r>
-            <a:r>
-              <a:rPr lang="en-US" altLang="ko-KR" sz="1200" b="0" i="0" u="none" strike="noStrike" dirty="0" err="1">
-                <a:solidFill>
-                  <a:srgbClr val="383A42"/>
-                </a:solidFill>
-                <a:effectLst/>
-                <a:latin typeface="Consolas" panose="020B0609020204030204" pitchFamily="49" charset="0"/>
-              </a:rPr>
-              <a:t>odd_count</a:t>
-            </a:r>
-            <a:r>
-              <a:rPr lang="en-US" altLang="ko-KR" sz="1200" b="0" i="0" u="none" strike="noStrike" dirty="0">
-                <a:solidFill>
-                  <a:srgbClr val="383A42"/>
-                </a:solidFill>
-                <a:effectLst/>
-                <a:latin typeface="Consolas" panose="020B0609020204030204" pitchFamily="49" charset="0"/>
-              </a:rPr>
-              <a:t>);</a:t>
+              <a:t>, odd_count);</a:t>
             </a:r>
             <a:endParaRPr lang="ko-KR" altLang="en-US" sz="1200" dirty="0"/>
           </a:p>
@@ -7860,15 +7482,15 @@
           <a:lstStyle/>
           <a:p>
             <a:r>
-              <a:rPr lang="en-US" altLang="ko-KR" b="0" dirty="0"/>
+              <a:rPr lang="en-US" altLang="ko-KR" dirty="0"/>
               <a:t>8.1.7 1</a:t>
             </a:r>
             <a:r>
-              <a:rPr lang="ko-KR" altLang="en-US" b="0" dirty="0"/>
+              <a:rPr lang="ko-KR" altLang="en-US" dirty="0"/>
               <a:t>차원 배열 역순 출력</a:t>
             </a:r>
             <a:r>
-              <a:rPr lang="en-US" altLang="ko-KR" b="0" dirty="0"/>
+              <a:rPr lang="en-US" altLang="ko-KR" dirty="0"/>
               <a:t>(Reverse)</a:t>
             </a:r>
             <a:endParaRPr lang="ko-KR" altLang="en-US" dirty="0"/>
@@ -7965,10 +7587,9 @@
               <a:defRPr/>
             </a:pPr>
             <a:r>
-              <a:rPr lang="ko-KR" altLang="en-US"/>
+              <a:rPr lang="ko-KR" altLang="en-US" dirty="0"/>
               <a:t>게임 프로그래밍 교육과정</a:t>
             </a:r>
-            <a:endParaRPr lang="ko-KR" altLang="en-US" dirty="0"/>
           </a:p>
         </p:txBody>
       </p:sp>
@@ -8095,27 +7716,7 @@
                 <a:effectLst/>
                 <a:latin typeface="Consolas" panose="020B0609020204030204" pitchFamily="49" charset="0"/>
               </a:rPr>
-              <a:t> </a:t>
-            </a:r>
-            <a:r>
-              <a:rPr lang="en-US" altLang="ko-KR" sz="1800" b="0" i="0" u="none" strike="noStrike" dirty="0" err="1">
-                <a:solidFill>
-                  <a:srgbClr val="383A42"/>
-                </a:solidFill>
-                <a:effectLst/>
-                <a:latin typeface="Consolas" panose="020B0609020204030204" pitchFamily="49" charset="0"/>
-              </a:rPr>
-              <a:t>arr_count</a:t>
-            </a:r>
-            <a:r>
-              <a:rPr lang="en-US" altLang="ko-KR" sz="1800" b="0" i="0" u="none" strike="noStrike" dirty="0">
-                <a:solidFill>
-                  <a:srgbClr val="383A42"/>
-                </a:solidFill>
-                <a:effectLst/>
-                <a:latin typeface="Consolas" panose="020B0609020204030204" pitchFamily="49" charset="0"/>
-              </a:rPr>
-              <a:t> = </a:t>
+              <a:t> arr_count = </a:t>
             </a:r>
             <a:r>
               <a:rPr lang="en-US" altLang="ko-KR" sz="1800" b="0" i="0" u="none" strike="noStrike" dirty="0">
@@ -8322,27 +7923,7 @@
                 <a:effectLst/>
                 <a:latin typeface="Consolas" panose="020B0609020204030204" pitchFamily="49" charset="0"/>
               </a:rPr>
-              <a:t>; i &lt; </a:t>
-            </a:r>
-            <a:r>
-              <a:rPr lang="en-US" altLang="ko-KR" sz="1800" b="0" i="0" u="none" strike="noStrike" dirty="0" err="1">
-                <a:solidFill>
-                  <a:srgbClr val="383A42"/>
-                </a:solidFill>
-                <a:effectLst/>
-                <a:latin typeface="Consolas" panose="020B0609020204030204" pitchFamily="49" charset="0"/>
-              </a:rPr>
-              <a:t>arr_count</a:t>
-            </a:r>
-            <a:r>
-              <a:rPr lang="en-US" altLang="ko-KR" sz="1800" b="0" i="0" u="none" strike="noStrike" dirty="0">
-                <a:solidFill>
-                  <a:srgbClr val="383A42"/>
-                </a:solidFill>
-                <a:effectLst/>
-                <a:latin typeface="Consolas" panose="020B0609020204030204" pitchFamily="49" charset="0"/>
-              </a:rPr>
-              <a:t>; ++i)</a:t>
+              <a:t>; i &lt; arr_count; ++i)</a:t>
             </a:r>
             <a:br>
               <a:rPr lang="en-US" altLang="ko-KR" sz="1800" b="0" i="0" u="none" strike="noStrike" dirty="0">
@@ -8506,27 +8087,7 @@
                 <a:effectLst/>
                 <a:latin typeface="Consolas" panose="020B0609020204030204" pitchFamily="49" charset="0"/>
               </a:rPr>
-              <a:t> i = </a:t>
-            </a:r>
-            <a:r>
-              <a:rPr lang="en-US" altLang="ko-KR" sz="1800" b="1" i="0" u="none" strike="noStrike" dirty="0" err="1">
-                <a:solidFill>
-                  <a:srgbClr val="383A42"/>
-                </a:solidFill>
-                <a:effectLst/>
-                <a:latin typeface="Consolas" panose="020B0609020204030204" pitchFamily="49" charset="0"/>
-              </a:rPr>
-              <a:t>arr_count</a:t>
-            </a:r>
-            <a:r>
-              <a:rPr lang="en-US" altLang="ko-KR" sz="1800" b="1" i="0" u="none" strike="noStrike" dirty="0">
-                <a:solidFill>
-                  <a:srgbClr val="383A42"/>
-                </a:solidFill>
-                <a:effectLst/>
-                <a:latin typeface="Consolas" panose="020B0609020204030204" pitchFamily="49" charset="0"/>
-              </a:rPr>
-              <a:t> - </a:t>
+              <a:t> i = arr_count - </a:t>
             </a:r>
             <a:r>
               <a:rPr lang="en-US" altLang="ko-KR" sz="1800" b="1" i="0" u="none" strike="noStrike" dirty="0">
@@ -8727,15 +8288,15 @@
           <a:lstStyle/>
           <a:p>
             <a:r>
-              <a:rPr lang="en-US" altLang="ko-KR" b="0" dirty="0"/>
+              <a:rPr lang="en-US" altLang="ko-KR" dirty="0"/>
               <a:t>8.1.8 1</a:t>
             </a:r>
             <a:r>
-              <a:rPr lang="ko-KR" altLang="en-US" b="0" dirty="0"/>
+              <a:rPr lang="ko-KR" altLang="en-US" dirty="0"/>
               <a:t>차원 배열 복사</a:t>
             </a:r>
             <a:r>
-              <a:rPr lang="en-US" altLang="ko-KR" b="0" dirty="0"/>
+              <a:rPr lang="en-US" altLang="ko-KR" dirty="0"/>
               <a:t>(Copy)</a:t>
             </a:r>
             <a:endParaRPr lang="ko-KR" altLang="en-US" dirty="0"/>
@@ -8896,10 +8457,9 @@
               <a:defRPr/>
             </a:pPr>
             <a:r>
-              <a:rPr lang="ko-KR" altLang="en-US"/>
+              <a:rPr lang="ko-KR" altLang="en-US" dirty="0"/>
               <a:t>게임 프로그래밍 교육과정</a:t>
             </a:r>
-            <a:endParaRPr lang="ko-KR" altLang="en-US" dirty="0"/>
           </a:p>
         </p:txBody>
       </p:sp>
@@ -9066,27 +8626,7 @@
                 <a:effectLst/>
                 <a:latin typeface="Consolas" panose="020B0609020204030204" pitchFamily="49" charset="0"/>
               </a:rPr>
-              <a:t>; i &lt; </a:t>
-            </a:r>
-            <a:r>
-              <a:rPr lang="en-US" altLang="ko-KR" sz="1800" b="0" i="0" u="none" strike="noStrike" dirty="0" err="1">
-                <a:solidFill>
-                  <a:srgbClr val="383A42"/>
-                </a:solidFill>
-                <a:effectLst/>
-                <a:latin typeface="Consolas" panose="020B0609020204030204" pitchFamily="49" charset="0"/>
-              </a:rPr>
-              <a:t>arr_count</a:t>
-            </a:r>
-            <a:r>
-              <a:rPr lang="en-US" altLang="ko-KR" sz="1800" b="0" i="0" u="none" strike="noStrike" dirty="0">
-                <a:solidFill>
-                  <a:srgbClr val="383A42"/>
-                </a:solidFill>
-                <a:effectLst/>
-                <a:latin typeface="Consolas" panose="020B0609020204030204" pitchFamily="49" charset="0"/>
-              </a:rPr>
-              <a:t>; ++i)</a:t>
+              <a:t>; i &lt; arr_count; ++i)</a:t>
             </a:r>
             <a:br>
               <a:rPr lang="en-US" altLang="ko-KR" sz="1800" b="0" i="0" u="none" strike="noStrike" dirty="0">
@@ -9124,47 +8664,7 @@
                 <a:effectLst/>
                 <a:latin typeface="Consolas" panose="020B0609020204030204" pitchFamily="49" charset="0"/>
               </a:rPr>
-              <a:t>    </a:t>
-            </a:r>
-            <a:r>
-              <a:rPr lang="en-US" altLang="ko-KR" sz="1800" b="0" i="0" u="none" strike="noStrike" dirty="0" err="1">
-                <a:solidFill>
-                  <a:srgbClr val="383A42"/>
-                </a:solidFill>
-                <a:effectLst/>
-                <a:latin typeface="Consolas" panose="020B0609020204030204" pitchFamily="49" charset="0"/>
-              </a:rPr>
-              <a:t>dst</a:t>
-            </a:r>
-            <a:r>
-              <a:rPr lang="en-US" altLang="ko-KR" sz="1800" b="0" i="0" u="none" strike="noStrike" dirty="0">
-                <a:solidFill>
-                  <a:srgbClr val="383A42"/>
-                </a:solidFill>
-                <a:effectLst/>
-                <a:latin typeface="Consolas" panose="020B0609020204030204" pitchFamily="49" charset="0"/>
-              </a:rPr>
-              <a:t>[i] = </a:t>
-            </a:r>
-            <a:r>
-              <a:rPr lang="en-US" altLang="ko-KR" sz="1800" b="0" i="0" u="none" strike="noStrike" dirty="0" err="1">
-                <a:solidFill>
-                  <a:srgbClr val="383A42"/>
-                </a:solidFill>
-                <a:effectLst/>
-                <a:latin typeface="Consolas" panose="020B0609020204030204" pitchFamily="49" charset="0"/>
-              </a:rPr>
-              <a:t>src</a:t>
-            </a:r>
-            <a:r>
-              <a:rPr lang="en-US" altLang="ko-KR" sz="1800" b="0" i="0" u="none" strike="noStrike" dirty="0">
-                <a:solidFill>
-                  <a:srgbClr val="383A42"/>
-                </a:solidFill>
-                <a:effectLst/>
-                <a:latin typeface="Consolas" panose="020B0609020204030204" pitchFamily="49" charset="0"/>
-              </a:rPr>
-              <a:t>[i];</a:t>
+              <a:t>    dst[i] = src[i];</a:t>
             </a:r>
             <a:br>
               <a:rPr lang="en-US" altLang="ko-KR" sz="1800" b="0" i="0" u="none" strike="noStrike" dirty="0">
@@ -9280,27 +8780,7 @@
                 <a:effectLst/>
                 <a:latin typeface="Consolas" panose="020B0609020204030204" pitchFamily="49" charset="0"/>
               </a:rPr>
-              <a:t>index = </a:t>
-            </a:r>
-            <a:r>
-              <a:rPr lang="en-US" altLang="ko-KR" sz="1800" b="0" i="0" u="none" strike="noStrike" dirty="0" err="1">
-                <a:solidFill>
-                  <a:srgbClr val="383A42"/>
-                </a:solidFill>
-                <a:effectLst/>
-                <a:latin typeface="Consolas" panose="020B0609020204030204" pitchFamily="49" charset="0"/>
-              </a:rPr>
-              <a:t>arr_count</a:t>
-            </a:r>
-            <a:r>
-              <a:rPr lang="en-US" altLang="ko-KR" sz="1800" b="0" i="0" u="none" strike="noStrike" dirty="0">
-                <a:solidFill>
-                  <a:srgbClr val="383A42"/>
-                </a:solidFill>
-                <a:effectLst/>
-                <a:latin typeface="Consolas" panose="020B0609020204030204" pitchFamily="49" charset="0"/>
-              </a:rPr>
-              <a:t>;</a:t>
+              <a:t>index = arr_count;</a:t>
             </a:r>
             <a:br>
               <a:rPr lang="en-US" altLang="ko-KR" sz="1800" b="0" i="0" u="none" strike="noStrike" dirty="0">
@@ -9397,47 +8877,7 @@
                 <a:effectLst/>
                 <a:latin typeface="Consolas" panose="020B0609020204030204" pitchFamily="49" charset="0"/>
               </a:rPr>
-              <a:t>    </a:t>
-            </a:r>
-            <a:r>
-              <a:rPr lang="en-US" altLang="ko-KR" sz="1800" b="0" i="0" u="none" strike="noStrike" dirty="0" err="1">
-                <a:solidFill>
-                  <a:srgbClr val="383A42"/>
-                </a:solidFill>
-                <a:effectLst/>
-                <a:latin typeface="Consolas" panose="020B0609020204030204" pitchFamily="49" charset="0"/>
-              </a:rPr>
-              <a:t>dst</a:t>
-            </a:r>
-            <a:r>
-              <a:rPr lang="en-US" altLang="ko-KR" sz="1800" b="0" i="0" u="none" strike="noStrike" dirty="0">
-                <a:solidFill>
-                  <a:srgbClr val="383A42"/>
-                </a:solidFill>
-                <a:effectLst/>
-                <a:latin typeface="Consolas" panose="020B0609020204030204" pitchFamily="49" charset="0"/>
-              </a:rPr>
-              <a:t>[index] = </a:t>
-            </a:r>
-            <a:r>
-              <a:rPr lang="en-US" altLang="ko-KR" sz="1800" b="0" i="0" u="none" strike="noStrike" dirty="0" err="1">
-                <a:solidFill>
-                  <a:srgbClr val="383A42"/>
-                </a:solidFill>
-                <a:effectLst/>
-                <a:latin typeface="Consolas" panose="020B0609020204030204" pitchFamily="49" charset="0"/>
-              </a:rPr>
-              <a:t>src</a:t>
-            </a:r>
-            <a:r>
-              <a:rPr lang="en-US" altLang="ko-KR" sz="1800" b="0" i="0" u="none" strike="noStrike" dirty="0">
-                <a:solidFill>
-                  <a:srgbClr val="383A42"/>
-                </a:solidFill>
-                <a:effectLst/>
-                <a:latin typeface="Consolas" panose="020B0609020204030204" pitchFamily="49" charset="0"/>
-              </a:rPr>
-              <a:t>[index];</a:t>
+              <a:t>    dst[index] = src[index];</a:t>
             </a:r>
             <a:br>
               <a:rPr lang="en-US" altLang="ko-KR" sz="1800" b="0" i="0" u="none" strike="noStrike" dirty="0">
@@ -9514,15 +8954,15 @@
           <a:lstStyle/>
           <a:p>
             <a:r>
-              <a:rPr lang="en-US" altLang="ko-KR" b="0" dirty="0"/>
+              <a:rPr lang="en-US" altLang="ko-KR" dirty="0"/>
               <a:t>8.1.9 1</a:t>
             </a:r>
             <a:r>
-              <a:rPr lang="ko-KR" altLang="en-US" b="0" dirty="0"/>
+              <a:rPr lang="ko-KR" altLang="en-US" dirty="0"/>
               <a:t>차원 배열 원소의 값 교환</a:t>
             </a:r>
             <a:r>
-              <a:rPr lang="en-US" altLang="ko-KR" b="0" dirty="0"/>
+              <a:rPr lang="en-US" altLang="ko-KR" dirty="0"/>
               <a:t>(Swap)</a:t>
             </a:r>
             <a:endParaRPr lang="ko-KR" altLang="en-US" dirty="0"/>
@@ -9615,10 +9055,9 @@
               <a:defRPr/>
             </a:pPr>
             <a:r>
-              <a:rPr lang="ko-KR" altLang="en-US"/>
+              <a:rPr lang="ko-KR" altLang="en-US" dirty="0"/>
               <a:t>게임 프로그래밍 교육과정</a:t>
             </a:r>
-            <a:endParaRPr lang="ko-KR" altLang="en-US" dirty="0"/>
           </a:p>
         </p:txBody>
       </p:sp>
@@ -9826,15 +9265,15 @@
           <a:lstStyle/>
           <a:p>
             <a:r>
-              <a:rPr lang="en-US" altLang="ko-KR" b="0" dirty="0"/>
+              <a:rPr lang="en-US" altLang="ko-KR" dirty="0"/>
               <a:t>8.1.10 1</a:t>
             </a:r>
             <a:r>
-              <a:rPr lang="ko-KR" altLang="en-US" b="0" dirty="0"/>
+              <a:rPr lang="ko-KR" altLang="en-US" dirty="0"/>
               <a:t>차원 배열 정렬</a:t>
             </a:r>
             <a:r>
-              <a:rPr lang="en-US" altLang="ko-KR" b="0" dirty="0"/>
+              <a:rPr lang="en-US" altLang="ko-KR" dirty="0"/>
               <a:t>(Bubble Sort)</a:t>
             </a:r>
             <a:endParaRPr lang="ko-KR" altLang="en-US" dirty="0"/>
@@ -9991,10 +9430,9 @@
               <a:defRPr/>
             </a:pPr>
             <a:r>
-              <a:rPr lang="ko-KR" altLang="en-US"/>
+              <a:rPr lang="ko-KR" altLang="en-US" dirty="0"/>
               <a:t>게임 프로그래밍 교육과정</a:t>
             </a:r>
-            <a:endParaRPr lang="ko-KR" altLang="en-US" dirty="0"/>
           </a:p>
         </p:txBody>
       </p:sp>
@@ -10121,27 +9559,7 @@
                 <a:effectLst/>
                 <a:latin typeface="Consolas" panose="020B0609020204030204" pitchFamily="49" charset="0"/>
               </a:rPr>
-              <a:t>; pass &lt; </a:t>
-            </a:r>
-            <a:r>
-              <a:rPr lang="en-US" altLang="ko-KR" sz="1600" b="0" i="0" u="none" strike="noStrike" dirty="0" err="1">
-                <a:solidFill>
-                  <a:srgbClr val="383A42"/>
-                </a:solidFill>
-                <a:effectLst/>
-                <a:latin typeface="Consolas" panose="020B0609020204030204" pitchFamily="49" charset="0"/>
-              </a:rPr>
-              <a:t>arr_count</a:t>
-            </a:r>
-            <a:r>
-              <a:rPr lang="en-US" altLang="ko-KR" sz="1600" b="0" i="0" u="none" strike="noStrike" dirty="0">
-                <a:solidFill>
-                  <a:srgbClr val="383A42"/>
-                </a:solidFill>
-                <a:effectLst/>
-                <a:latin typeface="Consolas" panose="020B0609020204030204" pitchFamily="49" charset="0"/>
-              </a:rPr>
-              <a:t> - </a:t>
+              <a:t>; pass &lt; arr_count - </a:t>
             </a:r>
             <a:r>
               <a:rPr lang="en-US" altLang="ko-KR" sz="1600" b="0" i="0" u="none" strike="noStrike" dirty="0">
@@ -10240,27 +9658,7 @@
                 <a:effectLst/>
                 <a:latin typeface="Consolas" panose="020B0609020204030204" pitchFamily="49" charset="0"/>
               </a:rPr>
-              <a:t>; i &lt; </a:t>
-            </a:r>
-            <a:r>
-              <a:rPr lang="en-US" altLang="ko-KR" sz="1600" b="0" i="0" u="none" strike="noStrike" dirty="0" err="1">
-                <a:solidFill>
-                  <a:srgbClr val="383A42"/>
-                </a:solidFill>
-                <a:effectLst/>
-                <a:latin typeface="Consolas" panose="020B0609020204030204" pitchFamily="49" charset="0"/>
-              </a:rPr>
-              <a:t>arr_count</a:t>
-            </a:r>
-            <a:r>
-              <a:rPr lang="en-US" altLang="ko-KR" sz="1600" b="0" i="0" u="none" strike="noStrike" dirty="0">
-                <a:solidFill>
-                  <a:srgbClr val="383A42"/>
-                </a:solidFill>
-                <a:effectLst/>
-                <a:latin typeface="Consolas" panose="020B0609020204030204" pitchFamily="49" charset="0"/>
-              </a:rPr>
-              <a:t> - </a:t>
+              <a:t>; i &lt; arr_count - </a:t>
             </a:r>
             <a:r>
               <a:rPr lang="en-US" altLang="ko-KR" sz="1600" b="0" i="0" u="none" strike="noStrike" dirty="0">
@@ -10558,15 +9956,15 @@
           <a:lstStyle/>
           <a:p>
             <a:r>
-              <a:rPr lang="en-US" altLang="ko-KR" b="0" dirty="0"/>
+              <a:rPr lang="en-US" altLang="ko-KR" dirty="0"/>
               <a:t>8.1.10 1</a:t>
             </a:r>
             <a:r>
-              <a:rPr lang="ko-KR" altLang="en-US" b="0" dirty="0"/>
+              <a:rPr lang="ko-KR" altLang="en-US" dirty="0"/>
               <a:t>차원 배열 정렬</a:t>
             </a:r>
             <a:r>
-              <a:rPr lang="en-US" altLang="ko-KR" b="0" dirty="0"/>
+              <a:rPr lang="en-US" altLang="ko-KR" dirty="0"/>
               <a:t>(Bubble Sort)</a:t>
             </a:r>
             <a:endParaRPr lang="ko-KR" altLang="en-US" dirty="0"/>
@@ -10723,10 +10121,9 @@
               <a:defRPr/>
             </a:pPr>
             <a:r>
-              <a:rPr lang="ko-KR" altLang="en-US"/>
+              <a:rPr lang="ko-KR" altLang="en-US" dirty="0"/>
               <a:t>게임 프로그래밍 교육과정</a:t>
             </a:r>
-            <a:endParaRPr lang="ko-KR" altLang="en-US" dirty="0"/>
           </a:p>
         </p:txBody>
       </p:sp>
@@ -10853,27 +10250,7 @@
                 <a:effectLst/>
                 <a:latin typeface="Consolas" panose="020B0609020204030204" pitchFamily="49" charset="0"/>
               </a:rPr>
-              <a:t>; pass &lt; </a:t>
-            </a:r>
-            <a:r>
-              <a:rPr lang="en-US" altLang="ko-KR" sz="1600" b="0" i="0" u="none" strike="noStrike" dirty="0" err="1">
-                <a:solidFill>
-                  <a:srgbClr val="383A42"/>
-                </a:solidFill>
-                <a:effectLst/>
-                <a:latin typeface="Consolas" panose="020B0609020204030204" pitchFamily="49" charset="0"/>
-              </a:rPr>
-              <a:t>arr_count</a:t>
-            </a:r>
-            <a:r>
-              <a:rPr lang="en-US" altLang="ko-KR" sz="1600" b="0" i="0" u="none" strike="noStrike" dirty="0">
-                <a:solidFill>
-                  <a:srgbClr val="383A42"/>
-                </a:solidFill>
-                <a:effectLst/>
-                <a:latin typeface="Consolas" panose="020B0609020204030204" pitchFamily="49" charset="0"/>
-              </a:rPr>
-              <a:t> - </a:t>
+              <a:t>; pass &lt; arr_count - </a:t>
             </a:r>
             <a:r>
               <a:rPr lang="en-US" altLang="ko-KR" sz="1600" b="0" i="0" u="none" strike="noStrike" dirty="0">
@@ -10972,27 +10349,7 @@
                 <a:effectLst/>
                 <a:latin typeface="Consolas" panose="020B0609020204030204" pitchFamily="49" charset="0"/>
               </a:rPr>
-              <a:t>; i &lt; </a:t>
-            </a:r>
-            <a:r>
-              <a:rPr lang="en-US" altLang="ko-KR" sz="1600" b="0" i="0" u="none" strike="noStrike" dirty="0" err="1">
-                <a:solidFill>
-                  <a:srgbClr val="383A42"/>
-                </a:solidFill>
-                <a:effectLst/>
-                <a:latin typeface="Consolas" panose="020B0609020204030204" pitchFamily="49" charset="0"/>
-              </a:rPr>
-              <a:t>arr_count</a:t>
-            </a:r>
-            <a:r>
-              <a:rPr lang="en-US" altLang="ko-KR" sz="1600" b="0" i="0" u="none" strike="noStrike" dirty="0">
-                <a:solidFill>
-                  <a:srgbClr val="383A42"/>
-                </a:solidFill>
-                <a:effectLst/>
-                <a:latin typeface="Consolas" panose="020B0609020204030204" pitchFamily="49" charset="0"/>
-              </a:rPr>
-              <a:t> - </a:t>
+              <a:t>; i &lt; arr_count - </a:t>
             </a:r>
             <a:r>
               <a:rPr lang="en-US" altLang="ko-KR" sz="1600" b="0" i="0" u="none" strike="noStrike" dirty="0">
@@ -11290,22 +10647,21 @@
           <a:lstStyle/>
           <a:p>
             <a:r>
-              <a:rPr lang="en-US" altLang="ko-KR" b="0" dirty="0"/>
+              <a:rPr lang="en-US" altLang="ko-KR" dirty="0"/>
               <a:t>8.1.10 1</a:t>
             </a:r>
             <a:r>
-              <a:rPr lang="ko-KR" altLang="en-US" b="0" dirty="0"/>
+              <a:rPr lang="ko-KR" altLang="en-US" dirty="0"/>
               <a:t>차원 배열 접근 </a:t>
             </a:r>
             <a:r>
-              <a:rPr lang="en-US" altLang="ko-KR" b="0" dirty="0"/>
+              <a:rPr lang="en-US" altLang="ko-KR" dirty="0"/>
               <a:t>– </a:t>
             </a:r>
             <a:r>
-              <a:rPr lang="ko-KR" altLang="en-US" b="0" dirty="0"/>
+              <a:rPr lang="ko-KR" altLang="en-US" dirty="0"/>
               <a:t>버블 정렬</a:t>
             </a:r>
-            <a:endParaRPr lang="ko-KR" altLang="en-US" dirty="0"/>
           </a:p>
         </p:txBody>
       </p:sp>
@@ -11368,10 +10724,9 @@
               <a:defRPr/>
             </a:pPr>
             <a:r>
-              <a:rPr lang="ko-KR" altLang="en-US"/>
+              <a:rPr lang="ko-KR" altLang="en-US" dirty="0"/>
               <a:t>게임 프로그래밍 교육과정</a:t>
             </a:r>
-            <a:endParaRPr lang="ko-KR" altLang="en-US" dirty="0"/>
           </a:p>
         </p:txBody>
       </p:sp>
@@ -12527,22 +11882,21 @@
           <a:lstStyle/>
           <a:p>
             <a:r>
-              <a:rPr lang="en-US" altLang="ko-KR" b="0" dirty="0"/>
+              <a:rPr lang="en-US" altLang="ko-KR" dirty="0"/>
               <a:t>8.1.11 1</a:t>
             </a:r>
             <a:r>
-              <a:rPr lang="ko-KR" altLang="en-US" b="0" dirty="0"/>
+              <a:rPr lang="ko-KR" altLang="en-US" dirty="0"/>
               <a:t>차원 배열 접근 </a:t>
             </a:r>
             <a:r>
-              <a:rPr lang="en-US" altLang="ko-KR" b="0" dirty="0"/>
+              <a:rPr lang="en-US" altLang="ko-KR" dirty="0"/>
               <a:t>– </a:t>
             </a:r>
             <a:r>
-              <a:rPr lang="ko-KR" altLang="en-US" b="0" dirty="0"/>
+              <a:rPr lang="ko-KR" altLang="en-US" dirty="0"/>
               <a:t>삽입 정렬</a:t>
             </a:r>
-            <a:endParaRPr lang="ko-KR" altLang="en-US" dirty="0"/>
           </a:p>
         </p:txBody>
       </p:sp>
@@ -12693,10 +12047,9 @@
               <a:defRPr/>
             </a:pPr>
             <a:r>
-              <a:rPr lang="ko-KR" altLang="en-US"/>
+              <a:rPr lang="ko-KR" altLang="en-US" dirty="0"/>
               <a:t>게임 프로그래밍 교육과정</a:t>
             </a:r>
-            <a:endParaRPr lang="ko-KR" altLang="en-US" dirty="0"/>
           </a:p>
         </p:txBody>
       </p:sp>
@@ -12794,27 +12147,7 @@
                 <a:effectLst/>
                 <a:latin typeface="Consolas" panose="020B0609020204030204" pitchFamily="49" charset="0"/>
               </a:rPr>
-              <a:t>; i &lt; </a:t>
-            </a:r>
-            <a:r>
-              <a:rPr lang="en-US" altLang="ko-KR" sz="1600" b="1" i="0" u="none" strike="noStrike" dirty="0" err="1">
-                <a:solidFill>
-                  <a:srgbClr val="383A42"/>
-                </a:solidFill>
-                <a:effectLst/>
-                <a:latin typeface="Consolas" panose="020B0609020204030204" pitchFamily="49" charset="0"/>
-              </a:rPr>
-              <a:t>arr_count</a:t>
-            </a:r>
-            <a:r>
-              <a:rPr lang="en-US" altLang="ko-KR" sz="1600" b="1" i="0" u="none" strike="noStrike" dirty="0">
-                <a:solidFill>
-                  <a:srgbClr val="383A42"/>
-                </a:solidFill>
-                <a:effectLst/>
-                <a:latin typeface="Consolas" panose="020B0609020204030204" pitchFamily="49" charset="0"/>
-              </a:rPr>
-              <a:t>; ++i)</a:t>
+              <a:t>; i &lt; arr_count; ++i)</a:t>
             </a:r>
             <a:br>
               <a:rPr lang="en-US" altLang="ko-KR" sz="1600" b="1" i="0" u="none" strike="noStrike" dirty="0">
@@ -13335,22 +12668,21 @@
           <a:lstStyle/>
           <a:p>
             <a:r>
-              <a:rPr lang="en-US" altLang="ko-KR" b="0" dirty="0"/>
+              <a:rPr lang="en-US" altLang="ko-KR" dirty="0"/>
               <a:t>8.1.11 1</a:t>
             </a:r>
             <a:r>
-              <a:rPr lang="ko-KR" altLang="en-US" b="0" dirty="0"/>
+              <a:rPr lang="ko-KR" altLang="en-US" dirty="0"/>
               <a:t>차원 배열 접근 </a:t>
             </a:r>
             <a:r>
-              <a:rPr lang="en-US" altLang="ko-KR" b="0" dirty="0"/>
+              <a:rPr lang="en-US" altLang="ko-KR" dirty="0"/>
               <a:t>– </a:t>
             </a:r>
             <a:r>
-              <a:rPr lang="ko-KR" altLang="en-US" b="0" dirty="0"/>
+              <a:rPr lang="ko-KR" altLang="en-US" dirty="0"/>
               <a:t>삽입 정렬</a:t>
             </a:r>
-            <a:endParaRPr lang="ko-KR" altLang="en-US" dirty="0"/>
           </a:p>
         </p:txBody>
       </p:sp>
@@ -13413,10 +12745,9 @@
               <a:defRPr/>
             </a:pPr>
             <a:r>
-              <a:rPr lang="ko-KR" altLang="en-US"/>
+              <a:rPr lang="ko-KR" altLang="en-US" dirty="0"/>
               <a:t>게임 프로그래밍 교육과정</a:t>
             </a:r>
-            <a:endParaRPr lang="ko-KR" altLang="en-US" dirty="0"/>
           </a:p>
         </p:txBody>
       </p:sp>
@@ -14311,14 +13642,13 @@
           <a:lstStyle/>
           <a:p>
             <a:r>
-              <a:rPr lang="en-US" altLang="ko-KR" b="0" dirty="0"/>
+              <a:rPr lang="en-US" altLang="ko-KR" dirty="0"/>
               <a:t>08. </a:t>
             </a:r>
             <a:r>
-              <a:rPr lang="ko-KR" altLang="en-US" b="0" dirty="0"/>
+              <a:rPr lang="ko-KR" altLang="en-US" dirty="0"/>
               <a:t>배열</a:t>
             </a:r>
-            <a:endParaRPr lang="ko-KR" altLang="en-US" dirty="0"/>
           </a:p>
         </p:txBody>
       </p:sp>
@@ -14540,14 +13870,13 @@
           <a:lstStyle/>
           <a:p>
             <a:r>
-              <a:rPr lang="en-US" altLang="ko-KR" b="0" dirty="0"/>
+              <a:rPr lang="en-US" altLang="ko-KR" dirty="0"/>
               <a:t>8.2  </a:t>
             </a:r>
             <a:r>
-              <a:rPr lang="ko-KR" altLang="en-US" b="0" dirty="0"/>
+              <a:rPr lang="ko-KR" altLang="en-US" dirty="0"/>
               <a:t>다차원 배열</a:t>
             </a:r>
-            <a:endParaRPr lang="ko-KR" altLang="en-US" dirty="0"/>
           </a:p>
         </p:txBody>
       </p:sp>
@@ -14684,10 +14013,9 @@
               <a:defRPr/>
             </a:pPr>
             <a:r>
-              <a:rPr lang="ko-KR" altLang="en-US"/>
+              <a:rPr lang="ko-KR" altLang="en-US" dirty="0"/>
               <a:t>게임 프로그래밍 교육과정</a:t>
             </a:r>
-            <a:endParaRPr lang="ko-KR" altLang="en-US" dirty="0"/>
           </a:p>
         </p:txBody>
       </p:sp>
@@ -14706,7 +14034,7 @@
         <p:spPr>
           <a:xfrm>
             <a:off x="539750" y="3140968"/>
-            <a:ext cx="7992690" cy="400110"/>
+            <a:ext cx="7992690" cy="523220"/>
           </a:xfrm>
           <a:prstGeom prst="rect">
             <a:avLst/>
@@ -14728,6 +14056,16 @@
           <a:lstStyle/>
           <a:p>
             <a:r>
+              <a:rPr lang="ko-KR" altLang="en-US" sz="2800" b="1" i="0" u="none" strike="noStrike" dirty="0">
+                <a:solidFill>
+                  <a:srgbClr val="0000FF"/>
+                </a:solidFill>
+                <a:effectLst/>
+                <a:latin typeface="Consolas" panose="020B0609020204030204" pitchFamily="49" charset="0"/>
+              </a:rPr>
+              <a:t>자료형</a:t>
+            </a:r>
+            <a:r>
               <a:rPr lang="ko-KR" altLang="en-US" sz="2000" b="1" i="0" u="none" strike="noStrike" dirty="0">
                 <a:solidFill>
                   <a:srgbClr val="383A42"/>
@@ -14735,12 +14073,22 @@
                 <a:effectLst/>
                 <a:latin typeface="Consolas" panose="020B0609020204030204" pitchFamily="49" charset="0"/>
               </a:rPr>
-              <a:t>자료형 배열</a:t>
+              <a:t> </a:t>
+            </a:r>
+            <a:r>
+              <a:rPr lang="ko-KR" altLang="en-US" sz="2000" b="1" i="0" u="none" strike="noStrike" dirty="0">
+                <a:solidFill>
+                  <a:srgbClr val="FF0000"/>
+                </a:solidFill>
+                <a:effectLst/>
+                <a:latin typeface="Consolas" panose="020B0609020204030204" pitchFamily="49" charset="0"/>
+              </a:rPr>
+              <a:t>배열</a:t>
             </a:r>
             <a:r>
               <a:rPr lang="en-US" altLang="ko-KR" sz="2000" b="1" i="0" u="none" strike="noStrike" dirty="0">
                 <a:solidFill>
-                  <a:srgbClr val="383A42"/>
+                  <a:srgbClr val="FF0000"/>
                 </a:solidFill>
                 <a:effectLst/>
                 <a:latin typeface="Consolas" panose="020B0609020204030204" pitchFamily="49" charset="0"/>
@@ -14750,7 +14098,7 @@
             <a:r>
               <a:rPr lang="ko-KR" altLang="en-US" sz="2000" b="1" i="0" u="none" strike="noStrike" dirty="0">
                 <a:solidFill>
-                  <a:srgbClr val="383A42"/>
+                  <a:srgbClr val="FF0000"/>
                 </a:solidFill>
                 <a:effectLst/>
                 <a:latin typeface="Consolas" panose="020B0609020204030204" pitchFamily="49" charset="0"/>
@@ -14780,7 +14128,7 @@
             <a:r>
               <a:rPr lang="ko-KR" altLang="en-US" sz="2000" b="1" i="0" u="none" strike="noStrike" dirty="0">
                 <a:solidFill>
-                  <a:srgbClr val="383A42"/>
+                  <a:srgbClr val="7030A0"/>
                 </a:solidFill>
                 <a:effectLst/>
                 <a:latin typeface="Consolas" panose="020B0609020204030204" pitchFamily="49" charset="0"/>
@@ -14790,7 +14138,7 @@
             <a:r>
               <a:rPr lang="en-US" altLang="ko-KR" sz="2000" b="1" i="0" u="none" strike="noStrike" dirty="0">
                 <a:solidFill>
-                  <a:srgbClr val="383A42"/>
+                  <a:srgbClr val="7030A0"/>
                 </a:solidFill>
                 <a:effectLst/>
                 <a:latin typeface="Consolas" panose="020B0609020204030204" pitchFamily="49" charset="0"/>
@@ -14800,7 +14148,7 @@
             <a:r>
               <a:rPr lang="ko-KR" altLang="en-US" sz="2000" b="1" i="0" u="none" strike="noStrike" dirty="0">
                 <a:solidFill>
-                  <a:srgbClr val="383A42"/>
+                  <a:srgbClr val="7030A0"/>
                 </a:solidFill>
                 <a:effectLst/>
                 <a:latin typeface="Consolas" panose="020B0609020204030204" pitchFamily="49" charset="0"/>
@@ -14830,7 +14178,7 @@
             <a:r>
               <a:rPr lang="ko-KR" altLang="en-US" sz="2000" b="1" i="0" u="none" strike="noStrike" dirty="0">
                 <a:solidFill>
-                  <a:srgbClr val="383A42"/>
+                  <a:srgbClr val="7030A0"/>
                 </a:solidFill>
                 <a:effectLst/>
                 <a:latin typeface="Consolas" panose="020B0609020204030204" pitchFamily="49" charset="0"/>
@@ -14840,7 +14188,7 @@
             <a:r>
               <a:rPr lang="en-US" altLang="ko-KR" sz="2000" b="1" i="0" u="none" strike="noStrike" dirty="0">
                 <a:solidFill>
-                  <a:srgbClr val="383A42"/>
+                  <a:srgbClr val="7030A0"/>
                 </a:solidFill>
                 <a:effectLst/>
                 <a:latin typeface="Consolas" panose="020B0609020204030204" pitchFamily="49" charset="0"/>
@@ -14850,7 +14198,7 @@
             <a:r>
               <a:rPr lang="ko-KR" altLang="en-US" sz="2000" b="1" i="0" u="none" strike="noStrike" dirty="0">
                 <a:solidFill>
-                  <a:srgbClr val="383A42"/>
+                  <a:srgbClr val="7030A0"/>
                 </a:solidFill>
                 <a:effectLst/>
                 <a:latin typeface="Consolas" panose="020B0609020204030204" pitchFamily="49" charset="0"/>
@@ -14870,7 +14218,7 @@
             <a:r>
               <a:rPr lang="ko-KR" altLang="en-US" sz="2000" b="1" i="0" u="none" strike="noStrike" dirty="0">
                 <a:solidFill>
-                  <a:srgbClr val="383A42"/>
+                  <a:srgbClr val="7030A0"/>
                 </a:solidFill>
                 <a:effectLst/>
                 <a:latin typeface="Consolas" panose="020B0609020204030204" pitchFamily="49" charset="0"/>
@@ -14880,7 +14228,7 @@
             <a:r>
               <a:rPr lang="en-US" altLang="ko-KR" sz="2000" b="1" i="0" u="none" strike="noStrike" dirty="0">
                 <a:solidFill>
-                  <a:srgbClr val="383A42"/>
+                  <a:srgbClr val="7030A0"/>
                 </a:solidFill>
                 <a:effectLst/>
                 <a:latin typeface="Consolas" panose="020B0609020204030204" pitchFamily="49" charset="0"/>
@@ -14890,7 +14238,7 @@
             <a:r>
               <a:rPr lang="ko-KR" altLang="en-US" sz="2000" b="1" i="0" u="none" strike="noStrike" dirty="0">
                 <a:solidFill>
-                  <a:srgbClr val="383A42"/>
+                  <a:srgbClr val="7030A0"/>
                 </a:solidFill>
                 <a:effectLst/>
                 <a:latin typeface="Consolas" panose="020B0609020204030204" pitchFamily="49" charset="0"/>
@@ -14925,8 +14273,8 @@
         </p:nvSpPr>
         <p:spPr>
           <a:xfrm>
-            <a:off x="539751" y="4725144"/>
-            <a:ext cx="7992690" cy="1477328"/>
+            <a:off x="611560" y="4725144"/>
+            <a:ext cx="8317432" cy="1323439"/>
           </a:xfrm>
           <a:prstGeom prst="rect">
             <a:avLst/>
@@ -14948,7 +14296,7 @@
           <a:lstStyle/>
           <a:p>
             <a:r>
-              <a:rPr lang="ko-KR" altLang="en-US" sz="1800" b="1" i="0" u="none" strike="noStrike" dirty="0">
+              <a:rPr lang="ko-KR" altLang="en-US" sz="1600" b="1" i="0" u="none" strike="noStrike" dirty="0">
                 <a:solidFill>
                   <a:srgbClr val="383A42"/>
                 </a:solidFill>
@@ -14958,17 +14306,17 @@
               <a:t>원소 주소 </a:t>
             </a:r>
             <a:r>
-              <a:rPr lang="en-US" altLang="ko-KR" sz="1800" b="1" i="0" u="none" strike="noStrike" dirty="0">
-                <a:solidFill>
-                  <a:srgbClr val="383A42"/>
-                </a:solidFill>
-                <a:effectLst/>
-                <a:latin typeface="Consolas" panose="020B0609020204030204" pitchFamily="49" charset="0"/>
-              </a:rPr>
-              <a:t>= </a:t>
-            </a:r>
-            <a:r>
-              <a:rPr lang="ko-KR" altLang="en-US" sz="1800" b="1" i="0" u="none" strike="noStrike" dirty="0">
+              <a:rPr lang="en-US" altLang="ko-KR" sz="1600" b="1" i="0" u="none" strike="noStrike" dirty="0">
+                <a:solidFill>
+                  <a:srgbClr val="383A42"/>
+                </a:solidFill>
+                <a:effectLst/>
+                <a:latin typeface="Consolas" panose="020B0609020204030204" pitchFamily="49" charset="0"/>
+              </a:rPr>
+              <a:t>= (</a:t>
+            </a:r>
+            <a:r>
+              <a:rPr lang="ko-KR" altLang="en-US" sz="1600" b="1" i="0" u="none" strike="noStrike" dirty="0">
                 <a:solidFill>
                   <a:srgbClr val="383A42"/>
                 </a:solidFill>
@@ -14978,7 +14326,7 @@
               <a:t>배열</a:t>
             </a:r>
             <a:r>
-              <a:rPr lang="en-US" altLang="ko-KR" sz="1800" b="1" i="0" u="none" strike="noStrike" dirty="0">
+              <a:rPr lang="en-US" altLang="ko-KR" sz="1600" b="1" i="0" u="none" strike="noStrike" dirty="0">
                 <a:solidFill>
                   <a:srgbClr val="383A42"/>
                 </a:solidFill>
@@ -14988,7 +14336,7 @@
               <a:t>_</a:t>
             </a:r>
             <a:r>
-              <a:rPr lang="ko-KR" altLang="en-US" sz="1800" b="1" i="0" u="none" strike="noStrike" dirty="0">
+              <a:rPr lang="ko-KR" altLang="en-US" sz="1600" b="1" i="0" u="none" strike="noStrike" dirty="0">
                 <a:solidFill>
                   <a:srgbClr val="383A42"/>
                 </a:solidFill>
@@ -14997,7 +14345,7 @@
               </a:rPr>
               <a:t>이름</a:t>
             </a:r>
-            <a:endParaRPr lang="en-US" altLang="ko-KR" sz="1800" b="1" i="0" u="none" strike="noStrike" dirty="0">
+            <a:endParaRPr lang="en-US" altLang="ko-KR" sz="1600" b="1" i="0" u="none" strike="noStrike" dirty="0">
               <a:solidFill>
                 <a:srgbClr val="383A42"/>
               </a:solidFill>
@@ -15007,7 +14355,7 @@
           </a:p>
           <a:p>
             <a:r>
-              <a:rPr lang="en-US" altLang="ko-KR" sz="1800" b="1" dirty="0">
+              <a:rPr lang="en-US" altLang="ko-KR" sz="1600" b="1" dirty="0">
                 <a:solidFill>
                   <a:srgbClr val="383A42"/>
                 </a:solidFill>
@@ -15016,7 +14364,7 @@
               <a:t>       </a:t>
             </a:r>
             <a:r>
-              <a:rPr lang="en-US" altLang="ko-KR" sz="1800" b="1" i="0" u="none" strike="noStrike" dirty="0">
+              <a:rPr lang="en-US" altLang="ko-KR" sz="1600" b="1" i="0" u="none" strike="noStrike" dirty="0">
                 <a:solidFill>
                   <a:srgbClr val="383A42"/>
                 </a:solidFill>
@@ -15026,7 +14374,7 @@
               <a:t>+ (...(((</a:t>
             </a:r>
             <a:r>
-              <a:rPr lang="en-US" altLang="ko-KR" sz="1800" b="1" i="0" u="none" strike="noStrike" dirty="0">
+              <a:rPr lang="en-US" altLang="ko-KR" sz="1600" b="1" i="0" u="none" strike="noStrike" dirty="0">
                 <a:solidFill>
                   <a:srgbClr val="986801"/>
                 </a:solidFill>
@@ -15036,7 +14384,7 @@
               <a:t>1</a:t>
             </a:r>
             <a:r>
-              <a:rPr lang="ko-KR" altLang="en-US" sz="1800" b="1" i="0" u="none" strike="noStrike" dirty="0">
+              <a:rPr lang="ko-KR" altLang="en-US" sz="1600" b="1" i="0" u="none" strike="noStrike" dirty="0">
                 <a:solidFill>
                   <a:srgbClr val="383A42"/>
                 </a:solidFill>
@@ -15046,7 +14394,7 @@
               <a:t>차원</a:t>
             </a:r>
             <a:r>
-              <a:rPr lang="en-US" altLang="ko-KR" sz="1800" b="1" i="0" u="none" strike="noStrike" dirty="0">
+              <a:rPr lang="en-US" altLang="ko-KR" sz="1600" b="1" i="0" u="none" strike="noStrike" dirty="0">
                 <a:solidFill>
                   <a:srgbClr val="383A42"/>
                 </a:solidFill>
@@ -15056,7 +14404,7 @@
               <a:t>_</a:t>
             </a:r>
             <a:r>
-              <a:rPr lang="ko-KR" altLang="en-US" sz="1800" b="1" i="0" u="none" strike="noStrike" dirty="0">
+              <a:rPr lang="ko-KR" altLang="en-US" sz="1600" b="1" i="0" u="none" strike="noStrike" dirty="0">
                 <a:solidFill>
                   <a:srgbClr val="383A42"/>
                 </a:solidFill>
@@ -15066,7 +14414,7 @@
               <a:t>인덱스 </a:t>
             </a:r>
             <a:r>
-              <a:rPr lang="en-US" altLang="ko-KR" sz="1800" b="1" i="0" u="none" strike="noStrike" dirty="0">
+              <a:rPr lang="en-US" altLang="ko-KR" sz="1600" b="1" i="0" u="none" strike="noStrike" dirty="0">
                 <a:solidFill>
                   <a:srgbClr val="383A42"/>
                 </a:solidFill>
@@ -15076,7 +14424,7 @@
               <a:t>× </a:t>
             </a:r>
             <a:r>
-              <a:rPr lang="en-US" altLang="ko-KR" sz="1800" b="1" i="0" u="none" strike="noStrike" dirty="0">
+              <a:rPr lang="en-US" altLang="ko-KR" sz="1600" b="1" i="0" u="none" strike="noStrike" dirty="0">
                 <a:solidFill>
                   <a:srgbClr val="986801"/>
                 </a:solidFill>
@@ -15086,7 +14434,7 @@
               <a:t>2</a:t>
             </a:r>
             <a:r>
-              <a:rPr lang="ko-KR" altLang="en-US" sz="1800" b="1" i="0" u="none" strike="noStrike" dirty="0">
+              <a:rPr lang="ko-KR" altLang="en-US" sz="1600" b="1" i="0" u="none" strike="noStrike" dirty="0">
                 <a:solidFill>
                   <a:srgbClr val="383A42"/>
                 </a:solidFill>
@@ -15096,7 +14444,7 @@
               <a:t>차원</a:t>
             </a:r>
             <a:r>
-              <a:rPr lang="en-US" altLang="ko-KR" sz="1800" b="1" i="0" u="none" strike="noStrike" dirty="0">
+              <a:rPr lang="en-US" altLang="ko-KR" sz="1600" b="1" i="0" u="none" strike="noStrike" dirty="0">
                 <a:solidFill>
                   <a:srgbClr val="383A42"/>
                 </a:solidFill>
@@ -15106,7 +14454,7 @@
               <a:t>_</a:t>
             </a:r>
             <a:r>
-              <a:rPr lang="ko-KR" altLang="en-US" sz="1800" b="1" i="0" u="none" strike="noStrike" dirty="0">
+              <a:rPr lang="ko-KR" altLang="en-US" sz="1600" b="1" i="0" u="none" strike="noStrike" dirty="0">
                 <a:solidFill>
                   <a:srgbClr val="383A42"/>
                 </a:solidFill>
@@ -15116,7 +14464,7 @@
               <a:t>개수 </a:t>
             </a:r>
             <a:r>
-              <a:rPr lang="en-US" altLang="ko-KR" sz="1800" b="1" i="0" u="none" strike="noStrike" dirty="0">
+              <a:rPr lang="en-US" altLang="ko-KR" sz="1600" b="1" i="0" u="none" strike="noStrike" dirty="0">
                 <a:solidFill>
                   <a:srgbClr val="383A42"/>
                 </a:solidFill>
@@ -15126,7 +14474,7 @@
               <a:t>+ </a:t>
             </a:r>
             <a:r>
-              <a:rPr lang="en-US" altLang="ko-KR" sz="1800" b="1" i="0" u="none" strike="noStrike" dirty="0">
+              <a:rPr lang="en-US" altLang="ko-KR" sz="1600" b="1" i="0" u="none" strike="noStrike" dirty="0">
                 <a:solidFill>
                   <a:srgbClr val="986801"/>
                 </a:solidFill>
@@ -15136,7 +14484,7 @@
               <a:t>2</a:t>
             </a:r>
             <a:r>
-              <a:rPr lang="ko-KR" altLang="en-US" sz="1800" b="1" i="0" u="none" strike="noStrike" dirty="0">
+              <a:rPr lang="ko-KR" altLang="en-US" sz="1600" b="1" i="0" u="none" strike="noStrike" dirty="0">
                 <a:solidFill>
                   <a:srgbClr val="383A42"/>
                 </a:solidFill>
@@ -15146,7 +14494,7 @@
               <a:t>차원</a:t>
             </a:r>
             <a:r>
-              <a:rPr lang="en-US" altLang="ko-KR" sz="1800" b="1" i="0" u="none" strike="noStrike" dirty="0">
+              <a:rPr lang="en-US" altLang="ko-KR" sz="1600" b="1" i="0" u="none" strike="noStrike" dirty="0">
                 <a:solidFill>
                   <a:srgbClr val="383A42"/>
                 </a:solidFill>
@@ -15156,7 +14504,7 @@
               <a:t>_</a:t>
             </a:r>
             <a:r>
-              <a:rPr lang="ko-KR" altLang="en-US" sz="1800" b="1" i="0" u="none" strike="noStrike" dirty="0">
+              <a:rPr lang="ko-KR" altLang="en-US" sz="1600" b="1" i="0" u="none" strike="noStrike" dirty="0">
                 <a:solidFill>
                   <a:srgbClr val="383A42"/>
                 </a:solidFill>
@@ -15166,7 +14514,7 @@
               <a:t>인덱스</a:t>
             </a:r>
             <a:r>
-              <a:rPr lang="en-US" altLang="ko-KR" sz="1800" b="1" i="0" u="none" strike="noStrike" dirty="0">
+              <a:rPr lang="en-US" altLang="ko-KR" sz="1600" b="1" i="0" u="none" strike="noStrike" dirty="0">
                 <a:solidFill>
                   <a:srgbClr val="383A42"/>
                 </a:solidFill>
@@ -15176,7 +14524,7 @@
               <a:t>)</a:t>
             </a:r>
             <a:br>
-              <a:rPr lang="en-US" altLang="ko-KR" sz="1800" b="1" i="0" u="none" strike="noStrike" dirty="0">
+              <a:rPr lang="en-US" altLang="ko-KR" sz="1600" b="1" i="0" u="none" strike="noStrike" dirty="0">
                 <a:solidFill>
                   <a:srgbClr val="383A42"/>
                 </a:solidFill>
@@ -15185,7 +14533,7 @@
               </a:rPr>
             </a:br>
             <a:r>
-              <a:rPr lang="en-US" altLang="ko-KR" sz="1800" b="1" i="0" u="none" strike="noStrike" dirty="0">
+              <a:rPr lang="en-US" altLang="ko-KR" sz="1600" b="1" i="0" u="none" strike="noStrike" dirty="0">
                 <a:solidFill>
                   <a:srgbClr val="383A42"/>
                 </a:solidFill>
@@ -15195,7 +14543,7 @@
               <a:t>                            × </a:t>
             </a:r>
             <a:r>
-              <a:rPr lang="en-US" altLang="ko-KR" sz="1800" b="1" i="0" u="none" strike="noStrike" dirty="0">
+              <a:rPr lang="en-US" altLang="ko-KR" sz="1600" b="1" i="0" u="none" strike="noStrike" dirty="0">
                 <a:solidFill>
                   <a:srgbClr val="986801"/>
                 </a:solidFill>
@@ -15205,7 +14553,7 @@
               <a:t>3</a:t>
             </a:r>
             <a:r>
-              <a:rPr lang="ko-KR" altLang="en-US" sz="1800" b="1" i="0" u="none" strike="noStrike" dirty="0">
+              <a:rPr lang="ko-KR" altLang="en-US" sz="1600" b="1" i="0" u="none" strike="noStrike" dirty="0">
                 <a:solidFill>
                   <a:srgbClr val="383A42"/>
                 </a:solidFill>
@@ -15215,7 +14563,7 @@
               <a:t>차원</a:t>
             </a:r>
             <a:r>
-              <a:rPr lang="en-US" altLang="ko-KR" sz="1800" b="1" i="0" u="none" strike="noStrike" dirty="0">
+              <a:rPr lang="en-US" altLang="ko-KR" sz="1600" b="1" i="0" u="none" strike="noStrike" dirty="0">
                 <a:solidFill>
                   <a:srgbClr val="383A42"/>
                 </a:solidFill>
@@ -15225,7 +14573,7 @@
               <a:t>_</a:t>
             </a:r>
             <a:r>
-              <a:rPr lang="ko-KR" altLang="en-US" sz="1800" b="1" i="0" u="none" strike="noStrike" dirty="0">
+              <a:rPr lang="ko-KR" altLang="en-US" sz="1600" b="1" i="0" u="none" strike="noStrike" dirty="0">
                 <a:solidFill>
                   <a:srgbClr val="383A42"/>
                 </a:solidFill>
@@ -15235,7 +14583,7 @@
               <a:t>개수 </a:t>
             </a:r>
             <a:r>
-              <a:rPr lang="en-US" altLang="ko-KR" sz="1800" b="1" i="0" u="none" strike="noStrike" dirty="0">
+              <a:rPr lang="en-US" altLang="ko-KR" sz="1600" b="1" i="0" u="none" strike="noStrike" dirty="0">
                 <a:solidFill>
                   <a:srgbClr val="383A42"/>
                 </a:solidFill>
@@ -15245,7 +14593,7 @@
               <a:t>+ </a:t>
             </a:r>
             <a:r>
-              <a:rPr lang="en-US" altLang="ko-KR" sz="1800" b="1" i="0" u="none" strike="noStrike" dirty="0">
+              <a:rPr lang="en-US" altLang="ko-KR" sz="1600" b="1" i="0" u="none" strike="noStrike" dirty="0">
                 <a:solidFill>
                   <a:srgbClr val="986801"/>
                 </a:solidFill>
@@ -15255,7 +14603,7 @@
               <a:t>3</a:t>
             </a:r>
             <a:r>
-              <a:rPr lang="ko-KR" altLang="en-US" sz="1800" b="1" i="0" u="none" strike="noStrike" dirty="0">
+              <a:rPr lang="ko-KR" altLang="en-US" sz="1600" b="1" i="0" u="none" strike="noStrike" dirty="0">
                 <a:solidFill>
                   <a:srgbClr val="383A42"/>
                 </a:solidFill>
@@ -15265,7 +14613,7 @@
               <a:t>차원</a:t>
             </a:r>
             <a:r>
-              <a:rPr lang="en-US" altLang="ko-KR" sz="1800" b="1" i="0" u="none" strike="noStrike" dirty="0">
+              <a:rPr lang="en-US" altLang="ko-KR" sz="1600" b="1" i="0" u="none" strike="noStrike" dirty="0">
                 <a:solidFill>
                   <a:srgbClr val="383A42"/>
                 </a:solidFill>
@@ -15275,7 +14623,7 @@
               <a:t>_</a:t>
             </a:r>
             <a:r>
-              <a:rPr lang="ko-KR" altLang="en-US" sz="1800" b="1" i="0" u="none" strike="noStrike" dirty="0">
+              <a:rPr lang="ko-KR" altLang="en-US" sz="1600" b="1" i="0" u="none" strike="noStrike" dirty="0">
                 <a:solidFill>
                   <a:srgbClr val="383A42"/>
                 </a:solidFill>
@@ -15285,7 +14633,7 @@
               <a:t>인덱스</a:t>
             </a:r>
             <a:r>
-              <a:rPr lang="en-US" altLang="ko-KR" sz="1800" b="1" i="0" u="none" strike="noStrike" dirty="0">
+              <a:rPr lang="en-US" altLang="ko-KR" sz="1600" b="1" i="0" u="none" strike="noStrike" dirty="0">
                 <a:solidFill>
                   <a:srgbClr val="383A42"/>
                 </a:solidFill>
@@ -15295,7 +14643,7 @@
               <a:t>)</a:t>
             </a:r>
             <a:br>
-              <a:rPr lang="en-US" altLang="ko-KR" sz="1800" b="1" i="0" u="none" strike="noStrike" dirty="0">
+              <a:rPr lang="en-US" altLang="ko-KR" sz="1600" b="1" i="0" u="none" strike="noStrike" dirty="0">
                 <a:solidFill>
                   <a:srgbClr val="383A42"/>
                 </a:solidFill>
@@ -15304,7 +14652,7 @@
               </a:rPr>
             </a:br>
             <a:r>
-              <a:rPr lang="en-US" altLang="ko-KR" sz="1800" b="1" i="0" u="none" strike="noStrike" dirty="0">
+              <a:rPr lang="en-US" altLang="ko-KR" sz="1600" b="1" i="0" u="none" strike="noStrike" dirty="0">
                 <a:solidFill>
                   <a:srgbClr val="383A42"/>
                 </a:solidFill>
@@ -15314,7 +14662,7 @@
               <a:t>                            × </a:t>
             </a:r>
             <a:r>
-              <a:rPr lang="en-US" altLang="ko-KR" sz="1800" b="1" i="0" u="none" strike="noStrike" dirty="0">
+              <a:rPr lang="en-US" altLang="ko-KR" sz="1600" b="1" i="0" u="none" strike="noStrike" dirty="0">
                 <a:solidFill>
                   <a:srgbClr val="986801"/>
                 </a:solidFill>
@@ -15324,7 +14672,7 @@
               <a:t>4</a:t>
             </a:r>
             <a:r>
-              <a:rPr lang="ko-KR" altLang="en-US" sz="1800" b="1" i="0" u="none" strike="noStrike" dirty="0">
+              <a:rPr lang="ko-KR" altLang="en-US" sz="1600" b="1" i="0" u="none" strike="noStrike" dirty="0">
                 <a:solidFill>
                   <a:srgbClr val="383A42"/>
                 </a:solidFill>
@@ -15334,7 +14682,7 @@
               <a:t>차원</a:t>
             </a:r>
             <a:r>
-              <a:rPr lang="en-US" altLang="ko-KR" sz="1800" b="1" i="0" u="none" strike="noStrike" dirty="0">
+              <a:rPr lang="en-US" altLang="ko-KR" sz="1600" b="1" i="0" u="none" strike="noStrike" dirty="0">
                 <a:solidFill>
                   <a:srgbClr val="383A42"/>
                 </a:solidFill>
@@ -15344,7 +14692,7 @@
               <a:t>_</a:t>
             </a:r>
             <a:r>
-              <a:rPr lang="ko-KR" altLang="en-US" sz="1800" b="1" i="0" u="none" strike="noStrike" dirty="0">
+              <a:rPr lang="ko-KR" altLang="en-US" sz="1600" b="1" i="0" u="none" strike="noStrike" dirty="0">
                 <a:solidFill>
                   <a:srgbClr val="383A42"/>
                 </a:solidFill>
@@ -15354,7 +14702,7 @@
               <a:t>개수 </a:t>
             </a:r>
             <a:r>
-              <a:rPr lang="en-US" altLang="ko-KR" sz="1800" b="1" i="0" u="none" strike="noStrike" dirty="0">
+              <a:rPr lang="en-US" altLang="ko-KR" sz="1600" b="1" i="0" u="none" strike="noStrike" dirty="0">
                 <a:solidFill>
                   <a:srgbClr val="383A42"/>
                 </a:solidFill>
@@ -15364,7 +14712,7 @@
               <a:t>+ </a:t>
             </a:r>
             <a:r>
-              <a:rPr lang="en-US" altLang="ko-KR" sz="1800" b="1" i="0" u="none" strike="noStrike" dirty="0">
+              <a:rPr lang="en-US" altLang="ko-KR" sz="1600" b="1" i="0" u="none" strike="noStrike" dirty="0">
                 <a:solidFill>
                   <a:srgbClr val="986801"/>
                 </a:solidFill>
@@ -15374,7 +14722,7 @@
               <a:t>4</a:t>
             </a:r>
             <a:r>
-              <a:rPr lang="ko-KR" altLang="en-US" sz="1800" b="1" i="0" u="none" strike="noStrike" dirty="0">
+              <a:rPr lang="ko-KR" altLang="en-US" sz="1600" b="1" i="0" u="none" strike="noStrike" dirty="0">
                 <a:solidFill>
                   <a:srgbClr val="383A42"/>
                 </a:solidFill>
@@ -15384,7 +14732,7 @@
               <a:t>차원</a:t>
             </a:r>
             <a:r>
-              <a:rPr lang="en-US" altLang="ko-KR" sz="1800" b="1" i="0" u="none" strike="noStrike" dirty="0">
+              <a:rPr lang="en-US" altLang="ko-KR" sz="1600" b="1" i="0" u="none" strike="noStrike" dirty="0">
                 <a:solidFill>
                   <a:srgbClr val="383A42"/>
                 </a:solidFill>
@@ -15394,7 +14742,7 @@
               <a:t>_</a:t>
             </a:r>
             <a:r>
-              <a:rPr lang="ko-KR" altLang="en-US" sz="1800" b="1" i="0" u="none" strike="noStrike" dirty="0">
+              <a:rPr lang="ko-KR" altLang="en-US" sz="1600" b="1" i="0" u="none" strike="noStrike" dirty="0">
                 <a:solidFill>
                   <a:srgbClr val="383A42"/>
                 </a:solidFill>
@@ -15404,7 +14752,7 @@
               <a:t>인덱스</a:t>
             </a:r>
             <a:r>
-              <a:rPr lang="en-US" altLang="ko-KR" sz="1800" b="1" i="0" u="none" strike="noStrike" dirty="0">
+              <a:rPr lang="en-US" altLang="ko-KR" sz="1600" b="1" i="0" u="none" strike="noStrike" dirty="0">
                 <a:solidFill>
                   <a:srgbClr val="383A42"/>
                 </a:solidFill>
@@ -15414,7 +14762,7 @@
               <a:t>) ... )</a:t>
             </a:r>
             <a:br>
-              <a:rPr lang="en-US" altLang="ko-KR" sz="1800" b="1" i="0" u="none" strike="noStrike" dirty="0">
+              <a:rPr lang="en-US" altLang="ko-KR" sz="1600" b="1" i="0" u="none" strike="noStrike" dirty="0">
                 <a:solidFill>
                   <a:srgbClr val="383A42"/>
                 </a:solidFill>
@@ -15423,7 +14771,7 @@
               </a:rPr>
             </a:br>
             <a:r>
-              <a:rPr lang="en-US" altLang="ko-KR" sz="1800" b="1" i="0" u="none" strike="noStrike" dirty="0">
+              <a:rPr lang="en-US" altLang="ko-KR" sz="1600" b="1" i="0" u="none" strike="noStrike" dirty="0">
                 <a:solidFill>
                   <a:srgbClr val="383A42"/>
                 </a:solidFill>
@@ -15433,7 +14781,7 @@
               <a:t>                            × n</a:t>
             </a:r>
             <a:r>
-              <a:rPr lang="ko-KR" altLang="en-US" sz="1800" b="1" i="0" u="none" strike="noStrike" dirty="0">
+              <a:rPr lang="ko-KR" altLang="en-US" sz="1600" b="1" i="0" u="none" strike="noStrike" dirty="0">
                 <a:solidFill>
                   <a:srgbClr val="383A42"/>
                 </a:solidFill>
@@ -15443,7 +14791,7 @@
               <a:t>차원</a:t>
             </a:r>
             <a:r>
-              <a:rPr lang="en-US" altLang="ko-KR" sz="1800" b="1" i="0" u="none" strike="noStrike" dirty="0">
+              <a:rPr lang="en-US" altLang="ko-KR" sz="1600" b="1" i="0" u="none" strike="noStrike" dirty="0">
                 <a:solidFill>
                   <a:srgbClr val="383A42"/>
                 </a:solidFill>
@@ -15453,7 +14801,7 @@
               <a:t>_</a:t>
             </a:r>
             <a:r>
-              <a:rPr lang="ko-KR" altLang="en-US" sz="1800" b="1" i="0" u="none" strike="noStrike" dirty="0">
+              <a:rPr lang="ko-KR" altLang="en-US" sz="1600" b="1" i="0" u="none" strike="noStrike" dirty="0">
                 <a:solidFill>
                   <a:srgbClr val="383A42"/>
                 </a:solidFill>
@@ -15463,7 +14811,7 @@
               <a:t>개수 </a:t>
             </a:r>
             <a:r>
-              <a:rPr lang="en-US" altLang="ko-KR" sz="1800" b="1" i="0" u="none" strike="noStrike" dirty="0">
+              <a:rPr lang="en-US" altLang="ko-KR" sz="1600" b="1" i="0" u="none" strike="noStrike" dirty="0">
                 <a:solidFill>
                   <a:srgbClr val="383A42"/>
                 </a:solidFill>
@@ -15473,7 +14821,7 @@
               <a:t>+ n</a:t>
             </a:r>
             <a:r>
-              <a:rPr lang="ko-KR" altLang="en-US" sz="1800" b="1" i="0" u="none" strike="noStrike" dirty="0">
+              <a:rPr lang="ko-KR" altLang="en-US" sz="1600" b="1" i="0" u="none" strike="noStrike" dirty="0">
                 <a:solidFill>
                   <a:srgbClr val="383A42"/>
                 </a:solidFill>
@@ -15483,7 +14831,7 @@
               <a:t>차원</a:t>
             </a:r>
             <a:r>
-              <a:rPr lang="en-US" altLang="ko-KR" sz="1800" b="1" i="0" u="none" strike="noStrike" dirty="0">
+              <a:rPr lang="en-US" altLang="ko-KR" sz="1600" b="1" i="0" u="none" strike="noStrike" dirty="0">
                 <a:solidFill>
                   <a:srgbClr val="383A42"/>
                 </a:solidFill>
@@ -15493,7 +14841,7 @@
               <a:t>_</a:t>
             </a:r>
             <a:r>
-              <a:rPr lang="ko-KR" altLang="en-US" sz="1800" b="1" i="0" u="none" strike="noStrike" dirty="0">
+              <a:rPr lang="ko-KR" altLang="en-US" sz="1600" b="1" i="0" u="none" strike="noStrike" dirty="0">
                 <a:solidFill>
                   <a:srgbClr val="383A42"/>
                 </a:solidFill>
@@ -15503,7 +14851,27 @@
               <a:t>인덱스</a:t>
             </a:r>
             <a:r>
-              <a:rPr lang="en-US" altLang="ko-KR" sz="1800" b="1" i="0" u="none" strike="noStrike" dirty="0">
+              <a:rPr lang="en-US" altLang="ko-KR" sz="1600" b="1" i="0" u="none" strike="noStrike" dirty="0">
+                <a:solidFill>
+                  <a:srgbClr val="383A42"/>
+                </a:solidFill>
+                <a:effectLst/>
+                <a:latin typeface="Consolas" panose="020B0609020204030204" pitchFamily="49" charset="0"/>
+              </a:rPr>
+              <a:t>) * </a:t>
+            </a:r>
+            <a:r>
+              <a:rPr lang="ko-KR" altLang="en-US" sz="1600" b="1" i="0" u="none" strike="noStrike" dirty="0">
+                <a:solidFill>
+                  <a:srgbClr val="383A42"/>
+                </a:solidFill>
+                <a:effectLst/>
+                <a:latin typeface="Consolas" panose="020B0609020204030204" pitchFamily="49" charset="0"/>
+              </a:rPr>
+              <a:t>자료형 크기</a:t>
+            </a:r>
+            <a:r>
+              <a:rPr lang="en-US" altLang="ko-KR" sz="1600" b="1" i="0" u="none" strike="noStrike" dirty="0">
                 <a:solidFill>
                   <a:srgbClr val="383A42"/>
                 </a:solidFill>
@@ -15512,7 +14880,7 @@
               </a:rPr>
               <a:t>;</a:t>
             </a:r>
-            <a:endParaRPr lang="ko-KR" altLang="en-US" sz="1800" b="1" dirty="0"/>
+            <a:endParaRPr lang="ko-KR" altLang="en-US" sz="1600" b="1" dirty="0"/>
           </a:p>
         </p:txBody>
       </p:sp>
@@ -15574,14 +14942,13 @@
           <a:lstStyle/>
           <a:p>
             <a:r>
-              <a:rPr lang="en-US" altLang="ko-KR" b="0" dirty="0"/>
+              <a:rPr lang="en-US" altLang="ko-KR" dirty="0"/>
               <a:t>8.2  </a:t>
             </a:r>
             <a:r>
-              <a:rPr lang="ko-KR" altLang="en-US" b="0" dirty="0"/>
+              <a:rPr lang="ko-KR" altLang="en-US" dirty="0"/>
               <a:t>다차원 배열</a:t>
             </a:r>
-            <a:endParaRPr lang="ko-KR" altLang="en-US" dirty="0"/>
           </a:p>
         </p:txBody>
       </p:sp>
@@ -15650,8 +15017,8 @@
             <a:endParaRPr lang="en-US" altLang="ko-KR" sz="2000" dirty="0"/>
           </a:p>
           <a:p>
-            <a:pPr lvl="1"/>
-            <a:endParaRPr lang="en-US" altLang="ko-KR" sz="2000" dirty="0"/>
+            <a:pPr lvl="2"/>
+            <a:endParaRPr lang="en-US" altLang="ko-KR" sz="1600" dirty="0"/>
           </a:p>
           <a:p>
             <a:pPr lvl="2"/>
@@ -15705,15 +15072,7 @@
             </a:r>
             <a:r>
               <a:rPr lang="en-US" altLang="ko-KR" sz="2000" dirty="0"/>
-              <a:t>= ((((i1 * D2 + i2) * D3 + i3) ...) * </a:t>
-            </a:r>
-            <a:r>
-              <a:rPr lang="en-US" altLang="ko-KR" sz="2000" dirty="0" err="1"/>
-              <a:t>Dn</a:t>
-            </a:r>
-            <a:r>
-              <a:rPr lang="en-US" altLang="ko-KR" sz="2000" dirty="0"/>
-              <a:t> + in)</a:t>
+              <a:t>= ((((i1 * D2 + i2) * D3 + i3) ...) * Dn + in)</a:t>
             </a:r>
           </a:p>
           <a:p>
@@ -15764,10 +15123,9 @@
               <a:defRPr/>
             </a:pPr>
             <a:r>
-              <a:rPr lang="ko-KR" altLang="en-US"/>
+              <a:rPr lang="ko-KR" altLang="en-US" dirty="0"/>
               <a:t>게임 프로그래밍 교육과정</a:t>
             </a:r>
-            <a:endParaRPr lang="ko-KR" altLang="en-US" dirty="0"/>
           </a:p>
         </p:txBody>
       </p:sp>
@@ -15810,17 +15168,37 @@
             <a:r>
               <a:rPr lang="ko-KR" altLang="en-US" sz="1800" b="1" i="0" u="none" strike="noStrike" dirty="0">
                 <a:solidFill>
-                  <a:srgbClr val="383A42"/>
-                </a:solidFill>
-                <a:effectLst/>
-                <a:latin typeface="Consolas" panose="020B0609020204030204" pitchFamily="49" charset="0"/>
-              </a:rPr>
-              <a:t>자료형 배열</a:t>
+                  <a:srgbClr val="0000FF"/>
+                </a:solidFill>
+                <a:effectLst/>
+                <a:latin typeface="Consolas" panose="020B0609020204030204" pitchFamily="49" charset="0"/>
+              </a:rPr>
+              <a:t>자료형</a:t>
+            </a:r>
+            <a:r>
+              <a:rPr lang="ko-KR" altLang="en-US" sz="1800" b="1" i="0" u="none" strike="noStrike" dirty="0">
+                <a:solidFill>
+                  <a:srgbClr val="383A42"/>
+                </a:solidFill>
+                <a:effectLst/>
+                <a:latin typeface="Consolas" panose="020B0609020204030204" pitchFamily="49" charset="0"/>
+              </a:rPr>
+              <a:t> </a:t>
+            </a:r>
+            <a:r>
+              <a:rPr lang="ko-KR" altLang="en-US" sz="1800" b="1" i="0" u="none" strike="noStrike" dirty="0">
+                <a:solidFill>
+                  <a:srgbClr val="FF0000"/>
+                </a:solidFill>
+                <a:effectLst/>
+                <a:latin typeface="Consolas" panose="020B0609020204030204" pitchFamily="49" charset="0"/>
+              </a:rPr>
+              <a:t>배열</a:t>
             </a:r>
             <a:r>
               <a:rPr lang="en-US" altLang="ko-KR" sz="1800" b="1" i="0" u="none" strike="noStrike" dirty="0">
                 <a:solidFill>
-                  <a:srgbClr val="383A42"/>
+                  <a:srgbClr val="FF0000"/>
                 </a:solidFill>
                 <a:effectLst/>
                 <a:latin typeface="Consolas" panose="020B0609020204030204" pitchFamily="49" charset="0"/>
@@ -15830,7 +15208,7 @@
             <a:r>
               <a:rPr lang="ko-KR" altLang="en-US" sz="1800" b="1" i="0" u="none" strike="noStrike" dirty="0">
                 <a:solidFill>
-                  <a:srgbClr val="383A42"/>
+                  <a:srgbClr val="FF0000"/>
                 </a:solidFill>
                 <a:effectLst/>
                 <a:latin typeface="Consolas" panose="020B0609020204030204" pitchFamily="49" charset="0"/>
@@ -15860,7 +15238,7 @@
             <a:r>
               <a:rPr lang="ko-KR" altLang="en-US" sz="1800" b="1" i="0" u="none" strike="noStrike" dirty="0">
                 <a:solidFill>
-                  <a:srgbClr val="383A42"/>
+                  <a:srgbClr val="7030A0"/>
                 </a:solidFill>
                 <a:effectLst/>
                 <a:latin typeface="Consolas" panose="020B0609020204030204" pitchFamily="49" charset="0"/>
@@ -15870,7 +15248,7 @@
             <a:r>
               <a:rPr lang="en-US" altLang="ko-KR" sz="1800" b="1" i="0" u="none" strike="noStrike" dirty="0">
                 <a:solidFill>
-                  <a:srgbClr val="383A42"/>
+                  <a:srgbClr val="7030A0"/>
                 </a:solidFill>
                 <a:effectLst/>
                 <a:latin typeface="Consolas" panose="020B0609020204030204" pitchFamily="49" charset="0"/>
@@ -15880,12 +15258,22 @@
             <a:r>
               <a:rPr lang="ko-KR" altLang="en-US" sz="1800" b="1" i="0" u="none" strike="noStrike" dirty="0">
                 <a:solidFill>
-                  <a:srgbClr val="383A42"/>
-                </a:solidFill>
-                <a:effectLst/>
-                <a:latin typeface="Consolas" panose="020B0609020204030204" pitchFamily="49" charset="0"/>
-              </a:rPr>
-              <a:t>개수 * </a:t>
+                  <a:srgbClr val="7030A0"/>
+                </a:solidFill>
+                <a:effectLst/>
+                <a:latin typeface="Consolas" panose="020B0609020204030204" pitchFamily="49" charset="0"/>
+              </a:rPr>
+              <a:t>개수 *</a:t>
+            </a:r>
+            <a:r>
+              <a:rPr lang="ko-KR" altLang="en-US" sz="1800" b="1" i="0" u="none" strike="noStrike" dirty="0">
+                <a:solidFill>
+                  <a:srgbClr val="383A42"/>
+                </a:solidFill>
+                <a:effectLst/>
+                <a:latin typeface="Consolas" panose="020B0609020204030204" pitchFamily="49" charset="0"/>
+              </a:rPr>
+              <a:t> </a:t>
             </a:r>
             <a:r>
               <a:rPr lang="en-US" altLang="ko-KR" sz="1800" b="1" i="0" u="none" strike="noStrike" dirty="0">
@@ -15900,7 +15288,7 @@
             <a:r>
               <a:rPr lang="ko-KR" altLang="en-US" sz="1800" b="1" i="0" u="none" strike="noStrike" dirty="0">
                 <a:solidFill>
-                  <a:srgbClr val="383A42"/>
+                  <a:srgbClr val="7030A0"/>
                 </a:solidFill>
                 <a:effectLst/>
                 <a:latin typeface="Consolas" panose="020B0609020204030204" pitchFamily="49" charset="0"/>
@@ -15910,7 +15298,7 @@
             <a:r>
               <a:rPr lang="en-US" altLang="ko-KR" sz="1800" b="1" i="0" u="none" strike="noStrike" dirty="0">
                 <a:solidFill>
-                  <a:srgbClr val="383A42"/>
+                  <a:srgbClr val="7030A0"/>
                 </a:solidFill>
                 <a:effectLst/>
                 <a:latin typeface="Consolas" panose="020B0609020204030204" pitchFamily="49" charset="0"/>
@@ -15920,12 +15308,22 @@
             <a:r>
               <a:rPr lang="ko-KR" altLang="en-US" sz="1800" b="1" i="0" u="none" strike="noStrike" dirty="0">
                 <a:solidFill>
-                  <a:srgbClr val="383A42"/>
-                </a:solidFill>
-                <a:effectLst/>
-                <a:latin typeface="Consolas" panose="020B0609020204030204" pitchFamily="49" charset="0"/>
-              </a:rPr>
-              <a:t>개수 * </a:t>
+                  <a:srgbClr val="7030A0"/>
+                </a:solidFill>
+                <a:effectLst/>
+                <a:latin typeface="Consolas" panose="020B0609020204030204" pitchFamily="49" charset="0"/>
+              </a:rPr>
+              <a:t>개수 *</a:t>
+            </a:r>
+            <a:r>
+              <a:rPr lang="ko-KR" altLang="en-US" sz="1800" b="1" i="0" u="none" strike="noStrike" dirty="0">
+                <a:solidFill>
+                  <a:srgbClr val="383A42"/>
+                </a:solidFill>
+                <a:effectLst/>
+                <a:latin typeface="Consolas" panose="020B0609020204030204" pitchFamily="49" charset="0"/>
+              </a:rPr>
+              <a:t> </a:t>
             </a:r>
             <a:r>
               <a:rPr lang="en-US" altLang="ko-KR" sz="1800" b="1" i="0" u="none" strike="noStrike" dirty="0">
@@ -15935,12 +15333,32 @@
                 <a:effectLst/>
                 <a:latin typeface="Consolas" panose="020B0609020204030204" pitchFamily="49" charset="0"/>
               </a:rPr>
-              <a:t>... * n</a:t>
+              <a:t>... </a:t>
+            </a:r>
+            <a:r>
+              <a:rPr lang="en-US" altLang="ko-KR" sz="1800" b="1" i="0" u="none" strike="noStrike" dirty="0">
+                <a:solidFill>
+                  <a:srgbClr val="7030A0"/>
+                </a:solidFill>
+                <a:effectLst/>
+                <a:latin typeface="Consolas" panose="020B0609020204030204" pitchFamily="49" charset="0"/>
+              </a:rPr>
+              <a:t>*</a:t>
+            </a:r>
+            <a:r>
+              <a:rPr lang="en-US" altLang="ko-KR" sz="1800" b="1" i="0" u="none" strike="noStrike" dirty="0">
+                <a:solidFill>
+                  <a:srgbClr val="383A42"/>
+                </a:solidFill>
+                <a:effectLst/>
+                <a:latin typeface="Consolas" panose="020B0609020204030204" pitchFamily="49" charset="0"/>
+              </a:rPr>
+              <a:t> n</a:t>
             </a:r>
             <a:r>
               <a:rPr lang="ko-KR" altLang="en-US" sz="1800" b="1" i="0" u="none" strike="noStrike" dirty="0">
                 <a:solidFill>
-                  <a:srgbClr val="383A42"/>
+                  <a:srgbClr val="7030A0"/>
                 </a:solidFill>
                 <a:effectLst/>
                 <a:latin typeface="Consolas" panose="020B0609020204030204" pitchFamily="49" charset="0"/>
@@ -15950,7 +15368,7 @@
             <a:r>
               <a:rPr lang="en-US" altLang="ko-KR" sz="1800" b="1" i="0" u="none" strike="noStrike" dirty="0">
                 <a:solidFill>
-                  <a:srgbClr val="383A42"/>
+                  <a:srgbClr val="7030A0"/>
                 </a:solidFill>
                 <a:effectLst/>
                 <a:latin typeface="Consolas" panose="020B0609020204030204" pitchFamily="49" charset="0"/>
@@ -15960,7 +15378,7 @@
             <a:r>
               <a:rPr lang="ko-KR" altLang="en-US" sz="1800" b="1" i="0" u="none" strike="noStrike" dirty="0">
                 <a:solidFill>
-                  <a:srgbClr val="383A42"/>
+                  <a:srgbClr val="7030A0"/>
                 </a:solidFill>
                 <a:effectLst/>
                 <a:latin typeface="Consolas" panose="020B0609020204030204" pitchFamily="49" charset="0"/>
@@ -16033,14 +15451,13 @@
           <a:lstStyle/>
           <a:p>
             <a:r>
-              <a:rPr lang="en-US" altLang="ko-KR" b="0" dirty="0"/>
+              <a:rPr lang="en-US" altLang="ko-KR" dirty="0"/>
               <a:t>8.2.1 2</a:t>
             </a:r>
             <a:r>
-              <a:rPr lang="ko-KR" altLang="en-US" b="0" dirty="0"/>
+              <a:rPr lang="ko-KR" altLang="en-US" dirty="0"/>
               <a:t>차원 배열</a:t>
             </a:r>
-            <a:endParaRPr lang="ko-KR" altLang="en-US" dirty="0"/>
           </a:p>
         </p:txBody>
       </p:sp>
@@ -16066,6 +15483,10 @@
           <a:lstStyle/>
           <a:p>
             <a:r>
+              <a:rPr lang="en-US" altLang="ko-KR" dirty="0"/>
+              <a:t>2</a:t>
+            </a:r>
+            <a:r>
               <a:rPr lang="ko-KR" altLang="en-US" dirty="0"/>
               <a:t>차원 배열</a:t>
             </a:r>
@@ -16155,10 +15576,9 @@
               <a:defRPr/>
             </a:pPr>
             <a:r>
-              <a:rPr lang="ko-KR" altLang="en-US"/>
+              <a:rPr lang="ko-KR" altLang="en-US" dirty="0"/>
               <a:t>게임 프로그래밍 교육과정</a:t>
             </a:r>
-            <a:endParaRPr lang="ko-KR" altLang="en-US" dirty="0"/>
           </a:p>
         </p:txBody>
       </p:sp>
@@ -16177,7 +15597,7 @@
         <p:spPr>
           <a:xfrm>
             <a:off x="611560" y="3125595"/>
-            <a:ext cx="5544616" cy="369332"/>
+            <a:ext cx="7488832" cy="461665"/>
           </a:xfrm>
           <a:prstGeom prst="rect">
             <a:avLst/>
@@ -16199,7 +15619,7 @@
           <a:lstStyle/>
           <a:p>
             <a:r>
-              <a:rPr lang="ko-KR" altLang="en-US" sz="1800" b="1" i="0" u="none" strike="noStrike" dirty="0">
+              <a:rPr lang="ko-KR" altLang="en-US" b="1" i="0" u="none" strike="noStrike" dirty="0">
                 <a:solidFill>
                   <a:srgbClr val="383A42"/>
                 </a:solidFill>
@@ -16209,7 +15629,7 @@
               <a:t>자료형 배열</a:t>
             </a:r>
             <a:r>
-              <a:rPr lang="en-US" altLang="ko-KR" sz="1800" b="1" i="0" u="none" strike="noStrike" dirty="0">
+              <a:rPr lang="en-US" altLang="ko-KR" b="1" i="0" u="none" strike="noStrike" dirty="0">
                 <a:solidFill>
                   <a:srgbClr val="383A42"/>
                 </a:solidFill>
@@ -16219,7 +15639,7 @@
               <a:t>_</a:t>
             </a:r>
             <a:r>
-              <a:rPr lang="ko-KR" altLang="en-US" sz="1800" b="1" i="0" u="none" strike="noStrike" dirty="0">
+              <a:rPr lang="ko-KR" altLang="en-US" b="1" i="0" u="none" strike="noStrike" dirty="0">
                 <a:solidFill>
                   <a:srgbClr val="383A42"/>
                 </a:solidFill>
@@ -16229,7 +15649,7 @@
               <a:t>이름</a:t>
             </a:r>
             <a:r>
-              <a:rPr lang="en-US" altLang="ko-KR" sz="1800" b="1" i="0" u="none" strike="noStrike" dirty="0">
+              <a:rPr lang="en-US" altLang="ko-KR" b="1" i="0" u="none" strike="noStrike" dirty="0">
                 <a:solidFill>
                   <a:srgbClr val="383A42"/>
                 </a:solidFill>
@@ -16239,7 +15659,7 @@
               <a:t>[</a:t>
             </a:r>
             <a:r>
-              <a:rPr lang="ko-KR" altLang="en-US" sz="1800" b="1" i="0" u="none" strike="noStrike" dirty="0">
+              <a:rPr lang="ko-KR" altLang="en-US" b="1" i="0" u="none" strike="noStrike" dirty="0">
                 <a:solidFill>
                   <a:srgbClr val="383A42"/>
                 </a:solidFill>
@@ -16249,7 +15669,7 @@
               <a:t>행의</a:t>
             </a:r>
             <a:r>
-              <a:rPr lang="en-US" altLang="ko-KR" sz="1800" b="1" i="0" u="none" strike="noStrike" dirty="0">
+              <a:rPr lang="en-US" altLang="ko-KR" b="1" i="0" u="none" strike="noStrike" dirty="0">
                 <a:solidFill>
                   <a:srgbClr val="383A42"/>
                 </a:solidFill>
@@ -16259,7 +15679,7 @@
               <a:t>_</a:t>
             </a:r>
             <a:r>
-              <a:rPr lang="ko-KR" altLang="en-US" sz="1800" b="1" i="0" u="none" strike="noStrike" dirty="0">
+              <a:rPr lang="ko-KR" altLang="en-US" b="1" i="0" u="none" strike="noStrike" dirty="0">
                 <a:solidFill>
                   <a:srgbClr val="383A42"/>
                 </a:solidFill>
@@ -16269,7 +15689,7 @@
               <a:t>개수</a:t>
             </a:r>
             <a:r>
-              <a:rPr lang="en-US" altLang="ko-KR" sz="1800" b="1" i="0" u="none" strike="noStrike" dirty="0">
+              <a:rPr lang="en-US" altLang="ko-KR" b="1" i="0" u="none" strike="noStrike" dirty="0">
                 <a:solidFill>
                   <a:srgbClr val="383A42"/>
                 </a:solidFill>
@@ -16279,7 +15699,7 @@
               <a:t>][</a:t>
             </a:r>
             <a:r>
-              <a:rPr lang="ko-KR" altLang="en-US" sz="1800" b="1" i="0" u="none" strike="noStrike" dirty="0">
+              <a:rPr lang="ko-KR" altLang="en-US" b="1" i="0" u="none" strike="noStrike" dirty="0">
                 <a:solidFill>
                   <a:srgbClr val="383A42"/>
                 </a:solidFill>
@@ -16289,7 +15709,7 @@
               <a:t>열의</a:t>
             </a:r>
             <a:r>
-              <a:rPr lang="en-US" altLang="ko-KR" sz="1800" b="1" i="0" u="none" strike="noStrike" dirty="0">
+              <a:rPr lang="en-US" altLang="ko-KR" b="1" i="0" u="none" strike="noStrike" dirty="0">
                 <a:solidFill>
                   <a:srgbClr val="383A42"/>
                 </a:solidFill>
@@ -16299,7 +15719,7 @@
               <a:t>_</a:t>
             </a:r>
             <a:r>
-              <a:rPr lang="ko-KR" altLang="en-US" sz="1800" b="1" i="0" u="none" strike="noStrike" dirty="0">
+              <a:rPr lang="ko-KR" altLang="en-US" b="1" i="0" u="none" strike="noStrike" dirty="0">
                 <a:solidFill>
                   <a:srgbClr val="383A42"/>
                 </a:solidFill>
@@ -16309,7 +15729,7 @@
               <a:t>개수</a:t>
             </a:r>
             <a:r>
-              <a:rPr lang="en-US" altLang="ko-KR" sz="1800" b="1" i="0" u="none" strike="noStrike" dirty="0">
+              <a:rPr lang="en-US" altLang="ko-KR" b="1" i="0" u="none" strike="noStrike" dirty="0">
                 <a:solidFill>
                   <a:srgbClr val="383A42"/>
                 </a:solidFill>
@@ -16318,7 +15738,7 @@
               </a:rPr>
               <a:t>];</a:t>
             </a:r>
-            <a:endParaRPr lang="ko-KR" altLang="en-US" sz="1800" b="1" dirty="0"/>
+            <a:endParaRPr lang="ko-KR" altLang="en-US" b="1" dirty="0"/>
           </a:p>
         </p:txBody>
       </p:sp>
@@ -16337,7 +15757,7 @@
         <p:spPr>
           <a:xfrm>
             <a:off x="611560" y="3717032"/>
-            <a:ext cx="5544616" cy="1477328"/>
+            <a:ext cx="7488832" cy="1938992"/>
           </a:xfrm>
           <a:prstGeom prst="rect">
             <a:avLst/>
@@ -16359,7 +15779,7 @@
           <a:lstStyle/>
           <a:p>
             <a:r>
-              <a:rPr lang="ko-KR" altLang="en-US" sz="1800" b="1" i="0" u="none" strike="noStrike" dirty="0">
+              <a:rPr lang="ko-KR" altLang="en-US" b="1" i="0" u="none" strike="noStrike" dirty="0">
                 <a:solidFill>
                   <a:srgbClr val="383A42"/>
                 </a:solidFill>
@@ -16369,7 +15789,7 @@
               <a:t>자료형 배열</a:t>
             </a:r>
             <a:r>
-              <a:rPr lang="en-US" altLang="ko-KR" sz="1800" b="1" i="0" u="none" strike="noStrike" dirty="0">
+              <a:rPr lang="en-US" altLang="ko-KR" b="1" i="0" u="none" strike="noStrike" dirty="0">
                 <a:solidFill>
                   <a:srgbClr val="383A42"/>
                 </a:solidFill>
@@ -16379,7 +15799,7 @@
               <a:t>_</a:t>
             </a:r>
             <a:r>
-              <a:rPr lang="ko-KR" altLang="en-US" sz="1800" b="1" i="0" u="none" strike="noStrike" dirty="0">
+              <a:rPr lang="ko-KR" altLang="en-US" b="1" i="0" u="none" strike="noStrike" dirty="0">
                 <a:solidFill>
                   <a:srgbClr val="383A42"/>
                 </a:solidFill>
@@ -16389,17 +15809,27 @@
               <a:t>이름</a:t>
             </a:r>
             <a:r>
-              <a:rPr lang="en-US" altLang="ko-KR" sz="1800" b="1" i="0" u="none" strike="noStrike" dirty="0">
-                <a:solidFill>
-                  <a:srgbClr val="383A42"/>
-                </a:solidFill>
-                <a:effectLst/>
-                <a:latin typeface="Consolas" panose="020B0609020204030204" pitchFamily="49" charset="0"/>
-              </a:rPr>
-              <a:t>[][</a:t>
-            </a:r>
-            <a:r>
-              <a:rPr lang="ko-KR" altLang="en-US" sz="1800" b="1" i="0" u="none" strike="noStrike" dirty="0">
+              <a:rPr lang="en-US" altLang="ko-KR" b="1" i="0" u="none" strike="noStrike" dirty="0">
+                <a:solidFill>
+                  <a:srgbClr val="7030A0"/>
+                </a:solidFill>
+                <a:effectLst/>
+                <a:latin typeface="Consolas" panose="020B0609020204030204" pitchFamily="49" charset="0"/>
+              </a:rPr>
+              <a:t>[]</a:t>
+            </a:r>
+            <a:r>
+              <a:rPr lang="en-US" altLang="ko-KR" b="1" i="0" u="none" strike="noStrike" dirty="0">
+                <a:solidFill>
+                  <a:srgbClr val="383A42"/>
+                </a:solidFill>
+                <a:effectLst/>
+                <a:latin typeface="Consolas" panose="020B0609020204030204" pitchFamily="49" charset="0"/>
+              </a:rPr>
+              <a:t>[</a:t>
+            </a:r>
+            <a:r>
+              <a:rPr lang="ko-KR" altLang="en-US" b="1" i="0" u="none" strike="noStrike" dirty="0">
                 <a:solidFill>
                   <a:srgbClr val="383A42"/>
                 </a:solidFill>
@@ -16409,7 +15839,7 @@
               <a:t>열의</a:t>
             </a:r>
             <a:r>
-              <a:rPr lang="en-US" altLang="ko-KR" sz="1800" b="1" i="0" u="none" strike="noStrike" dirty="0">
+              <a:rPr lang="en-US" altLang="ko-KR" b="1" i="0" u="none" strike="noStrike" dirty="0">
                 <a:solidFill>
                   <a:srgbClr val="383A42"/>
                 </a:solidFill>
@@ -16419,7 +15849,7 @@
               <a:t>_</a:t>
             </a:r>
             <a:r>
-              <a:rPr lang="ko-KR" altLang="en-US" sz="1800" b="1" i="0" u="none" strike="noStrike" dirty="0">
+              <a:rPr lang="ko-KR" altLang="en-US" b="1" i="0" u="none" strike="noStrike" dirty="0">
                 <a:solidFill>
                   <a:srgbClr val="383A42"/>
                 </a:solidFill>
@@ -16429,7 +15859,7 @@
               <a:t>개수</a:t>
             </a:r>
             <a:r>
-              <a:rPr lang="en-US" altLang="ko-KR" sz="1800" b="1" i="0" u="none" strike="noStrike" dirty="0">
+              <a:rPr lang="en-US" altLang="ko-KR" b="1" i="0" u="none" strike="noStrike" dirty="0">
                 <a:solidFill>
                   <a:srgbClr val="383A42"/>
                 </a:solidFill>
@@ -16441,7 +15871,7 @@
           </a:p>
           <a:p>
             <a:r>
-              <a:rPr lang="en-US" altLang="ko-KR" sz="1800" b="1" dirty="0">
+              <a:rPr lang="en-US" altLang="ko-KR" b="1" dirty="0">
                 <a:solidFill>
                   <a:srgbClr val="383A42"/>
                 </a:solidFill>
@@ -16450,7 +15880,7 @@
               <a:t>               </a:t>
             </a:r>
             <a:r>
-              <a:rPr lang="en-US" altLang="ko-KR" sz="1800" b="1" i="0" u="none" strike="noStrike" dirty="0">
+              <a:rPr lang="en-US" altLang="ko-KR" b="1" i="0" u="none" strike="noStrike" dirty="0">
                 <a:solidFill>
                   <a:srgbClr val="383A42"/>
                 </a:solidFill>
@@ -16462,7 +15892,7 @@
           </a:p>
           <a:p>
             <a:r>
-              <a:rPr lang="en-US" altLang="ko-KR" sz="1800" b="1" dirty="0">
+              <a:rPr lang="en-US" altLang="ko-KR" b="1" dirty="0">
                 <a:solidFill>
                   <a:srgbClr val="383A42"/>
                 </a:solidFill>
@@ -16471,7 +15901,7 @@
               <a:t>                 </a:t>
             </a:r>
             <a:r>
-              <a:rPr lang="en-US" altLang="ko-KR" sz="1800" b="1" i="0" u="none" strike="noStrike" dirty="0">
+              <a:rPr lang="en-US" altLang="ko-KR" b="1" i="0" u="none" strike="noStrike" dirty="0">
                 <a:solidFill>
                   <a:srgbClr val="383A42"/>
                 </a:solidFill>
@@ -16481,7 +15911,7 @@
               <a:t> {</a:t>
             </a:r>
             <a:r>
-              <a:rPr lang="ko-KR" altLang="en-US" sz="1800" b="1" i="0" u="none" strike="noStrike" dirty="0">
+              <a:rPr lang="ko-KR" altLang="en-US" b="1" i="0" u="none" strike="noStrike" dirty="0">
                 <a:solidFill>
                   <a:srgbClr val="383A42"/>
                 </a:solidFill>
@@ -16491,7 +15921,7 @@
               <a:t>각 행의 초기값</a:t>
             </a:r>
             <a:r>
-              <a:rPr lang="en-US" altLang="ko-KR" sz="1800" b="1" i="0" u="none" strike="noStrike" dirty="0">
+              <a:rPr lang="en-US" altLang="ko-KR" b="1" i="0" u="none" strike="noStrike" dirty="0">
                 <a:solidFill>
                   <a:srgbClr val="383A42"/>
                 </a:solidFill>
@@ -16503,7 +15933,7 @@
           </a:p>
           <a:p>
             <a:r>
-              <a:rPr lang="en-US" altLang="ko-KR" sz="1800" b="1" dirty="0">
+              <a:rPr lang="en-US" altLang="ko-KR" b="1" dirty="0">
                 <a:solidFill>
                   <a:srgbClr val="383A42"/>
                 </a:solidFill>
@@ -16512,7 +15942,7 @@
               <a:t>                 </a:t>
             </a:r>
             <a:r>
-              <a:rPr lang="en-US" altLang="ko-KR" sz="1800" b="1" i="0" u="none" strike="noStrike" dirty="0">
+              <a:rPr lang="en-US" altLang="ko-KR" b="1" i="0" u="none" strike="noStrike" dirty="0">
                 <a:solidFill>
                   <a:srgbClr val="383A42"/>
                 </a:solidFill>
@@ -16522,7 +15952,7 @@
               <a:t> {</a:t>
             </a:r>
             <a:r>
-              <a:rPr lang="ko-KR" altLang="en-US" sz="1800" b="1" i="0" u="none" strike="noStrike" dirty="0">
+              <a:rPr lang="ko-KR" altLang="en-US" b="1" i="0" u="none" strike="noStrike" dirty="0">
                 <a:solidFill>
                   <a:srgbClr val="383A42"/>
                 </a:solidFill>
@@ -16532,7 +15962,7 @@
               <a:t>각 행의 초기값</a:t>
             </a:r>
             <a:r>
-              <a:rPr lang="en-US" altLang="ko-KR" sz="1800" b="1" i="0" u="none" strike="noStrike" dirty="0">
+              <a:rPr lang="en-US" altLang="ko-KR" b="1" i="0" u="none" strike="noStrike" dirty="0">
                 <a:solidFill>
                   <a:srgbClr val="383A42"/>
                 </a:solidFill>
@@ -16544,7 +15974,7 @@
           </a:p>
           <a:p>
             <a:r>
-              <a:rPr lang="en-US" altLang="ko-KR" sz="1800" b="1" dirty="0">
+              <a:rPr lang="en-US" altLang="ko-KR" b="1" dirty="0">
                 <a:solidFill>
                   <a:srgbClr val="383A42"/>
                 </a:solidFill>
@@ -16553,7 +15983,7 @@
               <a:t>               </a:t>
             </a:r>
             <a:r>
-              <a:rPr lang="en-US" altLang="ko-KR" sz="1800" b="1" i="0" u="none" strike="noStrike" dirty="0">
+              <a:rPr lang="en-US" altLang="ko-KR" b="1" i="0" u="none" strike="noStrike" dirty="0">
                 <a:solidFill>
                   <a:srgbClr val="383A42"/>
                 </a:solidFill>
@@ -16562,7 +15992,7 @@
               </a:rPr>
               <a:t>};</a:t>
             </a:r>
-            <a:endParaRPr lang="ko-KR" altLang="en-US" sz="1800" b="1" dirty="0"/>
+            <a:endParaRPr lang="ko-KR" altLang="en-US" b="1" dirty="0"/>
           </a:p>
         </p:txBody>
       </p:sp>
@@ -16624,14 +16054,13 @@
           <a:lstStyle/>
           <a:p>
             <a:r>
-              <a:rPr lang="en-US" altLang="ko-KR" b="0" dirty="0"/>
+              <a:rPr lang="en-US" altLang="ko-KR" dirty="0"/>
               <a:t>8.2.1 2</a:t>
             </a:r>
             <a:r>
-              <a:rPr lang="ko-KR" altLang="en-US" b="0" dirty="0"/>
+              <a:rPr lang="ko-KR" altLang="en-US" dirty="0"/>
               <a:t>차원 배열</a:t>
             </a:r>
-            <a:endParaRPr lang="ko-KR" altLang="en-US" dirty="0"/>
           </a:p>
         </p:txBody>
       </p:sp>
@@ -16753,10 +16182,9 @@
               <a:defRPr/>
             </a:pPr>
             <a:r>
-              <a:rPr lang="ko-KR" altLang="en-US"/>
+              <a:rPr lang="ko-KR" altLang="en-US" dirty="0"/>
               <a:t>게임 프로그래밍 교육과정</a:t>
             </a:r>
-            <a:endParaRPr lang="ko-KR" altLang="en-US" dirty="0"/>
           </a:p>
         </p:txBody>
       </p:sp>
@@ -18215,7 +17643,9 @@
             <a:r>
               <a:rPr lang="en-US" altLang="ko-KR" sz="1800" b="1" i="0" u="none" strike="noStrike" dirty="0">
                 <a:solidFill>
-                  <a:srgbClr val="986801"/>
+                  <a:schemeClr val="accent2">
+                    <a:lumMod val="75000"/>
+                  </a:schemeClr>
                 </a:solidFill>
                 <a:effectLst/>
                 <a:latin typeface="Consolas" panose="020B0609020204030204" pitchFamily="49" charset="0"/>
@@ -18235,7 +17665,9 @@
             <a:r>
               <a:rPr lang="en-US" altLang="ko-KR" sz="1800" b="1" i="0" u="none" strike="noStrike" dirty="0">
                 <a:solidFill>
-                  <a:srgbClr val="986801"/>
+                  <a:schemeClr val="accent2">
+                    <a:lumMod val="75000"/>
+                  </a:schemeClr>
                 </a:solidFill>
                 <a:effectLst/>
                 <a:latin typeface="Consolas" panose="020B0609020204030204" pitchFamily="49" charset="0"/>
@@ -18255,7 +17687,9 @@
             <a:r>
               <a:rPr lang="en-US" altLang="ko-KR" sz="1800" b="1" i="0" u="none" strike="noStrike" dirty="0">
                 <a:solidFill>
-                  <a:srgbClr val="986801"/>
+                  <a:schemeClr val="accent2">
+                    <a:lumMod val="75000"/>
+                  </a:schemeClr>
                 </a:solidFill>
                 <a:effectLst/>
                 <a:latin typeface="Consolas" panose="020B0609020204030204" pitchFamily="49" charset="0"/>
@@ -18275,7 +17709,9 @@
             <a:r>
               <a:rPr lang="en-US" altLang="ko-KR" sz="1800" b="1" i="0" u="none" strike="noStrike" dirty="0">
                 <a:solidFill>
-                  <a:srgbClr val="986801"/>
+                  <a:schemeClr val="accent2">
+                    <a:lumMod val="75000"/>
+                  </a:schemeClr>
                 </a:solidFill>
                 <a:effectLst/>
                 <a:latin typeface="Consolas" panose="020B0609020204030204" pitchFamily="49" charset="0"/>
@@ -18295,7 +17731,7 @@
             <a:r>
               <a:rPr lang="en-US" altLang="ko-KR" sz="1800" b="1" i="0" u="none" strike="noStrike" dirty="0">
                 <a:solidFill>
-                  <a:srgbClr val="986801"/>
+                  <a:srgbClr val="0000FF"/>
                 </a:solidFill>
                 <a:effectLst/>
                 <a:latin typeface="Consolas" panose="020B0609020204030204" pitchFamily="49" charset="0"/>
@@ -18315,7 +17751,7 @@
             <a:r>
               <a:rPr lang="en-US" altLang="ko-KR" sz="1800" b="1" i="0" u="none" strike="noStrike" dirty="0">
                 <a:solidFill>
-                  <a:srgbClr val="986801"/>
+                  <a:srgbClr val="0000FF"/>
                 </a:solidFill>
                 <a:effectLst/>
                 <a:latin typeface="Consolas" panose="020B0609020204030204" pitchFamily="49" charset="0"/>
@@ -18335,7 +17771,7 @@
             <a:r>
               <a:rPr lang="en-US" altLang="ko-KR" sz="1800" b="1" i="0" u="none" strike="noStrike" dirty="0">
                 <a:solidFill>
-                  <a:srgbClr val="986801"/>
+                  <a:srgbClr val="0000FF"/>
                 </a:solidFill>
                 <a:effectLst/>
                 <a:latin typeface="Consolas" panose="020B0609020204030204" pitchFamily="49" charset="0"/>
@@ -18355,7 +17791,7 @@
             <a:r>
               <a:rPr lang="en-US" altLang="ko-KR" sz="1800" b="1" i="0" u="none" strike="noStrike" dirty="0">
                 <a:solidFill>
-                  <a:srgbClr val="986801"/>
+                  <a:srgbClr val="0000FF"/>
                 </a:solidFill>
                 <a:effectLst/>
                 <a:latin typeface="Consolas" panose="020B0609020204030204" pitchFamily="49" charset="0"/>
@@ -18503,7 +17939,7 @@
               <a:buNone/>
               <a:tabLst/>
             </a:pPr>
-            <a:endParaRPr kumimoji="1" lang="ko-KR" altLang="en-US" sz="2400" b="0" i="0" u="none" strike="noStrike" cap="none" normalizeH="0" baseline="0">
+            <a:endParaRPr kumimoji="1" lang="ko-KR" altLang="en-US" sz="2400" b="0" i="0" u="none" strike="noStrike" cap="none" normalizeH="0" baseline="0" dirty="0">
               <a:ln>
                 <a:noFill/>
               </a:ln>
@@ -18575,7 +18011,7 @@
               <a:buNone/>
               <a:tabLst/>
             </a:pPr>
-            <a:endParaRPr kumimoji="1" lang="ko-KR" altLang="en-US" sz="2400" b="0" i="0" u="none" strike="noStrike" cap="none" normalizeH="0" baseline="0">
+            <a:endParaRPr kumimoji="1" lang="ko-KR" altLang="en-US" sz="2400" b="0" i="0" u="none" strike="noStrike" cap="none" normalizeH="0" baseline="0" dirty="0">
               <a:ln>
                 <a:noFill/>
               </a:ln>
@@ -18641,14 +18077,13 @@
           <a:lstStyle/>
           <a:p>
             <a:r>
-              <a:rPr lang="en-US" altLang="ko-KR" b="0" dirty="0"/>
+              <a:rPr lang="en-US" altLang="ko-KR" dirty="0"/>
               <a:t>8.2.1 2</a:t>
             </a:r>
             <a:r>
-              <a:rPr lang="ko-KR" altLang="en-US" b="0" dirty="0"/>
+              <a:rPr lang="ko-KR" altLang="en-US" dirty="0"/>
               <a:t>차원 배열</a:t>
             </a:r>
-            <a:endParaRPr lang="ko-KR" altLang="en-US" dirty="0"/>
           </a:p>
         </p:txBody>
       </p:sp>
@@ -18809,10 +18244,9 @@
               <a:defRPr/>
             </a:pPr>
             <a:r>
-              <a:rPr lang="ko-KR" altLang="en-US"/>
+              <a:rPr lang="ko-KR" altLang="en-US" dirty="0"/>
               <a:t>게임 프로그래밍 교육과정</a:t>
             </a:r>
-            <a:endParaRPr lang="ko-KR" altLang="en-US" dirty="0"/>
           </a:p>
         </p:txBody>
       </p:sp>
@@ -18870,31 +18304,31 @@
                 <a:effectLst/>
                 <a:latin typeface="Consolas" panose="020B0609020204030204" pitchFamily="49" charset="0"/>
               </a:rPr>
-              <a:t> </a:t>
-            </a:r>
-            <a:r>
-              <a:rPr lang="en-US" altLang="ko-KR" sz="1800" b="1" i="0" u="none" strike="noStrike" dirty="0" err="1">
-                <a:solidFill>
-                  <a:srgbClr val="383A42"/>
-                </a:solidFill>
-                <a:effectLst/>
-                <a:latin typeface="Consolas" panose="020B0609020204030204" pitchFamily="49" charset="0"/>
-              </a:rPr>
-              <a:t>row_count</a:t>
+              <a:t> row_count = </a:t>
             </a:r>
             <a:r>
               <a:rPr lang="en-US" altLang="ko-KR" sz="1800" b="1" i="0" u="none" strike="noStrike" dirty="0">
                 <a:solidFill>
-                  <a:srgbClr val="383A42"/>
-                </a:solidFill>
-                <a:effectLst/>
-                <a:latin typeface="Consolas" panose="020B0609020204030204" pitchFamily="49" charset="0"/>
-              </a:rPr>
-              <a:t> = </a:t>
+                  <a:srgbClr val="A626A4"/>
+                </a:solidFill>
+                <a:effectLst/>
+                <a:latin typeface="Consolas" panose="020B0609020204030204" pitchFamily="49" charset="0"/>
+              </a:rPr>
+              <a:t>sizeof</a:t>
             </a:r>
             <a:r>
               <a:rPr lang="en-US" altLang="ko-KR" sz="1800" b="1" i="0" u="none" strike="noStrike" dirty="0">
                 <a:solidFill>
+                  <a:srgbClr val="383A42"/>
+                </a:solidFill>
+                <a:effectLst/>
+                <a:latin typeface="Consolas" panose="020B0609020204030204" pitchFamily="49" charset="0"/>
+              </a:rPr>
+              <a:t>(arr   ) / </a:t>
+            </a:r>
+            <a:r>
+              <a:rPr lang="en-US" altLang="ko-KR" sz="1800" b="1" i="0" u="none" strike="noStrike" dirty="0">
+                <a:solidFill>
                   <a:srgbClr val="A626A4"/>
                 </a:solidFill>
                 <a:effectLst/>
@@ -18910,17 +18344,17 @@
                 <a:effectLst/>
                 <a:latin typeface="Consolas" panose="020B0609020204030204" pitchFamily="49" charset="0"/>
               </a:rPr>
-              <a:t>(arr) / </a:t>
+              <a:t>(arr[</a:t>
             </a:r>
             <a:r>
               <a:rPr lang="en-US" altLang="ko-KR" sz="1800" b="1" i="0" u="none" strike="noStrike" dirty="0">
                 <a:solidFill>
-                  <a:srgbClr val="A626A4"/>
-                </a:solidFill>
-                <a:effectLst/>
-                <a:latin typeface="Consolas" panose="020B0609020204030204" pitchFamily="49" charset="0"/>
-              </a:rPr>
-              <a:t>sizeof</a:t>
+                  <a:srgbClr val="986801"/>
+                </a:solidFill>
+                <a:effectLst/>
+                <a:latin typeface="Consolas" panose="020B0609020204030204" pitchFamily="49" charset="0"/>
+              </a:rPr>
+              <a:t>0</a:t>
             </a:r>
             <a:r>
               <a:rPr lang="en-US" altLang="ko-KR" sz="1800" b="1" i="0" u="none" strike="noStrike" dirty="0">
@@ -18930,27 +18364,7 @@
                 <a:effectLst/>
                 <a:latin typeface="Consolas" panose="020B0609020204030204" pitchFamily="49" charset="0"/>
               </a:rPr>
-              <a:t>(arr[</a:t>
-            </a:r>
-            <a:r>
-              <a:rPr lang="en-US" altLang="ko-KR" sz="1800" b="1" i="0" u="none" strike="noStrike" dirty="0">
-                <a:solidFill>
-                  <a:srgbClr val="986801"/>
-                </a:solidFill>
-                <a:effectLst/>
-                <a:latin typeface="Consolas" panose="020B0609020204030204" pitchFamily="49" charset="0"/>
-              </a:rPr>
-              <a:t>0</a:t>
-            </a:r>
-            <a:r>
-              <a:rPr lang="en-US" altLang="ko-KR" sz="1800" b="1" i="0" u="none" strike="noStrike" dirty="0">
-                <a:solidFill>
-                  <a:srgbClr val="383A42"/>
-                </a:solidFill>
-                <a:effectLst/>
-                <a:latin typeface="Consolas" panose="020B0609020204030204" pitchFamily="49" charset="0"/>
-              </a:rPr>
-              <a:t>]);       </a:t>
+              <a:t>]);    </a:t>
             </a:r>
             <a:r>
               <a:rPr lang="en-US" altLang="ko-KR" sz="1800" b="1" i="1" u="none" strike="noStrike" dirty="0">
@@ -18999,27 +18413,7 @@
                 <a:effectLst/>
                 <a:latin typeface="Consolas" panose="020B0609020204030204" pitchFamily="49" charset="0"/>
               </a:rPr>
-              <a:t> </a:t>
-            </a:r>
-            <a:r>
-              <a:rPr lang="en-US" altLang="ko-KR" sz="1800" b="1" i="0" u="none" strike="noStrike" dirty="0" err="1">
-                <a:solidFill>
-                  <a:srgbClr val="383A42"/>
-                </a:solidFill>
-                <a:effectLst/>
-                <a:latin typeface="Consolas" panose="020B0609020204030204" pitchFamily="49" charset="0"/>
-              </a:rPr>
-              <a:t>col_count</a:t>
-            </a:r>
-            <a:r>
-              <a:rPr lang="en-US" altLang="ko-KR" sz="1800" b="1" i="0" u="none" strike="noStrike" dirty="0">
-                <a:solidFill>
-                  <a:srgbClr val="383A42"/>
-                </a:solidFill>
-                <a:effectLst/>
-                <a:latin typeface="Consolas" panose="020B0609020204030204" pitchFamily="49" charset="0"/>
-              </a:rPr>
-              <a:t> = </a:t>
+              <a:t> col_count = </a:t>
             </a:r>
             <a:r>
               <a:rPr lang="en-US" altLang="ko-KR" sz="1800" b="1" i="0" u="none" strike="noStrike" dirty="0">
@@ -20033,7 +19427,7 @@
                 <a:effectLst/>
                 <a:latin typeface="Consolas" panose="020B0609020204030204" pitchFamily="49" charset="0"/>
               </a:rPr>
-              <a:t>0</a:t>
+              <a:t>7</a:t>
             </a:r>
             <a:r>
               <a:rPr lang="en-US" altLang="ko-KR" sz="1600" b="1" i="0" u="none" strike="noStrike" dirty="0">
@@ -20266,7 +19660,7 @@
                 <a:effectLst/>
                 <a:latin typeface="Consolas" panose="020B0609020204030204" pitchFamily="49" charset="0"/>
               </a:rPr>
-              <a:t>0</a:t>
+              <a:t>7</a:t>
             </a:r>
             <a:r>
               <a:rPr lang="en-US" altLang="ko-KR" sz="1800" b="1" i="0" u="none" strike="noStrike" dirty="0">
@@ -20499,7 +19893,7 @@
               <a:buNone/>
               <a:tabLst/>
             </a:pPr>
-            <a:endParaRPr kumimoji="1" lang="ko-KR" altLang="en-US" sz="2400" b="0" i="0" u="none" strike="noStrike" cap="none" normalizeH="0" baseline="0">
+            <a:endParaRPr kumimoji="1" lang="ko-KR" altLang="en-US" sz="2400" b="0" i="0" u="none" strike="noStrike" cap="none" normalizeH="0" baseline="0" dirty="0">
               <a:ln>
                 <a:noFill/>
               </a:ln>
@@ -20571,7 +19965,7 @@
               <a:buNone/>
               <a:tabLst/>
             </a:pPr>
-            <a:endParaRPr kumimoji="1" lang="ko-KR" altLang="en-US" sz="2400" b="0" i="0" u="none" strike="noStrike" cap="none" normalizeH="0" baseline="0">
+            <a:endParaRPr kumimoji="1" lang="ko-KR" altLang="en-US" sz="2400" b="0" i="0" u="none" strike="noStrike" cap="none" normalizeH="0" baseline="0" dirty="0">
               <a:ln>
                 <a:noFill/>
               </a:ln>
@@ -20637,14 +20031,13 @@
           <a:lstStyle/>
           <a:p>
             <a:r>
-              <a:rPr lang="en-US" altLang="ko-KR" b="0" dirty="0"/>
+              <a:rPr lang="en-US" altLang="ko-KR" dirty="0"/>
               <a:t>8.2.1 2</a:t>
             </a:r>
             <a:r>
-              <a:rPr lang="ko-KR" altLang="en-US" b="0" dirty="0"/>
+              <a:rPr lang="ko-KR" altLang="en-US" dirty="0"/>
               <a:t>차원 배열 출력</a:t>
             </a:r>
-            <a:endParaRPr lang="ko-KR" altLang="en-US" dirty="0"/>
           </a:p>
         </p:txBody>
       </p:sp>
@@ -20776,10 +20169,9 @@
               <a:defRPr/>
             </a:pPr>
             <a:r>
-              <a:rPr lang="ko-KR" altLang="en-US"/>
+              <a:rPr lang="ko-KR" altLang="en-US" dirty="0"/>
               <a:t>게임 프로그래밍 교육과정</a:t>
             </a:r>
-            <a:endParaRPr lang="ko-KR" altLang="en-US" dirty="0"/>
           </a:p>
         </p:txBody>
       </p:sp>
@@ -20897,27 +20289,7 @@
                 <a:effectLst/>
                 <a:latin typeface="Consolas" panose="020B0609020204030204" pitchFamily="49" charset="0"/>
               </a:rPr>
-              <a:t>; i &lt; </a:t>
-            </a:r>
-            <a:r>
-              <a:rPr lang="en-US" altLang="ko-KR" sz="1800" i="0" u="none" strike="noStrike" dirty="0" err="1">
-                <a:solidFill>
-                  <a:srgbClr val="383A42"/>
-                </a:solidFill>
-                <a:effectLst/>
-                <a:latin typeface="Consolas" panose="020B0609020204030204" pitchFamily="49" charset="0"/>
-              </a:rPr>
-              <a:t>row_count</a:t>
-            </a:r>
-            <a:r>
-              <a:rPr lang="en-US" altLang="ko-KR" sz="1800" i="0" u="none" strike="noStrike" dirty="0">
-                <a:solidFill>
-                  <a:srgbClr val="383A42"/>
-                </a:solidFill>
-                <a:effectLst/>
-                <a:latin typeface="Consolas" panose="020B0609020204030204" pitchFamily="49" charset="0"/>
-              </a:rPr>
-              <a:t>; ++i)</a:t>
+              <a:t>; i &lt; row_count; ++i)</a:t>
             </a:r>
             <a:br>
               <a:rPr lang="en-US" altLang="ko-KR" sz="1800" i="0" u="none" strike="noStrike" dirty="0">
@@ -21035,27 +20407,7 @@
                 <a:effectLst/>
                 <a:latin typeface="Consolas" panose="020B0609020204030204" pitchFamily="49" charset="0"/>
               </a:rPr>
-              <a:t>; j &lt; </a:t>
-            </a:r>
-            <a:r>
-              <a:rPr lang="en-US" altLang="ko-KR" sz="1800" i="0" u="none" strike="noStrike" dirty="0" err="1">
-                <a:solidFill>
-                  <a:srgbClr val="383A42"/>
-                </a:solidFill>
-                <a:effectLst/>
-                <a:latin typeface="Consolas" panose="020B0609020204030204" pitchFamily="49" charset="0"/>
-              </a:rPr>
-              <a:t>col_count</a:t>
-            </a:r>
-            <a:r>
-              <a:rPr lang="en-US" altLang="ko-KR" sz="1800" i="0" u="none" strike="noStrike" dirty="0">
-                <a:solidFill>
-                  <a:srgbClr val="383A42"/>
-                </a:solidFill>
-                <a:effectLst/>
-                <a:latin typeface="Consolas" panose="020B0609020204030204" pitchFamily="49" charset="0"/>
-              </a:rPr>
-              <a:t>; ++j)</a:t>
+              <a:t>; j &lt; col_count; ++j)</a:t>
             </a:r>
             <a:br>
               <a:rPr lang="en-US" altLang="ko-KR" sz="1800" i="0" u="none" strike="noStrike" dirty="0">
@@ -21313,27 +20665,7 @@
                 <a:effectLst/>
                 <a:latin typeface="Consolas" panose="020B0609020204030204" pitchFamily="49" charset="0"/>
               </a:rPr>
-              <a:t> &lt; </a:t>
-            </a:r>
-            <a:r>
-              <a:rPr lang="en-US" altLang="ko-KR" sz="1800" i="0" u="none" strike="noStrike" dirty="0" err="1">
-                <a:solidFill>
-                  <a:srgbClr val="383A42"/>
-                </a:solidFill>
-                <a:effectLst/>
-                <a:latin typeface="Consolas" panose="020B0609020204030204" pitchFamily="49" charset="0"/>
-              </a:rPr>
-              <a:t>row_count</a:t>
-            </a:r>
-            <a:r>
-              <a:rPr lang="en-US" altLang="ko-KR" sz="1800" i="0" u="none" strike="noStrike" dirty="0">
-                <a:solidFill>
-                  <a:srgbClr val="383A42"/>
-                </a:solidFill>
-                <a:effectLst/>
-                <a:latin typeface="Consolas" panose="020B0609020204030204" pitchFamily="49" charset="0"/>
-              </a:rPr>
-              <a:t>; ++</a:t>
+              <a:t> &lt; row_count; ++</a:t>
             </a:r>
             <a:r>
               <a:rPr lang="en-US" altLang="ko-KR" sz="1800" b="1" i="0" u="none" strike="noStrike" dirty="0">
@@ -21491,27 +20823,7 @@
                 <a:effectLst/>
                 <a:latin typeface="Consolas" panose="020B0609020204030204" pitchFamily="49" charset="0"/>
               </a:rPr>
-              <a:t> &lt; </a:t>
-            </a:r>
-            <a:r>
-              <a:rPr lang="en-US" altLang="ko-KR" sz="1800" i="0" u="none" strike="noStrike" dirty="0" err="1">
-                <a:solidFill>
-                  <a:srgbClr val="383A42"/>
-                </a:solidFill>
-                <a:effectLst/>
-                <a:latin typeface="Consolas" panose="020B0609020204030204" pitchFamily="49" charset="0"/>
-              </a:rPr>
-              <a:t>col_count</a:t>
-            </a:r>
-            <a:r>
-              <a:rPr lang="en-US" altLang="ko-KR" sz="1800" i="0" u="none" strike="noStrike" dirty="0">
-                <a:solidFill>
-                  <a:srgbClr val="383A42"/>
-                </a:solidFill>
-                <a:effectLst/>
-                <a:latin typeface="Consolas" panose="020B0609020204030204" pitchFamily="49" charset="0"/>
-              </a:rPr>
-              <a:t>; ++</a:t>
+              <a:t> &lt; col_count; ++</a:t>
             </a:r>
             <a:r>
               <a:rPr lang="en-US" altLang="ko-KR" sz="1800" b="1" i="0" u="none" strike="noStrike" dirty="0">
@@ -21707,14 +21019,13 @@
           <a:lstStyle/>
           <a:p>
             <a:r>
-              <a:rPr lang="en-US" altLang="ko-KR" b="0" dirty="0"/>
+              <a:rPr lang="en-US" altLang="ko-KR" dirty="0"/>
               <a:t>8.2.2 2</a:t>
             </a:r>
             <a:r>
-              <a:rPr lang="ko-KR" altLang="en-US" b="0" dirty="0"/>
+              <a:rPr lang="ko-KR" altLang="en-US" dirty="0"/>
               <a:t>차원 배열 응용</a:t>
             </a:r>
-            <a:endParaRPr lang="ko-KR" altLang="en-US" dirty="0"/>
           </a:p>
         </p:txBody>
       </p:sp>
@@ -21811,10 +21122,9 @@
               <a:defRPr/>
             </a:pPr>
             <a:r>
-              <a:rPr lang="ko-KR" altLang="en-US"/>
+              <a:rPr lang="ko-KR" altLang="en-US" dirty="0"/>
               <a:t>게임 프로그래밍 교육과정</a:t>
             </a:r>
-            <a:endParaRPr lang="ko-KR" altLang="en-US" dirty="0"/>
           </a:p>
         </p:txBody>
       </p:sp>
@@ -22383,22 +21693,21 @@
           <a:lstStyle/>
           <a:p>
             <a:r>
-              <a:rPr lang="en-US" altLang="ko-KR" b="0" dirty="0"/>
+              <a:rPr lang="en-US" altLang="ko-KR" dirty="0"/>
               <a:t>8.2.3 2</a:t>
             </a:r>
             <a:r>
-              <a:rPr lang="ko-KR" altLang="en-US" b="0" dirty="0"/>
+              <a:rPr lang="ko-KR" altLang="en-US" dirty="0"/>
               <a:t>차원 배열 ↔ </a:t>
             </a:r>
             <a:r>
-              <a:rPr lang="en-US" altLang="ko-KR" b="0" dirty="0"/>
+              <a:rPr lang="en-US" altLang="ko-KR" dirty="0"/>
               <a:t>1</a:t>
             </a:r>
             <a:r>
-              <a:rPr lang="ko-KR" altLang="en-US" b="0" dirty="0"/>
+              <a:rPr lang="ko-KR" altLang="en-US" dirty="0"/>
               <a:t>차원 배열 변환</a:t>
             </a:r>
-            <a:endParaRPr lang="ko-KR" altLang="en-US" dirty="0"/>
           </a:p>
         </p:txBody>
       </p:sp>
@@ -22587,7 +21896,7 @@
                   <a:srgbClr val="0099FF"/>
                 </a:solidFill>
               </a:rPr>
-              <a:t>= index / </a:t>
+              <a:t>= index  /  </a:t>
             </a:r>
             <a:r>
               <a:rPr lang="ko-KR" altLang="en-US" dirty="0">
@@ -22614,7 +21923,7 @@
                   <a:srgbClr val="0099FF"/>
                 </a:solidFill>
               </a:rPr>
-              <a:t>= index % </a:t>
+              <a:t>= index  %  </a:t>
             </a:r>
             <a:r>
               <a:rPr lang="ko-KR" altLang="en-US" dirty="0">
@@ -22652,10 +21961,9 @@
               <a:defRPr/>
             </a:pPr>
             <a:r>
-              <a:rPr lang="ko-KR" altLang="en-US"/>
+              <a:rPr lang="ko-KR" altLang="en-US" dirty="0"/>
               <a:t>게임 프로그래밍 교육과정</a:t>
             </a:r>
-            <a:endParaRPr lang="ko-KR" altLang="en-US" dirty="0"/>
           </a:p>
         </p:txBody>
       </p:sp>
@@ -22711,14 +22019,13 @@
           <a:lstStyle/>
           <a:p>
             <a:r>
-              <a:rPr lang="en-US" altLang="ko-KR" b="0" dirty="0"/>
+              <a:rPr lang="en-US" altLang="ko-KR" dirty="0"/>
               <a:t>8.2.4 2</a:t>
             </a:r>
             <a:r>
-              <a:rPr lang="ko-KR" altLang="en-US" b="0" dirty="0"/>
+              <a:rPr lang="ko-KR" altLang="en-US" dirty="0"/>
               <a:t>차원 배열 행과 열 전치</a:t>
             </a:r>
-            <a:endParaRPr lang="ko-KR" altLang="en-US" dirty="0"/>
           </a:p>
         </p:txBody>
       </p:sp>
@@ -22784,10 +22091,9 @@
               <a:defRPr/>
             </a:pPr>
             <a:r>
-              <a:rPr lang="ko-KR" altLang="en-US"/>
+              <a:rPr lang="ko-KR" altLang="en-US" dirty="0"/>
               <a:t>게임 프로그래밍 교육과정</a:t>
             </a:r>
-            <a:endParaRPr lang="ko-KR" altLang="en-US" dirty="0"/>
           </a:p>
         </p:txBody>
       </p:sp>
@@ -22974,27 +22280,7 @@
                 <a:effectLst/>
                 <a:latin typeface="Consolas" panose="020B0609020204030204" pitchFamily="49" charset="0"/>
               </a:rPr>
-              <a:t>; r &lt; </a:t>
-            </a:r>
-            <a:r>
-              <a:rPr lang="en-US" altLang="ko-KR" sz="2400" b="0" i="0" u="none" strike="noStrike" dirty="0" err="1">
-                <a:solidFill>
-                  <a:srgbClr val="383A42"/>
-                </a:solidFill>
-                <a:effectLst/>
-                <a:latin typeface="Consolas" panose="020B0609020204030204" pitchFamily="49" charset="0"/>
-              </a:rPr>
-              <a:t>row_count</a:t>
-            </a:r>
-            <a:r>
-              <a:rPr lang="en-US" altLang="ko-KR" sz="2400" b="0" i="0" u="none" strike="noStrike" dirty="0">
-                <a:solidFill>
-                  <a:srgbClr val="383A42"/>
-                </a:solidFill>
-                <a:effectLst/>
-                <a:latin typeface="Consolas" panose="020B0609020204030204" pitchFamily="49" charset="0"/>
-              </a:rPr>
-              <a:t>; ++r)</a:t>
+              <a:t>; r &lt; row_count; ++r)</a:t>
             </a:r>
             <a:br>
               <a:rPr lang="en-US" altLang="ko-KR" sz="2400" b="0" i="0" u="none" strike="noStrike" dirty="0">
@@ -23092,27 +22378,7 @@
                 <a:effectLst/>
                 <a:latin typeface="Consolas" panose="020B0609020204030204" pitchFamily="49" charset="0"/>
               </a:rPr>
-              <a:t>; c &lt; </a:t>
-            </a:r>
-            <a:r>
-              <a:rPr lang="en-US" altLang="ko-KR" sz="2400" b="0" i="0" u="none" strike="noStrike" dirty="0" err="1">
-                <a:solidFill>
-                  <a:srgbClr val="383A42"/>
-                </a:solidFill>
-                <a:effectLst/>
-                <a:latin typeface="Consolas" panose="020B0609020204030204" pitchFamily="49" charset="0"/>
-              </a:rPr>
-              <a:t>col_count</a:t>
-            </a:r>
-            <a:r>
-              <a:rPr lang="en-US" altLang="ko-KR" sz="2400" b="0" i="0" u="none" strike="noStrike" dirty="0">
-                <a:solidFill>
-                  <a:srgbClr val="383A42"/>
-                </a:solidFill>
-                <a:effectLst/>
-                <a:latin typeface="Consolas" panose="020B0609020204030204" pitchFamily="49" charset="0"/>
-              </a:rPr>
-              <a:t>; ++c)</a:t>
+              <a:t>; c &lt; col_count; ++c)</a:t>
             </a:r>
             <a:br>
               <a:rPr lang="en-US" altLang="ko-KR" sz="2400" b="0" i="0" u="none" strike="noStrike" dirty="0">
@@ -23281,14 +22547,13 @@
           <a:lstStyle/>
           <a:p>
             <a:r>
-              <a:rPr lang="en-US" altLang="ko-KR" b="0" dirty="0"/>
+              <a:rPr lang="en-US" altLang="ko-KR" dirty="0"/>
               <a:t>8.2.5 3</a:t>
             </a:r>
             <a:r>
-              <a:rPr lang="ko-KR" altLang="en-US" b="0" dirty="0"/>
+              <a:rPr lang="ko-KR" altLang="en-US" dirty="0"/>
               <a:t>차원 배열</a:t>
             </a:r>
-            <a:endParaRPr lang="ko-KR" altLang="en-US" dirty="0"/>
           </a:p>
         </p:txBody>
       </p:sp>
@@ -23393,10 +22658,9 @@
               <a:defRPr/>
             </a:pPr>
             <a:r>
-              <a:rPr lang="ko-KR" altLang="en-US"/>
+              <a:rPr lang="ko-KR" altLang="en-US" dirty="0"/>
               <a:t>게임 프로그래밍 교육과정</a:t>
             </a:r>
-            <a:endParaRPr lang="ko-KR" altLang="en-US" dirty="0"/>
           </a:p>
         </p:txBody>
       </p:sp>
@@ -23439,17 +22703,37 @@
             <a:r>
               <a:rPr lang="ko-KR" altLang="en-US" sz="2400" b="1" i="0" u="none" strike="noStrike" dirty="0">
                 <a:solidFill>
-                  <a:srgbClr val="383A42"/>
-                </a:solidFill>
-                <a:effectLst/>
-                <a:latin typeface="Consolas" panose="020B0609020204030204" pitchFamily="49" charset="0"/>
-              </a:rPr>
-              <a:t>자료형 배열</a:t>
+                  <a:srgbClr val="0000FF"/>
+                </a:solidFill>
+                <a:effectLst/>
+                <a:latin typeface="Consolas" panose="020B0609020204030204" pitchFamily="49" charset="0"/>
+              </a:rPr>
+              <a:t>자료형</a:t>
+            </a:r>
+            <a:r>
+              <a:rPr lang="ko-KR" altLang="en-US" sz="2400" b="1" i="0" u="none" strike="noStrike" dirty="0">
+                <a:solidFill>
+                  <a:srgbClr val="383A42"/>
+                </a:solidFill>
+                <a:effectLst/>
+                <a:latin typeface="Consolas" panose="020B0609020204030204" pitchFamily="49" charset="0"/>
+              </a:rPr>
+              <a:t> </a:t>
+            </a:r>
+            <a:r>
+              <a:rPr lang="ko-KR" altLang="en-US" sz="2400" b="1" i="0" u="none" strike="noStrike" dirty="0">
+                <a:solidFill>
+                  <a:srgbClr val="FF0000"/>
+                </a:solidFill>
+                <a:effectLst/>
+                <a:latin typeface="Consolas" panose="020B0609020204030204" pitchFamily="49" charset="0"/>
+              </a:rPr>
+              <a:t>배열</a:t>
             </a:r>
             <a:r>
               <a:rPr lang="en-US" altLang="ko-KR" sz="2400" b="1" i="0" u="none" strike="noStrike" dirty="0">
                 <a:solidFill>
-                  <a:srgbClr val="383A42"/>
+                  <a:srgbClr val="FF0000"/>
                 </a:solidFill>
                 <a:effectLst/>
                 <a:latin typeface="Consolas" panose="020B0609020204030204" pitchFamily="49" charset="0"/>
@@ -23459,7 +22743,7 @@
             <a:r>
               <a:rPr lang="ko-KR" altLang="en-US" sz="2400" b="1" i="0" u="none" strike="noStrike" dirty="0">
                 <a:solidFill>
-                  <a:srgbClr val="383A42"/>
+                  <a:srgbClr val="FF0000"/>
                 </a:solidFill>
                 <a:effectLst/>
                 <a:latin typeface="Consolas" panose="020B0609020204030204" pitchFamily="49" charset="0"/>
@@ -23479,7 +22763,7 @@
             <a:r>
               <a:rPr lang="ko-KR" altLang="en-US" sz="2400" b="1" i="0" u="none" strike="noStrike" dirty="0">
                 <a:solidFill>
-                  <a:srgbClr val="383A42"/>
+                  <a:srgbClr val="7030A0"/>
                 </a:solidFill>
                 <a:effectLst/>
                 <a:latin typeface="Consolas" panose="020B0609020204030204" pitchFamily="49" charset="0"/>
@@ -23489,7 +22773,7 @@
             <a:r>
               <a:rPr lang="en-US" altLang="ko-KR" sz="2400" b="1" i="0" u="none" strike="noStrike" dirty="0">
                 <a:solidFill>
-                  <a:srgbClr val="383A42"/>
+                  <a:srgbClr val="7030A0"/>
                 </a:solidFill>
                 <a:effectLst/>
                 <a:latin typeface="Consolas" panose="020B0609020204030204" pitchFamily="49" charset="0"/>
@@ -23499,7 +22783,7 @@
             <a:r>
               <a:rPr lang="ko-KR" altLang="en-US" sz="2400" b="1" i="0" u="none" strike="noStrike" dirty="0">
                 <a:solidFill>
-                  <a:srgbClr val="383A42"/>
+                  <a:srgbClr val="7030A0"/>
                 </a:solidFill>
                 <a:effectLst/>
                 <a:latin typeface="Consolas" panose="020B0609020204030204" pitchFamily="49" charset="0"/>
@@ -23519,7 +22803,7 @@
             <a:r>
               <a:rPr lang="ko-KR" altLang="en-US" sz="2400" b="1" i="0" u="none" strike="noStrike" dirty="0">
                 <a:solidFill>
-                  <a:srgbClr val="383A42"/>
+                  <a:srgbClr val="7030A0"/>
                 </a:solidFill>
                 <a:effectLst/>
                 <a:latin typeface="Consolas" panose="020B0609020204030204" pitchFamily="49" charset="0"/>
@@ -23529,7 +22813,7 @@
             <a:r>
               <a:rPr lang="en-US" altLang="ko-KR" sz="2400" b="1" i="0" u="none" strike="noStrike" dirty="0">
                 <a:solidFill>
-                  <a:srgbClr val="383A42"/>
+                  <a:srgbClr val="7030A0"/>
                 </a:solidFill>
                 <a:effectLst/>
                 <a:latin typeface="Consolas" panose="020B0609020204030204" pitchFamily="49" charset="0"/>
@@ -23539,7 +22823,7 @@
             <a:r>
               <a:rPr lang="ko-KR" altLang="en-US" sz="2400" b="1" i="0" u="none" strike="noStrike" dirty="0">
                 <a:solidFill>
-                  <a:srgbClr val="383A42"/>
+                  <a:srgbClr val="7030A0"/>
                 </a:solidFill>
                 <a:effectLst/>
                 <a:latin typeface="Consolas" panose="020B0609020204030204" pitchFamily="49" charset="0"/>
@@ -23559,7 +22843,7 @@
             <a:r>
               <a:rPr lang="ko-KR" altLang="en-US" sz="2400" b="1" i="0" u="none" strike="noStrike" dirty="0">
                 <a:solidFill>
-                  <a:srgbClr val="383A42"/>
+                  <a:srgbClr val="7030A0"/>
                 </a:solidFill>
                 <a:effectLst/>
                 <a:latin typeface="Consolas" panose="020B0609020204030204" pitchFamily="49" charset="0"/>
@@ -23569,7 +22853,7 @@
             <a:r>
               <a:rPr lang="en-US" altLang="ko-KR" sz="2400" b="1" i="0" u="none" strike="noStrike" dirty="0">
                 <a:solidFill>
-                  <a:srgbClr val="383A42"/>
+                  <a:srgbClr val="7030A0"/>
                 </a:solidFill>
                 <a:effectLst/>
                 <a:latin typeface="Consolas" panose="020B0609020204030204" pitchFamily="49" charset="0"/>
@@ -23579,7 +22863,7 @@
             <a:r>
               <a:rPr lang="ko-KR" altLang="en-US" sz="2400" b="1" i="0" u="none" strike="noStrike" dirty="0">
                 <a:solidFill>
-                  <a:srgbClr val="383A42"/>
+                  <a:srgbClr val="7030A0"/>
                 </a:solidFill>
                 <a:effectLst/>
                 <a:latin typeface="Consolas" panose="020B0609020204030204" pitchFamily="49" charset="0"/>
@@ -23798,7 +23082,7 @@
               <a:buNone/>
               <a:tabLst/>
             </a:pPr>
-            <a:endParaRPr kumimoji="1" lang="ko-KR" altLang="en-US" sz="2400" b="0" i="0" u="none" strike="noStrike" cap="none" normalizeH="0" baseline="0">
+            <a:endParaRPr kumimoji="1" lang="ko-KR" altLang="en-US" sz="2400" b="0" i="0" u="none" strike="noStrike" cap="none" normalizeH="0" baseline="0" dirty="0">
               <a:ln>
                 <a:noFill/>
               </a:ln>
@@ -25455,14 +24739,13 @@
           <a:lstStyle/>
           <a:p>
             <a:r>
-              <a:rPr lang="en-US" altLang="ko-KR" b="0" dirty="0"/>
+              <a:rPr lang="en-US" altLang="ko-KR" dirty="0"/>
               <a:t>08. </a:t>
             </a:r>
             <a:r>
-              <a:rPr lang="ko-KR" altLang="en-US" b="0" dirty="0"/>
+              <a:rPr lang="ko-KR" altLang="en-US" dirty="0"/>
               <a:t>배열</a:t>
             </a:r>
-            <a:endParaRPr lang="ko-KR" altLang="en-US" dirty="0"/>
           </a:p>
         </p:txBody>
       </p:sp>
@@ -26143,7 +25426,7 @@
                         <a:buNone/>
                       </a:pPr>
                       <a:r>
-                        <a:rPr lang="ko-KR" altLang="en-US" sz="1800" b="1" i="0" u="none" strike="noStrike" dirty="0" err="1">
+                        <a:rPr lang="ko-KR" altLang="en-US" sz="1800" b="1" i="0" u="none" strike="noStrike" dirty="0">
                           <a:solidFill>
                             <a:srgbClr val="0000FF"/>
                           </a:solidFill>
@@ -26216,7 +25499,7 @@
                         <a:buNone/>
                       </a:pPr>
                       <a:r>
-                        <a:rPr lang="ko-KR" altLang="en-US" sz="1800" b="1" i="0" u="none" strike="noStrike">
+                        <a:rPr lang="ko-KR" altLang="en-US" sz="1800" b="1" i="0" u="none" strike="noStrike" dirty="0">
                           <a:solidFill>
                             <a:srgbClr val="000000"/>
                           </a:solidFill>
@@ -26225,7 +25508,7 @@
                         </a:rPr>
                         <a:t>메모리 구조</a:t>
                       </a:r>
-                      <a:endParaRPr lang="ko-KR" altLang="en-US" sz="3200" b="1">
+                      <a:endParaRPr lang="ko-KR" altLang="en-US" sz="3200" b="1" dirty="0">
                         <a:effectLst/>
                       </a:endParaRPr>
                     </a:p>
@@ -26667,7 +25950,7 @@
                         <a:buNone/>
                       </a:pPr>
                       <a:r>
-                        <a:rPr lang="ko-KR" altLang="en-US" sz="1800" b="1" i="0" u="none" strike="noStrike">
+                        <a:rPr lang="ko-KR" altLang="en-US" sz="1800" b="1" i="0" u="none" strike="noStrike" dirty="0">
                           <a:solidFill>
                             <a:srgbClr val="000000"/>
                           </a:solidFill>
@@ -26676,7 +25959,7 @@
                         </a:rPr>
                         <a:t>단편화</a:t>
                       </a:r>
-                      <a:endParaRPr lang="ko-KR" altLang="en-US" sz="3200" b="1">
+                      <a:endParaRPr lang="ko-KR" altLang="en-US" sz="3200" b="1" dirty="0">
                         <a:effectLst/>
                       </a:endParaRPr>
                     </a:p>
@@ -26730,7 +26013,7 @@
                         <a:buNone/>
                       </a:pPr>
                       <a:r>
-                        <a:rPr lang="ko-KR" altLang="en-US" sz="1800" b="1" i="0" u="none" strike="noStrike">
+                        <a:rPr lang="ko-KR" altLang="en-US" sz="1800" b="1" i="0" u="none" strike="noStrike" dirty="0">
                           <a:solidFill>
                             <a:srgbClr val="000000"/>
                           </a:solidFill>
@@ -26739,7 +26022,7 @@
                         </a:rPr>
                         <a:t>없음</a:t>
                       </a:r>
-                      <a:endParaRPr lang="ko-KR" altLang="en-US" sz="3200" b="1">
+                      <a:endParaRPr lang="ko-KR" altLang="en-US" sz="3200" b="1" dirty="0">
                         <a:effectLst/>
                       </a:endParaRPr>
                     </a:p>
@@ -27120,14 +26403,13 @@
           <a:lstStyle/>
           <a:p>
             <a:r>
-              <a:rPr lang="en-US" altLang="ko-KR" b="0" dirty="0"/>
+              <a:rPr lang="en-US" altLang="ko-KR" dirty="0"/>
               <a:t>8.2.5 3</a:t>
             </a:r>
             <a:r>
-              <a:rPr lang="ko-KR" altLang="en-US" b="0" dirty="0"/>
+              <a:rPr lang="ko-KR" altLang="en-US" dirty="0"/>
               <a:t>차원 배열</a:t>
             </a:r>
-            <a:endParaRPr lang="ko-KR" altLang="en-US" dirty="0"/>
           </a:p>
         </p:txBody>
       </p:sp>
@@ -27196,10 +26478,9 @@
               <a:defRPr/>
             </a:pPr>
             <a:r>
-              <a:rPr lang="ko-KR" altLang="en-US"/>
+              <a:rPr lang="ko-KR" altLang="en-US" dirty="0"/>
               <a:t>게임 프로그래밍 교육과정</a:t>
             </a:r>
-            <a:endParaRPr lang="ko-KR" altLang="en-US" dirty="0"/>
           </a:p>
         </p:txBody>
       </p:sp>
@@ -27224,6 +26505,14 @@
             <a:avLst/>
           </a:prstGeom>
           <a:noFill/>
+          <a:ln w="25400">
+            <a:solidFill>
+              <a:schemeClr val="bg1">
+                <a:lumMod val="85000"/>
+              </a:schemeClr>
+            </a:solidFill>
+            <a:prstDash val="sysDot"/>
+          </a:ln>
         </p:spPr>
         <p:txBody>
           <a:bodyPr wrap="square">
@@ -27550,27 +26839,7 @@
                 <a:effectLst/>
                 <a:latin typeface="Consolas" panose="020B0609020204030204" pitchFamily="49" charset="0"/>
               </a:rPr>
-              <a:t>; l &lt; </a:t>
-            </a:r>
-            <a:r>
-              <a:rPr lang="en-US" altLang="ko-KR" sz="2400" b="0" i="0" u="none" strike="noStrike" dirty="0" err="1">
-                <a:solidFill>
-                  <a:srgbClr val="383A42"/>
-                </a:solidFill>
-                <a:effectLst/>
-                <a:latin typeface="Consolas" panose="020B0609020204030204" pitchFamily="49" charset="0"/>
-              </a:rPr>
-              <a:t>layer_count</a:t>
-            </a:r>
-            <a:r>
-              <a:rPr lang="en-US" altLang="ko-KR" sz="2400" b="0" i="0" u="none" strike="noStrike" dirty="0">
-                <a:solidFill>
-                  <a:srgbClr val="383A42"/>
-                </a:solidFill>
-                <a:effectLst/>
-                <a:latin typeface="Consolas" panose="020B0609020204030204" pitchFamily="49" charset="0"/>
-              </a:rPr>
-              <a:t>; ++l)</a:t>
+              <a:t>; l &lt; layer_count; ++l)</a:t>
             </a:r>
             <a:br>
               <a:rPr lang="en-US" altLang="ko-KR" sz="2400" b="0" i="0" u="none" strike="noStrike" dirty="0">
@@ -27668,27 +26937,7 @@
                 <a:effectLst/>
                 <a:latin typeface="Consolas" panose="020B0609020204030204" pitchFamily="49" charset="0"/>
               </a:rPr>
-              <a:t>; r &lt; </a:t>
-            </a:r>
-            <a:r>
-              <a:rPr lang="en-US" altLang="ko-KR" sz="2400" b="0" i="0" u="none" strike="noStrike" dirty="0" err="1">
-                <a:solidFill>
-                  <a:srgbClr val="383A42"/>
-                </a:solidFill>
-                <a:effectLst/>
-                <a:latin typeface="Consolas" panose="020B0609020204030204" pitchFamily="49" charset="0"/>
-              </a:rPr>
-              <a:t>row_count</a:t>
-            </a:r>
-            <a:r>
-              <a:rPr lang="en-US" altLang="ko-KR" sz="2400" b="0" i="0" u="none" strike="noStrike" dirty="0">
-                <a:solidFill>
-                  <a:srgbClr val="383A42"/>
-                </a:solidFill>
-                <a:effectLst/>
-                <a:latin typeface="Consolas" panose="020B0609020204030204" pitchFamily="49" charset="0"/>
-              </a:rPr>
-              <a:t>; ++r)</a:t>
+              <a:t>; r &lt; row_count; ++r)</a:t>
             </a:r>
             <a:br>
               <a:rPr lang="en-US" altLang="ko-KR" sz="2400" b="0" i="0" u="none" strike="noStrike" dirty="0">
@@ -27786,27 +27035,7 @@
                 <a:effectLst/>
                 <a:latin typeface="Consolas" panose="020B0609020204030204" pitchFamily="49" charset="0"/>
               </a:rPr>
-              <a:t>; c &lt; </a:t>
-            </a:r>
-            <a:r>
-              <a:rPr lang="en-US" altLang="ko-KR" sz="2400" b="0" i="0" u="none" strike="noStrike" dirty="0" err="1">
-                <a:solidFill>
-                  <a:srgbClr val="383A42"/>
-                </a:solidFill>
-                <a:effectLst/>
-                <a:latin typeface="Consolas" panose="020B0609020204030204" pitchFamily="49" charset="0"/>
-              </a:rPr>
-              <a:t>col_count</a:t>
-            </a:r>
-            <a:r>
-              <a:rPr lang="en-US" altLang="ko-KR" sz="2400" b="0" i="0" u="none" strike="noStrike" dirty="0">
-                <a:solidFill>
-                  <a:srgbClr val="383A42"/>
-                </a:solidFill>
-                <a:effectLst/>
-                <a:latin typeface="Consolas" panose="020B0609020204030204" pitchFamily="49" charset="0"/>
-              </a:rPr>
-              <a:t>; ++c)</a:t>
+              <a:t>; c &lt; col_count; ++c)</a:t>
             </a:r>
             <a:br>
               <a:rPr lang="en-US" altLang="ko-KR" sz="2400" b="0" i="0" u="none" strike="noStrike" dirty="0">
@@ -27873,800 +27102,6 @@
 </file>
 
 <file path=ppt/slides/slide31.xml><?xml version="1.0" encoding="utf-8"?>
-<p:sld xmlns:a="http://schemas.openxmlformats.org/drawingml/2006/main" xmlns:r="http://schemas.openxmlformats.org/officeDocument/2006/relationships" xmlns:p="http://schemas.openxmlformats.org/presentationml/2006/main">
-  <p:cSld>
-    <p:spTree>
-      <p:nvGrpSpPr>
-        <p:cNvPr id="1" name="">
-          <a:extLst>
-            <a:ext uri="{FF2B5EF4-FFF2-40B4-BE49-F238E27FC236}">
-              <a16:creationId xmlns:a16="http://schemas.microsoft.com/office/drawing/2014/main" id="{02E3AB07-19C4-6EFD-CF21-EE6D65C7A3C1}"/>
-            </a:ext>
-          </a:extLst>
-        </p:cNvPr>
-        <p:cNvGrpSpPr/>
-        <p:nvPr/>
-      </p:nvGrpSpPr>
-      <p:grpSpPr>
-        <a:xfrm>
-          <a:off x="0" y="0"/>
-          <a:ext cx="0" cy="0"/>
-          <a:chOff x="0" y="0"/>
-          <a:chExt cx="0" cy="0"/>
-        </a:xfrm>
-      </p:grpSpPr>
-      <p:sp>
-        <p:nvSpPr>
-          <p:cNvPr id="2" name="제목 1">
-            <a:extLst>
-              <a:ext uri="{FF2B5EF4-FFF2-40B4-BE49-F238E27FC236}">
-                <a16:creationId xmlns:a16="http://schemas.microsoft.com/office/drawing/2014/main" id="{61CF5048-855A-1EFE-DFE2-0A972989FB29}"/>
-              </a:ext>
-            </a:extLst>
-          </p:cNvPr>
-          <p:cNvSpPr>
-            <a:spLocks noGrp="1"/>
-          </p:cNvSpPr>
-          <p:nvPr>
-            <p:ph type="title"/>
-          </p:nvPr>
-        </p:nvSpPr>
-        <p:spPr/>
-        <p:txBody>
-          <a:bodyPr/>
-          <a:lstStyle/>
-          <a:p>
-            <a:r>
-              <a:rPr lang="en-US" altLang="ko-KR" b="0" dirty="0"/>
-              <a:t>8.3 </a:t>
-            </a:r>
-            <a:r>
-              <a:rPr lang="ko-KR" altLang="en-US" b="0" dirty="0"/>
-              <a:t>문자열 </a:t>
-            </a:r>
-            <a:r>
-              <a:rPr lang="ko-KR" altLang="en-US" b="0" dirty="0" err="1"/>
-              <a:t>리터럴과</a:t>
-            </a:r>
-            <a:r>
-              <a:rPr lang="ko-KR" altLang="en-US" b="0" dirty="0"/>
-              <a:t> </a:t>
-            </a:r>
-            <a:r>
-              <a:rPr lang="en-US" altLang="ko-KR" b="0" dirty="0"/>
-              <a:t>char </a:t>
-            </a:r>
-            <a:r>
-              <a:rPr lang="ko-KR" altLang="en-US" b="0" dirty="0"/>
-              <a:t>배열</a:t>
-            </a:r>
-            <a:endParaRPr lang="ko-KR" altLang="en-US" dirty="0"/>
-          </a:p>
-        </p:txBody>
-      </p:sp>
-      <p:sp>
-        <p:nvSpPr>
-          <p:cNvPr id="3" name="내용 개체 틀 2">
-            <a:extLst>
-              <a:ext uri="{FF2B5EF4-FFF2-40B4-BE49-F238E27FC236}">
-                <a16:creationId xmlns:a16="http://schemas.microsoft.com/office/drawing/2014/main" id="{A34F7F6C-6F74-069D-2767-A5BE668EFF96}"/>
-              </a:ext>
-            </a:extLst>
-          </p:cNvPr>
-          <p:cNvSpPr>
-            <a:spLocks noGrp="1"/>
-          </p:cNvSpPr>
-          <p:nvPr>
-            <p:ph idx="1"/>
-          </p:nvPr>
-        </p:nvSpPr>
-        <p:spPr/>
-        <p:txBody>
-          <a:bodyPr/>
-          <a:lstStyle/>
-          <a:p>
-            <a:r>
-              <a:rPr lang="ko-KR" altLang="en-US" sz="2400" dirty="0"/>
-              <a:t>문자열 리터럴</a:t>
-            </a:r>
-            <a:endParaRPr lang="en-US" altLang="ko-KR" sz="2400" dirty="0"/>
-          </a:p>
-          <a:p>
-            <a:pPr lvl="1"/>
-            <a:r>
-              <a:rPr lang="en-US" altLang="ko-KR" sz="2000" dirty="0"/>
-              <a:t>string</a:t>
-            </a:r>
-          </a:p>
-          <a:p>
-            <a:pPr lvl="1"/>
-            <a:r>
-              <a:rPr lang="ko-KR" altLang="en-US" sz="2000" dirty="0"/>
-              <a:t>문자열 </a:t>
-            </a:r>
-            <a:r>
-              <a:rPr lang="en-US" altLang="ko-KR" sz="2000" dirty="0"/>
-              <a:t>= char </a:t>
-            </a:r>
-            <a:r>
-              <a:rPr lang="ko-KR" altLang="en-US" sz="2000" dirty="0"/>
-              <a:t>배열</a:t>
-            </a:r>
-            <a:endParaRPr lang="en-US" altLang="ko-KR" sz="2000" dirty="0"/>
-          </a:p>
-          <a:p>
-            <a:pPr lvl="1"/>
-            <a:r>
-              <a:rPr lang="ko-KR" altLang="en-US" sz="2000" dirty="0"/>
-              <a:t>문자열 끝 → 널 문자 </a:t>
-            </a:r>
-            <a:r>
-              <a:rPr lang="en-US" altLang="ko-KR" sz="2000" dirty="0">
-                <a:solidFill>
-                  <a:srgbClr val="FFC000"/>
-                </a:solidFill>
-              </a:rPr>
-              <a:t>'</a:t>
-            </a:r>
-            <a:r>
-              <a:rPr lang="en-US" altLang="ko-KR" sz="2000" dirty="0">
-                <a:solidFill>
-                  <a:srgbClr val="FFC000"/>
-                </a:solidFill>
-                <a:latin typeface="Consolas" panose="020B0609020204030204" pitchFamily="49" charset="0"/>
-              </a:rPr>
-              <a:t>\0</a:t>
-            </a:r>
-            <a:r>
-              <a:rPr lang="en-US" altLang="ko-KR" sz="2000" dirty="0">
-                <a:solidFill>
-                  <a:srgbClr val="FFC000"/>
-                </a:solidFill>
-              </a:rPr>
-              <a:t>'  </a:t>
-            </a:r>
-            <a:r>
-              <a:rPr lang="ko-KR" altLang="en-US" sz="2000" dirty="0"/>
-              <a:t>← 값 </a:t>
-            </a:r>
-            <a:r>
-              <a:rPr lang="en-US" altLang="ko-KR" sz="2000" dirty="0">
-                <a:solidFill>
-                  <a:srgbClr val="C00000"/>
-                </a:solidFill>
-              </a:rPr>
-              <a:t>0</a:t>
-            </a:r>
-          </a:p>
-          <a:p>
-            <a:pPr lvl="1"/>
-            <a:endParaRPr lang="en-US" altLang="ko-KR" sz="2000" dirty="0">
-              <a:solidFill>
-                <a:srgbClr val="C00000"/>
-              </a:solidFill>
-            </a:endParaRPr>
-          </a:p>
-          <a:p>
-            <a:pPr lvl="1"/>
-            <a:endParaRPr lang="en-US" altLang="ko-KR" sz="2000" dirty="0">
-              <a:solidFill>
-                <a:srgbClr val="C00000"/>
-              </a:solidFill>
-            </a:endParaRPr>
-          </a:p>
-          <a:p>
-            <a:pPr lvl="1"/>
-            <a:endParaRPr lang="en-US" altLang="ko-KR" sz="2000" dirty="0">
-              <a:solidFill>
-                <a:srgbClr val="C00000"/>
-              </a:solidFill>
-            </a:endParaRPr>
-          </a:p>
-          <a:p>
-            <a:pPr lvl="1"/>
-            <a:endParaRPr lang="en-US" altLang="ko-KR" sz="2000" dirty="0">
-              <a:solidFill>
-                <a:srgbClr val="C00000"/>
-              </a:solidFill>
-            </a:endParaRPr>
-          </a:p>
-          <a:p>
-            <a:pPr lvl="1"/>
-            <a:endParaRPr lang="en-US" altLang="ko-KR" sz="2000" dirty="0">
-              <a:solidFill>
-                <a:srgbClr val="C00000"/>
-              </a:solidFill>
-            </a:endParaRPr>
-          </a:p>
-          <a:p>
-            <a:endParaRPr lang="en-US" altLang="ko-KR" sz="2400" dirty="0"/>
-          </a:p>
-          <a:p>
-            <a:r>
-              <a:rPr lang="en-US" altLang="ko-KR" sz="2400" dirty="0"/>
-              <a:t>Not</a:t>
-            </a:r>
-            <a:r>
-              <a:rPr lang="ko-KR" altLang="en-US" sz="2400" dirty="0"/>
-              <a:t> </a:t>
-            </a:r>
-            <a:r>
-              <a:rPr lang="en-US" altLang="ko-KR" sz="2400" dirty="0"/>
-              <a:t>null-terminated string</a:t>
-            </a:r>
-          </a:p>
-          <a:p>
-            <a:pPr lvl="1"/>
-            <a:r>
-              <a:rPr lang="ko-KR" altLang="en-US" sz="2000" dirty="0"/>
-              <a:t>배열 끝에 </a:t>
-            </a:r>
-            <a:r>
-              <a:rPr lang="ko-KR" altLang="en-US" sz="2000" dirty="0" err="1"/>
-              <a:t>널문자</a:t>
-            </a:r>
-            <a:r>
-              <a:rPr lang="ko-KR" altLang="en-US" sz="2000" dirty="0"/>
-              <a:t> 없는 </a:t>
-            </a:r>
-            <a:r>
-              <a:rPr lang="en-US" altLang="ko-KR" sz="2000" dirty="0"/>
-              <a:t>char </a:t>
-            </a:r>
-            <a:r>
-              <a:rPr lang="ko-KR" altLang="en-US" sz="2000" dirty="0"/>
-              <a:t>배열</a:t>
-            </a:r>
-            <a:endParaRPr lang="en-US" altLang="ko-KR" sz="2000" dirty="0"/>
-          </a:p>
-          <a:p>
-            <a:pPr lvl="1"/>
-            <a:r>
-              <a:rPr lang="ko-KR" altLang="en-US" sz="2000" dirty="0"/>
-              <a:t>문자열 아님</a:t>
-            </a:r>
-            <a:endParaRPr lang="en-US" altLang="ko-KR" sz="2000" dirty="0"/>
-          </a:p>
-          <a:p>
-            <a:endParaRPr lang="en-US" altLang="ko-KR" sz="2400" dirty="0"/>
-          </a:p>
-          <a:p>
-            <a:endParaRPr lang="en-US" altLang="ko-KR" sz="2400" dirty="0"/>
-          </a:p>
-        </p:txBody>
-      </p:sp>
-      <p:sp>
-        <p:nvSpPr>
-          <p:cNvPr id="4" name="바닥글 개체 틀 3">
-            <a:extLst>
-              <a:ext uri="{FF2B5EF4-FFF2-40B4-BE49-F238E27FC236}">
-                <a16:creationId xmlns:a16="http://schemas.microsoft.com/office/drawing/2014/main" id="{11042868-63FD-C58D-B6C6-EF3C30B94B56}"/>
-              </a:ext>
-            </a:extLst>
-          </p:cNvPr>
-          <p:cNvSpPr>
-            <a:spLocks noGrp="1"/>
-          </p:cNvSpPr>
-          <p:nvPr>
-            <p:ph type="ftr" sz="quarter" idx="10"/>
-          </p:nvPr>
-        </p:nvSpPr>
-        <p:spPr/>
-        <p:txBody>
-          <a:bodyPr/>
-          <a:lstStyle/>
-          <a:p>
-            <a:pPr>
-              <a:defRPr/>
-            </a:pPr>
-            <a:r>
-              <a:rPr lang="ko-KR" altLang="en-US"/>
-              <a:t>게임 프로그래밍 교육과정</a:t>
-            </a:r>
-            <a:endParaRPr lang="ko-KR" altLang="en-US" dirty="0"/>
-          </a:p>
-        </p:txBody>
-      </p:sp>
-      <p:sp>
-        <p:nvSpPr>
-          <p:cNvPr id="7" name="TextBox 6">
-            <a:extLst>
-              <a:ext uri="{FF2B5EF4-FFF2-40B4-BE49-F238E27FC236}">
-                <a16:creationId xmlns:a16="http://schemas.microsoft.com/office/drawing/2014/main" id="{E4BB568F-2B1B-5FD2-4E2D-ABCDE760E727}"/>
-              </a:ext>
-            </a:extLst>
-          </p:cNvPr>
-          <p:cNvSpPr txBox="1"/>
-          <p:nvPr/>
-        </p:nvSpPr>
-        <p:spPr>
-          <a:xfrm>
-            <a:off x="1043608" y="2321966"/>
-            <a:ext cx="5112568" cy="461665"/>
-          </a:xfrm>
-          <a:prstGeom prst="rect">
-            <a:avLst/>
-          </a:prstGeom>
-          <a:noFill/>
-          <a:ln w="25400">
-            <a:solidFill>
-              <a:schemeClr val="bg1">
-                <a:lumMod val="65000"/>
-              </a:schemeClr>
-            </a:solidFill>
-            <a:prstDash val="sysDot"/>
-          </a:ln>
-        </p:spPr>
-        <p:txBody>
-          <a:bodyPr wrap="square">
-            <a:spAutoFit/>
-          </a:bodyPr>
-          <a:lstStyle/>
-          <a:p>
-            <a:r>
-              <a:rPr lang="it-IT" altLang="ko-KR" sz="2400" b="1" i="0" u="none" strike="noStrike" dirty="0">
-                <a:solidFill>
-                  <a:schemeClr val="bg1">
-                    <a:lumMod val="50000"/>
-                  </a:schemeClr>
-                </a:solidFill>
-                <a:effectLst/>
-                <a:latin typeface="Consolas" panose="020B0609020204030204" pitchFamily="49" charset="0"/>
-              </a:rPr>
-              <a:t>'H', 'e', 'l', 'l', 'o',</a:t>
-            </a:r>
-            <a:r>
-              <a:rPr lang="it-IT" altLang="ko-KR" sz="2400" b="1" i="0" u="none" strike="noStrike" dirty="0">
-                <a:solidFill>
-                  <a:srgbClr val="FF9900"/>
-                </a:solidFill>
-                <a:effectLst/>
-                <a:latin typeface="Consolas" panose="020B0609020204030204" pitchFamily="49" charset="0"/>
-              </a:rPr>
-              <a:t> '\0'</a:t>
-            </a:r>
-            <a:endParaRPr lang="ko-KR" altLang="en-US" b="1" dirty="0">
-              <a:solidFill>
-                <a:srgbClr val="FF9900"/>
-              </a:solidFill>
-            </a:endParaRPr>
-          </a:p>
-        </p:txBody>
-      </p:sp>
-      <p:sp>
-        <p:nvSpPr>
-          <p:cNvPr id="13" name="TextBox 12">
-            <a:extLst>
-              <a:ext uri="{FF2B5EF4-FFF2-40B4-BE49-F238E27FC236}">
-                <a16:creationId xmlns:a16="http://schemas.microsoft.com/office/drawing/2014/main" id="{931E8DE1-4940-80BA-E85D-2687418A29B5}"/>
-              </a:ext>
-            </a:extLst>
-          </p:cNvPr>
-          <p:cNvSpPr txBox="1"/>
-          <p:nvPr/>
-        </p:nvSpPr>
-        <p:spPr>
-          <a:xfrm>
-            <a:off x="1043608" y="3081734"/>
-            <a:ext cx="1711474" cy="461665"/>
-          </a:xfrm>
-          <a:prstGeom prst="rect">
-            <a:avLst/>
-          </a:prstGeom>
-          <a:noFill/>
-          <a:ln w="25400">
-            <a:solidFill>
-              <a:schemeClr val="bg1">
-                <a:lumMod val="65000"/>
-              </a:schemeClr>
-            </a:solidFill>
-            <a:prstDash val="sysDot"/>
-          </a:ln>
-        </p:spPr>
-        <p:txBody>
-          <a:bodyPr wrap="square">
-            <a:spAutoFit/>
-          </a:bodyPr>
-          <a:lstStyle/>
-          <a:p>
-            <a:r>
-              <a:rPr lang="en-US" altLang="ko-KR" b="1" i="0" u="none" strike="noStrike" dirty="0">
-                <a:solidFill>
-                  <a:schemeClr val="bg1">
-                    <a:lumMod val="50000"/>
-                  </a:schemeClr>
-                </a:solidFill>
-                <a:effectLst/>
-                <a:latin typeface="Consolas" panose="020B0609020204030204" pitchFamily="49" charset="0"/>
-              </a:rPr>
-              <a:t>"Hello</a:t>
-            </a:r>
-            <a:r>
-              <a:rPr lang="en-US" altLang="ko-KR" b="1" i="0" u="none" strike="noStrike" dirty="0">
-                <a:solidFill>
-                  <a:srgbClr val="FF9900"/>
-                </a:solidFill>
-                <a:effectLst/>
-                <a:latin typeface="Consolas" panose="020B0609020204030204" pitchFamily="49" charset="0"/>
-              </a:rPr>
-              <a:t>\0</a:t>
-            </a:r>
-            <a:r>
-              <a:rPr lang="en-US" altLang="ko-KR" b="1" i="0" u="none" strike="noStrike" dirty="0">
-                <a:solidFill>
-                  <a:schemeClr val="bg1">
-                    <a:lumMod val="50000"/>
-                  </a:schemeClr>
-                </a:solidFill>
-                <a:effectLst/>
-                <a:latin typeface="Consolas" panose="020B0609020204030204" pitchFamily="49" charset="0"/>
-              </a:rPr>
-              <a:t>"</a:t>
-            </a:r>
-            <a:endParaRPr lang="ko-KR" altLang="en-US" b="1" dirty="0">
-              <a:solidFill>
-                <a:schemeClr val="bg1">
-                  <a:lumMod val="50000"/>
-                </a:schemeClr>
-              </a:solidFill>
-              <a:latin typeface="Consolas" panose="020B0609020204030204" pitchFamily="49" charset="0"/>
-            </a:endParaRPr>
-          </a:p>
-        </p:txBody>
-      </p:sp>
-      <p:sp>
-        <p:nvSpPr>
-          <p:cNvPr id="15" name="TextBox 14">
-            <a:extLst>
-              <a:ext uri="{FF2B5EF4-FFF2-40B4-BE49-F238E27FC236}">
-                <a16:creationId xmlns:a16="http://schemas.microsoft.com/office/drawing/2014/main" id="{0544949C-8B8D-7D37-2797-FDFD4AD0A790}"/>
-              </a:ext>
-            </a:extLst>
-          </p:cNvPr>
-          <p:cNvSpPr txBox="1"/>
-          <p:nvPr/>
-        </p:nvSpPr>
-        <p:spPr>
-          <a:xfrm>
-            <a:off x="1547664" y="3543399"/>
-            <a:ext cx="6120680" cy="461665"/>
-          </a:xfrm>
-          <a:prstGeom prst="rect">
-            <a:avLst/>
-          </a:prstGeom>
-          <a:noFill/>
-          <a:ln w="25400">
-            <a:solidFill>
-              <a:schemeClr val="bg1">
-                <a:lumMod val="65000"/>
-              </a:schemeClr>
-            </a:solidFill>
-            <a:prstDash val="sysDot"/>
-          </a:ln>
-        </p:spPr>
-        <p:txBody>
-          <a:bodyPr wrap="square">
-            <a:spAutoFit/>
-          </a:bodyPr>
-          <a:lstStyle/>
-          <a:p>
-            <a:r>
-              <a:rPr lang="it-IT" altLang="ko-KR" b="1" i="0" u="none" strike="noStrike" dirty="0">
-                <a:solidFill>
-                  <a:schemeClr val="bg1">
-                    <a:lumMod val="50000"/>
-                  </a:schemeClr>
-                </a:solidFill>
-                <a:effectLst/>
-                <a:latin typeface="Consolas" panose="020B0609020204030204" pitchFamily="49" charset="0"/>
-              </a:rPr>
-              <a:t>'H', 'e', 'l', 'l', 'o', </a:t>
-            </a:r>
-            <a:r>
-              <a:rPr lang="it-IT" altLang="ko-KR" b="1" i="0" u="none" strike="noStrike" dirty="0">
-                <a:solidFill>
-                  <a:srgbClr val="FF9900"/>
-                </a:solidFill>
-                <a:effectLst/>
-                <a:latin typeface="Consolas" panose="020B0609020204030204" pitchFamily="49" charset="0"/>
-              </a:rPr>
-              <a:t>'\0'</a:t>
-            </a:r>
-            <a:r>
-              <a:rPr lang="it-IT" altLang="ko-KR" b="1" i="0" u="none" strike="noStrike" dirty="0">
-                <a:solidFill>
-                  <a:srgbClr val="383A42"/>
-                </a:solidFill>
-                <a:effectLst/>
-                <a:latin typeface="Consolas" panose="020B0609020204030204" pitchFamily="49" charset="0"/>
-              </a:rPr>
-              <a:t>, </a:t>
-            </a:r>
-            <a:r>
-              <a:rPr lang="it-IT" altLang="ko-KR" b="1" i="0" u="none" strike="noStrike" dirty="0">
-                <a:solidFill>
-                  <a:srgbClr val="FF9900"/>
-                </a:solidFill>
-                <a:effectLst/>
-                <a:latin typeface="Consolas" panose="020B0609020204030204" pitchFamily="49" charset="0"/>
-              </a:rPr>
-              <a:t>'\0'</a:t>
-            </a:r>
-            <a:endParaRPr lang="ko-KR" altLang="en-US" b="1" dirty="0">
-              <a:solidFill>
-                <a:srgbClr val="FF9900"/>
-              </a:solidFill>
-              <a:latin typeface="Consolas" panose="020B0609020204030204" pitchFamily="49" charset="0"/>
-            </a:endParaRPr>
-          </a:p>
-        </p:txBody>
-      </p:sp>
-      <p:sp>
-        <p:nvSpPr>
-          <p:cNvPr id="16" name="화살표: 오른쪽 15">
-            <a:extLst>
-              <a:ext uri="{FF2B5EF4-FFF2-40B4-BE49-F238E27FC236}">
-                <a16:creationId xmlns:a16="http://schemas.microsoft.com/office/drawing/2014/main" id="{3706B0E1-3097-8E3C-5A7F-E099FA516F3D}"/>
-              </a:ext>
-            </a:extLst>
-          </p:cNvPr>
-          <p:cNvSpPr/>
-          <p:nvPr/>
-        </p:nvSpPr>
-        <p:spPr bwMode="auto">
-          <a:xfrm>
-            <a:off x="2843808" y="3081734"/>
-            <a:ext cx="403592" cy="402978"/>
-          </a:xfrm>
-          <a:prstGeom prst="rightArrow">
-            <a:avLst/>
-          </a:prstGeom>
-          <a:solidFill>
-            <a:srgbClr val="FFFF00"/>
-          </a:solidFill>
-          <a:ln w="25400" cap="flat" cmpd="sng" algn="ctr">
-            <a:solidFill>
-              <a:schemeClr val="tx1"/>
-            </a:solidFill>
-            <a:prstDash val="solid"/>
-            <a:round/>
-            <a:headEnd type="none" w="med" len="med"/>
-            <a:tailEnd type="none" w="med" len="med"/>
-          </a:ln>
-          <a:effectLst/>
-        </p:spPr>
-        <p:txBody>
-          <a:bodyPr vert="horz" wrap="none" lIns="90000" tIns="46800" rIns="90000" bIns="46800" numCol="1" rtlCol="0" anchor="ctr" anchorCtr="0" compatLnSpc="1">
-            <a:prstTxWarp prst="textNoShape">
-              <a:avLst/>
-            </a:prstTxWarp>
-          </a:bodyPr>
-          <a:lstStyle/>
-          <a:p>
-            <a:pPr marL="0" marR="0" indent="0" algn="l" defTabSz="914400" rtl="0" eaLnBrk="1" fontAlgn="base" latinLnBrk="1" hangingPunct="1">
-              <a:lnSpc>
-                <a:spcPct val="100000"/>
-              </a:lnSpc>
-              <a:spcBef>
-                <a:spcPct val="0"/>
-              </a:spcBef>
-              <a:spcAft>
-                <a:spcPct val="0"/>
-              </a:spcAft>
-              <a:buClrTx/>
-              <a:buSzTx/>
-              <a:buFontTx/>
-              <a:buNone/>
-              <a:tabLst/>
-            </a:pPr>
-            <a:endParaRPr kumimoji="1" lang="ko-KR" altLang="en-US" sz="2400" b="0" i="0" u="none" strike="noStrike" cap="none" normalizeH="0" baseline="0">
-              <a:ln>
-                <a:noFill/>
-              </a:ln>
-              <a:solidFill>
-                <a:schemeClr val="tx1"/>
-              </a:solidFill>
-              <a:effectLst/>
-              <a:latin typeface="굴림" panose="020B0600000101010101" pitchFamily="50" charset="-127"/>
-              <a:ea typeface="굴림" panose="020B0600000101010101" pitchFamily="50" charset="-127"/>
-            </a:endParaRPr>
-          </a:p>
-        </p:txBody>
-      </p:sp>
-      <p:sp>
-        <p:nvSpPr>
-          <p:cNvPr id="18" name="TextBox 17">
-            <a:extLst>
-              <a:ext uri="{FF2B5EF4-FFF2-40B4-BE49-F238E27FC236}">
-                <a16:creationId xmlns:a16="http://schemas.microsoft.com/office/drawing/2014/main" id="{964404F8-D2F6-4AD6-651A-A276C134FA4D}"/>
-              </a:ext>
-            </a:extLst>
-          </p:cNvPr>
-          <p:cNvSpPr txBox="1"/>
-          <p:nvPr/>
-        </p:nvSpPr>
-        <p:spPr>
-          <a:xfrm>
-            <a:off x="739402" y="5805264"/>
-            <a:ext cx="8163672" cy="461665"/>
-          </a:xfrm>
-          <a:prstGeom prst="rect">
-            <a:avLst/>
-          </a:prstGeom>
-          <a:noFill/>
-          <a:ln w="25400">
-            <a:solidFill>
-              <a:schemeClr val="bg1">
-                <a:lumMod val="65000"/>
-              </a:schemeClr>
-            </a:solidFill>
-            <a:prstDash val="sysDot"/>
-          </a:ln>
-        </p:spPr>
-        <p:txBody>
-          <a:bodyPr wrap="square">
-            <a:spAutoFit/>
-          </a:bodyPr>
-          <a:lstStyle/>
-          <a:p>
-            <a:r>
-              <a:rPr lang="en-US" altLang="ko-KR" b="0" i="0" u="none" strike="noStrike" dirty="0">
-                <a:solidFill>
-                  <a:srgbClr val="A626A4"/>
-                </a:solidFill>
-                <a:effectLst/>
-                <a:latin typeface="Consolas" panose="020B0609020204030204" pitchFamily="49" charset="0"/>
-              </a:rPr>
-              <a:t>char</a:t>
-            </a:r>
-            <a:r>
-              <a:rPr lang="en-US" altLang="ko-KR" b="0" i="0" u="none" strike="noStrike" dirty="0">
-                <a:solidFill>
-                  <a:srgbClr val="383A42"/>
-                </a:solidFill>
-                <a:effectLst/>
-                <a:latin typeface="Consolas" panose="020B0609020204030204" pitchFamily="49" charset="0"/>
-              </a:rPr>
-              <a:t> </a:t>
-            </a:r>
-            <a:r>
-              <a:rPr lang="en-US" altLang="ko-KR" b="0" i="0" u="none" strike="noStrike" dirty="0" err="1">
-                <a:solidFill>
-                  <a:srgbClr val="383A42"/>
-                </a:solidFill>
-                <a:effectLst/>
-                <a:latin typeface="Consolas" panose="020B0609020204030204" pitchFamily="49" charset="0"/>
-              </a:rPr>
-              <a:t>charArray</a:t>
-            </a:r>
-            <a:r>
-              <a:rPr lang="en-US" altLang="ko-KR" b="0" i="0" u="none" strike="noStrike" dirty="0">
-                <a:solidFill>
-                  <a:srgbClr val="383A42"/>
-                </a:solidFill>
-                <a:effectLst/>
-                <a:latin typeface="Consolas" panose="020B0609020204030204" pitchFamily="49" charset="0"/>
-              </a:rPr>
-              <a:t>[] = { </a:t>
-            </a:r>
-            <a:r>
-              <a:rPr lang="en-US" altLang="ko-KR" b="0" i="0" u="none" strike="noStrike" dirty="0">
-                <a:solidFill>
-                  <a:srgbClr val="50A14F"/>
-                </a:solidFill>
-                <a:effectLst/>
-                <a:latin typeface="Consolas" panose="020B0609020204030204" pitchFamily="49" charset="0"/>
-              </a:rPr>
-              <a:t>'H'</a:t>
-            </a:r>
-            <a:r>
-              <a:rPr lang="en-US" altLang="ko-KR" b="0" i="0" u="none" strike="noStrike" dirty="0">
-                <a:solidFill>
-                  <a:srgbClr val="383A42"/>
-                </a:solidFill>
-                <a:effectLst/>
-                <a:latin typeface="Consolas" panose="020B0609020204030204" pitchFamily="49" charset="0"/>
-              </a:rPr>
-              <a:t>, </a:t>
-            </a:r>
-            <a:r>
-              <a:rPr lang="en-US" altLang="ko-KR" b="0" i="0" u="none" strike="noStrike" dirty="0">
-                <a:solidFill>
-                  <a:srgbClr val="50A14F"/>
-                </a:solidFill>
-                <a:effectLst/>
-                <a:latin typeface="Consolas" panose="020B0609020204030204" pitchFamily="49" charset="0"/>
-              </a:rPr>
-              <a:t>'e'</a:t>
-            </a:r>
-            <a:r>
-              <a:rPr lang="en-US" altLang="ko-KR" b="0" i="0" u="none" strike="noStrike" dirty="0">
-                <a:solidFill>
-                  <a:srgbClr val="383A42"/>
-                </a:solidFill>
-                <a:effectLst/>
-                <a:latin typeface="Consolas" panose="020B0609020204030204" pitchFamily="49" charset="0"/>
-              </a:rPr>
-              <a:t>, </a:t>
-            </a:r>
-            <a:r>
-              <a:rPr lang="en-US" altLang="ko-KR" b="0" i="0" u="none" strike="noStrike" dirty="0">
-                <a:solidFill>
-                  <a:srgbClr val="50A14F"/>
-                </a:solidFill>
-                <a:effectLst/>
-                <a:latin typeface="Consolas" panose="020B0609020204030204" pitchFamily="49" charset="0"/>
-              </a:rPr>
-              <a:t>'l'</a:t>
-            </a:r>
-            <a:r>
-              <a:rPr lang="en-US" altLang="ko-KR" b="0" i="0" u="none" strike="noStrike" dirty="0">
-                <a:solidFill>
-                  <a:srgbClr val="383A42"/>
-                </a:solidFill>
-                <a:effectLst/>
-                <a:latin typeface="Consolas" panose="020B0609020204030204" pitchFamily="49" charset="0"/>
-              </a:rPr>
-              <a:t>, </a:t>
-            </a:r>
-            <a:r>
-              <a:rPr lang="en-US" altLang="ko-KR" b="0" i="0" u="none" strike="noStrike" dirty="0">
-                <a:solidFill>
-                  <a:srgbClr val="50A14F"/>
-                </a:solidFill>
-                <a:effectLst/>
-                <a:latin typeface="Consolas" panose="020B0609020204030204" pitchFamily="49" charset="0"/>
-              </a:rPr>
-              <a:t>'l'</a:t>
-            </a:r>
-            <a:r>
-              <a:rPr lang="en-US" altLang="ko-KR" b="0" i="0" u="none" strike="noStrike" dirty="0">
-                <a:solidFill>
-                  <a:srgbClr val="383A42"/>
-                </a:solidFill>
-                <a:effectLst/>
-                <a:latin typeface="Consolas" panose="020B0609020204030204" pitchFamily="49" charset="0"/>
-              </a:rPr>
-              <a:t>, </a:t>
-            </a:r>
-            <a:r>
-              <a:rPr lang="en-US" altLang="ko-KR" b="0" i="0" u="none" strike="noStrike" dirty="0">
-                <a:solidFill>
-                  <a:srgbClr val="50A14F"/>
-                </a:solidFill>
-                <a:effectLst/>
-                <a:latin typeface="Consolas" panose="020B0609020204030204" pitchFamily="49" charset="0"/>
-              </a:rPr>
-              <a:t>'o'</a:t>
-            </a:r>
-            <a:r>
-              <a:rPr lang="en-US" altLang="ko-KR" b="0" i="0" u="none" strike="noStrike" dirty="0">
-                <a:solidFill>
-                  <a:srgbClr val="383A42"/>
-                </a:solidFill>
-                <a:effectLst/>
-                <a:latin typeface="Consolas" panose="020B0609020204030204" pitchFamily="49" charset="0"/>
-              </a:rPr>
-              <a:t> };</a:t>
-            </a:r>
-            <a:endParaRPr lang="ko-KR" altLang="en-US" dirty="0"/>
-          </a:p>
-        </p:txBody>
-      </p:sp>
-    </p:spTree>
-    <p:extLst>
-      <p:ext uri="{BB962C8B-B14F-4D97-AF65-F5344CB8AC3E}">
-        <p14:creationId xmlns:p14="http://schemas.microsoft.com/office/powerpoint/2010/main" val="4174663633"/>
-      </p:ext>
-    </p:extLst>
-  </p:cSld>
-  <p:clrMapOvr>
-    <a:masterClrMapping/>
-  </p:clrMapOvr>
-</p:sld>
-</file>
-
-<file path=ppt/slides/slide32.xml><?xml version="1.0" encoding="utf-8"?>
 <p:sld xmlns:a="http://schemas.openxmlformats.org/drawingml/2006/main" xmlns:r="http://schemas.openxmlformats.org/officeDocument/2006/relationships" xmlns:p="http://schemas.openxmlformats.org/presentationml/2006/main">
   <p:cSld>
     <p:spTree>
@@ -28711,30 +27146,21 @@
           <a:lstStyle/>
           <a:p>
             <a:r>
-              <a:rPr lang="en-US" altLang="ko-KR" b="0" dirty="0"/>
+              <a:rPr lang="en-US" altLang="ko-KR" dirty="0"/>
               <a:t>8.3 </a:t>
             </a:r>
             <a:r>
-              <a:rPr lang="ko-KR" altLang="en-US" b="0" dirty="0"/>
-              <a:t>문자열 </a:t>
-            </a:r>
-            <a:r>
-              <a:rPr lang="ko-KR" altLang="en-US" b="0" dirty="0" err="1"/>
-              <a:t>리터럴과</a:t>
-            </a:r>
-            <a:r>
-              <a:rPr lang="ko-KR" altLang="en-US" b="0" dirty="0"/>
-              <a:t> </a:t>
-            </a:r>
-            <a:r>
-              <a:rPr lang="en-US" altLang="ko-KR" b="0" dirty="0"/>
+              <a:rPr lang="ko-KR" altLang="en-US" dirty="0"/>
+              <a:t>문자열 리터럴과 </a:t>
+            </a:r>
+            <a:r>
+              <a:rPr lang="en-US" altLang="ko-KR" dirty="0"/>
               <a:t>char </a:t>
             </a:r>
             <a:r>
-              <a:rPr lang="ko-KR" altLang="en-US" b="0" dirty="0"/>
+              <a:rPr lang="ko-KR" altLang="en-US" dirty="0"/>
               <a:t>배열</a:t>
             </a:r>
-            <a:endParaRPr lang="ko-KR" altLang="en-US" dirty="0"/>
           </a:p>
         </p:txBody>
       </p:sp>
@@ -28886,15 +27312,7 @@
             <a:pPr lvl="1"/>
             <a:r>
               <a:rPr lang="ko-KR" altLang="en-US" sz="2000" dirty="0"/>
-              <a:t>배열 끝에 </a:t>
-            </a:r>
-            <a:r>
-              <a:rPr lang="ko-KR" altLang="en-US" sz="2000" dirty="0" err="1"/>
-              <a:t>널문자</a:t>
-            </a:r>
-            <a:r>
-              <a:rPr lang="ko-KR" altLang="en-US" sz="2000" dirty="0"/>
-              <a:t> 없는 </a:t>
+              <a:t>배열 끝에 널문자 없는 </a:t>
             </a:r>
             <a:r>
               <a:rPr lang="en-US" altLang="ko-KR" sz="2000" dirty="0"/>
@@ -28947,10 +27365,9 @@
               <a:defRPr/>
             </a:pPr>
             <a:r>
-              <a:rPr lang="ko-KR" altLang="en-US"/>
+              <a:rPr lang="ko-KR" altLang="en-US" dirty="0"/>
               <a:t>게임 프로그래밍 교육과정</a:t>
             </a:r>
-            <a:endParaRPr lang="ko-KR" altLang="en-US" dirty="0"/>
           </a:p>
         </p:txBody>
       </p:sp>
@@ -29335,27 +27752,7 @@
                 <a:effectLst/>
                 <a:latin typeface="Consolas" panose="020B0609020204030204" pitchFamily="49" charset="0"/>
               </a:rPr>
-              <a:t> </a:t>
-            </a:r>
-            <a:r>
-              <a:rPr lang="en-US" altLang="ko-KR" sz="2000" b="0" i="0" u="none" strike="noStrike" dirty="0" err="1">
-                <a:solidFill>
-                  <a:srgbClr val="383A42"/>
-                </a:solidFill>
-                <a:effectLst/>
-                <a:latin typeface="Consolas" panose="020B0609020204030204" pitchFamily="49" charset="0"/>
-              </a:rPr>
-              <a:t>charArray</a:t>
-            </a:r>
-            <a:r>
-              <a:rPr lang="en-US" altLang="ko-KR" sz="2000" b="0" i="0" u="none" strike="noStrike" dirty="0">
-                <a:solidFill>
-                  <a:srgbClr val="383A42"/>
-                </a:solidFill>
-                <a:effectLst/>
-                <a:latin typeface="Consolas" panose="020B0609020204030204" pitchFamily="49" charset="0"/>
-              </a:rPr>
-              <a:t>[] = { </a:t>
+              <a:t> charArray[] = { </a:t>
             </a:r>
             <a:r>
               <a:rPr lang="en-US" altLang="ko-KR" sz="2000" b="0" i="0" u="none" strike="noStrike" dirty="0">
@@ -29886,7 +28283,7 @@
 </p:sld>
 </file>
 
-<file path=ppt/slides/slide33.xml><?xml version="1.0" encoding="utf-8"?>
+<file path=ppt/slides/slide32.xml><?xml version="1.0" encoding="utf-8"?>
 <p:sld xmlns:a="http://schemas.openxmlformats.org/drawingml/2006/main" xmlns:r="http://schemas.openxmlformats.org/officeDocument/2006/relationships" xmlns:p="http://schemas.openxmlformats.org/presentationml/2006/main">
   <p:cSld>
     <p:spTree>
@@ -29931,30 +28328,21 @@
           <a:lstStyle/>
           <a:p>
             <a:r>
-              <a:rPr lang="en-US" altLang="ko-KR" b="0" dirty="0"/>
+              <a:rPr lang="en-US" altLang="ko-KR" dirty="0"/>
               <a:t>8.3 </a:t>
             </a:r>
             <a:r>
-              <a:rPr lang="ko-KR" altLang="en-US" b="0" dirty="0"/>
-              <a:t>문자열 </a:t>
-            </a:r>
-            <a:r>
-              <a:rPr lang="ko-KR" altLang="en-US" b="0" dirty="0" err="1"/>
-              <a:t>리터럴과</a:t>
-            </a:r>
-            <a:r>
-              <a:rPr lang="ko-KR" altLang="en-US" b="0" dirty="0"/>
-              <a:t> </a:t>
-            </a:r>
-            <a:r>
-              <a:rPr lang="en-US" altLang="ko-KR" b="0" dirty="0"/>
+              <a:rPr lang="ko-KR" altLang="en-US" dirty="0"/>
+              <a:t>문자열 리터럴과 </a:t>
+            </a:r>
+            <a:r>
+              <a:rPr lang="en-US" altLang="ko-KR" dirty="0"/>
               <a:t>char </a:t>
             </a:r>
             <a:r>
-              <a:rPr lang="ko-KR" altLang="en-US" b="0" dirty="0"/>
+              <a:rPr lang="ko-KR" altLang="en-US" dirty="0"/>
               <a:t>배열</a:t>
             </a:r>
-            <a:endParaRPr lang="ko-KR" altLang="en-US" dirty="0"/>
           </a:p>
         </p:txBody>
       </p:sp>
@@ -30003,7 +28391,7 @@
               <a:t>+ 1 (</a:t>
             </a:r>
             <a:r>
-              <a:rPr lang="ko-KR" altLang="en-US" sz="2000" dirty="0" err="1"/>
+              <a:rPr lang="ko-KR" altLang="en-US" sz="2000" dirty="0"/>
               <a:t>널문자</a:t>
             </a:r>
             <a:r>
@@ -30038,10 +28426,9 @@
               <a:defRPr/>
             </a:pPr>
             <a:r>
-              <a:rPr lang="ko-KR" altLang="en-US"/>
+              <a:rPr lang="ko-KR" altLang="en-US" dirty="0"/>
               <a:t>게임 프로그래밍 교육과정</a:t>
             </a:r>
-            <a:endParaRPr lang="ko-KR" altLang="en-US" dirty="0"/>
           </a:p>
         </p:txBody>
       </p:sp>
@@ -30155,25 +28542,7 @@
                 </a:solidFill>
                 <a:latin typeface="Consolas" panose="020B0609020204030204" pitchFamily="49" charset="0"/>
               </a:rPr>
-              <a:t>: '</a:t>
-            </a:r>
-            <a:r>
-              <a:rPr lang="en-US" altLang="ko-KR" sz="1600" b="1" i="1" dirty="0" err="1">
-                <a:solidFill>
-                  <a:srgbClr val="A0A1A7"/>
-                </a:solidFill>
-                <a:latin typeface="Consolas" panose="020B0609020204030204" pitchFamily="49" charset="0"/>
-              </a:rPr>
-              <a:t>H','e','l','l','o</a:t>
-            </a:r>
-            <a:r>
-              <a:rPr lang="en-US" altLang="ko-KR" sz="1600" b="1" i="1" dirty="0">
-                <a:solidFill>
-                  <a:srgbClr val="A0A1A7"/>
-                </a:solidFill>
-                <a:latin typeface="Consolas" panose="020B0609020204030204" pitchFamily="49" charset="0"/>
-              </a:rPr>
-              <a:t>','\0' → </a:t>
+              <a:t>: 'H','e','l','l','o','\0' → </a:t>
             </a:r>
             <a:r>
               <a:rPr lang="ko-KR" altLang="en-US" sz="1600" b="1" i="1" dirty="0">
@@ -30372,25 +28741,7 @@
                 </a:solidFill>
                 <a:latin typeface="Consolas" panose="020B0609020204030204" pitchFamily="49" charset="0"/>
               </a:rPr>
-              <a:t>: '</a:t>
-            </a:r>
-            <a:r>
-              <a:rPr lang="en-US" altLang="ko-KR" sz="1600" b="1" i="1" dirty="0" err="1">
-                <a:solidFill>
-                  <a:srgbClr val="A0A1A7"/>
-                </a:solidFill>
-                <a:latin typeface="Consolas" panose="020B0609020204030204" pitchFamily="49" charset="0"/>
-              </a:rPr>
-              <a:t>H','e','l','l','o</a:t>
-            </a:r>
-            <a:r>
-              <a:rPr lang="en-US" altLang="ko-KR" sz="1600" b="1" i="1" dirty="0">
-                <a:solidFill>
-                  <a:srgbClr val="A0A1A7"/>
-                </a:solidFill>
-                <a:latin typeface="Consolas" panose="020B0609020204030204" pitchFamily="49" charset="0"/>
-              </a:rPr>
-              <a:t>','\0','\0' → </a:t>
+              <a:t>: 'H','e','l','l','o','\0','\0' → </a:t>
             </a:r>
             <a:r>
               <a:rPr lang="ko-KR" altLang="en-US" sz="1600" b="1" i="1" dirty="0">
@@ -30558,27 +28909,7 @@
                 <a:effectLst/>
                 <a:latin typeface="Consolas" panose="020B0609020204030204" pitchFamily="49" charset="0"/>
               </a:rPr>
-              <a:t>포인터 → 문자열 </a:t>
-            </a:r>
-            <a:r>
-              <a:rPr lang="ko-KR" altLang="en-US" sz="1600" b="1" i="1" u="none" strike="noStrike" dirty="0" err="1">
-                <a:solidFill>
-                  <a:srgbClr val="A0A1A7"/>
-                </a:solidFill>
-                <a:effectLst/>
-                <a:latin typeface="Consolas" panose="020B0609020204030204" pitchFamily="49" charset="0"/>
-              </a:rPr>
-              <a:t>리터럴을</a:t>
-            </a:r>
-            <a:r>
-              <a:rPr lang="ko-KR" altLang="en-US" sz="1600" b="1" i="1" u="none" strike="noStrike" dirty="0">
-                <a:solidFill>
-                  <a:srgbClr val="A0A1A7"/>
-                </a:solidFill>
-                <a:effectLst/>
-                <a:latin typeface="Consolas" panose="020B0609020204030204" pitchFamily="49" charset="0"/>
-              </a:rPr>
-              <a:t> 가리킴</a:t>
+              <a:t>포인터 → 문자열 리터럴을 가리킴</a:t>
             </a:r>
             <a:endParaRPr lang="en-US" altLang="ko-KR" sz="1600" b="1" i="1" u="none" strike="noStrike" dirty="0">
               <a:solidFill>
@@ -30724,27 +29055,7 @@
                 <a:effectLst/>
                 <a:latin typeface="Consolas" panose="020B0609020204030204" pitchFamily="49" charset="0"/>
               </a:rPr>
-              <a:t>"array(\"Hello\")   : %</a:t>
-            </a:r>
-            <a:r>
-              <a:rPr lang="en-US" altLang="ko-KR" sz="1600" b="1" i="0" u="none" strike="noStrike" dirty="0" err="1">
-                <a:solidFill>
-                  <a:srgbClr val="50A14F"/>
-                </a:solidFill>
-                <a:effectLst/>
-                <a:latin typeface="Consolas" panose="020B0609020204030204" pitchFamily="49" charset="0"/>
-              </a:rPr>
-              <a:t>zu</a:t>
-            </a:r>
-            <a:r>
-              <a:rPr lang="en-US" altLang="ko-KR" sz="1600" b="1" i="0" u="none" strike="noStrike" dirty="0">
-                <a:solidFill>
-                  <a:srgbClr val="50A14F"/>
-                </a:solidFill>
-                <a:effectLst/>
-                <a:latin typeface="Consolas" panose="020B0609020204030204" pitchFamily="49" charset="0"/>
-              </a:rPr>
-              <a:t>\n"</a:t>
+              <a:t>"array(\"Hello\")   : %zu\n"</a:t>
             </a:r>
             <a:r>
               <a:rPr lang="en-US" altLang="ko-KR" sz="1600" b="1" i="0" u="none" strike="noStrike" dirty="0">
@@ -30823,27 +29134,7 @@
                 <a:effectLst/>
                 <a:latin typeface="Consolas" panose="020B0609020204030204" pitchFamily="49" charset="0"/>
               </a:rPr>
-              <a:t>"array(\"Hello\\0\") : %</a:t>
-            </a:r>
-            <a:r>
-              <a:rPr lang="en-US" altLang="ko-KR" sz="1600" b="1" i="0" u="none" strike="noStrike" dirty="0" err="1">
-                <a:solidFill>
-                  <a:srgbClr val="50A14F"/>
-                </a:solidFill>
-                <a:effectLst/>
-                <a:latin typeface="Consolas" panose="020B0609020204030204" pitchFamily="49" charset="0"/>
-              </a:rPr>
-              <a:t>zu</a:t>
-            </a:r>
-            <a:r>
-              <a:rPr lang="en-US" altLang="ko-KR" sz="1600" b="1" i="0" u="none" strike="noStrike" dirty="0">
-                <a:solidFill>
-                  <a:srgbClr val="50A14F"/>
-                </a:solidFill>
-                <a:effectLst/>
-                <a:latin typeface="Consolas" panose="020B0609020204030204" pitchFamily="49" charset="0"/>
-              </a:rPr>
-              <a:t>\n"</a:t>
+              <a:t>"array(\"Hello\\0\") : %zu\n"</a:t>
             </a:r>
             <a:r>
               <a:rPr lang="en-US" altLang="ko-KR" sz="1600" b="1" i="0" u="none" strike="noStrike" dirty="0">
@@ -30922,27 +29213,7 @@
                 <a:effectLst/>
                 <a:latin typeface="Consolas" panose="020B0609020204030204" pitchFamily="49" charset="0"/>
               </a:rPr>
-              <a:t>"pointer(\"Hello\") : %</a:t>
-            </a:r>
-            <a:r>
-              <a:rPr lang="en-US" altLang="ko-KR" sz="1600" b="1" i="0" u="none" strike="noStrike" dirty="0" err="1">
-                <a:solidFill>
-                  <a:srgbClr val="50A14F"/>
-                </a:solidFill>
-                <a:effectLst/>
-                <a:latin typeface="Consolas" panose="020B0609020204030204" pitchFamily="49" charset="0"/>
-              </a:rPr>
-              <a:t>zu</a:t>
-            </a:r>
-            <a:r>
-              <a:rPr lang="en-US" altLang="ko-KR" sz="1600" b="1" i="0" u="none" strike="noStrike" dirty="0">
-                <a:solidFill>
-                  <a:srgbClr val="50A14F"/>
-                </a:solidFill>
-                <a:effectLst/>
-                <a:latin typeface="Consolas" panose="020B0609020204030204" pitchFamily="49" charset="0"/>
-              </a:rPr>
-              <a:t>\n"</a:t>
+              <a:t>"pointer(\"Hello\") : %zu\n"</a:t>
             </a:r>
             <a:r>
               <a:rPr lang="en-US" altLang="ko-KR" sz="1600" b="1" i="0" u="none" strike="noStrike" dirty="0">
@@ -31041,27 +29312,7 @@
                 <a:effectLst/>
                 <a:latin typeface="Consolas" panose="020B0609020204030204" pitchFamily="49" charset="0"/>
               </a:rPr>
-              <a:t>"literal(\"Hello\") : %</a:t>
-            </a:r>
-            <a:r>
-              <a:rPr lang="en-US" altLang="ko-KR" sz="1600" b="1" i="0" u="none" strike="noStrike" dirty="0" err="1">
-                <a:solidFill>
-                  <a:srgbClr val="50A14F"/>
-                </a:solidFill>
-                <a:effectLst/>
-                <a:latin typeface="Consolas" panose="020B0609020204030204" pitchFamily="49" charset="0"/>
-              </a:rPr>
-              <a:t>zu</a:t>
-            </a:r>
-            <a:r>
-              <a:rPr lang="en-US" altLang="ko-KR" sz="1600" b="1" i="0" u="none" strike="noStrike" dirty="0">
-                <a:solidFill>
-                  <a:srgbClr val="50A14F"/>
-                </a:solidFill>
-                <a:effectLst/>
-                <a:latin typeface="Consolas" panose="020B0609020204030204" pitchFamily="49" charset="0"/>
-              </a:rPr>
-              <a:t>\n"</a:t>
+              <a:t>"literal(\"Hello\") : %zu\n"</a:t>
             </a:r>
             <a:r>
               <a:rPr lang="en-US" altLang="ko-KR" sz="1600" b="1" i="0" u="none" strike="noStrike" dirty="0">
@@ -31160,7 +29411,7 @@
 </p:sld>
 </file>
 
-<file path=ppt/slides/slide34.xml><?xml version="1.0" encoding="utf-8"?>
+<file path=ppt/slides/slide33.xml><?xml version="1.0" encoding="utf-8"?>
 <p:sld xmlns:a="http://schemas.openxmlformats.org/drawingml/2006/main" xmlns:r="http://schemas.openxmlformats.org/officeDocument/2006/relationships" xmlns:p="http://schemas.openxmlformats.org/presentationml/2006/main">
   <p:cSld>
     <p:spTree>
@@ -31205,30 +29456,21 @@
           <a:lstStyle/>
           <a:p>
             <a:r>
-              <a:rPr lang="en-US" altLang="ko-KR" b="0" dirty="0"/>
+              <a:rPr lang="en-US" altLang="ko-KR" dirty="0"/>
               <a:t>8.3 </a:t>
             </a:r>
             <a:r>
-              <a:rPr lang="ko-KR" altLang="en-US" b="0" dirty="0"/>
-              <a:t>문자열 </a:t>
-            </a:r>
-            <a:r>
-              <a:rPr lang="ko-KR" altLang="en-US" b="0" dirty="0" err="1"/>
-              <a:t>리터럴과</a:t>
-            </a:r>
-            <a:r>
-              <a:rPr lang="ko-KR" altLang="en-US" b="0" dirty="0"/>
-              <a:t> </a:t>
-            </a:r>
-            <a:r>
-              <a:rPr lang="en-US" altLang="ko-KR" b="0" dirty="0"/>
+              <a:rPr lang="ko-KR" altLang="en-US" dirty="0"/>
+              <a:t>문자열 리터럴과 </a:t>
+            </a:r>
+            <a:r>
+              <a:rPr lang="en-US" altLang="ko-KR" dirty="0"/>
               <a:t>char </a:t>
             </a:r>
             <a:r>
-              <a:rPr lang="ko-KR" altLang="en-US" b="0" dirty="0"/>
+              <a:rPr lang="ko-KR" altLang="en-US" dirty="0"/>
               <a:t>배열</a:t>
             </a:r>
-            <a:endParaRPr lang="ko-KR" altLang="en-US" dirty="0"/>
           </a:p>
         </p:txBody>
       </p:sp>
@@ -31361,7 +29603,7 @@
               <a:t>(</a:t>
             </a:r>
             <a:r>
-              <a:rPr lang="en-US" altLang="ko-KR" sz="2000" dirty="0" err="1">
+              <a:rPr lang="en-US" altLang="ko-KR" sz="2000" dirty="0">
                 <a:solidFill>
                   <a:srgbClr val="0000FF"/>
                 </a:solidFill>
@@ -31373,7 +29615,7 @@
               <a:t>, </a:t>
             </a:r>
             <a:r>
-              <a:rPr lang="en-US" altLang="ko-KR" sz="2000" dirty="0" err="1">
+              <a:rPr lang="en-US" altLang="ko-KR" sz="2000" dirty="0">
                 <a:solidFill>
                   <a:srgbClr val="0000FF"/>
                 </a:solidFill>
@@ -31385,7 +29627,7 @@
               <a:t>, </a:t>
             </a:r>
             <a:r>
-              <a:rPr lang="en-US" altLang="ko-KR" sz="2000" dirty="0" err="1">
+              <a:rPr lang="en-US" altLang="ko-KR" sz="2000" dirty="0">
                 <a:solidFill>
                   <a:srgbClr val="0000FF"/>
                 </a:solidFill>
@@ -31427,7 +29669,15 @@
             <a:pPr lvl="1"/>
             <a:r>
               <a:rPr lang="ko-KR" altLang="en-US" sz="2000" dirty="0"/>
-              <a:t>널 문자 없으면 문자열 아님</a:t>
+              <a:t>널 문자 없으면 문자열 아님 → </a:t>
+            </a:r>
+            <a:r>
+              <a:rPr lang="en-US" altLang="ko-KR" sz="2000" dirty="0"/>
+              <a:t>char </a:t>
+            </a:r>
+            <a:r>
+              <a:rPr lang="ko-KR" altLang="en-US" sz="2000" dirty="0"/>
+              <a:t>배열</a:t>
             </a:r>
             <a:endParaRPr lang="en-US" altLang="ko-KR" sz="2000" dirty="0"/>
           </a:p>
@@ -31458,10 +29708,9 @@
               <a:defRPr/>
             </a:pPr>
             <a:r>
-              <a:rPr lang="ko-KR" altLang="en-US"/>
+              <a:rPr lang="ko-KR" altLang="en-US" dirty="0"/>
               <a:t>게임 프로그래밍 교육과정</a:t>
             </a:r>
-            <a:endParaRPr lang="ko-KR" altLang="en-US" dirty="0"/>
           </a:p>
         </p:txBody>
       </p:sp>
@@ -31478,7 +29727,7 @@
 </p:sld>
 </file>
 
-<file path=ppt/slides/slide35.xml><?xml version="1.0" encoding="utf-8"?>
+<file path=ppt/slides/slide34.xml><?xml version="1.0" encoding="utf-8"?>
 <p:sld xmlns:a="http://schemas.openxmlformats.org/drawingml/2006/main" xmlns:r="http://schemas.openxmlformats.org/officeDocument/2006/relationships" xmlns:p="http://schemas.openxmlformats.org/presentationml/2006/main">
   <p:cSld>
     <p:spTree>
@@ -31523,14 +29772,13 @@
           <a:lstStyle/>
           <a:p>
             <a:r>
-              <a:rPr lang="en-US" altLang="ko-KR" b="0" dirty="0"/>
+              <a:rPr lang="en-US" altLang="ko-KR" dirty="0"/>
               <a:t>8.3.1 </a:t>
             </a:r>
             <a:r>
-              <a:rPr lang="ko-KR" altLang="en-US" b="0" dirty="0"/>
+              <a:rPr lang="ko-KR" altLang="en-US" dirty="0"/>
               <a:t>함수에서 배열 인수 전달</a:t>
             </a:r>
-            <a:endParaRPr lang="ko-KR" altLang="en-US" dirty="0"/>
           </a:p>
         </p:txBody>
       </p:sp>
@@ -31593,21 +29841,8 @@
             </a:pPr>
             <a:r>
               <a:rPr lang="en-US" altLang="ko-KR" sz="2000" dirty="0"/>
-              <a:t>	Ex) int arr[] → int*, char </a:t>
-            </a:r>
-            <a:r>
-              <a:rPr lang="en-US" altLang="ko-KR" sz="2000" dirty="0" err="1"/>
-              <a:t>byteArray</a:t>
-            </a:r>
-            <a:r>
-              <a:rPr lang="en-US" altLang="ko-KR" sz="2000" dirty="0"/>
-              <a:t>[] → char* </a:t>
-            </a:r>
-            <a:r>
-              <a:rPr lang="en-US" altLang="ko-KR" sz="2000" dirty="0" err="1"/>
-              <a:t>byteArray</a:t>
-            </a:r>
-            <a:endParaRPr lang="en-US" altLang="ko-KR" sz="2000" dirty="0"/>
+              <a:t>	Ex) int arr[] → int*, char byteArray[] → char* byteArray</a:t>
+            </a:r>
           </a:p>
           <a:p>
             <a:pPr lvl="2"/>
@@ -31699,10 +29934,9 @@
               <a:defRPr/>
             </a:pPr>
             <a:r>
-              <a:rPr lang="ko-KR" altLang="en-US"/>
+              <a:rPr lang="ko-KR" altLang="en-US" dirty="0"/>
               <a:t>게임 프로그래밍 교육과정</a:t>
             </a:r>
-            <a:endParaRPr lang="ko-KR" altLang="en-US" dirty="0"/>
           </a:p>
         </p:txBody>
       </p:sp>
@@ -31763,7 +29997,7 @@
               <a:t> </a:t>
             </a:r>
             <a:r>
-              <a:rPr lang="en-US" altLang="ko-KR" sz="1800" b="0" i="0" u="none" strike="noStrike" dirty="0" err="1">
+              <a:rPr lang="en-US" altLang="ko-KR" sz="1800" b="0" i="0" u="none" strike="noStrike" dirty="0">
                 <a:solidFill>
                   <a:srgbClr val="4078F2"/>
                 </a:solidFill>
@@ -32053,7 +30287,7 @@
 </p:sld>
 </file>
 
-<file path=ppt/slides/slide36.xml><?xml version="1.0" encoding="utf-8"?>
+<file path=ppt/slides/slide35.xml><?xml version="1.0" encoding="utf-8"?>
 <p:sld xmlns:a="http://schemas.openxmlformats.org/drawingml/2006/main" xmlns:r="http://schemas.openxmlformats.org/officeDocument/2006/relationships" xmlns:p="http://schemas.openxmlformats.org/presentationml/2006/main">
   <p:cSld>
     <p:spTree>
@@ -32098,14 +30332,13 @@
           <a:lstStyle/>
           <a:p>
             <a:r>
-              <a:rPr lang="en-US" altLang="ko-KR" b="0" dirty="0"/>
+              <a:rPr lang="en-US" altLang="ko-KR" dirty="0"/>
               <a:t>8.3.1 </a:t>
             </a:r>
             <a:r>
-              <a:rPr lang="ko-KR" altLang="en-US" b="0" dirty="0"/>
+              <a:rPr lang="ko-KR" altLang="en-US" dirty="0"/>
               <a:t>함수에서 배열 인수 전달</a:t>
             </a:r>
-            <a:endParaRPr lang="ko-KR" altLang="en-US" dirty="0"/>
           </a:p>
         </p:txBody>
       </p:sp>
@@ -32157,15 +30390,27 @@
               <a:t>전달 시 </a:t>
             </a:r>
             <a:r>
-              <a:rPr lang="en-US" altLang="ko-KR" dirty="0"/>
+              <a:rPr lang="en-US" altLang="ko-KR" dirty="0">
+                <a:solidFill>
+                  <a:srgbClr val="FF0000"/>
+                </a:solidFill>
+              </a:rPr>
               <a:t>0-</a:t>
             </a:r>
             <a:r>
-              <a:rPr lang="ko-KR" altLang="en-US" dirty="0"/>
+              <a:rPr lang="ko-KR" altLang="en-US" dirty="0">
+                <a:solidFill>
+                  <a:srgbClr val="FF0000"/>
+                </a:solidFill>
+              </a:rPr>
               <a:t>요소의 주소</a:t>
             </a:r>
             <a:r>
-              <a:rPr lang="en-US" altLang="ko-KR" dirty="0"/>
+              <a:rPr lang="en-US" altLang="ko-KR" dirty="0">
+                <a:solidFill>
+                  <a:srgbClr val="FF0000"/>
+                </a:solidFill>
+              </a:rPr>
               <a:t>(&amp;arr[0])</a:t>
             </a:r>
             <a:r>
@@ -32211,10 +30456,9 @@
               <a:defRPr/>
             </a:pPr>
             <a:r>
-              <a:rPr lang="ko-KR" altLang="en-US"/>
+              <a:rPr lang="ko-KR" altLang="en-US" dirty="0"/>
               <a:t>게임 프로그래밍 교육과정</a:t>
             </a:r>
-            <a:endParaRPr lang="ko-KR" altLang="en-US" dirty="0"/>
           </a:p>
         </p:txBody>
       </p:sp>
@@ -32581,7 +30825,7 @@
 </p:sld>
 </file>
 
-<file path=ppt/slides/slide37.xml><?xml version="1.0" encoding="utf-8"?>
+<file path=ppt/slides/slide36.xml><?xml version="1.0" encoding="utf-8"?>
 <p:sld xmlns:a="http://schemas.openxmlformats.org/drawingml/2006/main" xmlns:r="http://schemas.openxmlformats.org/officeDocument/2006/relationships" xmlns:p="http://schemas.openxmlformats.org/presentationml/2006/main">
   <p:cSld>
     <p:spTree>
@@ -32620,14 +30864,13 @@
           <a:lstStyle/>
           <a:p>
             <a:r>
-              <a:rPr lang="en-US" altLang="ko-KR" b="0" dirty="0"/>
+              <a:rPr lang="en-US" altLang="ko-KR" dirty="0"/>
               <a:t>8.3.2 printf, scanf "%s" </a:t>
             </a:r>
             <a:r>
-              <a:rPr lang="ko-KR" altLang="en-US" b="0" dirty="0"/>
+              <a:rPr lang="ko-KR" altLang="en-US" dirty="0"/>
               <a:t>이해</a:t>
             </a:r>
-            <a:endParaRPr lang="ko-KR" altLang="en-US" dirty="0"/>
           </a:p>
         </p:txBody>
       </p:sp>
@@ -32679,18 +30922,33 @@
               <a:t>시작 주소부터 </a:t>
             </a:r>
             <a:r>
+              <a:rPr lang="en-US" altLang="ko-KR" sz="1600" dirty="0">
+                <a:solidFill>
+                  <a:srgbClr val="CC00CC"/>
+                </a:solidFill>
+              </a:rPr>
+              <a:t>'</a:t>
+            </a:r>
+            <a:r>
+              <a:rPr lang="en-US" altLang="ko-KR" sz="1600" dirty="0">
+                <a:solidFill>
+                  <a:srgbClr val="CC00CC"/>
+                </a:solidFill>
+                <a:latin typeface="Consolas" panose="020B0609020204030204" pitchFamily="49" charset="0"/>
+              </a:rPr>
+              <a:t>\0</a:t>
+            </a:r>
+            <a:r>
+              <a:rPr lang="en-US" altLang="ko-KR" sz="1600" dirty="0">
+                <a:solidFill>
+                  <a:srgbClr val="CC00CC"/>
+                </a:solidFill>
+              </a:rPr>
+              <a:t>'</a:t>
+            </a:r>
+            <a:r>
               <a:rPr lang="en-US" altLang="ko-KR" sz="1600" dirty="0"/>
-              <a:t>'</a:t>
-            </a:r>
-            <a:r>
-              <a:rPr lang="en-US" altLang="ko-KR" sz="1600" dirty="0">
-                <a:latin typeface="Consolas" panose="020B0609020204030204" pitchFamily="49" charset="0"/>
-              </a:rPr>
-              <a:t>\0</a:t>
-            </a:r>
-            <a:r>
-              <a:rPr lang="en-US" altLang="ko-KR" sz="1600" dirty="0"/>
-              <a:t>' </a:t>
+              <a:t> </a:t>
             </a:r>
             <a:r>
               <a:rPr lang="ko-KR" altLang="en-US" sz="1600" dirty="0"/>
@@ -32719,17 +30977,28 @@
               <a:t>마지막에 </a:t>
             </a:r>
             <a:r>
-              <a:rPr lang="en-US" altLang="ko-KR" sz="1600" dirty="0"/>
+              <a:rPr lang="en-US" altLang="ko-KR" sz="1600" dirty="0">
+                <a:solidFill>
+                  <a:srgbClr val="CC00CC"/>
+                </a:solidFill>
+              </a:rPr>
               <a:t>'</a:t>
             </a:r>
             <a:r>
               <a:rPr lang="en-US" altLang="ko-KR" sz="1600" dirty="0">
+                <a:solidFill>
+                  <a:srgbClr val="CC00CC"/>
+                </a:solidFill>
                 <a:latin typeface="Consolas" panose="020B0609020204030204" pitchFamily="49" charset="0"/>
               </a:rPr>
               <a:t>\0</a:t>
             </a:r>
             <a:r>
-              <a:rPr lang="en-US" altLang="ko-KR" sz="1600" dirty="0"/>
+              <a:rPr lang="en-US" altLang="ko-KR" sz="1600" dirty="0">
+                <a:solidFill>
+                  <a:srgbClr val="CC00CC"/>
+                </a:solidFill>
+              </a:rPr>
               <a:t>' </a:t>
             </a:r>
             <a:r>
@@ -32782,7 +31051,7 @@
               <a:t>, </a:t>
             </a:r>
             <a:r>
-              <a:rPr lang="ko-KR" altLang="en-US" sz="2000" dirty="0" err="1"/>
+              <a:rPr lang="ko-KR" altLang="en-US" sz="2000" dirty="0"/>
               <a:t>엔터</a:t>
             </a:r>
             <a:r>
@@ -32802,17 +31071,36 @@
             </a:r>
             <a:r>
               <a:rPr lang="en-US" altLang="ko-KR" sz="2000" dirty="0"/>
-              <a:t>('</a:t>
+              <a:t>(</a:t>
             </a:r>
             <a:r>
               <a:rPr lang="en-US" altLang="ko-KR" sz="2000" dirty="0">
+                <a:solidFill>
+                  <a:srgbClr val="CC00CC"/>
+                </a:solidFill>
+              </a:rPr>
+              <a:t>'</a:t>
+            </a:r>
+            <a:r>
+              <a:rPr lang="en-US" altLang="ko-KR" sz="2000" dirty="0">
+                <a:solidFill>
+                  <a:srgbClr val="CC00CC"/>
+                </a:solidFill>
                 <a:latin typeface="Consolas" panose="020B0609020204030204" pitchFamily="49" charset="0"/>
               </a:rPr>
               <a:t>\0</a:t>
             </a:r>
             <a:r>
+              <a:rPr lang="en-US" altLang="ko-KR" sz="2000" dirty="0">
+                <a:solidFill>
+                  <a:srgbClr val="CC00CC"/>
+                </a:solidFill>
+              </a:rPr>
+              <a:t>'</a:t>
+            </a:r>
+            <a:r>
               <a:rPr lang="en-US" altLang="ko-KR" sz="2000" dirty="0"/>
-              <a:t>' </a:t>
+              <a:t> </a:t>
             </a:r>
             <a:r>
               <a:rPr lang="ko-KR" altLang="en-US" sz="2000" dirty="0"/>
@@ -32873,10 +31161,9 @@
               <a:defRPr/>
             </a:pPr>
             <a:r>
-              <a:rPr lang="ko-KR" altLang="en-US"/>
+              <a:rPr lang="ko-KR" altLang="en-US" dirty="0"/>
               <a:t>게임 프로그래밍 교육과정</a:t>
             </a:r>
-            <a:endParaRPr lang="ko-KR" altLang="en-US" dirty="0"/>
           </a:p>
         </p:txBody>
       </p:sp>
@@ -32893,7 +31180,7 @@
 </p:sld>
 </file>
 
-<file path=ppt/slides/slide38.xml><?xml version="1.0" encoding="utf-8"?>
+<file path=ppt/slides/slide37.xml><?xml version="1.0" encoding="utf-8"?>
 <p:sld xmlns:a="http://schemas.openxmlformats.org/drawingml/2006/main" xmlns:r="http://schemas.openxmlformats.org/officeDocument/2006/relationships" xmlns:p="http://schemas.openxmlformats.org/presentationml/2006/main">
   <p:cSld>
     <p:spTree>
@@ -32938,12 +31225,8 @@
           <a:lstStyle/>
           <a:p>
             <a:r>
-              <a:rPr lang="en-US" altLang="ko-KR" b="0" dirty="0"/>
-              <a:t>8.3.2 </a:t>
-            </a:r>
-            <a:r>
-              <a:rPr lang="en-US" altLang="ko-KR" b="0" dirty="0" err="1"/>
-              <a:t>myScanf</a:t>
+              <a:rPr lang="en-US" altLang="ko-KR" dirty="0"/>
+              <a:t>8.3.2 myScanf</a:t>
             </a:r>
             <a:endParaRPr lang="ko-KR" altLang="en-US" dirty="0"/>
           </a:p>
@@ -33012,7 +31295,11 @@
           <a:p>
             <a:pPr lvl="1"/>
             <a:r>
-              <a:rPr lang="en-US" altLang="ko-KR" sz="2000" dirty="0" err="1"/>
+              <a:rPr lang="en-US" altLang="ko-KR" dirty="0">
+                <a:solidFill>
+                  <a:srgbClr val="7030A0"/>
+                </a:solidFill>
+              </a:rPr>
               <a:t>getchar</a:t>
             </a:r>
             <a:r>
@@ -33024,12 +31311,8 @@
               <a:t>, </a:t>
             </a:r>
             <a:r>
-              <a:rPr lang="ko-KR" altLang="en-US" sz="2000" dirty="0" err="1"/>
-              <a:t>줄바꿈까지</a:t>
-            </a:r>
-            <a:r>
               <a:rPr lang="ko-KR" altLang="en-US" sz="2000" dirty="0"/>
-              <a:t> 읽어 입력 버퍼 비움</a:t>
+              <a:t>줄바꿈까지 읽어 입력 버퍼 비움</a:t>
             </a:r>
           </a:p>
           <a:p>
@@ -33085,10 +31368,9 @@
               <a:defRPr/>
             </a:pPr>
             <a:r>
-              <a:rPr lang="ko-KR" altLang="en-US"/>
+              <a:rPr lang="ko-KR" altLang="en-US" dirty="0"/>
               <a:t>게임 프로그래밍 교육과정</a:t>
             </a:r>
-            <a:endParaRPr lang="ko-KR" altLang="en-US" dirty="0"/>
           </a:p>
         </p:txBody>
       </p:sp>
@@ -33149,7 +31431,7 @@
               <a:t> </a:t>
             </a:r>
             <a:r>
-              <a:rPr lang="en-US" altLang="ko-KR" sz="1400" b="1" i="0" u="none" strike="noStrike" dirty="0" err="1">
+              <a:rPr lang="en-US" altLang="ko-KR" sz="1400" b="1" i="0" u="none" strike="noStrike" dirty="0">
                 <a:solidFill>
                   <a:srgbClr val="4078F2"/>
                 </a:solidFill>
@@ -33186,67 +31468,27 @@
                 <a:effectLst/>
                 <a:latin typeface="Consolas" panose="020B0609020204030204" pitchFamily="49" charset="0"/>
               </a:rPr>
-              <a:t> </a:t>
-            </a:r>
-            <a:r>
-              <a:rPr lang="en-US" altLang="ko-KR" sz="1400" b="1" i="0" u="none" strike="noStrike" dirty="0" err="1">
-                <a:solidFill>
-                  <a:srgbClr val="383A42"/>
-                </a:solidFill>
-                <a:effectLst/>
-                <a:latin typeface="Consolas" panose="020B0609020204030204" pitchFamily="49" charset="0"/>
-              </a:rPr>
-              <a:t>buf</a:t>
+              <a:t> buf[], </a:t>
             </a:r>
             <a:r>
               <a:rPr lang="en-US" altLang="ko-KR" sz="1400" b="1" i="0" u="none" strike="noStrike" dirty="0">
                 <a:solidFill>
-                  <a:srgbClr val="383A42"/>
-                </a:solidFill>
-                <a:effectLst/>
-                <a:latin typeface="Consolas" panose="020B0609020204030204" pitchFamily="49" charset="0"/>
-              </a:rPr>
-              <a:t>[], </a:t>
+                  <a:srgbClr val="A626A4"/>
+                </a:solidFill>
+                <a:effectLst/>
+                <a:latin typeface="Consolas" panose="020B0609020204030204" pitchFamily="49" charset="0"/>
+              </a:rPr>
+              <a:t>int</a:t>
             </a:r>
             <a:r>
               <a:rPr lang="en-US" altLang="ko-KR" sz="1400" b="1" i="0" u="none" strike="noStrike" dirty="0">
                 <a:solidFill>
-                  <a:srgbClr val="A626A4"/>
-                </a:solidFill>
-                <a:effectLst/>
-                <a:latin typeface="Consolas" panose="020B0609020204030204" pitchFamily="49" charset="0"/>
-              </a:rPr>
-              <a:t>int</a:t>
-            </a:r>
-            <a:r>
-              <a:rPr lang="en-US" altLang="ko-KR" sz="1400" b="1" i="0" u="none" strike="noStrike" dirty="0">
-                <a:solidFill>
-                  <a:srgbClr val="383A42"/>
-                </a:solidFill>
-                <a:effectLst/>
-                <a:latin typeface="Consolas" panose="020B0609020204030204" pitchFamily="49" charset="0"/>
-              </a:rPr>
-              <a:t> </a:t>
-            </a:r>
-            <a:r>
-              <a:rPr lang="en-US" altLang="ko-KR" sz="1400" b="1" i="0" u="none" strike="noStrike" dirty="0" err="1">
-                <a:solidFill>
-                  <a:srgbClr val="383A42"/>
-                </a:solidFill>
-                <a:effectLst/>
-                <a:latin typeface="Consolas" panose="020B0609020204030204" pitchFamily="49" charset="0"/>
-              </a:rPr>
-              <a:t>bufsize</a:t>
-            </a:r>
-            <a:r>
-              <a:rPr lang="en-US" altLang="ko-KR" sz="1400" b="1" i="0" u="none" strike="noStrike" dirty="0">
-                <a:solidFill>
-                  <a:srgbClr val="383A42"/>
-                </a:solidFill>
-                <a:effectLst/>
-                <a:latin typeface="Consolas" panose="020B0609020204030204" pitchFamily="49" charset="0"/>
-              </a:rPr>
-              <a:t>)</a:t>
+                  <a:srgbClr val="383A42"/>
+                </a:solidFill>
+                <a:effectLst/>
+                <a:latin typeface="Consolas" panose="020B0609020204030204" pitchFamily="49" charset="0"/>
+              </a:rPr>
+              <a:t> bufsize)</a:t>
             </a:r>
             <a:br>
               <a:rPr lang="en-US" altLang="ko-KR" sz="1400" b="1" i="0" u="none" strike="noStrike" dirty="0">
@@ -33304,27 +31546,7 @@
                 <a:effectLst/>
                 <a:latin typeface="Consolas" panose="020B0609020204030204" pitchFamily="49" charset="0"/>
               </a:rPr>
-              <a:t> </a:t>
-            </a:r>
-            <a:r>
-              <a:rPr lang="en-US" altLang="ko-KR" sz="1400" b="1" i="0" u="none" strike="noStrike" dirty="0" err="1">
-                <a:solidFill>
-                  <a:srgbClr val="383A42"/>
-                </a:solidFill>
-                <a:effectLst/>
-                <a:latin typeface="Consolas" panose="020B0609020204030204" pitchFamily="49" charset="0"/>
-              </a:rPr>
-              <a:t>read_count</a:t>
-            </a:r>
-            <a:r>
-              <a:rPr lang="en-US" altLang="ko-KR" sz="1400" b="1" i="0" u="none" strike="noStrike" dirty="0">
-                <a:solidFill>
-                  <a:srgbClr val="383A42"/>
-                </a:solidFill>
-                <a:effectLst/>
-                <a:latin typeface="Consolas" panose="020B0609020204030204" pitchFamily="49" charset="0"/>
-              </a:rPr>
-              <a:t> = </a:t>
+              <a:t> read_count = </a:t>
             </a:r>
             <a:r>
               <a:rPr lang="en-US" altLang="ko-KR" sz="1400" b="1" i="0" u="none" strike="noStrike" dirty="0">
@@ -33453,27 +31675,7 @@
                 <a:effectLst/>
                 <a:latin typeface="Consolas" panose="020B0609020204030204" pitchFamily="49" charset="0"/>
               </a:rPr>
-              <a:t>배열 마지막에 </a:t>
-            </a:r>
-            <a:r>
-              <a:rPr lang="ko-KR" altLang="en-US" sz="1400" b="1" i="1" u="none" strike="noStrike" dirty="0" err="1">
-                <a:solidFill>
-                  <a:srgbClr val="A0A1A7"/>
-                </a:solidFill>
-                <a:effectLst/>
-                <a:latin typeface="Consolas" panose="020B0609020204030204" pitchFamily="49" charset="0"/>
-              </a:rPr>
-              <a:t>널문자</a:t>
-            </a:r>
-            <a:r>
-              <a:rPr lang="ko-KR" altLang="en-US" sz="1400" b="1" i="1" u="none" strike="noStrike" dirty="0">
-                <a:solidFill>
-                  <a:srgbClr val="A0A1A7"/>
-                </a:solidFill>
-                <a:effectLst/>
-                <a:latin typeface="Consolas" panose="020B0609020204030204" pitchFamily="49" charset="0"/>
-              </a:rPr>
-              <a:t> 추가하기 위해 밖으로 뺌</a:t>
+              <a:t>배열 마지막에 널문자 추가하기 위해 밖으로 뺌</a:t>
             </a:r>
             <a:r>
               <a:rPr lang="en-US" altLang="ko-KR" sz="1400" b="1" i="1" u="none" strike="noStrike" dirty="0">
@@ -33610,27 +31812,7 @@
                 <a:effectLst/>
                 <a:latin typeface="Consolas" panose="020B0609020204030204" pitchFamily="49" charset="0"/>
               </a:rPr>
-              <a:t>;(ch = </a:t>
-            </a:r>
-            <a:r>
-              <a:rPr lang="en-US" altLang="ko-KR" sz="1400" b="1" i="0" u="none" strike="noStrike" dirty="0" err="1">
-                <a:solidFill>
-                  <a:srgbClr val="383A42"/>
-                </a:solidFill>
-                <a:effectLst/>
-                <a:latin typeface="Consolas" panose="020B0609020204030204" pitchFamily="49" charset="0"/>
-              </a:rPr>
-              <a:t>getchar</a:t>
-            </a:r>
-            <a:r>
-              <a:rPr lang="en-US" altLang="ko-KR" sz="1400" b="1" i="0" u="none" strike="noStrike" dirty="0">
-                <a:solidFill>
-                  <a:srgbClr val="383A42"/>
-                </a:solidFill>
-                <a:effectLst/>
-                <a:latin typeface="Consolas" panose="020B0609020204030204" pitchFamily="49" charset="0"/>
-              </a:rPr>
-              <a:t>()) != </a:t>
+              <a:t>;(ch = getchar()) != </a:t>
             </a:r>
             <a:r>
               <a:rPr lang="en-US" altLang="ko-KR" sz="1400" b="1" i="0" u="none" strike="noStrike" dirty="0">
@@ -33793,41 +31975,21 @@
                 <a:effectLst/>
                 <a:latin typeface="Consolas" panose="020B0609020204030204" pitchFamily="49" charset="0"/>
               </a:rPr>
-              <a:t>(index &lt; </a:t>
-            </a:r>
-            <a:r>
-              <a:rPr lang="en-US" altLang="ko-KR" sz="1400" b="1" i="0" u="none" strike="noStrike" dirty="0" err="1">
-                <a:solidFill>
-                  <a:srgbClr val="383A42"/>
-                </a:solidFill>
-                <a:effectLst/>
-                <a:latin typeface="Consolas" panose="020B0609020204030204" pitchFamily="49" charset="0"/>
-              </a:rPr>
-              <a:t>bufsize</a:t>
+              <a:t>(index &lt; bufsize - </a:t>
             </a:r>
             <a:r>
               <a:rPr lang="en-US" altLang="ko-KR" sz="1400" b="1" i="0" u="none" strike="noStrike" dirty="0">
                 <a:solidFill>
-                  <a:srgbClr val="383A42"/>
-                </a:solidFill>
-                <a:effectLst/>
-                <a:latin typeface="Consolas" panose="020B0609020204030204" pitchFamily="49" charset="0"/>
-              </a:rPr>
-              <a:t> - </a:t>
+                  <a:srgbClr val="986801"/>
+                </a:solidFill>
+                <a:effectLst/>
+                <a:latin typeface="Consolas" panose="020B0609020204030204" pitchFamily="49" charset="0"/>
+              </a:rPr>
+              <a:t>1</a:t>
             </a:r>
             <a:r>
               <a:rPr lang="en-US" altLang="ko-KR" sz="1400" b="1" i="0" u="none" strike="noStrike" dirty="0">
                 <a:solidFill>
-                  <a:srgbClr val="986801"/>
-                </a:solidFill>
-                <a:effectLst/>
-                <a:latin typeface="Consolas" panose="020B0609020204030204" pitchFamily="49" charset="0"/>
-              </a:rPr>
-              <a:t>1</a:t>
-            </a:r>
-            <a:r>
-              <a:rPr lang="en-US" altLang="ko-KR" sz="1400" b="1" i="0" u="none" strike="noStrike" dirty="0">
-                <a:solidFill>
                   <a:srgbClr val="383A42"/>
                 </a:solidFill>
                 <a:effectLst/>
@@ -33853,17 +32015,7 @@
                 <a:effectLst/>
                 <a:latin typeface="Consolas" panose="020B0609020204030204" pitchFamily="49" charset="0"/>
               </a:rPr>
-              <a:t>버퍼 크기 </a:t>
-            </a:r>
-            <a:r>
-              <a:rPr lang="ko-KR" altLang="en-US" sz="1400" b="1" i="1" u="none" strike="noStrike" dirty="0" err="1">
-                <a:solidFill>
-                  <a:srgbClr val="A0A1A7"/>
-                </a:solidFill>
-                <a:effectLst/>
-                <a:latin typeface="Consolas" panose="020B0609020204030204" pitchFamily="49" charset="0"/>
-              </a:rPr>
-              <a:t>전까지만</a:t>
+              <a:t>버퍼 크기 전까지만</a:t>
             </a:r>
             <a:br>
               <a:rPr lang="ko-KR" altLang="en-US" sz="1400" b="1" i="0" u="none" strike="noStrike" dirty="0">
@@ -33911,27 +32063,7 @@
                 <a:effectLst/>
                 <a:latin typeface="Consolas" panose="020B0609020204030204" pitchFamily="49" charset="0"/>
               </a:rPr>
-              <a:t>            </a:t>
-            </a:r>
-            <a:r>
-              <a:rPr lang="en-US" altLang="ko-KR" sz="1400" b="1" i="0" u="none" strike="noStrike" dirty="0" err="1">
-                <a:solidFill>
-                  <a:srgbClr val="383A42"/>
-                </a:solidFill>
-                <a:effectLst/>
-                <a:latin typeface="Consolas" panose="020B0609020204030204" pitchFamily="49" charset="0"/>
-              </a:rPr>
-              <a:t>buf</a:t>
-            </a:r>
-            <a:r>
-              <a:rPr lang="en-US" altLang="ko-KR" sz="1400" b="1" i="0" u="none" strike="noStrike" dirty="0">
-                <a:solidFill>
-                  <a:srgbClr val="383A42"/>
-                </a:solidFill>
-                <a:effectLst/>
-                <a:latin typeface="Consolas" panose="020B0609020204030204" pitchFamily="49" charset="0"/>
-              </a:rPr>
-              <a:t>[index] = (</a:t>
+              <a:t>            buf[index] = (</a:t>
             </a:r>
             <a:r>
               <a:rPr lang="en-US" altLang="ko-KR" sz="1400" b="1" i="0" u="none" strike="noStrike" dirty="0">
@@ -33970,27 +32102,7 @@
                 <a:effectLst/>
                 <a:latin typeface="Consolas" panose="020B0609020204030204" pitchFamily="49" charset="0"/>
               </a:rPr>
-              <a:t>            ++</a:t>
-            </a:r>
-            <a:r>
-              <a:rPr lang="en-US" altLang="ko-KR" sz="1400" b="1" i="0" u="none" strike="noStrike" dirty="0" err="1">
-                <a:solidFill>
-                  <a:srgbClr val="383A42"/>
-                </a:solidFill>
-                <a:effectLst/>
-                <a:latin typeface="Consolas" panose="020B0609020204030204" pitchFamily="49" charset="0"/>
-              </a:rPr>
-              <a:t>read_count</a:t>
-            </a:r>
-            <a:r>
-              <a:rPr lang="en-US" altLang="ko-KR" sz="1400" b="1" i="0" u="none" strike="noStrike" dirty="0">
-                <a:solidFill>
-                  <a:srgbClr val="383A42"/>
-                </a:solidFill>
-                <a:effectLst/>
-                <a:latin typeface="Consolas" panose="020B0609020204030204" pitchFamily="49" charset="0"/>
-              </a:rPr>
-              <a:t>;</a:t>
+              <a:t>            ++read_count;</a:t>
             </a:r>
             <a:br>
               <a:rPr lang="en-US" altLang="ko-KR" sz="1400" b="1" i="0" u="none" strike="noStrike" dirty="0">
@@ -34050,16 +32162,6 @@
               <a:t>    </a:t>
             </a:r>
             <a:r>
-              <a:rPr lang="en-US" altLang="ko-KR" sz="1400" b="1" i="0" u="none" strike="noStrike" dirty="0" err="1">
-                <a:solidFill>
-                  <a:srgbClr val="383A42"/>
-                </a:solidFill>
-                <a:effectLst/>
-                <a:latin typeface="Consolas" panose="020B0609020204030204" pitchFamily="49" charset="0"/>
-              </a:rPr>
-              <a:t>buf</a:t>
-            </a:r>
-            <a:r>
               <a:rPr lang="en-US" altLang="ko-KR" sz="1400" b="1" i="0" u="none" strike="noStrike" dirty="0">
                 <a:solidFill>
                   <a:srgbClr val="383A42"/>
@@ -34067,27 +32169,7 @@
                 <a:effectLst/>
                 <a:latin typeface="Consolas" panose="020B0609020204030204" pitchFamily="49" charset="0"/>
               </a:rPr>
-              <a:t>[</a:t>
-            </a:r>
-            <a:r>
-              <a:rPr lang="en-US" altLang="ko-KR" sz="1400" b="1" i="0" u="none" strike="noStrike" dirty="0" err="1">
-                <a:solidFill>
-                  <a:srgbClr val="383A42"/>
-                </a:solidFill>
-                <a:effectLst/>
-                <a:latin typeface="Consolas" panose="020B0609020204030204" pitchFamily="49" charset="0"/>
-              </a:rPr>
-              <a:t>read_count</a:t>
-            </a:r>
-            <a:r>
-              <a:rPr lang="en-US" altLang="ko-KR" sz="1400" b="1" i="0" u="none" strike="noStrike" dirty="0">
-                <a:solidFill>
-                  <a:srgbClr val="383A42"/>
-                </a:solidFill>
-                <a:effectLst/>
-                <a:latin typeface="Consolas" panose="020B0609020204030204" pitchFamily="49" charset="0"/>
-              </a:rPr>
-              <a:t>] = </a:t>
+              <a:t>buf[read_count] = </a:t>
             </a:r>
             <a:r>
               <a:rPr lang="en-US" altLang="ko-KR" sz="1400" b="1" i="0" u="none" strike="noStrike" dirty="0">
@@ -34181,27 +32263,7 @@
                 <a:effectLst/>
                 <a:latin typeface="Consolas" panose="020B0609020204030204" pitchFamily="49" charset="0"/>
               </a:rPr>
-              <a:t> </a:t>
-            </a:r>
-            <a:r>
-              <a:rPr lang="en-US" altLang="ko-KR" sz="1400" b="1" i="0" u="none" strike="noStrike" dirty="0" err="1">
-                <a:solidFill>
-                  <a:srgbClr val="383A42"/>
-                </a:solidFill>
-                <a:effectLst/>
-                <a:latin typeface="Consolas" panose="020B0609020204030204" pitchFamily="49" charset="0"/>
-              </a:rPr>
-              <a:t>read_count</a:t>
-            </a:r>
-            <a:r>
-              <a:rPr lang="en-US" altLang="ko-KR" sz="1400" b="1" i="0" u="none" strike="noStrike" dirty="0">
-                <a:solidFill>
-                  <a:srgbClr val="383A42"/>
-                </a:solidFill>
-                <a:effectLst/>
-                <a:latin typeface="Consolas" panose="020B0609020204030204" pitchFamily="49" charset="0"/>
-              </a:rPr>
-              <a:t>;</a:t>
+              <a:t> read_count;</a:t>
             </a:r>
             <a:r>
               <a:rPr lang="en-US" altLang="ko-KR" sz="1400" b="1" dirty="0">
@@ -34275,7 +32337,7 @@
 </p:sld>
 </file>
 
-<file path=ppt/slides/slide39.xml><?xml version="1.0" encoding="utf-8"?>
+<file path=ppt/slides/slide38.xml><?xml version="1.0" encoding="utf-8"?>
 <p:sld xmlns:a="http://schemas.openxmlformats.org/drawingml/2006/main" xmlns:r="http://schemas.openxmlformats.org/officeDocument/2006/relationships" xmlns:p="http://schemas.openxmlformats.org/presentationml/2006/main">
   <p:cSld>
     <p:spTree>
@@ -34320,20 +32382,16 @@
           <a:lstStyle/>
           <a:p>
             <a:r>
-              <a:rPr lang="en-US" altLang="ko-KR" b="0" dirty="0"/>
+              <a:rPr lang="en-US" altLang="ko-KR" dirty="0"/>
               <a:t>8.3.3 </a:t>
             </a:r>
             <a:r>
-              <a:rPr lang="ko-KR" altLang="en-US" b="0" dirty="0"/>
+              <a:rPr lang="ko-KR" altLang="en-US" dirty="0"/>
               <a:t>문자열 길이 </a:t>
             </a:r>
             <a:r>
-              <a:rPr lang="en-US" altLang="ko-KR" b="0" dirty="0"/>
-              <a:t>– </a:t>
-            </a:r>
-            <a:r>
-              <a:rPr lang="en-US" altLang="ko-KR" b="0" dirty="0" err="1"/>
-              <a:t>myStrLen</a:t>
+              <a:rPr lang="en-US" altLang="ko-KR" dirty="0"/>
+              <a:t>– myStrLen</a:t>
             </a:r>
             <a:endParaRPr lang="ko-KR" altLang="en-US" dirty="0"/>
           </a:p>
@@ -34431,10 +32489,9 @@
               <a:defRPr/>
             </a:pPr>
             <a:r>
-              <a:rPr lang="ko-KR" altLang="en-US"/>
+              <a:rPr lang="ko-KR" altLang="en-US" dirty="0"/>
               <a:t>게임 프로그래밍 교육과정</a:t>
             </a:r>
-            <a:endParaRPr lang="ko-KR" altLang="en-US" dirty="0"/>
           </a:p>
         </p:txBody>
       </p:sp>
@@ -34478,7 +32535,7 @@
               <a:buNone/>
             </a:pPr>
             <a:r>
-              <a:rPr lang="en-US" altLang="ko-KR" sz="2000" b="0" i="0" u="none" strike="noStrike" dirty="0" err="1">
+              <a:rPr lang="en-US" altLang="ko-KR" sz="2000" b="0" i="0" u="none" strike="noStrike" dirty="0">
                 <a:solidFill>
                   <a:srgbClr val="A626A4"/>
                 </a:solidFill>
@@ -34495,27 +32552,7 @@
                 <a:effectLst/>
                 <a:latin typeface="Consolas" panose="020B0609020204030204" pitchFamily="49" charset="0"/>
               </a:rPr>
-              <a:t> </a:t>
-            </a:r>
-            <a:r>
-              <a:rPr lang="en-US" altLang="ko-KR" sz="2000" b="0" i="0" u="none" strike="noStrike" dirty="0" err="1">
-                <a:solidFill>
-                  <a:srgbClr val="383A42"/>
-                </a:solidFill>
-                <a:effectLst/>
-                <a:latin typeface="Consolas" panose="020B0609020204030204" pitchFamily="49" charset="0"/>
-              </a:rPr>
-              <a:t>myStrLen</a:t>
-            </a:r>
-            <a:r>
-              <a:rPr lang="en-US" altLang="ko-KR" sz="2000" b="0" i="0" u="none" strike="noStrike" dirty="0">
-                <a:solidFill>
-                  <a:srgbClr val="383A42"/>
-                </a:solidFill>
-                <a:effectLst/>
-                <a:latin typeface="Consolas" panose="020B0609020204030204" pitchFamily="49" charset="0"/>
-              </a:rPr>
-              <a:t>(</a:t>
+              <a:t> myStrLen(</a:t>
             </a:r>
             <a:r>
               <a:rPr lang="en-US" altLang="ko-KR" sz="2000" b="0" i="0" u="none" strike="noStrike" dirty="0">
@@ -34732,7 +32769,7 @@
               <a:t>    </a:t>
             </a:r>
             <a:r>
-              <a:rPr lang="en-US" altLang="ko-KR" sz="2000" b="0" i="0" u="none" strike="noStrike" dirty="0" err="1">
+              <a:rPr lang="en-US" altLang="ko-KR" sz="2000" b="0" i="0" u="none" strike="noStrike" dirty="0">
                 <a:solidFill>
                   <a:srgbClr val="A626A4"/>
                 </a:solidFill>
@@ -34749,27 +32786,7 @@
                 <a:effectLst/>
                 <a:latin typeface="Consolas" panose="020B0609020204030204" pitchFamily="49" charset="0"/>
               </a:rPr>
-              <a:t> </a:t>
-            </a:r>
-            <a:r>
-              <a:rPr lang="en-US" altLang="ko-KR" sz="2000" b="0" i="0" u="none" strike="noStrike" dirty="0" err="1">
-                <a:solidFill>
-                  <a:srgbClr val="383A42"/>
-                </a:solidFill>
-                <a:effectLst/>
-                <a:latin typeface="Consolas" panose="020B0609020204030204" pitchFamily="49" charset="0"/>
-              </a:rPr>
-              <a:t>len</a:t>
-            </a:r>
-            <a:r>
-              <a:rPr lang="en-US" altLang="ko-KR" sz="2000" b="0" i="0" u="none" strike="noStrike" dirty="0">
-                <a:solidFill>
-                  <a:srgbClr val="383A42"/>
-                </a:solidFill>
-                <a:effectLst/>
-                <a:latin typeface="Consolas" panose="020B0609020204030204" pitchFamily="49" charset="0"/>
-              </a:rPr>
-              <a:t> = </a:t>
+              <a:t> len = </a:t>
             </a:r>
             <a:r>
               <a:rPr lang="en-US" altLang="ko-KR" sz="2000" b="0" i="0" u="none" strike="noStrike" dirty="0">
@@ -34821,44 +32838,14 @@
               <a:t>// </a:t>
             </a:r>
             <a:r>
-              <a:rPr lang="ko-KR" altLang="en-US" sz="2000" b="0" i="1" u="none" strike="noStrike" dirty="0" err="1">
+              <a:rPr lang="ko-KR" altLang="en-US" sz="2000" b="0" i="1" u="none" strike="noStrike" dirty="0">
                 <a:solidFill>
                   <a:srgbClr val="A0A1A7"/>
                 </a:solidFill>
                 <a:effectLst/>
                 <a:latin typeface="Consolas" panose="020B0609020204030204" pitchFamily="49" charset="0"/>
               </a:rPr>
-              <a:t>널문자</a:t>
-            </a:r>
-            <a:r>
-              <a:rPr lang="ko-KR" altLang="en-US" sz="2000" b="0" i="1" u="none" strike="noStrike" dirty="0">
-                <a:solidFill>
-                  <a:srgbClr val="A0A1A7"/>
-                </a:solidFill>
-                <a:effectLst/>
-                <a:latin typeface="Consolas" panose="020B0609020204030204" pitchFamily="49" charset="0"/>
-              </a:rPr>
-              <a:t> </a:t>
-            </a:r>
-            <a:r>
-              <a:rPr lang="ko-KR" altLang="en-US" sz="2000" b="0" i="1" u="none" strike="noStrike" dirty="0" err="1">
-                <a:solidFill>
-                  <a:srgbClr val="A0A1A7"/>
-                </a:solidFill>
-                <a:effectLst/>
-                <a:latin typeface="Consolas" panose="020B0609020204030204" pitchFamily="49" charset="0"/>
-              </a:rPr>
-              <a:t>전까지가</a:t>
-            </a:r>
-            <a:r>
-              <a:rPr lang="ko-KR" altLang="en-US" sz="2000" b="0" i="1" u="none" strike="noStrike" dirty="0">
-                <a:solidFill>
-                  <a:srgbClr val="A0A1A7"/>
-                </a:solidFill>
-                <a:effectLst/>
-                <a:latin typeface="Consolas" panose="020B0609020204030204" pitchFamily="49" charset="0"/>
-              </a:rPr>
-              <a:t> 문자열의 길이</a:t>
+              <a:t>널문자 전까지가 문자열의 길이</a:t>
             </a:r>
             <a:r>
               <a:rPr lang="en-US" altLang="ko-KR" sz="2000" b="0" i="1" u="none" strike="noStrike" dirty="0">
@@ -34907,27 +32894,7 @@
                 <a:effectLst/>
                 <a:latin typeface="Consolas" panose="020B0609020204030204" pitchFamily="49" charset="0"/>
               </a:rPr>
-              <a:t>(str[</a:t>
-            </a:r>
-            <a:r>
-              <a:rPr lang="en-US" altLang="ko-KR" sz="3200" b="1" i="0" u="none" strike="noStrike" dirty="0" err="1">
-                <a:solidFill>
-                  <a:srgbClr val="383A42"/>
-                </a:solidFill>
-                <a:effectLst/>
-                <a:latin typeface="Consolas" panose="020B0609020204030204" pitchFamily="49" charset="0"/>
-              </a:rPr>
-              <a:t>len</a:t>
-            </a:r>
-            <a:r>
-              <a:rPr lang="en-US" altLang="ko-KR" sz="3200" b="1" i="0" u="none" strike="noStrike" dirty="0">
-                <a:solidFill>
-                  <a:srgbClr val="383A42"/>
-                </a:solidFill>
-                <a:effectLst/>
-                <a:latin typeface="Consolas" panose="020B0609020204030204" pitchFamily="49" charset="0"/>
-              </a:rPr>
-              <a:t>] != </a:t>
+              <a:t>(str[len] != </a:t>
             </a:r>
             <a:r>
               <a:rPr lang="en-US" altLang="ko-KR" sz="3200" b="1" i="0" u="none" strike="noStrike" dirty="0">
@@ -34985,27 +32952,7 @@
                 <a:effectLst/>
                 <a:latin typeface="Consolas" panose="020B0609020204030204" pitchFamily="49" charset="0"/>
               </a:rPr>
-              <a:t>        ++</a:t>
-            </a:r>
-            <a:r>
-              <a:rPr lang="en-US" altLang="ko-KR" sz="2000" b="0" i="0" u="none" strike="noStrike" dirty="0" err="1">
-                <a:solidFill>
-                  <a:srgbClr val="383A42"/>
-                </a:solidFill>
-                <a:effectLst/>
-                <a:latin typeface="Consolas" panose="020B0609020204030204" pitchFamily="49" charset="0"/>
-              </a:rPr>
-              <a:t>len</a:t>
-            </a:r>
-            <a:r>
-              <a:rPr lang="en-US" altLang="ko-KR" sz="2000" b="0" i="0" u="none" strike="noStrike" dirty="0">
-                <a:solidFill>
-                  <a:srgbClr val="383A42"/>
-                </a:solidFill>
-                <a:effectLst/>
-                <a:latin typeface="Consolas" panose="020B0609020204030204" pitchFamily="49" charset="0"/>
-              </a:rPr>
-              <a:t>;</a:t>
+              <a:t>        ++len;</a:t>
             </a:r>
             <a:br>
               <a:rPr lang="en-US" altLang="ko-KR" sz="2000" b="0" i="0" u="none" strike="noStrike" dirty="0">
@@ -35063,27 +33010,7 @@
                 <a:effectLst/>
                 <a:latin typeface="Consolas" panose="020B0609020204030204" pitchFamily="49" charset="0"/>
               </a:rPr>
-              <a:t> </a:t>
-            </a:r>
-            <a:r>
-              <a:rPr lang="en-US" altLang="ko-KR" sz="2000" b="0" i="0" u="none" strike="noStrike" dirty="0" err="1">
-                <a:solidFill>
-                  <a:srgbClr val="383A42"/>
-                </a:solidFill>
-                <a:effectLst/>
-                <a:latin typeface="Consolas" panose="020B0609020204030204" pitchFamily="49" charset="0"/>
-              </a:rPr>
-              <a:t>len</a:t>
-            </a:r>
-            <a:r>
-              <a:rPr lang="en-US" altLang="ko-KR" sz="2000" b="0" i="0" u="none" strike="noStrike" dirty="0">
-                <a:solidFill>
-                  <a:srgbClr val="383A42"/>
-                </a:solidFill>
-                <a:effectLst/>
-                <a:latin typeface="Consolas" panose="020B0609020204030204" pitchFamily="49" charset="0"/>
-              </a:rPr>
-              <a:t>;</a:t>
+              <a:t> len;</a:t>
             </a:r>
             <a:br>
               <a:rPr lang="en-US" altLang="ko-KR" sz="2000" b="0" i="0" u="none" strike="noStrike" dirty="0">
@@ -35112,6 +33039,942 @@
     <p:extLst>
       <p:ext uri="{BB962C8B-B14F-4D97-AF65-F5344CB8AC3E}">
         <p14:creationId xmlns:p14="http://schemas.microsoft.com/office/powerpoint/2010/main" val="3957507229"/>
+      </p:ext>
+    </p:extLst>
+  </p:cSld>
+  <p:clrMapOvr>
+    <a:masterClrMapping/>
+  </p:clrMapOvr>
+</p:sld>
+</file>
+
+<file path=ppt/slides/slide39.xml><?xml version="1.0" encoding="utf-8"?>
+<p:sld xmlns:a="http://schemas.openxmlformats.org/drawingml/2006/main" xmlns:r="http://schemas.openxmlformats.org/officeDocument/2006/relationships" xmlns:p="http://schemas.openxmlformats.org/presentationml/2006/main">
+  <p:cSld>
+    <p:spTree>
+      <p:nvGrpSpPr>
+        <p:cNvPr id="1" name="">
+          <a:extLst>
+            <a:ext uri="{FF2B5EF4-FFF2-40B4-BE49-F238E27FC236}">
+              <a16:creationId xmlns:a16="http://schemas.microsoft.com/office/drawing/2014/main" id="{47B8AB45-5BBC-D997-3987-FBE56A8FF282}"/>
+            </a:ext>
+          </a:extLst>
+        </p:cNvPr>
+        <p:cNvGrpSpPr/>
+        <p:nvPr/>
+      </p:nvGrpSpPr>
+      <p:grpSpPr>
+        <a:xfrm>
+          <a:off x="0" y="0"/>
+          <a:ext cx="0" cy="0"/>
+          <a:chOff x="0" y="0"/>
+          <a:chExt cx="0" cy="0"/>
+        </a:xfrm>
+      </p:grpSpPr>
+      <p:sp>
+        <p:nvSpPr>
+          <p:cNvPr id="2" name="제목 1">
+            <a:extLst>
+              <a:ext uri="{FF2B5EF4-FFF2-40B4-BE49-F238E27FC236}">
+                <a16:creationId xmlns:a16="http://schemas.microsoft.com/office/drawing/2014/main" id="{28B13EFC-99FB-614F-9AD2-27A43714C86F}"/>
+              </a:ext>
+            </a:extLst>
+          </p:cNvPr>
+          <p:cNvSpPr>
+            <a:spLocks noGrp="1"/>
+          </p:cNvSpPr>
+          <p:nvPr>
+            <p:ph type="title"/>
+          </p:nvPr>
+        </p:nvSpPr>
+        <p:spPr/>
+        <p:txBody>
+          <a:bodyPr/>
+          <a:lstStyle/>
+          <a:p>
+            <a:r>
+              <a:rPr lang="en-US" altLang="ko-KR" dirty="0"/>
+              <a:t>8.3.4 </a:t>
+            </a:r>
+            <a:r>
+              <a:rPr lang="ko-KR" altLang="en-US" dirty="0"/>
+              <a:t>문자열 복사하기 </a:t>
+            </a:r>
+            <a:r>
+              <a:rPr lang="en-US" altLang="ko-KR" dirty="0"/>
+              <a:t>– myStrCpy</a:t>
+            </a:r>
+            <a:endParaRPr lang="ko-KR" altLang="en-US" dirty="0"/>
+          </a:p>
+        </p:txBody>
+      </p:sp>
+      <p:sp>
+        <p:nvSpPr>
+          <p:cNvPr id="3" name="내용 개체 틀 2">
+            <a:extLst>
+              <a:ext uri="{FF2B5EF4-FFF2-40B4-BE49-F238E27FC236}">
+                <a16:creationId xmlns:a16="http://schemas.microsoft.com/office/drawing/2014/main" id="{98585783-F4BB-268A-3A73-567E1B96687A}"/>
+              </a:ext>
+            </a:extLst>
+          </p:cNvPr>
+          <p:cNvSpPr>
+            <a:spLocks noGrp="1"/>
+          </p:cNvSpPr>
+          <p:nvPr>
+            <p:ph idx="1"/>
+          </p:nvPr>
+        </p:nvSpPr>
+        <p:spPr/>
+        <p:txBody>
+          <a:bodyPr/>
+          <a:lstStyle/>
+          <a:p>
+            <a:r>
+              <a:rPr lang="ko-KR" altLang="en-US" sz="2400" dirty="0"/>
+              <a:t>문자열 끝 → </a:t>
+            </a:r>
+            <a:r>
+              <a:rPr lang="en-US" altLang="ko-KR" sz="2400" dirty="0"/>
+              <a:t>'</a:t>
+            </a:r>
+            <a:r>
+              <a:rPr lang="en-US" altLang="ko-KR" sz="2400" dirty="0">
+                <a:latin typeface="Consolas" panose="020B0609020204030204" pitchFamily="49" charset="0"/>
+              </a:rPr>
+              <a:t>\0</a:t>
+            </a:r>
+            <a:r>
+              <a:rPr lang="en-US" altLang="ko-KR" sz="2400" dirty="0"/>
+              <a:t>'</a:t>
+            </a:r>
+          </a:p>
+          <a:p>
+            <a:r>
+              <a:rPr lang="ko-KR" altLang="en-US" sz="2400" dirty="0"/>
+              <a:t>문자열 길이 → </a:t>
+            </a:r>
+            <a:r>
+              <a:rPr lang="en-US" altLang="ko-KR" sz="2400" dirty="0"/>
+              <a:t>'</a:t>
+            </a:r>
+            <a:r>
+              <a:rPr lang="en-US" altLang="ko-KR" sz="2400" dirty="0">
+                <a:latin typeface="Consolas" panose="020B0609020204030204" pitchFamily="49" charset="0"/>
+              </a:rPr>
+              <a:t>\0</a:t>
+            </a:r>
+            <a:r>
+              <a:rPr lang="en-US" altLang="ko-KR" sz="2400" dirty="0"/>
+              <a:t>' </a:t>
+            </a:r>
+            <a:r>
+              <a:rPr lang="ko-KR" altLang="en-US" sz="2400" dirty="0"/>
+              <a:t>이전까지</a:t>
+            </a:r>
+            <a:endParaRPr lang="en-US" altLang="ko-KR" sz="2400" dirty="0"/>
+          </a:p>
+        </p:txBody>
+      </p:sp>
+      <p:sp>
+        <p:nvSpPr>
+          <p:cNvPr id="4" name="바닥글 개체 틀 3">
+            <a:extLst>
+              <a:ext uri="{FF2B5EF4-FFF2-40B4-BE49-F238E27FC236}">
+                <a16:creationId xmlns:a16="http://schemas.microsoft.com/office/drawing/2014/main" id="{8A211DE7-6BC0-26E8-91C2-7FB661E7012C}"/>
+              </a:ext>
+            </a:extLst>
+          </p:cNvPr>
+          <p:cNvSpPr>
+            <a:spLocks noGrp="1"/>
+          </p:cNvSpPr>
+          <p:nvPr>
+            <p:ph type="ftr" sz="quarter" idx="10"/>
+          </p:nvPr>
+        </p:nvSpPr>
+        <p:spPr/>
+        <p:txBody>
+          <a:bodyPr/>
+          <a:lstStyle/>
+          <a:p>
+            <a:pPr>
+              <a:defRPr/>
+            </a:pPr>
+            <a:r>
+              <a:rPr lang="ko-KR" altLang="en-US" dirty="0"/>
+              <a:t>게임 프로그래밍 교육과정</a:t>
+            </a:r>
+          </a:p>
+        </p:txBody>
+      </p:sp>
+      <p:sp>
+        <p:nvSpPr>
+          <p:cNvPr id="9" name="TextBox 8">
+            <a:extLst>
+              <a:ext uri="{FF2B5EF4-FFF2-40B4-BE49-F238E27FC236}">
+                <a16:creationId xmlns:a16="http://schemas.microsoft.com/office/drawing/2014/main" id="{6788BB81-769A-8F83-C3DD-68226736CF0A}"/>
+              </a:ext>
+            </a:extLst>
+          </p:cNvPr>
+          <p:cNvSpPr txBox="1"/>
+          <p:nvPr/>
+        </p:nvSpPr>
+        <p:spPr>
+          <a:xfrm>
+            <a:off x="539750" y="1700808"/>
+            <a:ext cx="8064500" cy="3600986"/>
+          </a:xfrm>
+          <a:prstGeom prst="rect">
+            <a:avLst/>
+          </a:prstGeom>
+          <a:noFill/>
+          <a:ln w="25400">
+            <a:solidFill>
+              <a:schemeClr val="bg1">
+                <a:lumMod val="65000"/>
+              </a:schemeClr>
+            </a:solidFill>
+            <a:prstDash val="sysDot"/>
+          </a:ln>
+        </p:spPr>
+        <p:txBody>
+          <a:bodyPr wrap="square">
+            <a:spAutoFit/>
+          </a:bodyPr>
+          <a:lstStyle/>
+          <a:p>
+            <a:pPr rtl="0">
+              <a:buNone/>
+            </a:pPr>
+            <a:r>
+              <a:rPr lang="en-US" altLang="ko-KR" sz="1600" b="0" i="0" u="none" strike="noStrike" dirty="0">
+                <a:solidFill>
+                  <a:srgbClr val="A626A4"/>
+                </a:solidFill>
+                <a:effectLst/>
+                <a:latin typeface="Consolas" panose="020B0609020204030204" pitchFamily="49" charset="0"/>
+              </a:rPr>
+              <a:t>size_t</a:t>
+            </a:r>
+            <a:r>
+              <a:rPr lang="en-US" altLang="ko-KR" sz="1600" b="0" i="0" u="none" strike="noStrike" dirty="0">
+                <a:solidFill>
+                  <a:srgbClr val="383A42"/>
+                </a:solidFill>
+                <a:effectLst/>
+                <a:latin typeface="Consolas" panose="020B0609020204030204" pitchFamily="49" charset="0"/>
+              </a:rPr>
+              <a:t> myStrCpy(</a:t>
+            </a:r>
+            <a:r>
+              <a:rPr lang="en-US" altLang="ko-KR" sz="1600" b="0" i="0" u="none" strike="noStrike" dirty="0">
+                <a:solidFill>
+                  <a:srgbClr val="A626A4"/>
+                </a:solidFill>
+                <a:effectLst/>
+                <a:latin typeface="Consolas" panose="020B0609020204030204" pitchFamily="49" charset="0"/>
+              </a:rPr>
+              <a:t>char</a:t>
+            </a:r>
+            <a:r>
+              <a:rPr lang="en-US" altLang="ko-KR" sz="1600" b="0" i="0" u="none" strike="noStrike" dirty="0">
+                <a:solidFill>
+                  <a:srgbClr val="383A42"/>
+                </a:solidFill>
+                <a:effectLst/>
+                <a:latin typeface="Consolas" panose="020B0609020204030204" pitchFamily="49" charset="0"/>
+              </a:rPr>
+              <a:t> dst[], </a:t>
+            </a:r>
+            <a:r>
+              <a:rPr lang="en-US" altLang="ko-KR" sz="1600" b="0" i="0" u="none" strike="noStrike" dirty="0">
+                <a:solidFill>
+                  <a:srgbClr val="A626A4"/>
+                </a:solidFill>
+                <a:effectLst/>
+                <a:latin typeface="Consolas" panose="020B0609020204030204" pitchFamily="49" charset="0"/>
+              </a:rPr>
+              <a:t>size_t</a:t>
+            </a:r>
+            <a:r>
+              <a:rPr lang="en-US" altLang="ko-KR" sz="1600" b="0" i="0" u="none" strike="noStrike" dirty="0">
+                <a:solidFill>
+                  <a:srgbClr val="383A42"/>
+                </a:solidFill>
+                <a:effectLst/>
+                <a:latin typeface="Consolas" panose="020B0609020204030204" pitchFamily="49" charset="0"/>
+              </a:rPr>
+              <a:t> dest_size, </a:t>
+            </a:r>
+            <a:r>
+              <a:rPr lang="en-US" altLang="ko-KR" sz="1600" b="0" i="0" u="none" strike="noStrike" dirty="0">
+                <a:solidFill>
+                  <a:srgbClr val="A626A4"/>
+                </a:solidFill>
+                <a:effectLst/>
+                <a:latin typeface="Consolas" panose="020B0609020204030204" pitchFamily="49" charset="0"/>
+              </a:rPr>
+              <a:t>const</a:t>
+            </a:r>
+            <a:r>
+              <a:rPr lang="en-US" altLang="ko-KR" sz="1600" b="0" i="0" u="none" strike="noStrike" dirty="0">
+                <a:solidFill>
+                  <a:srgbClr val="383A42"/>
+                </a:solidFill>
+                <a:effectLst/>
+                <a:latin typeface="Consolas" panose="020B0609020204030204" pitchFamily="49" charset="0"/>
+              </a:rPr>
+              <a:t> </a:t>
+            </a:r>
+            <a:r>
+              <a:rPr lang="en-US" altLang="ko-KR" sz="1600" b="0" i="0" u="none" strike="noStrike" dirty="0">
+                <a:solidFill>
+                  <a:srgbClr val="A626A4"/>
+                </a:solidFill>
+                <a:effectLst/>
+                <a:latin typeface="Consolas" panose="020B0609020204030204" pitchFamily="49" charset="0"/>
+              </a:rPr>
+              <a:t>char</a:t>
+            </a:r>
+            <a:r>
+              <a:rPr lang="en-US" altLang="ko-KR" sz="1600" b="0" i="0" u="none" strike="noStrike" dirty="0">
+                <a:solidFill>
+                  <a:srgbClr val="383A42"/>
+                </a:solidFill>
+                <a:effectLst/>
+                <a:latin typeface="Consolas" panose="020B0609020204030204" pitchFamily="49" charset="0"/>
+              </a:rPr>
+              <a:t> src[])</a:t>
+            </a:r>
+            <a:br>
+              <a:rPr lang="en-US" altLang="ko-KR" sz="1600" b="0" i="0" u="none" strike="noStrike" dirty="0">
+                <a:solidFill>
+                  <a:srgbClr val="383A42"/>
+                </a:solidFill>
+                <a:effectLst/>
+                <a:latin typeface="Consolas" panose="020B0609020204030204" pitchFamily="49" charset="0"/>
+              </a:rPr>
+            </a:br>
+            <a:r>
+              <a:rPr lang="en-US" altLang="ko-KR" sz="1600" b="0" i="0" u="none" strike="noStrike" dirty="0">
+                <a:solidFill>
+                  <a:srgbClr val="383A42"/>
+                </a:solidFill>
+                <a:effectLst/>
+                <a:latin typeface="Consolas" panose="020B0609020204030204" pitchFamily="49" charset="0"/>
+              </a:rPr>
+              <a:t>{</a:t>
+            </a:r>
+            <a:br>
+              <a:rPr lang="en-US" altLang="ko-KR" sz="1600" b="0" i="0" u="none" strike="noStrike" dirty="0">
+                <a:solidFill>
+                  <a:srgbClr val="383A42"/>
+                </a:solidFill>
+                <a:effectLst/>
+                <a:latin typeface="Consolas" panose="020B0609020204030204" pitchFamily="49" charset="0"/>
+              </a:rPr>
+            </a:br>
+            <a:r>
+              <a:rPr lang="en-US" altLang="ko-KR" sz="1600" b="0" i="0" u="none" strike="noStrike" dirty="0">
+                <a:solidFill>
+                  <a:srgbClr val="383A42"/>
+                </a:solidFill>
+                <a:effectLst/>
+                <a:latin typeface="Consolas" panose="020B0609020204030204" pitchFamily="49" charset="0"/>
+              </a:rPr>
+              <a:t>    </a:t>
+            </a:r>
+            <a:r>
+              <a:rPr lang="en-US" altLang="ko-KR" sz="1600" b="0" i="0" u="none" strike="noStrike" dirty="0">
+                <a:solidFill>
+                  <a:srgbClr val="A626A4"/>
+                </a:solidFill>
+                <a:effectLst/>
+                <a:latin typeface="Consolas" panose="020B0609020204030204" pitchFamily="49" charset="0"/>
+              </a:rPr>
+              <a:t>if</a:t>
+            </a:r>
+            <a:r>
+              <a:rPr lang="en-US" altLang="ko-KR" sz="1600" b="0" i="0" u="none" strike="noStrike" dirty="0">
+                <a:solidFill>
+                  <a:srgbClr val="383A42"/>
+                </a:solidFill>
+                <a:effectLst/>
+                <a:latin typeface="Consolas" panose="020B0609020204030204" pitchFamily="49" charset="0"/>
+              </a:rPr>
+              <a:t>(</a:t>
+            </a:r>
+            <a:r>
+              <a:rPr lang="en-US" altLang="ko-KR" sz="1600" b="0" i="0" u="none" strike="noStrike" dirty="0">
+                <a:solidFill>
+                  <a:srgbClr val="986801"/>
+                </a:solidFill>
+                <a:effectLst/>
+                <a:latin typeface="Consolas" panose="020B0609020204030204" pitchFamily="49" charset="0"/>
+              </a:rPr>
+              <a:t>0</a:t>
+            </a:r>
+            <a:r>
+              <a:rPr lang="en-US" altLang="ko-KR" sz="1600" b="0" i="0" u="none" strike="noStrike" dirty="0">
+                <a:solidFill>
+                  <a:srgbClr val="383A42"/>
+                </a:solidFill>
+                <a:effectLst/>
+                <a:latin typeface="Consolas" panose="020B0609020204030204" pitchFamily="49" charset="0"/>
+              </a:rPr>
+              <a:t> == dest_size)  </a:t>
+            </a:r>
+            <a:r>
+              <a:rPr lang="en-US" altLang="ko-KR" sz="1600" b="0" i="1" u="none" strike="noStrike" dirty="0">
+                <a:solidFill>
+                  <a:srgbClr val="A0A1A7"/>
+                </a:solidFill>
+                <a:effectLst/>
+                <a:latin typeface="Consolas" panose="020B0609020204030204" pitchFamily="49" charset="0"/>
+              </a:rPr>
+              <a:t>// </a:t>
+            </a:r>
+            <a:r>
+              <a:rPr lang="ko-KR" altLang="en-US" sz="1600" b="0" i="1" u="none" strike="noStrike" dirty="0">
+                <a:solidFill>
+                  <a:srgbClr val="A0A1A7"/>
+                </a:solidFill>
+                <a:effectLst/>
+                <a:latin typeface="Consolas" panose="020B0609020204030204" pitchFamily="49" charset="0"/>
+              </a:rPr>
+              <a:t>크기 </a:t>
+            </a:r>
+            <a:r>
+              <a:rPr lang="en-US" altLang="ko-KR" sz="1600" b="0" i="1" u="none" strike="noStrike" dirty="0">
+                <a:solidFill>
+                  <a:srgbClr val="A0A1A7"/>
+                </a:solidFill>
+                <a:effectLst/>
+                <a:latin typeface="Consolas" panose="020B0609020204030204" pitchFamily="49" charset="0"/>
+              </a:rPr>
+              <a:t>0</a:t>
+            </a:r>
+            <a:r>
+              <a:rPr lang="ko-KR" altLang="en-US" sz="1600" b="0" i="1" u="none" strike="noStrike" dirty="0">
+                <a:solidFill>
+                  <a:srgbClr val="A0A1A7"/>
+                </a:solidFill>
+                <a:effectLst/>
+                <a:latin typeface="Consolas" panose="020B0609020204030204" pitchFamily="49" charset="0"/>
+              </a:rPr>
+              <a:t>이면 복사할 수 없으므로 </a:t>
+            </a:r>
+            <a:r>
+              <a:rPr lang="en-US" altLang="ko-KR" sz="1600" b="0" i="1" u="none" strike="noStrike" dirty="0">
+                <a:solidFill>
+                  <a:srgbClr val="A0A1A7"/>
+                </a:solidFill>
+                <a:effectLst/>
+                <a:latin typeface="Consolas" panose="020B0609020204030204" pitchFamily="49" charset="0"/>
+              </a:rPr>
+              <a:t>0 </a:t>
+            </a:r>
+            <a:r>
+              <a:rPr lang="ko-KR" altLang="en-US" sz="1600" b="0" i="1" u="none" strike="noStrike" dirty="0">
+                <a:solidFill>
+                  <a:srgbClr val="A0A1A7"/>
+                </a:solidFill>
+                <a:effectLst/>
+                <a:latin typeface="Consolas" panose="020B0609020204030204" pitchFamily="49" charset="0"/>
+              </a:rPr>
+              <a:t>반환</a:t>
+            </a:r>
+            <a:r>
+              <a:rPr lang="en-US" altLang="ko-KR" sz="1600" b="0" i="1" u="none" strike="noStrike" dirty="0">
+                <a:solidFill>
+                  <a:srgbClr val="A0A1A7"/>
+                </a:solidFill>
+                <a:effectLst/>
+                <a:latin typeface="Consolas" panose="020B0609020204030204" pitchFamily="49" charset="0"/>
+              </a:rPr>
+              <a:t>.</a:t>
+            </a:r>
+            <a:br>
+              <a:rPr lang="ko-KR" altLang="en-US" sz="1600" b="0" i="0" u="none" strike="noStrike" dirty="0">
+                <a:solidFill>
+                  <a:srgbClr val="383A42"/>
+                </a:solidFill>
+                <a:effectLst/>
+                <a:latin typeface="Consolas" panose="020B0609020204030204" pitchFamily="49" charset="0"/>
+              </a:rPr>
+            </a:br>
+            <a:r>
+              <a:rPr lang="ko-KR" altLang="en-US" sz="1600" b="0" i="0" u="none" strike="noStrike" dirty="0">
+                <a:solidFill>
+                  <a:srgbClr val="383A42"/>
+                </a:solidFill>
+                <a:effectLst/>
+                <a:latin typeface="Consolas" panose="020B0609020204030204" pitchFamily="49" charset="0"/>
+              </a:rPr>
+              <a:t>        </a:t>
+            </a:r>
+            <a:r>
+              <a:rPr lang="en-US" altLang="ko-KR" sz="1600" b="0" i="0" u="none" strike="noStrike" dirty="0">
+                <a:solidFill>
+                  <a:srgbClr val="A626A4"/>
+                </a:solidFill>
+                <a:effectLst/>
+                <a:latin typeface="Consolas" panose="020B0609020204030204" pitchFamily="49" charset="0"/>
+              </a:rPr>
+              <a:t>return</a:t>
+            </a:r>
+            <a:r>
+              <a:rPr lang="en-US" altLang="ko-KR" sz="1600" b="0" i="0" u="none" strike="noStrike" dirty="0">
+                <a:solidFill>
+                  <a:srgbClr val="383A42"/>
+                </a:solidFill>
+                <a:effectLst/>
+                <a:latin typeface="Consolas" panose="020B0609020204030204" pitchFamily="49" charset="0"/>
+              </a:rPr>
+              <a:t> </a:t>
+            </a:r>
+            <a:r>
+              <a:rPr lang="en-US" altLang="ko-KR" sz="1600" b="0" i="0" u="none" strike="noStrike" dirty="0">
+                <a:solidFill>
+                  <a:srgbClr val="986801"/>
+                </a:solidFill>
+                <a:effectLst/>
+                <a:latin typeface="Consolas" panose="020B0609020204030204" pitchFamily="49" charset="0"/>
+              </a:rPr>
+              <a:t>0</a:t>
+            </a:r>
+            <a:r>
+              <a:rPr lang="en-US" altLang="ko-KR" sz="1600" b="0" i="0" u="none" strike="noStrike" dirty="0">
+                <a:solidFill>
+                  <a:srgbClr val="383A42"/>
+                </a:solidFill>
+                <a:effectLst/>
+                <a:latin typeface="Consolas" panose="020B0609020204030204" pitchFamily="49" charset="0"/>
+              </a:rPr>
+              <a:t>;</a:t>
+            </a:r>
+            <a:endParaRPr lang="en-US" altLang="ko-KR" sz="1600" b="0" dirty="0">
+              <a:effectLst/>
+            </a:endParaRPr>
+          </a:p>
+          <a:p>
+            <a:pPr>
+              <a:buNone/>
+            </a:pPr>
+            <a:br>
+              <a:rPr lang="en-US" altLang="ko-KR" sz="1600" b="0" i="0" u="none" strike="noStrike" dirty="0">
+                <a:solidFill>
+                  <a:srgbClr val="383A42"/>
+                </a:solidFill>
+                <a:effectLst/>
+                <a:latin typeface="Consolas" panose="020B0609020204030204" pitchFamily="49" charset="0"/>
+              </a:rPr>
+            </a:br>
+            <a:r>
+              <a:rPr lang="en-US" altLang="ko-KR" sz="1600" b="0" i="0" u="none" strike="noStrike" dirty="0">
+                <a:solidFill>
+                  <a:srgbClr val="383A42"/>
+                </a:solidFill>
+                <a:effectLst/>
+                <a:latin typeface="Consolas" panose="020B0609020204030204" pitchFamily="49" charset="0"/>
+              </a:rPr>
+              <a:t>    </a:t>
+            </a:r>
+            <a:r>
+              <a:rPr lang="en-US" altLang="ko-KR" sz="1600" b="0" i="0" u="none" strike="noStrike" dirty="0">
+                <a:solidFill>
+                  <a:srgbClr val="A626A4"/>
+                </a:solidFill>
+                <a:effectLst/>
+                <a:latin typeface="Consolas" panose="020B0609020204030204" pitchFamily="49" charset="0"/>
+              </a:rPr>
+              <a:t>size_t</a:t>
+            </a:r>
+            <a:r>
+              <a:rPr lang="en-US" altLang="ko-KR" sz="1600" b="0" i="0" u="none" strike="noStrike" dirty="0">
+                <a:solidFill>
+                  <a:srgbClr val="383A42"/>
+                </a:solidFill>
+                <a:effectLst/>
+                <a:latin typeface="Consolas" panose="020B0609020204030204" pitchFamily="49" charset="0"/>
+              </a:rPr>
+              <a:t> n=</a:t>
+            </a:r>
+            <a:r>
+              <a:rPr lang="en-US" altLang="ko-KR" sz="1600" b="0" i="0" u="none" strike="noStrike" dirty="0">
+                <a:solidFill>
+                  <a:srgbClr val="986801"/>
+                </a:solidFill>
+                <a:effectLst/>
+                <a:latin typeface="Consolas" panose="020B0609020204030204" pitchFamily="49" charset="0"/>
+              </a:rPr>
+              <a:t>0</a:t>
+            </a:r>
+            <a:r>
+              <a:rPr lang="en-US" altLang="ko-KR" sz="1600" b="0" i="0" u="none" strike="noStrike" dirty="0">
+                <a:solidFill>
+                  <a:srgbClr val="383A42"/>
+                </a:solidFill>
+                <a:effectLst/>
+                <a:latin typeface="Consolas" panose="020B0609020204030204" pitchFamily="49" charset="0"/>
+              </a:rPr>
+              <a:t>;</a:t>
+            </a:r>
+            <a:br>
+              <a:rPr lang="en-US" altLang="ko-KR" sz="1600" b="0" i="0" u="none" strike="noStrike" dirty="0">
+                <a:solidFill>
+                  <a:srgbClr val="383A42"/>
+                </a:solidFill>
+                <a:effectLst/>
+                <a:latin typeface="Consolas" panose="020B0609020204030204" pitchFamily="49" charset="0"/>
+              </a:rPr>
+            </a:br>
+            <a:r>
+              <a:rPr lang="en-US" altLang="ko-KR" sz="1600" b="0" i="0" u="none" strike="noStrike" dirty="0">
+                <a:solidFill>
+                  <a:srgbClr val="383A42"/>
+                </a:solidFill>
+                <a:effectLst/>
+                <a:latin typeface="Consolas" panose="020B0609020204030204" pitchFamily="49" charset="0"/>
+              </a:rPr>
+              <a:t>    --dest_size;        </a:t>
+            </a:r>
+            <a:r>
+              <a:rPr lang="en-US" altLang="ko-KR" sz="1600" b="0" i="1" u="none" strike="noStrike" dirty="0">
+                <a:solidFill>
+                  <a:srgbClr val="A0A1A7"/>
+                </a:solidFill>
+                <a:effectLst/>
+                <a:latin typeface="Consolas" panose="020B0609020204030204" pitchFamily="49" charset="0"/>
+              </a:rPr>
+              <a:t>// </a:t>
+            </a:r>
+            <a:r>
+              <a:rPr lang="ko-KR" altLang="en-US" sz="1600" b="0" i="1" u="none" strike="noStrike" dirty="0">
+                <a:solidFill>
+                  <a:srgbClr val="A0A1A7"/>
+                </a:solidFill>
+                <a:effectLst/>
+                <a:latin typeface="Consolas" panose="020B0609020204030204" pitchFamily="49" charset="0"/>
+              </a:rPr>
+              <a:t>널문자 저장 공간을 위해 </a:t>
+            </a:r>
+            <a:r>
+              <a:rPr lang="en-US" altLang="ko-KR" sz="1600" b="0" i="1" u="none" strike="noStrike" dirty="0">
+                <a:solidFill>
+                  <a:srgbClr val="A0A1A7"/>
+                </a:solidFill>
+                <a:effectLst/>
+                <a:latin typeface="Consolas" panose="020B0609020204030204" pitchFamily="49" charset="0"/>
+              </a:rPr>
+              <a:t>1 </a:t>
+            </a:r>
+            <a:r>
+              <a:rPr lang="ko-KR" altLang="en-US" sz="1600" b="0" i="1" u="none" strike="noStrike" dirty="0">
+                <a:solidFill>
+                  <a:srgbClr val="A0A1A7"/>
+                </a:solidFill>
+                <a:effectLst/>
+                <a:latin typeface="Consolas" panose="020B0609020204030204" pitchFamily="49" charset="0"/>
+              </a:rPr>
+              <a:t>감소</a:t>
+            </a:r>
+            <a:r>
+              <a:rPr lang="en-US" altLang="ko-KR" sz="1600" b="0" i="1" u="none" strike="noStrike" dirty="0">
+                <a:solidFill>
+                  <a:srgbClr val="A0A1A7"/>
+                </a:solidFill>
+                <a:effectLst/>
+                <a:latin typeface="Consolas" panose="020B0609020204030204" pitchFamily="49" charset="0"/>
+              </a:rPr>
+              <a:t>.</a:t>
+            </a:r>
+            <a:br>
+              <a:rPr lang="ko-KR" altLang="en-US" sz="1600" b="0" i="0" u="none" strike="noStrike" dirty="0">
+                <a:solidFill>
+                  <a:srgbClr val="383A42"/>
+                </a:solidFill>
+                <a:effectLst/>
+                <a:latin typeface="Consolas" panose="020B0609020204030204" pitchFamily="49" charset="0"/>
+              </a:rPr>
+            </a:br>
+            <a:r>
+              <a:rPr lang="ko-KR" altLang="en-US" sz="1600" b="0" i="0" u="none" strike="noStrike" dirty="0">
+                <a:solidFill>
+                  <a:srgbClr val="383A42"/>
+                </a:solidFill>
+                <a:effectLst/>
+                <a:latin typeface="Consolas" panose="020B0609020204030204" pitchFamily="49" charset="0"/>
+              </a:rPr>
+              <a:t>    </a:t>
+            </a:r>
+            <a:r>
+              <a:rPr lang="en-US" altLang="ko-KR" sz="1600" b="0" i="0" u="none" strike="noStrike" dirty="0">
+                <a:solidFill>
+                  <a:srgbClr val="A626A4"/>
+                </a:solidFill>
+                <a:effectLst/>
+                <a:latin typeface="Consolas" panose="020B0609020204030204" pitchFamily="49" charset="0"/>
+              </a:rPr>
+              <a:t>for</a:t>
+            </a:r>
+            <a:r>
+              <a:rPr lang="en-US" altLang="ko-KR" sz="2000" b="1" i="0" u="none" strike="noStrike" dirty="0">
+                <a:solidFill>
+                  <a:srgbClr val="383A42"/>
+                </a:solidFill>
+                <a:effectLst/>
+                <a:latin typeface="Consolas" panose="020B0609020204030204" pitchFamily="49" charset="0"/>
+              </a:rPr>
+              <a:t>(;</a:t>
+            </a:r>
+            <a:r>
+              <a:rPr lang="en-US" altLang="ko-KR" sz="2000" b="1" i="0" u="none" strike="noStrike" dirty="0">
+                <a:solidFill>
+                  <a:srgbClr val="50A14F"/>
+                </a:solidFill>
+                <a:effectLst/>
+                <a:latin typeface="Consolas" panose="020B0609020204030204" pitchFamily="49" charset="0"/>
+              </a:rPr>
+              <a:t>'\0'</a:t>
+            </a:r>
+            <a:r>
+              <a:rPr lang="en-US" altLang="ko-KR" sz="2000" b="1" i="0" u="none" strike="noStrike" dirty="0">
+                <a:solidFill>
+                  <a:srgbClr val="383A42"/>
+                </a:solidFill>
+                <a:effectLst/>
+                <a:latin typeface="Consolas" panose="020B0609020204030204" pitchFamily="49" charset="0"/>
+              </a:rPr>
+              <a:t> != src[n] &amp;&amp; </a:t>
+            </a:r>
+            <a:r>
+              <a:rPr lang="en-US" altLang="ko-KR" sz="2000" b="1" i="0" u="none" strike="noStrike" dirty="0">
+                <a:solidFill>
+                  <a:srgbClr val="986801"/>
+                </a:solidFill>
+                <a:effectLst/>
+                <a:latin typeface="Consolas" panose="020B0609020204030204" pitchFamily="49" charset="0"/>
+              </a:rPr>
+              <a:t>0</a:t>
+            </a:r>
+            <a:r>
+              <a:rPr lang="en-US" altLang="ko-KR" sz="2000" b="1" i="0" u="none" strike="noStrike" dirty="0">
+                <a:solidFill>
+                  <a:srgbClr val="383A42"/>
+                </a:solidFill>
+                <a:effectLst/>
+                <a:latin typeface="Consolas" panose="020B0609020204030204" pitchFamily="49" charset="0"/>
+              </a:rPr>
+              <a:t>&lt;dest_size; ++n, --dest_size</a:t>
+            </a:r>
+            <a:r>
+              <a:rPr lang="en-US" altLang="ko-KR" sz="1600" b="0" i="0" u="none" strike="noStrike" dirty="0">
+                <a:solidFill>
+                  <a:srgbClr val="383A42"/>
+                </a:solidFill>
+                <a:effectLst/>
+                <a:latin typeface="Consolas" panose="020B0609020204030204" pitchFamily="49" charset="0"/>
+              </a:rPr>
+              <a:t>)</a:t>
+            </a:r>
+            <a:br>
+              <a:rPr lang="en-US" altLang="ko-KR" sz="1600" b="0" i="0" u="none" strike="noStrike" dirty="0">
+                <a:solidFill>
+                  <a:srgbClr val="383A42"/>
+                </a:solidFill>
+                <a:effectLst/>
+                <a:latin typeface="Consolas" panose="020B0609020204030204" pitchFamily="49" charset="0"/>
+              </a:rPr>
+            </a:br>
+            <a:r>
+              <a:rPr lang="en-US" altLang="ko-KR" sz="1600" b="0" i="0" u="none" strike="noStrike" dirty="0">
+                <a:solidFill>
+                  <a:srgbClr val="383A42"/>
+                </a:solidFill>
+                <a:effectLst/>
+                <a:latin typeface="Consolas" panose="020B0609020204030204" pitchFamily="49" charset="0"/>
+              </a:rPr>
+              <a:t>    {</a:t>
+            </a:r>
+            <a:br>
+              <a:rPr lang="en-US" altLang="ko-KR" sz="1600" b="0" i="0" u="none" strike="noStrike" dirty="0">
+                <a:solidFill>
+                  <a:srgbClr val="383A42"/>
+                </a:solidFill>
+                <a:effectLst/>
+                <a:latin typeface="Consolas" panose="020B0609020204030204" pitchFamily="49" charset="0"/>
+              </a:rPr>
+            </a:br>
+            <a:r>
+              <a:rPr lang="en-US" altLang="ko-KR" sz="1600" b="0" i="0" u="none" strike="noStrike" dirty="0">
+                <a:solidFill>
+                  <a:srgbClr val="383A42"/>
+                </a:solidFill>
+                <a:effectLst/>
+                <a:latin typeface="Consolas" panose="020B0609020204030204" pitchFamily="49" charset="0"/>
+              </a:rPr>
+              <a:t>        dst[n] = src[n];</a:t>
+            </a:r>
+            <a:br>
+              <a:rPr lang="en-US" altLang="ko-KR" sz="1600" b="0" i="0" u="none" strike="noStrike" dirty="0">
+                <a:solidFill>
+                  <a:srgbClr val="383A42"/>
+                </a:solidFill>
+                <a:effectLst/>
+                <a:latin typeface="Consolas" panose="020B0609020204030204" pitchFamily="49" charset="0"/>
+              </a:rPr>
+            </a:br>
+            <a:r>
+              <a:rPr lang="en-US" altLang="ko-KR" sz="1600" b="0" i="0" u="none" strike="noStrike" dirty="0">
+                <a:solidFill>
+                  <a:srgbClr val="383A42"/>
+                </a:solidFill>
+                <a:effectLst/>
+                <a:latin typeface="Consolas" panose="020B0609020204030204" pitchFamily="49" charset="0"/>
+              </a:rPr>
+              <a:t>    }</a:t>
+            </a:r>
+            <a:br>
+              <a:rPr lang="en-US" altLang="ko-KR" sz="1600" b="0" i="0" u="none" strike="noStrike" dirty="0">
+                <a:solidFill>
+                  <a:srgbClr val="383A42"/>
+                </a:solidFill>
+                <a:effectLst/>
+                <a:latin typeface="Consolas" panose="020B0609020204030204" pitchFamily="49" charset="0"/>
+              </a:rPr>
+            </a:br>
+            <a:r>
+              <a:rPr lang="en-US" altLang="ko-KR" sz="1600" b="0" i="0" u="none" strike="noStrike" dirty="0">
+                <a:solidFill>
+                  <a:srgbClr val="383A42"/>
+                </a:solidFill>
+                <a:effectLst/>
+                <a:latin typeface="Consolas" panose="020B0609020204030204" pitchFamily="49" charset="0"/>
+              </a:rPr>
+              <a:t>    dst[n] = </a:t>
+            </a:r>
+            <a:r>
+              <a:rPr lang="en-US" altLang="ko-KR" sz="1600" b="0" i="0" u="none" strike="noStrike" dirty="0">
+                <a:solidFill>
+                  <a:srgbClr val="50A14F"/>
+                </a:solidFill>
+                <a:effectLst/>
+                <a:latin typeface="Consolas" panose="020B0609020204030204" pitchFamily="49" charset="0"/>
+              </a:rPr>
+              <a:t>'\0'</a:t>
+            </a:r>
+            <a:r>
+              <a:rPr lang="en-US" altLang="ko-KR" sz="1600" b="0" i="0" u="none" strike="noStrike" dirty="0">
+                <a:solidFill>
+                  <a:srgbClr val="383A42"/>
+                </a:solidFill>
+                <a:effectLst/>
+                <a:latin typeface="Consolas" panose="020B0609020204030204" pitchFamily="49" charset="0"/>
+              </a:rPr>
+              <a:t>;</a:t>
+            </a:r>
+            <a:r>
+              <a:rPr lang="en-US" altLang="ko-KR" sz="1600" dirty="0">
+                <a:solidFill>
+                  <a:srgbClr val="383A42"/>
+                </a:solidFill>
+                <a:latin typeface="Consolas" panose="020B0609020204030204" pitchFamily="49" charset="0"/>
+              </a:rPr>
+              <a:t>      </a:t>
+            </a:r>
+            <a:r>
+              <a:rPr lang="en-US" altLang="ko-KR" sz="1600" i="1" dirty="0">
+                <a:solidFill>
+                  <a:srgbClr val="A0A1A7"/>
+                </a:solidFill>
+                <a:latin typeface="Consolas" panose="020B0609020204030204" pitchFamily="49" charset="0"/>
+              </a:rPr>
+              <a:t>// </a:t>
+            </a:r>
+            <a:r>
+              <a:rPr lang="ko-KR" altLang="en-US" sz="1600" i="1" dirty="0">
+                <a:solidFill>
+                  <a:srgbClr val="A0A1A7"/>
+                </a:solidFill>
+                <a:latin typeface="Consolas" panose="020B0609020204030204" pitchFamily="49" charset="0"/>
+              </a:rPr>
+              <a:t>널문자 저장</a:t>
+            </a:r>
+            <a:r>
+              <a:rPr lang="en-US" altLang="ko-KR" sz="1600" i="1" dirty="0">
+                <a:solidFill>
+                  <a:srgbClr val="A0A1A7"/>
+                </a:solidFill>
+                <a:latin typeface="Consolas" panose="020B0609020204030204" pitchFamily="49" charset="0"/>
+              </a:rPr>
+              <a:t>.</a:t>
+            </a:r>
+            <a:br>
+              <a:rPr lang="en-US" altLang="ko-KR" sz="1600" b="0" i="0" u="none" strike="noStrike" dirty="0">
+                <a:solidFill>
+                  <a:srgbClr val="383A42"/>
+                </a:solidFill>
+                <a:effectLst/>
+                <a:latin typeface="Consolas" panose="020B0609020204030204" pitchFamily="49" charset="0"/>
+              </a:rPr>
+            </a:br>
+            <a:r>
+              <a:rPr lang="en-US" altLang="ko-KR" sz="1600" b="0" i="0" u="none" strike="noStrike" dirty="0">
+                <a:solidFill>
+                  <a:srgbClr val="383A42"/>
+                </a:solidFill>
+                <a:effectLst/>
+                <a:latin typeface="Consolas" panose="020B0609020204030204" pitchFamily="49" charset="0"/>
+              </a:rPr>
+              <a:t>    </a:t>
+            </a:r>
+            <a:r>
+              <a:rPr lang="en-US" altLang="ko-KR" sz="1600" b="0" i="0" u="none" strike="noStrike" dirty="0">
+                <a:solidFill>
+                  <a:srgbClr val="A626A4"/>
+                </a:solidFill>
+                <a:effectLst/>
+                <a:latin typeface="Consolas" panose="020B0609020204030204" pitchFamily="49" charset="0"/>
+              </a:rPr>
+              <a:t>return</a:t>
+            </a:r>
+            <a:r>
+              <a:rPr lang="en-US" altLang="ko-KR" sz="1600" b="0" i="0" u="none" strike="noStrike" dirty="0">
+                <a:solidFill>
+                  <a:srgbClr val="383A42"/>
+                </a:solidFill>
+                <a:effectLst/>
+                <a:latin typeface="Consolas" panose="020B0609020204030204" pitchFamily="49" charset="0"/>
+              </a:rPr>
+              <a:t> n;</a:t>
+            </a:r>
+            <a:br>
+              <a:rPr lang="en-US" altLang="ko-KR" sz="1600" b="0" i="0" u="none" strike="noStrike" dirty="0">
+                <a:solidFill>
+                  <a:srgbClr val="383A42"/>
+                </a:solidFill>
+                <a:effectLst/>
+                <a:latin typeface="Consolas" panose="020B0609020204030204" pitchFamily="49" charset="0"/>
+              </a:rPr>
+            </a:br>
+            <a:r>
+              <a:rPr lang="en-US" altLang="ko-KR" sz="1600" b="0" i="0" u="none" strike="noStrike" dirty="0">
+                <a:solidFill>
+                  <a:srgbClr val="383A42"/>
+                </a:solidFill>
+                <a:effectLst/>
+                <a:latin typeface="Consolas" panose="020B0609020204030204" pitchFamily="49" charset="0"/>
+              </a:rPr>
+              <a:t>}</a:t>
+            </a:r>
+            <a:endParaRPr lang="ko-KR" altLang="en-US" sz="1600" dirty="0"/>
+          </a:p>
+        </p:txBody>
+      </p:sp>
+    </p:spTree>
+    <p:extLst>
+      <p:ext uri="{BB962C8B-B14F-4D97-AF65-F5344CB8AC3E}">
+        <p14:creationId xmlns:p14="http://schemas.microsoft.com/office/powerpoint/2010/main" val="3781586448"/>
       </p:ext>
     </p:extLst>
   </p:cSld>
@@ -35166,14 +34029,13 @@
           <a:lstStyle/>
           <a:p>
             <a:r>
-              <a:rPr lang="en-US" altLang="ko-KR" b="0" dirty="0"/>
+              <a:rPr lang="en-US" altLang="ko-KR" dirty="0"/>
               <a:t>08. </a:t>
             </a:r>
             <a:r>
-              <a:rPr lang="ko-KR" altLang="en-US" b="0" dirty="0"/>
+              <a:rPr lang="ko-KR" altLang="en-US" dirty="0"/>
               <a:t>배열</a:t>
             </a:r>
-            <a:endParaRPr lang="ko-KR" altLang="en-US" dirty="0"/>
           </a:p>
         </p:txBody>
       </p:sp>
@@ -35809,1196 +34671,6 @@
   <p:cSld>
     <p:spTree>
       <p:nvGrpSpPr>
-        <p:cNvPr id="1" name="">
-          <a:extLst>
-            <a:ext uri="{FF2B5EF4-FFF2-40B4-BE49-F238E27FC236}">
-              <a16:creationId xmlns:a16="http://schemas.microsoft.com/office/drawing/2014/main" id="{47B8AB45-5BBC-D997-3987-FBE56A8FF282}"/>
-            </a:ext>
-          </a:extLst>
-        </p:cNvPr>
-        <p:cNvGrpSpPr/>
-        <p:nvPr/>
-      </p:nvGrpSpPr>
-      <p:grpSpPr>
-        <a:xfrm>
-          <a:off x="0" y="0"/>
-          <a:ext cx="0" cy="0"/>
-          <a:chOff x="0" y="0"/>
-          <a:chExt cx="0" cy="0"/>
-        </a:xfrm>
-      </p:grpSpPr>
-      <p:sp>
-        <p:nvSpPr>
-          <p:cNvPr id="2" name="제목 1">
-            <a:extLst>
-              <a:ext uri="{FF2B5EF4-FFF2-40B4-BE49-F238E27FC236}">
-                <a16:creationId xmlns:a16="http://schemas.microsoft.com/office/drawing/2014/main" id="{28B13EFC-99FB-614F-9AD2-27A43714C86F}"/>
-              </a:ext>
-            </a:extLst>
-          </p:cNvPr>
-          <p:cNvSpPr>
-            <a:spLocks noGrp="1"/>
-          </p:cNvSpPr>
-          <p:nvPr>
-            <p:ph type="title"/>
-          </p:nvPr>
-        </p:nvSpPr>
-        <p:spPr/>
-        <p:txBody>
-          <a:bodyPr/>
-          <a:lstStyle/>
-          <a:p>
-            <a:r>
-              <a:rPr lang="en-US" altLang="ko-KR" b="0" dirty="0"/>
-              <a:t>8.3.4 </a:t>
-            </a:r>
-            <a:r>
-              <a:rPr lang="ko-KR" altLang="en-US" b="0" dirty="0"/>
-              <a:t>문자열 복사하기 </a:t>
-            </a:r>
-            <a:r>
-              <a:rPr lang="en-US" altLang="ko-KR" b="0" dirty="0"/>
-              <a:t>– </a:t>
-            </a:r>
-            <a:r>
-              <a:rPr lang="en-US" altLang="ko-KR" b="0" dirty="0" err="1"/>
-              <a:t>myStrCpy</a:t>
-            </a:r>
-            <a:endParaRPr lang="ko-KR" altLang="en-US" dirty="0"/>
-          </a:p>
-        </p:txBody>
-      </p:sp>
-      <p:sp>
-        <p:nvSpPr>
-          <p:cNvPr id="3" name="내용 개체 틀 2">
-            <a:extLst>
-              <a:ext uri="{FF2B5EF4-FFF2-40B4-BE49-F238E27FC236}">
-                <a16:creationId xmlns:a16="http://schemas.microsoft.com/office/drawing/2014/main" id="{98585783-F4BB-268A-3A73-567E1B96687A}"/>
-              </a:ext>
-            </a:extLst>
-          </p:cNvPr>
-          <p:cNvSpPr>
-            <a:spLocks noGrp="1"/>
-          </p:cNvSpPr>
-          <p:nvPr>
-            <p:ph idx="1"/>
-          </p:nvPr>
-        </p:nvSpPr>
-        <p:spPr/>
-        <p:txBody>
-          <a:bodyPr/>
-          <a:lstStyle/>
-          <a:p>
-            <a:r>
-              <a:rPr lang="ko-KR" altLang="en-US" sz="2400" dirty="0"/>
-              <a:t>문자열 끝 → </a:t>
-            </a:r>
-            <a:r>
-              <a:rPr lang="en-US" altLang="ko-KR" sz="2400" dirty="0"/>
-              <a:t>'</a:t>
-            </a:r>
-            <a:r>
-              <a:rPr lang="en-US" altLang="ko-KR" sz="2400" dirty="0">
-                <a:latin typeface="Consolas" panose="020B0609020204030204" pitchFamily="49" charset="0"/>
-              </a:rPr>
-              <a:t>\0</a:t>
-            </a:r>
-            <a:r>
-              <a:rPr lang="en-US" altLang="ko-KR" sz="2400" dirty="0"/>
-              <a:t>'</a:t>
-            </a:r>
-          </a:p>
-          <a:p>
-            <a:r>
-              <a:rPr lang="ko-KR" altLang="en-US" sz="2400" dirty="0"/>
-              <a:t>문자열 길이 → </a:t>
-            </a:r>
-            <a:r>
-              <a:rPr lang="en-US" altLang="ko-KR" sz="2400" dirty="0"/>
-              <a:t>'</a:t>
-            </a:r>
-            <a:r>
-              <a:rPr lang="en-US" altLang="ko-KR" sz="2400" dirty="0">
-                <a:latin typeface="Consolas" panose="020B0609020204030204" pitchFamily="49" charset="0"/>
-              </a:rPr>
-              <a:t>\0</a:t>
-            </a:r>
-            <a:r>
-              <a:rPr lang="en-US" altLang="ko-KR" sz="2400" dirty="0"/>
-              <a:t>' </a:t>
-            </a:r>
-            <a:r>
-              <a:rPr lang="ko-KR" altLang="en-US" sz="2400" dirty="0"/>
-              <a:t>이전까지</a:t>
-            </a:r>
-            <a:endParaRPr lang="en-US" altLang="ko-KR" sz="2400" dirty="0"/>
-          </a:p>
-        </p:txBody>
-      </p:sp>
-      <p:sp>
-        <p:nvSpPr>
-          <p:cNvPr id="4" name="바닥글 개체 틀 3">
-            <a:extLst>
-              <a:ext uri="{FF2B5EF4-FFF2-40B4-BE49-F238E27FC236}">
-                <a16:creationId xmlns:a16="http://schemas.microsoft.com/office/drawing/2014/main" id="{8A211DE7-6BC0-26E8-91C2-7FB661E7012C}"/>
-              </a:ext>
-            </a:extLst>
-          </p:cNvPr>
-          <p:cNvSpPr>
-            <a:spLocks noGrp="1"/>
-          </p:cNvSpPr>
-          <p:nvPr>
-            <p:ph type="ftr" sz="quarter" idx="10"/>
-          </p:nvPr>
-        </p:nvSpPr>
-        <p:spPr/>
-        <p:txBody>
-          <a:bodyPr/>
-          <a:lstStyle/>
-          <a:p>
-            <a:pPr>
-              <a:defRPr/>
-            </a:pPr>
-            <a:r>
-              <a:rPr lang="ko-KR" altLang="en-US"/>
-              <a:t>게임 프로그래밍 교육과정</a:t>
-            </a:r>
-            <a:endParaRPr lang="ko-KR" altLang="en-US" dirty="0"/>
-          </a:p>
-        </p:txBody>
-      </p:sp>
-      <p:sp>
-        <p:nvSpPr>
-          <p:cNvPr id="9" name="TextBox 8">
-            <a:extLst>
-              <a:ext uri="{FF2B5EF4-FFF2-40B4-BE49-F238E27FC236}">
-                <a16:creationId xmlns:a16="http://schemas.microsoft.com/office/drawing/2014/main" id="{6788BB81-769A-8F83-C3DD-68226736CF0A}"/>
-              </a:ext>
-            </a:extLst>
-          </p:cNvPr>
-          <p:cNvSpPr txBox="1"/>
-          <p:nvPr/>
-        </p:nvSpPr>
-        <p:spPr>
-          <a:xfrm>
-            <a:off x="539750" y="1700808"/>
-            <a:ext cx="8064500" cy="3600986"/>
-          </a:xfrm>
-          <a:prstGeom prst="rect">
-            <a:avLst/>
-          </a:prstGeom>
-          <a:noFill/>
-          <a:ln w="25400">
-            <a:solidFill>
-              <a:schemeClr val="bg1">
-                <a:lumMod val="65000"/>
-              </a:schemeClr>
-            </a:solidFill>
-            <a:prstDash val="sysDot"/>
-          </a:ln>
-        </p:spPr>
-        <p:txBody>
-          <a:bodyPr wrap="square">
-            <a:spAutoFit/>
-          </a:bodyPr>
-          <a:lstStyle/>
-          <a:p>
-            <a:pPr rtl="0">
-              <a:buNone/>
-            </a:pPr>
-            <a:r>
-              <a:rPr lang="en-US" altLang="ko-KR" sz="1600" b="0" i="0" u="none" strike="noStrike" dirty="0" err="1">
-                <a:solidFill>
-                  <a:srgbClr val="A626A4"/>
-                </a:solidFill>
-                <a:effectLst/>
-                <a:latin typeface="Consolas" panose="020B0609020204030204" pitchFamily="49" charset="0"/>
-              </a:rPr>
-              <a:t>size_t</a:t>
-            </a:r>
-            <a:r>
-              <a:rPr lang="en-US" altLang="ko-KR" sz="1600" b="0" i="0" u="none" strike="noStrike" dirty="0">
-                <a:solidFill>
-                  <a:srgbClr val="383A42"/>
-                </a:solidFill>
-                <a:effectLst/>
-                <a:latin typeface="Consolas" panose="020B0609020204030204" pitchFamily="49" charset="0"/>
-              </a:rPr>
-              <a:t> </a:t>
-            </a:r>
-            <a:r>
-              <a:rPr lang="en-US" altLang="ko-KR" sz="1600" b="0" i="0" u="none" strike="noStrike" dirty="0" err="1">
-                <a:solidFill>
-                  <a:srgbClr val="383A42"/>
-                </a:solidFill>
-                <a:effectLst/>
-                <a:latin typeface="Consolas" panose="020B0609020204030204" pitchFamily="49" charset="0"/>
-              </a:rPr>
-              <a:t>myStrCpy</a:t>
-            </a:r>
-            <a:r>
-              <a:rPr lang="en-US" altLang="ko-KR" sz="1600" b="0" i="0" u="none" strike="noStrike" dirty="0">
-                <a:solidFill>
-                  <a:srgbClr val="383A42"/>
-                </a:solidFill>
-                <a:effectLst/>
-                <a:latin typeface="Consolas" panose="020B0609020204030204" pitchFamily="49" charset="0"/>
-              </a:rPr>
-              <a:t>(</a:t>
-            </a:r>
-            <a:r>
-              <a:rPr lang="en-US" altLang="ko-KR" sz="1600" b="0" i="0" u="none" strike="noStrike" dirty="0">
-                <a:solidFill>
-                  <a:srgbClr val="A626A4"/>
-                </a:solidFill>
-                <a:effectLst/>
-                <a:latin typeface="Consolas" panose="020B0609020204030204" pitchFamily="49" charset="0"/>
-              </a:rPr>
-              <a:t>char</a:t>
-            </a:r>
-            <a:r>
-              <a:rPr lang="en-US" altLang="ko-KR" sz="1600" b="0" i="0" u="none" strike="noStrike" dirty="0">
-                <a:solidFill>
-                  <a:srgbClr val="383A42"/>
-                </a:solidFill>
-                <a:effectLst/>
-                <a:latin typeface="Consolas" panose="020B0609020204030204" pitchFamily="49" charset="0"/>
-              </a:rPr>
-              <a:t> </a:t>
-            </a:r>
-            <a:r>
-              <a:rPr lang="en-US" altLang="ko-KR" sz="1600" b="0" i="0" u="none" strike="noStrike" dirty="0" err="1">
-                <a:solidFill>
-                  <a:srgbClr val="383A42"/>
-                </a:solidFill>
-                <a:effectLst/>
-                <a:latin typeface="Consolas" panose="020B0609020204030204" pitchFamily="49" charset="0"/>
-              </a:rPr>
-              <a:t>dst</a:t>
-            </a:r>
-            <a:r>
-              <a:rPr lang="en-US" altLang="ko-KR" sz="1600" b="0" i="0" u="none" strike="noStrike" dirty="0">
-                <a:solidFill>
-                  <a:srgbClr val="383A42"/>
-                </a:solidFill>
-                <a:effectLst/>
-                <a:latin typeface="Consolas" panose="020B0609020204030204" pitchFamily="49" charset="0"/>
-              </a:rPr>
-              <a:t>[], </a:t>
-            </a:r>
-            <a:r>
-              <a:rPr lang="en-US" altLang="ko-KR" sz="1600" b="0" i="0" u="none" strike="noStrike" dirty="0" err="1">
-                <a:solidFill>
-                  <a:srgbClr val="A626A4"/>
-                </a:solidFill>
-                <a:effectLst/>
-                <a:latin typeface="Consolas" panose="020B0609020204030204" pitchFamily="49" charset="0"/>
-              </a:rPr>
-              <a:t>size_t</a:t>
-            </a:r>
-            <a:r>
-              <a:rPr lang="en-US" altLang="ko-KR" sz="1600" b="0" i="0" u="none" strike="noStrike" dirty="0">
-                <a:solidFill>
-                  <a:srgbClr val="383A42"/>
-                </a:solidFill>
-                <a:effectLst/>
-                <a:latin typeface="Consolas" panose="020B0609020204030204" pitchFamily="49" charset="0"/>
-              </a:rPr>
-              <a:t> </a:t>
-            </a:r>
-            <a:r>
-              <a:rPr lang="en-US" altLang="ko-KR" sz="1600" b="0" i="0" u="none" strike="noStrike" dirty="0" err="1">
-                <a:solidFill>
-                  <a:srgbClr val="383A42"/>
-                </a:solidFill>
-                <a:effectLst/>
-                <a:latin typeface="Consolas" panose="020B0609020204030204" pitchFamily="49" charset="0"/>
-              </a:rPr>
-              <a:t>dest_size</a:t>
-            </a:r>
-            <a:r>
-              <a:rPr lang="en-US" altLang="ko-KR" sz="1600" b="0" i="0" u="none" strike="noStrike" dirty="0">
-                <a:solidFill>
-                  <a:srgbClr val="383A42"/>
-                </a:solidFill>
-                <a:effectLst/>
-                <a:latin typeface="Consolas" panose="020B0609020204030204" pitchFamily="49" charset="0"/>
-              </a:rPr>
-              <a:t>, </a:t>
-            </a:r>
-            <a:r>
-              <a:rPr lang="en-US" altLang="ko-KR" sz="1600" b="0" i="0" u="none" strike="noStrike" dirty="0">
-                <a:solidFill>
-                  <a:srgbClr val="A626A4"/>
-                </a:solidFill>
-                <a:effectLst/>
-                <a:latin typeface="Consolas" panose="020B0609020204030204" pitchFamily="49" charset="0"/>
-              </a:rPr>
-              <a:t>const</a:t>
-            </a:r>
-            <a:r>
-              <a:rPr lang="en-US" altLang="ko-KR" sz="1600" b="0" i="0" u="none" strike="noStrike" dirty="0">
-                <a:solidFill>
-                  <a:srgbClr val="383A42"/>
-                </a:solidFill>
-                <a:effectLst/>
-                <a:latin typeface="Consolas" panose="020B0609020204030204" pitchFamily="49" charset="0"/>
-              </a:rPr>
-              <a:t> </a:t>
-            </a:r>
-            <a:r>
-              <a:rPr lang="en-US" altLang="ko-KR" sz="1600" b="0" i="0" u="none" strike="noStrike" dirty="0">
-                <a:solidFill>
-                  <a:srgbClr val="A626A4"/>
-                </a:solidFill>
-                <a:effectLst/>
-                <a:latin typeface="Consolas" panose="020B0609020204030204" pitchFamily="49" charset="0"/>
-              </a:rPr>
-              <a:t>char</a:t>
-            </a:r>
-            <a:r>
-              <a:rPr lang="en-US" altLang="ko-KR" sz="1600" b="0" i="0" u="none" strike="noStrike" dirty="0">
-                <a:solidFill>
-                  <a:srgbClr val="383A42"/>
-                </a:solidFill>
-                <a:effectLst/>
-                <a:latin typeface="Consolas" panose="020B0609020204030204" pitchFamily="49" charset="0"/>
-              </a:rPr>
-              <a:t> </a:t>
-            </a:r>
-            <a:r>
-              <a:rPr lang="en-US" altLang="ko-KR" sz="1600" b="0" i="0" u="none" strike="noStrike" dirty="0" err="1">
-                <a:solidFill>
-                  <a:srgbClr val="383A42"/>
-                </a:solidFill>
-                <a:effectLst/>
-                <a:latin typeface="Consolas" panose="020B0609020204030204" pitchFamily="49" charset="0"/>
-              </a:rPr>
-              <a:t>src</a:t>
-            </a:r>
-            <a:r>
-              <a:rPr lang="en-US" altLang="ko-KR" sz="1600" b="0" i="0" u="none" strike="noStrike" dirty="0">
-                <a:solidFill>
-                  <a:srgbClr val="383A42"/>
-                </a:solidFill>
-                <a:effectLst/>
-                <a:latin typeface="Consolas" panose="020B0609020204030204" pitchFamily="49" charset="0"/>
-              </a:rPr>
-              <a:t>[])</a:t>
-            </a:r>
-            <a:br>
-              <a:rPr lang="en-US" altLang="ko-KR" sz="1600" b="0" i="0" u="none" strike="noStrike" dirty="0">
-                <a:solidFill>
-                  <a:srgbClr val="383A42"/>
-                </a:solidFill>
-                <a:effectLst/>
-                <a:latin typeface="Consolas" panose="020B0609020204030204" pitchFamily="49" charset="0"/>
-              </a:rPr>
-            </a:br>
-            <a:r>
-              <a:rPr lang="en-US" altLang="ko-KR" sz="1600" b="0" i="0" u="none" strike="noStrike" dirty="0">
-                <a:solidFill>
-                  <a:srgbClr val="383A42"/>
-                </a:solidFill>
-                <a:effectLst/>
-                <a:latin typeface="Consolas" panose="020B0609020204030204" pitchFamily="49" charset="0"/>
-              </a:rPr>
-              <a:t>{</a:t>
-            </a:r>
-            <a:br>
-              <a:rPr lang="en-US" altLang="ko-KR" sz="1600" b="0" i="0" u="none" strike="noStrike" dirty="0">
-                <a:solidFill>
-                  <a:srgbClr val="383A42"/>
-                </a:solidFill>
-                <a:effectLst/>
-                <a:latin typeface="Consolas" panose="020B0609020204030204" pitchFamily="49" charset="0"/>
-              </a:rPr>
-            </a:br>
-            <a:r>
-              <a:rPr lang="en-US" altLang="ko-KR" sz="1600" b="0" i="0" u="none" strike="noStrike" dirty="0">
-                <a:solidFill>
-                  <a:srgbClr val="383A42"/>
-                </a:solidFill>
-                <a:effectLst/>
-                <a:latin typeface="Consolas" panose="020B0609020204030204" pitchFamily="49" charset="0"/>
-              </a:rPr>
-              <a:t>    </a:t>
-            </a:r>
-            <a:r>
-              <a:rPr lang="en-US" altLang="ko-KR" sz="1600" b="0" i="0" u="none" strike="noStrike" dirty="0">
-                <a:solidFill>
-                  <a:srgbClr val="A626A4"/>
-                </a:solidFill>
-                <a:effectLst/>
-                <a:latin typeface="Consolas" panose="020B0609020204030204" pitchFamily="49" charset="0"/>
-              </a:rPr>
-              <a:t>if</a:t>
-            </a:r>
-            <a:r>
-              <a:rPr lang="en-US" altLang="ko-KR" sz="1600" b="0" i="0" u="none" strike="noStrike" dirty="0">
-                <a:solidFill>
-                  <a:srgbClr val="383A42"/>
-                </a:solidFill>
-                <a:effectLst/>
-                <a:latin typeface="Consolas" panose="020B0609020204030204" pitchFamily="49" charset="0"/>
-              </a:rPr>
-              <a:t>(</a:t>
-            </a:r>
-            <a:r>
-              <a:rPr lang="en-US" altLang="ko-KR" sz="1600" b="0" i="0" u="none" strike="noStrike" dirty="0">
-                <a:solidFill>
-                  <a:srgbClr val="986801"/>
-                </a:solidFill>
-                <a:effectLst/>
-                <a:latin typeface="Consolas" panose="020B0609020204030204" pitchFamily="49" charset="0"/>
-              </a:rPr>
-              <a:t>0</a:t>
-            </a:r>
-            <a:r>
-              <a:rPr lang="en-US" altLang="ko-KR" sz="1600" b="0" i="0" u="none" strike="noStrike" dirty="0">
-                <a:solidFill>
-                  <a:srgbClr val="383A42"/>
-                </a:solidFill>
-                <a:effectLst/>
-                <a:latin typeface="Consolas" panose="020B0609020204030204" pitchFamily="49" charset="0"/>
-              </a:rPr>
-              <a:t> == </a:t>
-            </a:r>
-            <a:r>
-              <a:rPr lang="en-US" altLang="ko-KR" sz="1600" b="0" i="0" u="none" strike="noStrike" dirty="0" err="1">
-                <a:solidFill>
-                  <a:srgbClr val="383A42"/>
-                </a:solidFill>
-                <a:effectLst/>
-                <a:latin typeface="Consolas" panose="020B0609020204030204" pitchFamily="49" charset="0"/>
-              </a:rPr>
-              <a:t>dest_size</a:t>
-            </a:r>
-            <a:r>
-              <a:rPr lang="en-US" altLang="ko-KR" sz="1600" b="0" i="0" u="none" strike="noStrike" dirty="0">
-                <a:solidFill>
-                  <a:srgbClr val="383A42"/>
-                </a:solidFill>
-                <a:effectLst/>
-                <a:latin typeface="Consolas" panose="020B0609020204030204" pitchFamily="49" charset="0"/>
-              </a:rPr>
-              <a:t>)  </a:t>
-            </a:r>
-            <a:r>
-              <a:rPr lang="en-US" altLang="ko-KR" sz="1600" b="0" i="1" u="none" strike="noStrike" dirty="0">
-                <a:solidFill>
-                  <a:srgbClr val="A0A1A7"/>
-                </a:solidFill>
-                <a:effectLst/>
-                <a:latin typeface="Consolas" panose="020B0609020204030204" pitchFamily="49" charset="0"/>
-              </a:rPr>
-              <a:t>// </a:t>
-            </a:r>
-            <a:r>
-              <a:rPr lang="ko-KR" altLang="en-US" sz="1600" b="0" i="1" u="none" strike="noStrike" dirty="0">
-                <a:solidFill>
-                  <a:srgbClr val="A0A1A7"/>
-                </a:solidFill>
-                <a:effectLst/>
-                <a:latin typeface="Consolas" panose="020B0609020204030204" pitchFamily="49" charset="0"/>
-              </a:rPr>
-              <a:t>크기 </a:t>
-            </a:r>
-            <a:r>
-              <a:rPr lang="en-US" altLang="ko-KR" sz="1600" b="0" i="1" u="none" strike="noStrike" dirty="0">
-                <a:solidFill>
-                  <a:srgbClr val="A0A1A7"/>
-                </a:solidFill>
-                <a:effectLst/>
-                <a:latin typeface="Consolas" panose="020B0609020204030204" pitchFamily="49" charset="0"/>
-              </a:rPr>
-              <a:t>0</a:t>
-            </a:r>
-            <a:r>
-              <a:rPr lang="ko-KR" altLang="en-US" sz="1600" b="0" i="1" u="none" strike="noStrike" dirty="0">
-                <a:solidFill>
-                  <a:srgbClr val="A0A1A7"/>
-                </a:solidFill>
-                <a:effectLst/>
-                <a:latin typeface="Consolas" panose="020B0609020204030204" pitchFamily="49" charset="0"/>
-              </a:rPr>
-              <a:t>이면 복사할 수 없으므로 </a:t>
-            </a:r>
-            <a:r>
-              <a:rPr lang="en-US" altLang="ko-KR" sz="1600" b="0" i="1" u="none" strike="noStrike" dirty="0">
-                <a:solidFill>
-                  <a:srgbClr val="A0A1A7"/>
-                </a:solidFill>
-                <a:effectLst/>
-                <a:latin typeface="Consolas" panose="020B0609020204030204" pitchFamily="49" charset="0"/>
-              </a:rPr>
-              <a:t>0 </a:t>
-            </a:r>
-            <a:r>
-              <a:rPr lang="ko-KR" altLang="en-US" sz="1600" b="0" i="1" u="none" strike="noStrike" dirty="0">
-                <a:solidFill>
-                  <a:srgbClr val="A0A1A7"/>
-                </a:solidFill>
-                <a:effectLst/>
-                <a:latin typeface="Consolas" panose="020B0609020204030204" pitchFamily="49" charset="0"/>
-              </a:rPr>
-              <a:t>반환</a:t>
-            </a:r>
-            <a:r>
-              <a:rPr lang="en-US" altLang="ko-KR" sz="1600" b="0" i="1" u="none" strike="noStrike" dirty="0">
-                <a:solidFill>
-                  <a:srgbClr val="A0A1A7"/>
-                </a:solidFill>
-                <a:effectLst/>
-                <a:latin typeface="Consolas" panose="020B0609020204030204" pitchFamily="49" charset="0"/>
-              </a:rPr>
-              <a:t>.</a:t>
-            </a:r>
-            <a:br>
-              <a:rPr lang="ko-KR" altLang="en-US" sz="1600" b="0" i="0" u="none" strike="noStrike" dirty="0">
-                <a:solidFill>
-                  <a:srgbClr val="383A42"/>
-                </a:solidFill>
-                <a:effectLst/>
-                <a:latin typeface="Consolas" panose="020B0609020204030204" pitchFamily="49" charset="0"/>
-              </a:rPr>
-            </a:br>
-            <a:r>
-              <a:rPr lang="ko-KR" altLang="en-US" sz="1600" b="0" i="0" u="none" strike="noStrike" dirty="0">
-                <a:solidFill>
-                  <a:srgbClr val="383A42"/>
-                </a:solidFill>
-                <a:effectLst/>
-                <a:latin typeface="Consolas" panose="020B0609020204030204" pitchFamily="49" charset="0"/>
-              </a:rPr>
-              <a:t>        </a:t>
-            </a:r>
-            <a:r>
-              <a:rPr lang="en-US" altLang="ko-KR" sz="1600" b="0" i="0" u="none" strike="noStrike" dirty="0">
-                <a:solidFill>
-                  <a:srgbClr val="A626A4"/>
-                </a:solidFill>
-                <a:effectLst/>
-                <a:latin typeface="Consolas" panose="020B0609020204030204" pitchFamily="49" charset="0"/>
-              </a:rPr>
-              <a:t>return</a:t>
-            </a:r>
-            <a:r>
-              <a:rPr lang="en-US" altLang="ko-KR" sz="1600" b="0" i="0" u="none" strike="noStrike" dirty="0">
-                <a:solidFill>
-                  <a:srgbClr val="383A42"/>
-                </a:solidFill>
-                <a:effectLst/>
-                <a:latin typeface="Consolas" panose="020B0609020204030204" pitchFamily="49" charset="0"/>
-              </a:rPr>
-              <a:t> </a:t>
-            </a:r>
-            <a:r>
-              <a:rPr lang="en-US" altLang="ko-KR" sz="1600" b="0" i="0" u="none" strike="noStrike" dirty="0">
-                <a:solidFill>
-                  <a:srgbClr val="986801"/>
-                </a:solidFill>
-                <a:effectLst/>
-                <a:latin typeface="Consolas" panose="020B0609020204030204" pitchFamily="49" charset="0"/>
-              </a:rPr>
-              <a:t>0</a:t>
-            </a:r>
-            <a:r>
-              <a:rPr lang="en-US" altLang="ko-KR" sz="1600" b="0" i="0" u="none" strike="noStrike" dirty="0">
-                <a:solidFill>
-                  <a:srgbClr val="383A42"/>
-                </a:solidFill>
-                <a:effectLst/>
-                <a:latin typeface="Consolas" panose="020B0609020204030204" pitchFamily="49" charset="0"/>
-              </a:rPr>
-              <a:t>;</a:t>
-            </a:r>
-            <a:endParaRPr lang="en-US" altLang="ko-KR" sz="1600" b="0" dirty="0">
-              <a:effectLst/>
-            </a:endParaRPr>
-          </a:p>
-          <a:p>
-            <a:pPr>
-              <a:buNone/>
-            </a:pPr>
-            <a:br>
-              <a:rPr lang="en-US" altLang="ko-KR" sz="1600" b="0" i="0" u="none" strike="noStrike" dirty="0">
-                <a:solidFill>
-                  <a:srgbClr val="383A42"/>
-                </a:solidFill>
-                <a:effectLst/>
-                <a:latin typeface="Consolas" panose="020B0609020204030204" pitchFamily="49" charset="0"/>
-              </a:rPr>
-            </a:br>
-            <a:r>
-              <a:rPr lang="en-US" altLang="ko-KR" sz="1600" b="0" i="0" u="none" strike="noStrike" dirty="0">
-                <a:solidFill>
-                  <a:srgbClr val="383A42"/>
-                </a:solidFill>
-                <a:effectLst/>
-                <a:latin typeface="Consolas" panose="020B0609020204030204" pitchFamily="49" charset="0"/>
-              </a:rPr>
-              <a:t>    </a:t>
-            </a:r>
-            <a:r>
-              <a:rPr lang="en-US" altLang="ko-KR" sz="1600" b="0" i="0" u="none" strike="noStrike" dirty="0" err="1">
-                <a:solidFill>
-                  <a:srgbClr val="A626A4"/>
-                </a:solidFill>
-                <a:effectLst/>
-                <a:latin typeface="Consolas" panose="020B0609020204030204" pitchFamily="49" charset="0"/>
-              </a:rPr>
-              <a:t>size_t</a:t>
-            </a:r>
-            <a:r>
-              <a:rPr lang="en-US" altLang="ko-KR" sz="1600" b="0" i="0" u="none" strike="noStrike" dirty="0">
-                <a:solidFill>
-                  <a:srgbClr val="383A42"/>
-                </a:solidFill>
-                <a:effectLst/>
-                <a:latin typeface="Consolas" panose="020B0609020204030204" pitchFamily="49" charset="0"/>
-              </a:rPr>
-              <a:t> n=</a:t>
-            </a:r>
-            <a:r>
-              <a:rPr lang="en-US" altLang="ko-KR" sz="1600" b="0" i="0" u="none" strike="noStrike" dirty="0">
-                <a:solidFill>
-                  <a:srgbClr val="986801"/>
-                </a:solidFill>
-                <a:effectLst/>
-                <a:latin typeface="Consolas" panose="020B0609020204030204" pitchFamily="49" charset="0"/>
-              </a:rPr>
-              <a:t>0</a:t>
-            </a:r>
-            <a:r>
-              <a:rPr lang="en-US" altLang="ko-KR" sz="1600" b="0" i="0" u="none" strike="noStrike" dirty="0">
-                <a:solidFill>
-                  <a:srgbClr val="383A42"/>
-                </a:solidFill>
-                <a:effectLst/>
-                <a:latin typeface="Consolas" panose="020B0609020204030204" pitchFamily="49" charset="0"/>
-              </a:rPr>
-              <a:t>;</a:t>
-            </a:r>
-            <a:br>
-              <a:rPr lang="en-US" altLang="ko-KR" sz="1600" b="0" i="0" u="none" strike="noStrike" dirty="0">
-                <a:solidFill>
-                  <a:srgbClr val="383A42"/>
-                </a:solidFill>
-                <a:effectLst/>
-                <a:latin typeface="Consolas" panose="020B0609020204030204" pitchFamily="49" charset="0"/>
-              </a:rPr>
-            </a:br>
-            <a:r>
-              <a:rPr lang="en-US" altLang="ko-KR" sz="1600" b="0" i="0" u="none" strike="noStrike" dirty="0">
-                <a:solidFill>
-                  <a:srgbClr val="383A42"/>
-                </a:solidFill>
-                <a:effectLst/>
-                <a:latin typeface="Consolas" panose="020B0609020204030204" pitchFamily="49" charset="0"/>
-              </a:rPr>
-              <a:t>    --</a:t>
-            </a:r>
-            <a:r>
-              <a:rPr lang="en-US" altLang="ko-KR" sz="1600" b="0" i="0" u="none" strike="noStrike" dirty="0" err="1">
-                <a:solidFill>
-                  <a:srgbClr val="383A42"/>
-                </a:solidFill>
-                <a:effectLst/>
-                <a:latin typeface="Consolas" panose="020B0609020204030204" pitchFamily="49" charset="0"/>
-              </a:rPr>
-              <a:t>dest_size</a:t>
-            </a:r>
-            <a:r>
-              <a:rPr lang="en-US" altLang="ko-KR" sz="1600" b="0" i="0" u="none" strike="noStrike" dirty="0">
-                <a:solidFill>
-                  <a:srgbClr val="383A42"/>
-                </a:solidFill>
-                <a:effectLst/>
-                <a:latin typeface="Consolas" panose="020B0609020204030204" pitchFamily="49" charset="0"/>
-              </a:rPr>
-              <a:t>;        </a:t>
-            </a:r>
-            <a:r>
-              <a:rPr lang="en-US" altLang="ko-KR" sz="1600" b="0" i="1" u="none" strike="noStrike" dirty="0">
-                <a:solidFill>
-                  <a:srgbClr val="A0A1A7"/>
-                </a:solidFill>
-                <a:effectLst/>
-                <a:latin typeface="Consolas" panose="020B0609020204030204" pitchFamily="49" charset="0"/>
-              </a:rPr>
-              <a:t>// </a:t>
-            </a:r>
-            <a:r>
-              <a:rPr lang="ko-KR" altLang="en-US" sz="1600" b="0" i="1" u="none" strike="noStrike" dirty="0" err="1">
-                <a:solidFill>
-                  <a:srgbClr val="A0A1A7"/>
-                </a:solidFill>
-                <a:effectLst/>
-                <a:latin typeface="Consolas" panose="020B0609020204030204" pitchFamily="49" charset="0"/>
-              </a:rPr>
-              <a:t>널문자</a:t>
-            </a:r>
-            <a:r>
-              <a:rPr lang="ko-KR" altLang="en-US" sz="1600" b="0" i="1" u="none" strike="noStrike" dirty="0">
-                <a:solidFill>
-                  <a:srgbClr val="A0A1A7"/>
-                </a:solidFill>
-                <a:effectLst/>
-                <a:latin typeface="Consolas" panose="020B0609020204030204" pitchFamily="49" charset="0"/>
-              </a:rPr>
-              <a:t> 저장 공간을 위해 </a:t>
-            </a:r>
-            <a:r>
-              <a:rPr lang="en-US" altLang="ko-KR" sz="1600" b="0" i="1" u="none" strike="noStrike" dirty="0">
-                <a:solidFill>
-                  <a:srgbClr val="A0A1A7"/>
-                </a:solidFill>
-                <a:effectLst/>
-                <a:latin typeface="Consolas" panose="020B0609020204030204" pitchFamily="49" charset="0"/>
-              </a:rPr>
-              <a:t>1 </a:t>
-            </a:r>
-            <a:r>
-              <a:rPr lang="ko-KR" altLang="en-US" sz="1600" b="0" i="1" u="none" strike="noStrike" dirty="0">
-                <a:solidFill>
-                  <a:srgbClr val="A0A1A7"/>
-                </a:solidFill>
-                <a:effectLst/>
-                <a:latin typeface="Consolas" panose="020B0609020204030204" pitchFamily="49" charset="0"/>
-              </a:rPr>
-              <a:t>감소</a:t>
-            </a:r>
-            <a:r>
-              <a:rPr lang="en-US" altLang="ko-KR" sz="1600" b="0" i="1" u="none" strike="noStrike" dirty="0">
-                <a:solidFill>
-                  <a:srgbClr val="A0A1A7"/>
-                </a:solidFill>
-                <a:effectLst/>
-                <a:latin typeface="Consolas" panose="020B0609020204030204" pitchFamily="49" charset="0"/>
-              </a:rPr>
-              <a:t>.</a:t>
-            </a:r>
-            <a:br>
-              <a:rPr lang="ko-KR" altLang="en-US" sz="1600" b="0" i="0" u="none" strike="noStrike" dirty="0">
-                <a:solidFill>
-                  <a:srgbClr val="383A42"/>
-                </a:solidFill>
-                <a:effectLst/>
-                <a:latin typeface="Consolas" panose="020B0609020204030204" pitchFamily="49" charset="0"/>
-              </a:rPr>
-            </a:br>
-            <a:r>
-              <a:rPr lang="ko-KR" altLang="en-US" sz="1600" b="0" i="0" u="none" strike="noStrike" dirty="0">
-                <a:solidFill>
-                  <a:srgbClr val="383A42"/>
-                </a:solidFill>
-                <a:effectLst/>
-                <a:latin typeface="Consolas" panose="020B0609020204030204" pitchFamily="49" charset="0"/>
-              </a:rPr>
-              <a:t>    </a:t>
-            </a:r>
-            <a:r>
-              <a:rPr lang="en-US" altLang="ko-KR" sz="1600" b="0" i="0" u="none" strike="noStrike" dirty="0">
-                <a:solidFill>
-                  <a:srgbClr val="A626A4"/>
-                </a:solidFill>
-                <a:effectLst/>
-                <a:latin typeface="Consolas" panose="020B0609020204030204" pitchFamily="49" charset="0"/>
-              </a:rPr>
-              <a:t>for</a:t>
-            </a:r>
-            <a:r>
-              <a:rPr lang="en-US" altLang="ko-KR" sz="2000" b="1" i="0" u="none" strike="noStrike" dirty="0">
-                <a:solidFill>
-                  <a:srgbClr val="383A42"/>
-                </a:solidFill>
-                <a:effectLst/>
-                <a:latin typeface="Consolas" panose="020B0609020204030204" pitchFamily="49" charset="0"/>
-              </a:rPr>
-              <a:t>(;</a:t>
-            </a:r>
-            <a:r>
-              <a:rPr lang="en-US" altLang="ko-KR" sz="2000" b="1" i="0" u="none" strike="noStrike" dirty="0">
-                <a:solidFill>
-                  <a:srgbClr val="50A14F"/>
-                </a:solidFill>
-                <a:effectLst/>
-                <a:latin typeface="Consolas" panose="020B0609020204030204" pitchFamily="49" charset="0"/>
-              </a:rPr>
-              <a:t>'\0'</a:t>
-            </a:r>
-            <a:r>
-              <a:rPr lang="en-US" altLang="ko-KR" sz="2000" b="1" i="0" u="none" strike="noStrike" dirty="0">
-                <a:solidFill>
-                  <a:srgbClr val="383A42"/>
-                </a:solidFill>
-                <a:effectLst/>
-                <a:latin typeface="Consolas" panose="020B0609020204030204" pitchFamily="49" charset="0"/>
-              </a:rPr>
-              <a:t> != </a:t>
-            </a:r>
-            <a:r>
-              <a:rPr lang="en-US" altLang="ko-KR" sz="2000" b="1" i="0" u="none" strike="noStrike" dirty="0" err="1">
-                <a:solidFill>
-                  <a:srgbClr val="383A42"/>
-                </a:solidFill>
-                <a:effectLst/>
-                <a:latin typeface="Consolas" panose="020B0609020204030204" pitchFamily="49" charset="0"/>
-              </a:rPr>
-              <a:t>src</a:t>
-            </a:r>
-            <a:r>
-              <a:rPr lang="en-US" altLang="ko-KR" sz="2000" b="1" i="0" u="none" strike="noStrike" dirty="0">
-                <a:solidFill>
-                  <a:srgbClr val="383A42"/>
-                </a:solidFill>
-                <a:effectLst/>
-                <a:latin typeface="Consolas" panose="020B0609020204030204" pitchFamily="49" charset="0"/>
-              </a:rPr>
-              <a:t>[n] &amp;&amp; </a:t>
-            </a:r>
-            <a:r>
-              <a:rPr lang="en-US" altLang="ko-KR" sz="2000" b="1" i="0" u="none" strike="noStrike" dirty="0">
-                <a:solidFill>
-                  <a:srgbClr val="986801"/>
-                </a:solidFill>
-                <a:effectLst/>
-                <a:latin typeface="Consolas" panose="020B0609020204030204" pitchFamily="49" charset="0"/>
-              </a:rPr>
-              <a:t>0</a:t>
-            </a:r>
-            <a:r>
-              <a:rPr lang="en-US" altLang="ko-KR" sz="2000" b="1" i="0" u="none" strike="noStrike" dirty="0">
-                <a:solidFill>
-                  <a:srgbClr val="383A42"/>
-                </a:solidFill>
-                <a:effectLst/>
-                <a:latin typeface="Consolas" panose="020B0609020204030204" pitchFamily="49" charset="0"/>
-              </a:rPr>
-              <a:t>&lt;</a:t>
-            </a:r>
-            <a:r>
-              <a:rPr lang="en-US" altLang="ko-KR" sz="2000" b="1" i="0" u="none" strike="noStrike" dirty="0" err="1">
-                <a:solidFill>
-                  <a:srgbClr val="383A42"/>
-                </a:solidFill>
-                <a:effectLst/>
-                <a:latin typeface="Consolas" panose="020B0609020204030204" pitchFamily="49" charset="0"/>
-              </a:rPr>
-              <a:t>dest_size</a:t>
-            </a:r>
-            <a:r>
-              <a:rPr lang="en-US" altLang="ko-KR" sz="2000" b="1" i="0" u="none" strike="noStrike" dirty="0">
-                <a:solidFill>
-                  <a:srgbClr val="383A42"/>
-                </a:solidFill>
-                <a:effectLst/>
-                <a:latin typeface="Consolas" panose="020B0609020204030204" pitchFamily="49" charset="0"/>
-              </a:rPr>
-              <a:t>; ++n, --</a:t>
-            </a:r>
-            <a:r>
-              <a:rPr lang="en-US" altLang="ko-KR" sz="2000" b="1" i="0" u="none" strike="noStrike" dirty="0" err="1">
-                <a:solidFill>
-                  <a:srgbClr val="383A42"/>
-                </a:solidFill>
-                <a:effectLst/>
-                <a:latin typeface="Consolas" panose="020B0609020204030204" pitchFamily="49" charset="0"/>
-              </a:rPr>
-              <a:t>dest_size</a:t>
-            </a:r>
-            <a:r>
-              <a:rPr lang="en-US" altLang="ko-KR" sz="1600" b="0" i="0" u="none" strike="noStrike" dirty="0">
-                <a:solidFill>
-                  <a:srgbClr val="383A42"/>
-                </a:solidFill>
-                <a:effectLst/>
-                <a:latin typeface="Consolas" panose="020B0609020204030204" pitchFamily="49" charset="0"/>
-              </a:rPr>
-              <a:t>)</a:t>
-            </a:r>
-            <a:br>
-              <a:rPr lang="en-US" altLang="ko-KR" sz="1600" b="0" i="0" u="none" strike="noStrike" dirty="0">
-                <a:solidFill>
-                  <a:srgbClr val="383A42"/>
-                </a:solidFill>
-                <a:effectLst/>
-                <a:latin typeface="Consolas" panose="020B0609020204030204" pitchFamily="49" charset="0"/>
-              </a:rPr>
-            </a:br>
-            <a:r>
-              <a:rPr lang="en-US" altLang="ko-KR" sz="1600" b="0" i="0" u="none" strike="noStrike" dirty="0">
-                <a:solidFill>
-                  <a:srgbClr val="383A42"/>
-                </a:solidFill>
-                <a:effectLst/>
-                <a:latin typeface="Consolas" panose="020B0609020204030204" pitchFamily="49" charset="0"/>
-              </a:rPr>
-              <a:t>    {</a:t>
-            </a:r>
-            <a:br>
-              <a:rPr lang="en-US" altLang="ko-KR" sz="1600" b="0" i="0" u="none" strike="noStrike" dirty="0">
-                <a:solidFill>
-                  <a:srgbClr val="383A42"/>
-                </a:solidFill>
-                <a:effectLst/>
-                <a:latin typeface="Consolas" panose="020B0609020204030204" pitchFamily="49" charset="0"/>
-              </a:rPr>
-            </a:br>
-            <a:r>
-              <a:rPr lang="en-US" altLang="ko-KR" sz="1600" b="0" i="0" u="none" strike="noStrike" dirty="0">
-                <a:solidFill>
-                  <a:srgbClr val="383A42"/>
-                </a:solidFill>
-                <a:effectLst/>
-                <a:latin typeface="Consolas" panose="020B0609020204030204" pitchFamily="49" charset="0"/>
-              </a:rPr>
-              <a:t>        </a:t>
-            </a:r>
-            <a:r>
-              <a:rPr lang="en-US" altLang="ko-KR" sz="1600" b="0" i="0" u="none" strike="noStrike" dirty="0" err="1">
-                <a:solidFill>
-                  <a:srgbClr val="383A42"/>
-                </a:solidFill>
-                <a:effectLst/>
-                <a:latin typeface="Consolas" panose="020B0609020204030204" pitchFamily="49" charset="0"/>
-              </a:rPr>
-              <a:t>dst</a:t>
-            </a:r>
-            <a:r>
-              <a:rPr lang="en-US" altLang="ko-KR" sz="1600" b="0" i="0" u="none" strike="noStrike" dirty="0">
-                <a:solidFill>
-                  <a:srgbClr val="383A42"/>
-                </a:solidFill>
-                <a:effectLst/>
-                <a:latin typeface="Consolas" panose="020B0609020204030204" pitchFamily="49" charset="0"/>
-              </a:rPr>
-              <a:t>[n] = </a:t>
-            </a:r>
-            <a:r>
-              <a:rPr lang="en-US" altLang="ko-KR" sz="1600" b="0" i="0" u="none" strike="noStrike" dirty="0" err="1">
-                <a:solidFill>
-                  <a:srgbClr val="383A42"/>
-                </a:solidFill>
-                <a:effectLst/>
-                <a:latin typeface="Consolas" panose="020B0609020204030204" pitchFamily="49" charset="0"/>
-              </a:rPr>
-              <a:t>src</a:t>
-            </a:r>
-            <a:r>
-              <a:rPr lang="en-US" altLang="ko-KR" sz="1600" b="0" i="0" u="none" strike="noStrike" dirty="0">
-                <a:solidFill>
-                  <a:srgbClr val="383A42"/>
-                </a:solidFill>
-                <a:effectLst/>
-                <a:latin typeface="Consolas" panose="020B0609020204030204" pitchFamily="49" charset="0"/>
-              </a:rPr>
-              <a:t>[n];</a:t>
-            </a:r>
-            <a:br>
-              <a:rPr lang="en-US" altLang="ko-KR" sz="1600" b="0" i="0" u="none" strike="noStrike" dirty="0">
-                <a:solidFill>
-                  <a:srgbClr val="383A42"/>
-                </a:solidFill>
-                <a:effectLst/>
-                <a:latin typeface="Consolas" panose="020B0609020204030204" pitchFamily="49" charset="0"/>
-              </a:rPr>
-            </a:br>
-            <a:r>
-              <a:rPr lang="en-US" altLang="ko-KR" sz="1600" b="0" i="0" u="none" strike="noStrike" dirty="0">
-                <a:solidFill>
-                  <a:srgbClr val="383A42"/>
-                </a:solidFill>
-                <a:effectLst/>
-                <a:latin typeface="Consolas" panose="020B0609020204030204" pitchFamily="49" charset="0"/>
-              </a:rPr>
-              <a:t>    }</a:t>
-            </a:r>
-            <a:br>
-              <a:rPr lang="en-US" altLang="ko-KR" sz="1600" b="0" i="0" u="none" strike="noStrike" dirty="0">
-                <a:solidFill>
-                  <a:srgbClr val="383A42"/>
-                </a:solidFill>
-                <a:effectLst/>
-                <a:latin typeface="Consolas" panose="020B0609020204030204" pitchFamily="49" charset="0"/>
-              </a:rPr>
-            </a:br>
-            <a:r>
-              <a:rPr lang="en-US" altLang="ko-KR" sz="1600" b="0" i="0" u="none" strike="noStrike" dirty="0">
-                <a:solidFill>
-                  <a:srgbClr val="383A42"/>
-                </a:solidFill>
-                <a:effectLst/>
-                <a:latin typeface="Consolas" panose="020B0609020204030204" pitchFamily="49" charset="0"/>
-              </a:rPr>
-              <a:t>    </a:t>
-            </a:r>
-            <a:r>
-              <a:rPr lang="en-US" altLang="ko-KR" sz="1600" b="0" i="0" u="none" strike="noStrike" dirty="0" err="1">
-                <a:solidFill>
-                  <a:srgbClr val="383A42"/>
-                </a:solidFill>
-                <a:effectLst/>
-                <a:latin typeface="Consolas" panose="020B0609020204030204" pitchFamily="49" charset="0"/>
-              </a:rPr>
-              <a:t>dst</a:t>
-            </a:r>
-            <a:r>
-              <a:rPr lang="en-US" altLang="ko-KR" sz="1600" b="0" i="0" u="none" strike="noStrike" dirty="0">
-                <a:solidFill>
-                  <a:srgbClr val="383A42"/>
-                </a:solidFill>
-                <a:effectLst/>
-                <a:latin typeface="Consolas" panose="020B0609020204030204" pitchFamily="49" charset="0"/>
-              </a:rPr>
-              <a:t>[n] = </a:t>
-            </a:r>
-            <a:r>
-              <a:rPr lang="en-US" altLang="ko-KR" sz="1600" b="0" i="0" u="none" strike="noStrike" dirty="0">
-                <a:solidFill>
-                  <a:srgbClr val="50A14F"/>
-                </a:solidFill>
-                <a:effectLst/>
-                <a:latin typeface="Consolas" panose="020B0609020204030204" pitchFamily="49" charset="0"/>
-              </a:rPr>
-              <a:t>'\0'</a:t>
-            </a:r>
-            <a:r>
-              <a:rPr lang="en-US" altLang="ko-KR" sz="1600" b="0" i="0" u="none" strike="noStrike" dirty="0">
-                <a:solidFill>
-                  <a:srgbClr val="383A42"/>
-                </a:solidFill>
-                <a:effectLst/>
-                <a:latin typeface="Consolas" panose="020B0609020204030204" pitchFamily="49" charset="0"/>
-              </a:rPr>
-              <a:t>;</a:t>
-            </a:r>
-            <a:r>
-              <a:rPr lang="en-US" altLang="ko-KR" sz="1600" dirty="0">
-                <a:solidFill>
-                  <a:srgbClr val="383A42"/>
-                </a:solidFill>
-                <a:latin typeface="Consolas" panose="020B0609020204030204" pitchFamily="49" charset="0"/>
-              </a:rPr>
-              <a:t>      </a:t>
-            </a:r>
-            <a:r>
-              <a:rPr lang="en-US" altLang="ko-KR" sz="1600" i="1" dirty="0">
-                <a:solidFill>
-                  <a:srgbClr val="A0A1A7"/>
-                </a:solidFill>
-                <a:latin typeface="Consolas" panose="020B0609020204030204" pitchFamily="49" charset="0"/>
-              </a:rPr>
-              <a:t>// </a:t>
-            </a:r>
-            <a:r>
-              <a:rPr lang="ko-KR" altLang="en-US" sz="1600" i="1" dirty="0" err="1">
-                <a:solidFill>
-                  <a:srgbClr val="A0A1A7"/>
-                </a:solidFill>
-                <a:latin typeface="Consolas" panose="020B0609020204030204" pitchFamily="49" charset="0"/>
-              </a:rPr>
-              <a:t>널문자</a:t>
-            </a:r>
-            <a:r>
-              <a:rPr lang="ko-KR" altLang="en-US" sz="1600" i="1" dirty="0">
-                <a:solidFill>
-                  <a:srgbClr val="A0A1A7"/>
-                </a:solidFill>
-                <a:latin typeface="Consolas" panose="020B0609020204030204" pitchFamily="49" charset="0"/>
-              </a:rPr>
-              <a:t> 저장</a:t>
-            </a:r>
-            <a:r>
-              <a:rPr lang="en-US" altLang="ko-KR" sz="1600" i="1" dirty="0">
-                <a:solidFill>
-                  <a:srgbClr val="A0A1A7"/>
-                </a:solidFill>
-                <a:latin typeface="Consolas" panose="020B0609020204030204" pitchFamily="49" charset="0"/>
-              </a:rPr>
-              <a:t>.</a:t>
-            </a:r>
-            <a:br>
-              <a:rPr lang="en-US" altLang="ko-KR" sz="1600" b="0" i="0" u="none" strike="noStrike" dirty="0">
-                <a:solidFill>
-                  <a:srgbClr val="383A42"/>
-                </a:solidFill>
-                <a:effectLst/>
-                <a:latin typeface="Consolas" panose="020B0609020204030204" pitchFamily="49" charset="0"/>
-              </a:rPr>
-            </a:br>
-            <a:r>
-              <a:rPr lang="en-US" altLang="ko-KR" sz="1600" b="0" i="0" u="none" strike="noStrike" dirty="0">
-                <a:solidFill>
-                  <a:srgbClr val="383A42"/>
-                </a:solidFill>
-                <a:effectLst/>
-                <a:latin typeface="Consolas" panose="020B0609020204030204" pitchFamily="49" charset="0"/>
-              </a:rPr>
-              <a:t>    </a:t>
-            </a:r>
-            <a:r>
-              <a:rPr lang="en-US" altLang="ko-KR" sz="1600" b="0" i="0" u="none" strike="noStrike" dirty="0">
-                <a:solidFill>
-                  <a:srgbClr val="A626A4"/>
-                </a:solidFill>
-                <a:effectLst/>
-                <a:latin typeface="Consolas" panose="020B0609020204030204" pitchFamily="49" charset="0"/>
-              </a:rPr>
-              <a:t>return</a:t>
-            </a:r>
-            <a:r>
-              <a:rPr lang="en-US" altLang="ko-KR" sz="1600" b="0" i="0" u="none" strike="noStrike" dirty="0">
-                <a:solidFill>
-                  <a:srgbClr val="383A42"/>
-                </a:solidFill>
-                <a:effectLst/>
-                <a:latin typeface="Consolas" panose="020B0609020204030204" pitchFamily="49" charset="0"/>
-              </a:rPr>
-              <a:t> n;</a:t>
-            </a:r>
-            <a:br>
-              <a:rPr lang="en-US" altLang="ko-KR" sz="1600" b="0" i="0" u="none" strike="noStrike" dirty="0">
-                <a:solidFill>
-                  <a:srgbClr val="383A42"/>
-                </a:solidFill>
-                <a:effectLst/>
-                <a:latin typeface="Consolas" panose="020B0609020204030204" pitchFamily="49" charset="0"/>
-              </a:rPr>
-            </a:br>
-            <a:r>
-              <a:rPr lang="en-US" altLang="ko-KR" sz="1600" b="0" i="0" u="none" strike="noStrike" dirty="0">
-                <a:solidFill>
-                  <a:srgbClr val="383A42"/>
-                </a:solidFill>
-                <a:effectLst/>
-                <a:latin typeface="Consolas" panose="020B0609020204030204" pitchFamily="49" charset="0"/>
-              </a:rPr>
-              <a:t>}</a:t>
-            </a:r>
-            <a:endParaRPr lang="ko-KR" altLang="en-US" sz="1600" dirty="0"/>
-          </a:p>
-        </p:txBody>
-      </p:sp>
-    </p:spTree>
-    <p:extLst>
-      <p:ext uri="{BB962C8B-B14F-4D97-AF65-F5344CB8AC3E}">
-        <p14:creationId xmlns:p14="http://schemas.microsoft.com/office/powerpoint/2010/main" val="3781586448"/>
-      </p:ext>
-    </p:extLst>
-  </p:cSld>
-  <p:clrMapOvr>
-    <a:masterClrMapping/>
-  </p:clrMapOvr>
-</p:sld>
-</file>
-
-<file path=ppt/slides/slide41.xml><?xml version="1.0" encoding="utf-8"?>
-<p:sld xmlns:a="http://schemas.openxmlformats.org/drawingml/2006/main" xmlns:r="http://schemas.openxmlformats.org/officeDocument/2006/relationships" xmlns:p="http://schemas.openxmlformats.org/presentationml/2006/main">
-  <p:cSld>
-    <p:spTree>
-      <p:nvGrpSpPr>
         <p:cNvPr id="1" name=""/>
         <p:cNvGrpSpPr/>
         <p:nvPr/>
@@ -37033,14 +34705,13 @@
           <a:lstStyle/>
           <a:p>
             <a:r>
-              <a:rPr lang="en-US" altLang="ko-KR" b="0" dirty="0"/>
+              <a:rPr lang="en-US" altLang="ko-KR" dirty="0"/>
               <a:t>8.3.5 </a:t>
             </a:r>
             <a:r>
-              <a:rPr lang="ko-KR" altLang="en-US" b="0" dirty="0"/>
+              <a:rPr lang="ko-KR" altLang="en-US" dirty="0"/>
               <a:t>문자열 비교하기</a:t>
             </a:r>
-            <a:endParaRPr lang="ko-KR" altLang="en-US" dirty="0"/>
           </a:p>
         </p:txBody>
       </p:sp>
@@ -37148,10 +34819,9 @@
               <a:defRPr/>
             </a:pPr>
             <a:r>
-              <a:rPr lang="ko-KR" altLang="en-US"/>
+              <a:rPr lang="ko-KR" altLang="en-US" dirty="0"/>
               <a:t>게임 프로그래밍 교육과정</a:t>
             </a:r>
-            <a:endParaRPr lang="ko-KR" altLang="en-US" dirty="0"/>
           </a:p>
         </p:txBody>
       </p:sp>
@@ -37212,7 +34882,7 @@
               <a:t> </a:t>
             </a:r>
             <a:r>
-              <a:rPr lang="en-US" altLang="ko-KR" sz="1400" b="0" i="0" u="none" strike="noStrike" dirty="0" err="1">
+              <a:rPr lang="en-US" altLang="ko-KR" sz="1400" b="0" i="0" u="none" strike="noStrike" dirty="0">
                 <a:solidFill>
                   <a:srgbClr val="4078F2"/>
                 </a:solidFill>
@@ -38090,7 +35760,7 @@
 </p:sld>
 </file>
 
-<file path=ppt/slides/slide42.xml><?xml version="1.0" encoding="utf-8"?>
+<file path=ppt/slides/slide41.xml><?xml version="1.0" encoding="utf-8"?>
 <p:sld xmlns:a="http://schemas.openxmlformats.org/drawingml/2006/main" xmlns:r="http://schemas.openxmlformats.org/officeDocument/2006/relationships" xmlns:p="http://schemas.openxmlformats.org/presentationml/2006/main">
   <p:cSld>
     <p:spTree>
@@ -38135,14 +35805,13 @@
           <a:lstStyle/>
           <a:p>
             <a:r>
-              <a:rPr lang="en-US" altLang="ko-KR" b="0" dirty="0"/>
+              <a:rPr lang="en-US" altLang="ko-KR" dirty="0"/>
               <a:t>8.3.6 </a:t>
             </a:r>
             <a:r>
-              <a:rPr lang="ko-KR" altLang="en-US" b="0" dirty="0"/>
+              <a:rPr lang="ko-KR" altLang="en-US" dirty="0"/>
               <a:t>문자열 함수</a:t>
             </a:r>
-            <a:endParaRPr lang="ko-KR" altLang="en-US" dirty="0"/>
           </a:p>
         </p:txBody>
       </p:sp>
@@ -38177,22 +35846,18 @@
             <a:pPr lvl="1"/>
             <a:r>
               <a:rPr lang="en-US" altLang="ko-KR" sz="1800" dirty="0"/>
-              <a:t>&lt;</a:t>
-            </a:r>
-            <a:r>
-              <a:rPr lang="en-US" altLang="ko-KR" sz="1800" dirty="0" err="1"/>
-              <a:t>string.h</a:t>
-            </a:r>
-            <a:r>
-              <a:rPr lang="en-US" altLang="ko-KR" sz="1800" dirty="0"/>
-              <a:t>&gt; </a:t>
+              <a:t>&lt;string.h&gt; </a:t>
             </a:r>
             <a:r>
               <a:rPr lang="ko-KR" altLang="en-US" sz="1800" dirty="0"/>
               <a:t>제공 함수 → </a:t>
             </a:r>
             <a:r>
-              <a:rPr lang="en-US" altLang="ko-KR" sz="1800" dirty="0" err="1"/>
+              <a:rPr lang="en-US" altLang="ko-KR" sz="1800" dirty="0">
+                <a:solidFill>
+                  <a:srgbClr val="7030A0"/>
+                </a:solidFill>
+              </a:rPr>
               <a:t>strlen</a:t>
             </a:r>
             <a:r>
@@ -38200,7 +35865,11 @@
               <a:t>, </a:t>
             </a:r>
             <a:r>
-              <a:rPr lang="en-US" altLang="ko-KR" sz="1800" dirty="0" err="1"/>
+              <a:rPr lang="en-US" altLang="ko-KR" sz="1800" dirty="0">
+                <a:solidFill>
+                  <a:srgbClr val="7030A0"/>
+                </a:solidFill>
+              </a:rPr>
               <a:t>strcpy</a:t>
             </a:r>
             <a:r>
@@ -38208,10 +35877,13 @@
               <a:t>, </a:t>
             </a:r>
             <a:r>
-              <a:rPr lang="en-US" altLang="ko-KR" sz="1800" dirty="0" err="1"/>
+              <a:rPr lang="en-US" altLang="ko-KR" sz="1800" dirty="0">
+                <a:solidFill>
+                  <a:srgbClr val="7030A0"/>
+                </a:solidFill>
+              </a:rPr>
               <a:t>strcmp</a:t>
             </a:r>
-            <a:endParaRPr lang="en-US" altLang="ko-KR" sz="1800" dirty="0"/>
           </a:p>
           <a:p>
             <a:endParaRPr lang="en-US" altLang="ko-KR" sz="2400" dirty="0"/>
@@ -38315,10 +35987,9 @@
               <a:defRPr/>
             </a:pPr>
             <a:r>
-              <a:rPr lang="ko-KR" altLang="en-US"/>
+              <a:rPr lang="ko-KR" altLang="en-US" dirty="0"/>
               <a:t>게임 프로그래밍 교육과정</a:t>
             </a:r>
-            <a:endParaRPr lang="ko-KR" altLang="en-US" dirty="0"/>
           </a:p>
         </p:txBody>
       </p:sp>
@@ -38335,7 +36006,7 @@
 </p:sld>
 </file>
 
-<file path=ppt/slides/slide43.xml><?xml version="1.0" encoding="utf-8"?>
+<file path=ppt/slides/slide42.xml><?xml version="1.0" encoding="utf-8"?>
 <p:sld xmlns:a="http://schemas.openxmlformats.org/drawingml/2006/main" xmlns:r="http://schemas.openxmlformats.org/officeDocument/2006/relationships" xmlns:p="http://schemas.openxmlformats.org/presentationml/2006/main">
   <p:cSld>
     <p:spTree>
@@ -38378,10 +36049,9 @@
               <a:t>6. </a:t>
             </a:r>
             <a:r>
-              <a:rPr lang="ko-KR" altLang="en-US" b="0" dirty="0"/>
+              <a:rPr lang="ko-KR" altLang="en-US" dirty="0"/>
               <a:t>학습 정리</a:t>
             </a:r>
-            <a:endParaRPr lang="ko-KR" altLang="en-US" dirty="0"/>
           </a:p>
         </p:txBody>
       </p:sp>
@@ -38420,7 +36090,7 @@
             <a:pPr lvl="1"/>
             <a:r>
               <a:rPr lang="ko-KR" altLang="en-US" sz="1600" dirty="0"/>
-              <a:t>연속된 메모리 공간</a:t>
+              <a:t>동일한 타입의 연속된 메모리 공간</a:t>
             </a:r>
           </a:p>
           <a:p>
@@ -38462,7 +36132,7 @@
             <a:pPr lvl="1"/>
             <a:r>
               <a:rPr lang="en-US" altLang="ko-KR" sz="1600" dirty="0"/>
-              <a:t>index </a:t>
+              <a:t>Index </a:t>
             </a:r>
             <a:r>
               <a:rPr lang="ko-KR" altLang="en-US" sz="1600" dirty="0"/>
@@ -38763,10 +36433,9 @@
               <a:defRPr/>
             </a:pPr>
             <a:r>
-              <a:rPr lang="ko-KR" altLang="en-US"/>
+              <a:rPr lang="ko-KR" altLang="en-US" dirty="0"/>
               <a:t>게임 프로그래밍 교육과정</a:t>
             </a:r>
-            <a:endParaRPr lang="ko-KR" altLang="en-US" dirty="0"/>
           </a:p>
         </p:txBody>
       </p:sp>
@@ -38783,7 +36452,7 @@
 </p:sld>
 </file>
 
-<file path=ppt/slides/slide44.xml><?xml version="1.0" encoding="utf-8"?>
+<file path=ppt/slides/slide43.xml><?xml version="1.0" encoding="utf-8"?>
 <p:sld xmlns:a="http://schemas.openxmlformats.org/drawingml/2006/main" xmlns:r="http://schemas.openxmlformats.org/officeDocument/2006/relationships" xmlns:p="http://schemas.openxmlformats.org/presentationml/2006/main">
   <p:cSld>
     <p:spTree>
@@ -38822,10 +36491,9 @@
           <a:lstStyle/>
           <a:p>
             <a:r>
-              <a:rPr lang="ko-KR" altLang="en-US" b="0" dirty="0"/>
+              <a:rPr lang="ko-KR" altLang="en-US" dirty="0"/>
               <a:t>실습 및 과제</a:t>
             </a:r>
-            <a:endParaRPr lang="ko-KR" altLang="en-US" dirty="0"/>
           </a:p>
         </p:txBody>
       </p:sp>
@@ -39088,10 +36756,9 @@
               <a:defRPr/>
             </a:pPr>
             <a:r>
-              <a:rPr lang="ko-KR" altLang="en-US"/>
+              <a:rPr lang="ko-KR" altLang="en-US" dirty="0"/>
               <a:t>게임 프로그래밍 교육과정</a:t>
             </a:r>
-            <a:endParaRPr lang="ko-KR" altLang="en-US" dirty="0"/>
           </a:p>
         </p:txBody>
       </p:sp>
@@ -39108,7 +36775,7 @@
 </p:sld>
 </file>
 
-<file path=ppt/slides/slide45.xml><?xml version="1.0" encoding="utf-8"?>
+<file path=ppt/slides/slide44.xml><?xml version="1.0" encoding="utf-8"?>
 <p:sld xmlns:a="http://schemas.openxmlformats.org/drawingml/2006/main" xmlns:r="http://schemas.openxmlformats.org/officeDocument/2006/relationships" xmlns:p="http://schemas.openxmlformats.org/presentationml/2006/main">
   <p:cSld>
     <p:spTree>
@@ -39153,10 +36820,9 @@
           <a:lstStyle/>
           <a:p>
             <a:r>
-              <a:rPr lang="ko-KR" altLang="en-US" b="0" dirty="0"/>
+              <a:rPr lang="ko-KR" altLang="en-US" dirty="0"/>
               <a:t>실습 및 과제</a:t>
             </a:r>
-            <a:endParaRPr lang="ko-KR" altLang="en-US" dirty="0"/>
           </a:p>
         </p:txBody>
       </p:sp>
@@ -39384,10 +37050,9 @@
               <a:defRPr/>
             </a:pPr>
             <a:r>
-              <a:rPr lang="ko-KR" altLang="en-US"/>
+              <a:rPr lang="ko-KR" altLang="en-US" dirty="0"/>
               <a:t>게임 프로그래밍 교육과정</a:t>
             </a:r>
-            <a:endParaRPr lang="ko-KR" altLang="en-US" dirty="0"/>
           </a:p>
         </p:txBody>
       </p:sp>
@@ -39449,14 +37114,13 @@
           <a:lstStyle/>
           <a:p>
             <a:r>
-              <a:rPr lang="en-US" altLang="ko-KR" b="0" dirty="0"/>
+              <a:rPr lang="en-US" altLang="ko-KR" dirty="0"/>
               <a:t>8.1 1</a:t>
             </a:r>
             <a:r>
-              <a:rPr lang="ko-KR" altLang="en-US" b="0" dirty="0"/>
+              <a:rPr lang="ko-KR" altLang="en-US" dirty="0"/>
               <a:t>차원 배열</a:t>
             </a:r>
-            <a:endParaRPr lang="ko-KR" altLang="en-US" dirty="0"/>
           </a:p>
         </p:txBody>
       </p:sp>
@@ -39605,25 +37269,7 @@
                 </a:solidFill>
                 <a:latin typeface="Consolas" panose="020B0609020204030204" pitchFamily="49" charset="0"/>
               </a:rPr>
-              <a:t>&amp;</a:t>
-            </a:r>
-            <a:r>
-              <a:rPr lang="en-US" altLang="ko-KR" sz="2000" dirty="0" err="1">
-                <a:solidFill>
-                  <a:srgbClr val="0000FF"/>
-                </a:solidFill>
-                <a:latin typeface="Consolas" panose="020B0609020204030204" pitchFamily="49" charset="0"/>
-              </a:rPr>
-              <a:t>arrayVal</a:t>
-            </a:r>
-            <a:r>
-              <a:rPr lang="en-US" altLang="ko-KR" sz="2000" dirty="0">
-                <a:solidFill>
-                  <a:srgbClr val="0000FF"/>
-                </a:solidFill>
-                <a:latin typeface="Consolas" panose="020B0609020204030204" pitchFamily="49" charset="0"/>
-              </a:rPr>
-              <a:t>[0];</a:t>
+              <a:t>&amp;arrayVal[0];</a:t>
             </a:r>
           </a:p>
           <a:p>
@@ -39936,27 +37582,7 @@
                   </a:schemeClr>
                 </a:solidFill>
               </a:rPr>
-              <a:t>&amp;</a:t>
-            </a:r>
-            <a:r>
-              <a:rPr lang="en-US" altLang="ko-KR" b="1" dirty="0" err="1">
-                <a:solidFill>
-                  <a:schemeClr val="bg1">
-                    <a:lumMod val="50000"/>
-                  </a:schemeClr>
-                </a:solidFill>
-              </a:rPr>
-              <a:t>arrayVal</a:t>
-            </a:r>
-            <a:r>
-              <a:rPr lang="en-US" altLang="ko-KR" b="1" dirty="0">
-                <a:solidFill>
-                  <a:schemeClr val="bg1">
-                    <a:lumMod val="50000"/>
-                  </a:schemeClr>
-                </a:solidFill>
-              </a:rPr>
-              <a:t>[</a:t>
+              <a:t>&amp;arrayVal[</a:t>
             </a:r>
             <a:r>
               <a:rPr lang="en-US" altLang="ko-KR" b="1" dirty="0">
@@ -40046,14 +37672,13 @@
           <a:lstStyle/>
           <a:p>
             <a:r>
-              <a:rPr lang="en-US" altLang="ko-KR" b="0" dirty="0"/>
+              <a:rPr lang="en-US" altLang="ko-KR" dirty="0"/>
               <a:t>8.1 1</a:t>
             </a:r>
             <a:r>
-              <a:rPr lang="ko-KR" altLang="en-US" b="0" dirty="0"/>
+              <a:rPr lang="ko-KR" altLang="en-US" dirty="0"/>
               <a:t>차원 배열</a:t>
             </a:r>
-            <a:endParaRPr lang="ko-KR" altLang="en-US" dirty="0"/>
           </a:p>
         </p:txBody>
       </p:sp>
@@ -41268,7 +38893,7 @@
               <a:buNone/>
               <a:tabLst/>
             </a:pPr>
-            <a:endParaRPr kumimoji="1" lang="ko-KR" altLang="en-US" sz="2400" b="0" i="0" u="none" strike="noStrike" cap="none" normalizeH="0" baseline="0">
+            <a:endParaRPr kumimoji="1" lang="ko-KR" altLang="en-US" sz="2400" b="0" i="0" u="none" strike="noStrike" cap="none" normalizeH="0" baseline="0" dirty="0">
               <a:ln>
                 <a:noFill/>
               </a:ln>
@@ -41340,14 +38965,13 @@
           <a:lstStyle/>
           <a:p>
             <a:r>
-              <a:rPr lang="en-US" altLang="ko-KR" b="0" dirty="0"/>
+              <a:rPr lang="en-US" altLang="ko-KR" dirty="0"/>
               <a:t>8.1.2 1</a:t>
             </a:r>
             <a:r>
-              <a:rPr lang="ko-KR" altLang="en-US" b="0" dirty="0"/>
+              <a:rPr lang="ko-KR" altLang="en-US" dirty="0"/>
               <a:t>차원 배열 선언과 동시에 초기화</a:t>
             </a:r>
-            <a:endParaRPr lang="ko-KR" altLang="en-US" dirty="0"/>
           </a:p>
         </p:txBody>
       </p:sp>
@@ -42136,14 +39760,13 @@
           <a:lstStyle/>
           <a:p>
             <a:r>
-              <a:rPr lang="en-US" altLang="ko-KR" b="0" dirty="0"/>
+              <a:rPr lang="en-US" altLang="ko-KR" dirty="0"/>
               <a:t>8.1.3 1</a:t>
             </a:r>
             <a:r>
-              <a:rPr lang="ko-KR" altLang="en-US" b="0" dirty="0"/>
+              <a:rPr lang="ko-KR" altLang="en-US" dirty="0"/>
               <a:t>차원 배열의 크기와 원소의 개수</a:t>
             </a:r>
-            <a:endParaRPr lang="ko-KR" altLang="en-US" dirty="0"/>
           </a:p>
         </p:txBody>
       </p:sp>
@@ -42206,10 +39829,9 @@
               <a:defRPr/>
             </a:pPr>
             <a:r>
-              <a:rPr lang="ko-KR" altLang="en-US"/>
+              <a:rPr lang="ko-KR" altLang="en-US" dirty="0"/>
               <a:t>게임 프로그래밍 교육과정</a:t>
             </a:r>
-            <a:endParaRPr lang="ko-KR" altLang="en-US" dirty="0"/>
           </a:p>
         </p:txBody>
       </p:sp>
@@ -42250,7 +39872,7 @@
           <a:lstStyle/>
           <a:p>
             <a:r>
-              <a:rPr lang="ko-KR" altLang="en-US" b="0" i="0" u="none" strike="noStrike" dirty="0">
+              <a:rPr lang="ko-KR" altLang="en-US" b="1" i="0" u="none" strike="noStrike" dirty="0">
                 <a:solidFill>
                   <a:srgbClr val="383A42"/>
                 </a:solidFill>
@@ -42260,7 +39882,7 @@
               <a:t>배열 원소 크기 </a:t>
             </a:r>
             <a:r>
-              <a:rPr lang="en-US" altLang="ko-KR" b="0" i="0" u="none" strike="noStrike" dirty="0">
+              <a:rPr lang="en-US" altLang="ko-KR" b="1" i="0" u="none" strike="noStrike" dirty="0">
                 <a:solidFill>
                   <a:srgbClr val="383A42"/>
                 </a:solidFill>
@@ -42270,7 +39892,7 @@
               <a:t>= </a:t>
             </a:r>
             <a:r>
-              <a:rPr lang="en-US" altLang="ko-KR" b="0" i="0" u="none" strike="noStrike" dirty="0">
+              <a:rPr lang="en-US" altLang="ko-KR" b="1" i="0" u="none" strike="noStrike" dirty="0">
                 <a:solidFill>
                   <a:srgbClr val="A626A4"/>
                 </a:solidFill>
@@ -42280,7 +39902,7 @@
               <a:t>sizeof</a:t>
             </a:r>
             <a:r>
-              <a:rPr lang="en-US" altLang="ko-KR" b="0" i="0" u="none" strike="noStrike" dirty="0">
+              <a:rPr lang="en-US" altLang="ko-KR" b="1" i="0" u="none" strike="noStrike" dirty="0">
                 <a:solidFill>
                   <a:srgbClr val="383A42"/>
                 </a:solidFill>
@@ -42290,7 +39912,7 @@
               <a:t>(</a:t>
             </a:r>
             <a:r>
-              <a:rPr lang="ko-KR" altLang="en-US" b="0" i="0" u="none" strike="noStrike" dirty="0">
+              <a:rPr lang="ko-KR" altLang="en-US" b="1" i="0" u="none" strike="noStrike" dirty="0">
                 <a:solidFill>
                   <a:srgbClr val="383A42"/>
                 </a:solidFill>
@@ -42300,7 +39922,7 @@
               <a:t>배열</a:t>
             </a:r>
             <a:r>
-              <a:rPr lang="en-US" altLang="ko-KR" b="0" i="0" u="none" strike="noStrike" dirty="0">
+              <a:rPr lang="en-US" altLang="ko-KR" b="1" i="0" u="none" strike="noStrike" dirty="0">
                 <a:solidFill>
                   <a:srgbClr val="383A42"/>
                 </a:solidFill>
@@ -42310,7 +39932,7 @@
               <a:t>_</a:t>
             </a:r>
             <a:r>
-              <a:rPr lang="ko-KR" altLang="en-US" b="0" i="0" u="none" strike="noStrike" dirty="0">
+              <a:rPr lang="ko-KR" altLang="en-US" b="1" i="0" u="none" strike="noStrike" dirty="0">
                 <a:solidFill>
                   <a:srgbClr val="383A42"/>
                 </a:solidFill>
@@ -42320,7 +39942,7 @@
               <a:t>이름</a:t>
             </a:r>
             <a:r>
-              <a:rPr lang="en-US" altLang="ko-KR" b="0" i="0" u="none" strike="noStrike" dirty="0">
+              <a:rPr lang="en-US" altLang="ko-KR" b="1" i="0" u="none" strike="noStrike" dirty="0">
                 <a:solidFill>
                   <a:srgbClr val="383A42"/>
                 </a:solidFill>
@@ -42330,7 +39952,7 @@
               <a:t>[</a:t>
             </a:r>
             <a:r>
-              <a:rPr lang="en-US" altLang="ko-KR" b="0" i="0" u="none" strike="noStrike" dirty="0">
+              <a:rPr lang="en-US" altLang="ko-KR" b="1" i="0" u="none" strike="noStrike" dirty="0">
                 <a:solidFill>
                   <a:srgbClr val="986801"/>
                 </a:solidFill>
@@ -42340,7 +39962,7 @@
               <a:t>0</a:t>
             </a:r>
             <a:r>
-              <a:rPr lang="en-US" altLang="ko-KR" b="0" i="0" u="none" strike="noStrike" dirty="0">
+              <a:rPr lang="en-US" altLang="ko-KR" b="1" i="0" u="none" strike="noStrike" dirty="0">
                 <a:solidFill>
                   <a:srgbClr val="383A42"/>
                 </a:solidFill>
@@ -42350,7 +39972,7 @@
               <a:t>])</a:t>
             </a:r>
             <a:br>
-              <a:rPr lang="en-US" altLang="ko-KR" b="0" i="0" u="none" strike="noStrike" dirty="0">
+              <a:rPr lang="en-US" altLang="ko-KR" b="1" i="0" u="none" strike="noStrike" dirty="0">
                 <a:solidFill>
                   <a:srgbClr val="383A42"/>
                 </a:solidFill>
@@ -42359,7 +39981,7 @@
               </a:rPr>
             </a:br>
             <a:r>
-              <a:rPr lang="ko-KR" altLang="en-US" b="0" i="0" u="none" strike="noStrike" dirty="0">
+              <a:rPr lang="ko-KR" altLang="en-US" b="1" i="0" u="none" strike="noStrike" dirty="0">
                 <a:solidFill>
                   <a:srgbClr val="383A42"/>
                 </a:solidFill>
@@ -42369,7 +39991,7 @@
               <a:t>배열 전체 크기 </a:t>
             </a:r>
             <a:r>
-              <a:rPr lang="en-US" altLang="ko-KR" b="0" i="0" u="none" strike="noStrike" dirty="0">
+              <a:rPr lang="en-US" altLang="ko-KR" b="1" i="0" u="none" strike="noStrike" dirty="0">
                 <a:solidFill>
                   <a:srgbClr val="383A42"/>
                 </a:solidFill>
@@ -42379,7 +40001,7 @@
               <a:t>= </a:t>
             </a:r>
             <a:r>
-              <a:rPr lang="en-US" altLang="ko-KR" b="0" i="0" u="none" strike="noStrike" dirty="0">
+              <a:rPr lang="en-US" altLang="ko-KR" b="1" i="0" u="none" strike="noStrike" dirty="0">
                 <a:solidFill>
                   <a:srgbClr val="A626A4"/>
                 </a:solidFill>
@@ -42389,7 +40011,7 @@
               <a:t>sizeof</a:t>
             </a:r>
             <a:r>
-              <a:rPr lang="en-US" altLang="ko-KR" b="0" i="0" u="none" strike="noStrike" dirty="0">
+              <a:rPr lang="en-US" altLang="ko-KR" b="1" i="0" u="none" strike="noStrike" dirty="0">
                 <a:solidFill>
                   <a:srgbClr val="383A42"/>
                 </a:solidFill>
@@ -42399,7 +40021,7 @@
               <a:t>(</a:t>
             </a:r>
             <a:r>
-              <a:rPr lang="ko-KR" altLang="en-US" b="0" i="0" u="none" strike="noStrike" dirty="0">
+              <a:rPr lang="ko-KR" altLang="en-US" b="1" i="0" u="none" strike="noStrike" dirty="0">
                 <a:solidFill>
                   <a:srgbClr val="383A42"/>
                 </a:solidFill>
@@ -42409,7 +40031,7 @@
               <a:t>배열</a:t>
             </a:r>
             <a:r>
-              <a:rPr lang="en-US" altLang="ko-KR" b="0" i="0" u="none" strike="noStrike" dirty="0">
+              <a:rPr lang="en-US" altLang="ko-KR" b="1" i="0" u="none" strike="noStrike" dirty="0">
                 <a:solidFill>
                   <a:srgbClr val="383A42"/>
                 </a:solidFill>
@@ -42419,7 +40041,7 @@
               <a:t>_</a:t>
             </a:r>
             <a:r>
-              <a:rPr lang="ko-KR" altLang="en-US" b="0" i="0" u="none" strike="noStrike" dirty="0">
+              <a:rPr lang="ko-KR" altLang="en-US" b="1" i="0" u="none" strike="noStrike" dirty="0">
                 <a:solidFill>
                   <a:srgbClr val="383A42"/>
                 </a:solidFill>
@@ -42429,7 +40051,7 @@
               <a:t>이름</a:t>
             </a:r>
             <a:r>
-              <a:rPr lang="en-US" altLang="ko-KR" b="0" i="0" u="none" strike="noStrike" dirty="0">
+              <a:rPr lang="en-US" altLang="ko-KR" b="1" i="0" u="none" strike="noStrike" dirty="0">
                 <a:solidFill>
                   <a:srgbClr val="383A42"/>
                 </a:solidFill>
@@ -42439,7 +40061,7 @@
               <a:t>)</a:t>
             </a:r>
             <a:br>
-              <a:rPr lang="en-US" altLang="ko-KR" b="0" i="0" u="none" strike="noStrike" dirty="0">
+              <a:rPr lang="en-US" altLang="ko-KR" b="1" i="0" u="none" strike="noStrike" dirty="0">
                 <a:solidFill>
                   <a:srgbClr val="383A42"/>
                 </a:solidFill>
@@ -42448,7 +40070,7 @@
               </a:rPr>
             </a:br>
             <a:r>
-              <a:rPr lang="ko-KR" altLang="en-US" b="0" i="0" u="none" strike="noStrike" dirty="0">
+              <a:rPr lang="ko-KR" altLang="en-US" b="1" i="0" u="none" strike="noStrike" dirty="0">
                 <a:solidFill>
                   <a:srgbClr val="383A42"/>
                 </a:solidFill>
@@ -42458,7 +40080,7 @@
               <a:t>배열 요소 개수 </a:t>
             </a:r>
             <a:r>
-              <a:rPr lang="en-US" altLang="ko-KR" b="0" i="0" u="none" strike="noStrike" dirty="0">
+              <a:rPr lang="en-US" altLang="ko-KR" b="1" i="0" u="none" strike="noStrike" dirty="0">
                 <a:solidFill>
                   <a:srgbClr val="383A42"/>
                 </a:solidFill>
@@ -42468,7 +40090,7 @@
               <a:t>= </a:t>
             </a:r>
             <a:r>
-              <a:rPr lang="ko-KR" altLang="en-US" b="0" i="0" u="none" strike="noStrike" dirty="0">
+              <a:rPr lang="ko-KR" altLang="en-US" b="1" i="0" u="none" strike="noStrike" dirty="0">
                 <a:solidFill>
                   <a:srgbClr val="383A42"/>
                 </a:solidFill>
@@ -42478,7 +40100,7 @@
               <a:t>배열 전체 크기 </a:t>
             </a:r>
             <a:r>
-              <a:rPr lang="en-US" altLang="ko-KR" b="0" i="0" u="none" strike="noStrike" dirty="0">
+              <a:rPr lang="en-US" altLang="ko-KR" b="1" i="0" u="none" strike="noStrike" dirty="0">
                 <a:solidFill>
                   <a:srgbClr val="383A42"/>
                 </a:solidFill>
@@ -42488,7 +40110,7 @@
               <a:t>/ </a:t>
             </a:r>
             <a:r>
-              <a:rPr lang="ko-KR" altLang="en-US" b="0" i="0" u="none" strike="noStrike" dirty="0">
+              <a:rPr lang="ko-KR" altLang="en-US" b="1" i="0" u="none" strike="noStrike" dirty="0">
                 <a:solidFill>
                   <a:srgbClr val="383A42"/>
                 </a:solidFill>
@@ -42497,7 +40119,7 @@
               </a:rPr>
               <a:t>배열 원소 크기</a:t>
             </a:r>
-            <a:endParaRPr lang="ko-KR" altLang="en-US" dirty="0"/>
+            <a:endParaRPr lang="ko-KR" altLang="en-US" b="1" dirty="0"/>
           </a:p>
         </p:txBody>
       </p:sp>
@@ -42538,7 +40160,7 @@
           <a:lstStyle/>
           <a:p>
             <a:r>
-              <a:rPr lang="en-US" altLang="ko-KR" sz="2000" b="0" i="0" u="none" strike="noStrike" dirty="0">
+              <a:rPr lang="en-US" altLang="ko-KR" sz="2000" b="1" i="0" u="none" strike="noStrike" dirty="0">
                 <a:solidFill>
                   <a:srgbClr val="A626A4"/>
                 </a:solidFill>
@@ -42548,7 +40170,7 @@
               <a:t>int</a:t>
             </a:r>
             <a:r>
-              <a:rPr lang="en-US" altLang="ko-KR" sz="2000" b="0" i="0" u="none" strike="noStrike" dirty="0">
+              <a:rPr lang="en-US" altLang="ko-KR" sz="2000" b="1" i="0" u="none" strike="noStrike" dirty="0">
                 <a:solidFill>
                   <a:srgbClr val="383A42"/>
                 </a:solidFill>
@@ -42558,7 +40180,7 @@
               <a:t> arr[</a:t>
             </a:r>
             <a:r>
-              <a:rPr lang="en-US" altLang="ko-KR" sz="2000" b="0" i="0" u="none" strike="noStrike" dirty="0">
+              <a:rPr lang="en-US" altLang="ko-KR" sz="2000" b="1" i="0" u="none" strike="noStrike" dirty="0">
                 <a:solidFill>
                   <a:srgbClr val="986801"/>
                 </a:solidFill>
@@ -42568,7 +40190,7 @@
               <a:t>128</a:t>
             </a:r>
             <a:r>
-              <a:rPr lang="en-US" altLang="ko-KR" sz="2000" b="0" i="0" u="none" strike="noStrike" dirty="0">
+              <a:rPr lang="en-US" altLang="ko-KR" sz="2000" b="1" i="0" u="none" strike="noStrike" dirty="0">
                 <a:solidFill>
                   <a:srgbClr val="383A42"/>
                 </a:solidFill>
@@ -42578,7 +40200,7 @@
               <a:t>];</a:t>
             </a:r>
             <a:br>
-              <a:rPr lang="en-US" altLang="ko-KR" sz="2000" b="0" i="0" u="none" strike="noStrike" dirty="0">
+              <a:rPr lang="en-US" altLang="ko-KR" sz="2000" b="1" i="0" u="none" strike="noStrike" dirty="0">
                 <a:solidFill>
                   <a:srgbClr val="383A42"/>
                 </a:solidFill>
@@ -42587,7 +40209,7 @@
               </a:rPr>
             </a:br>
             <a:r>
-              <a:rPr lang="en-US" altLang="ko-KR" sz="2000" b="0" i="0" u="none" strike="noStrike" dirty="0">
+              <a:rPr lang="en-US" altLang="ko-KR" sz="2000" b="1" i="0" u="none" strike="noStrike" dirty="0">
                 <a:solidFill>
                   <a:srgbClr val="A626A4"/>
                 </a:solidFill>
@@ -42597,7 +40219,7 @@
               <a:t>sizeof</a:t>
             </a:r>
             <a:r>
-              <a:rPr lang="en-US" altLang="ko-KR" sz="2000" b="0" i="0" u="none" strike="noStrike" dirty="0">
+              <a:rPr lang="en-US" altLang="ko-KR" sz="2000" b="1" i="0" u="none" strike="noStrike" dirty="0">
                 <a:solidFill>
                   <a:srgbClr val="383A42"/>
                 </a:solidFill>
@@ -42607,7 +40229,7 @@
               <a:t>(arr);        </a:t>
             </a:r>
             <a:r>
-              <a:rPr lang="en-US" altLang="ko-KR" sz="2000" b="0" i="1" u="none" strike="noStrike" dirty="0">
+              <a:rPr lang="en-US" altLang="ko-KR" sz="2000" b="1" i="1" u="none" strike="noStrike" dirty="0">
                 <a:solidFill>
                   <a:srgbClr val="A0A1A7"/>
                 </a:solidFill>
@@ -42617,7 +40239,7 @@
               <a:t>// 512 (int</a:t>
             </a:r>
             <a:r>
-              <a:rPr lang="ko-KR" altLang="en-US" sz="2000" b="0" i="1" u="none" strike="noStrike" dirty="0">
+              <a:rPr lang="ko-KR" altLang="en-US" sz="2000" b="1" i="1" u="none" strike="noStrike" dirty="0">
                 <a:solidFill>
                   <a:srgbClr val="A0A1A7"/>
                 </a:solidFill>
@@ -42627,7 +40249,7 @@
               <a:t>가 </a:t>
             </a:r>
             <a:r>
-              <a:rPr lang="en-US" altLang="ko-KR" sz="2000" b="0" i="1" u="none" strike="noStrike" dirty="0">
+              <a:rPr lang="en-US" altLang="ko-KR" sz="2000" b="1" i="1" u="none" strike="noStrike" dirty="0">
                 <a:solidFill>
                   <a:srgbClr val="A0A1A7"/>
                 </a:solidFill>
@@ -42637,7 +40259,7 @@
               <a:t>4</a:t>
             </a:r>
             <a:r>
-              <a:rPr lang="ko-KR" altLang="en-US" sz="2000" b="0" i="1" u="none" strike="noStrike" dirty="0">
+              <a:rPr lang="ko-KR" altLang="en-US" sz="2000" b="1" i="1" u="none" strike="noStrike" dirty="0">
                 <a:solidFill>
                   <a:srgbClr val="A0A1A7"/>
                 </a:solidFill>
@@ -42647,7 +40269,7 @@
               <a:t>바이트 가정</a:t>
             </a:r>
             <a:r>
-              <a:rPr lang="en-US" altLang="ko-KR" sz="2000" b="0" i="1" u="none" strike="noStrike" dirty="0">
+              <a:rPr lang="en-US" altLang="ko-KR" sz="2000" b="1" i="1" u="none" strike="noStrike" dirty="0">
                 <a:solidFill>
                   <a:srgbClr val="A0A1A7"/>
                 </a:solidFill>
@@ -42657,7 +40279,7 @@
               <a:t>)</a:t>
             </a:r>
             <a:br>
-              <a:rPr lang="ko-KR" altLang="en-US" sz="2000" b="0" i="0" u="none" strike="noStrike" dirty="0">
+              <a:rPr lang="ko-KR" altLang="en-US" sz="2000" b="1" i="0" u="none" strike="noStrike" dirty="0">
                 <a:solidFill>
                   <a:srgbClr val="383A42"/>
                 </a:solidFill>
@@ -42666,7 +40288,7 @@
               </a:rPr>
             </a:br>
             <a:r>
-              <a:rPr lang="en-US" altLang="ko-KR" sz="2000" b="0" i="0" u="none" strike="noStrike" dirty="0">
+              <a:rPr lang="en-US" altLang="ko-KR" sz="2000" b="1" i="0" u="none" strike="noStrike" dirty="0">
                 <a:solidFill>
                   <a:srgbClr val="A626A4"/>
                 </a:solidFill>
@@ -42676,7 +40298,7 @@
               <a:t>sizeof</a:t>
             </a:r>
             <a:r>
-              <a:rPr lang="en-US" altLang="ko-KR" sz="2000" b="0" i="0" u="none" strike="noStrike" dirty="0">
+              <a:rPr lang="en-US" altLang="ko-KR" sz="2000" b="1" i="0" u="none" strike="noStrike" dirty="0">
                 <a:solidFill>
                   <a:srgbClr val="383A42"/>
                 </a:solidFill>
@@ -42686,7 +40308,7 @@
               <a:t>(arr[</a:t>
             </a:r>
             <a:r>
-              <a:rPr lang="en-US" altLang="ko-KR" sz="2000" b="0" i="0" u="none" strike="noStrike" dirty="0">
+              <a:rPr lang="en-US" altLang="ko-KR" sz="2000" b="1" i="0" u="none" strike="noStrike" dirty="0">
                 <a:solidFill>
                   <a:srgbClr val="986801"/>
                 </a:solidFill>
@@ -42696,7 +40318,7 @@
               <a:t>0</a:t>
             </a:r>
             <a:r>
-              <a:rPr lang="en-US" altLang="ko-KR" sz="2000" b="0" i="0" u="none" strike="noStrike" dirty="0">
+              <a:rPr lang="en-US" altLang="ko-KR" sz="2000" b="1" i="0" u="none" strike="noStrike" dirty="0">
                 <a:solidFill>
                   <a:srgbClr val="383A42"/>
                 </a:solidFill>
@@ -42706,7 +40328,7 @@
               <a:t>]);     </a:t>
             </a:r>
             <a:r>
-              <a:rPr lang="en-US" altLang="ko-KR" sz="2000" b="0" i="1" u="none" strike="noStrike" dirty="0">
+              <a:rPr lang="en-US" altLang="ko-KR" sz="2000" b="1" i="1" u="none" strike="noStrike" dirty="0">
                 <a:solidFill>
                   <a:srgbClr val="A0A1A7"/>
                 </a:solidFill>
@@ -42716,7 +40338,7 @@
               <a:t>// 4</a:t>
             </a:r>
             <a:r>
-              <a:rPr lang="ko-KR" altLang="en-US" sz="2000" b="0" i="1" u="none" strike="noStrike" dirty="0">
+              <a:rPr lang="ko-KR" altLang="en-US" sz="2000" b="1" i="1" u="none" strike="noStrike" dirty="0">
                 <a:solidFill>
                   <a:srgbClr val="A0A1A7"/>
                 </a:solidFill>
@@ -42726,7 +40348,7 @@
               <a:t>바이트</a:t>
             </a:r>
             <a:br>
-              <a:rPr lang="ko-KR" altLang="en-US" sz="2000" b="0" i="0" u="none" strike="noStrike" dirty="0">
+              <a:rPr lang="ko-KR" altLang="en-US" sz="2000" b="1" i="0" u="none" strike="noStrike" dirty="0">
                 <a:solidFill>
                   <a:srgbClr val="383A42"/>
                 </a:solidFill>
@@ -42735,7 +40357,7 @@
               </a:rPr>
             </a:br>
             <a:r>
-              <a:rPr lang="en-US" altLang="ko-KR" sz="2000" b="0" i="0" u="none" strike="noStrike" dirty="0">
+              <a:rPr lang="en-US" altLang="ko-KR" sz="2000" b="1" i="0" u="none" strike="noStrike" dirty="0">
                 <a:solidFill>
                   <a:srgbClr val="A626A4"/>
                 </a:solidFill>
@@ -42745,37 +40367,17 @@
               <a:t>int</a:t>
             </a:r>
             <a:r>
-              <a:rPr lang="en-US" altLang="ko-KR" sz="2000" b="0" i="0" u="none" strike="noStrike" dirty="0">
-                <a:solidFill>
-                  <a:srgbClr val="383A42"/>
-                </a:solidFill>
-                <a:effectLst/>
-                <a:latin typeface="Consolas" panose="020B0609020204030204" pitchFamily="49" charset="0"/>
-              </a:rPr>
-              <a:t> </a:t>
-            </a:r>
-            <a:r>
-              <a:rPr lang="en-US" altLang="ko-KR" sz="2000" b="0" i="0" u="none" strike="noStrike" dirty="0" err="1">
-                <a:solidFill>
-                  <a:srgbClr val="383A42"/>
-                </a:solidFill>
-                <a:effectLst/>
-                <a:latin typeface="Consolas" panose="020B0609020204030204" pitchFamily="49" charset="0"/>
-              </a:rPr>
-              <a:t>arr_number</a:t>
-            </a:r>
-            <a:r>
-              <a:rPr lang="en-US" altLang="ko-KR" sz="2000" b="0" i="0" u="none" strike="noStrike" dirty="0">
-                <a:solidFill>
-                  <a:srgbClr val="383A42"/>
-                </a:solidFill>
-                <a:effectLst/>
-                <a:latin typeface="Consolas" panose="020B0609020204030204" pitchFamily="49" charset="0"/>
-              </a:rPr>
-              <a:t> = </a:t>
-            </a:r>
-            <a:r>
-              <a:rPr lang="en-US" altLang="ko-KR" sz="2000" b="0" i="0" u="none" strike="noStrike" dirty="0">
+              <a:rPr lang="en-US" altLang="ko-KR" sz="2000" b="1" i="0" u="none" strike="noStrike" dirty="0">
+                <a:solidFill>
+                  <a:srgbClr val="383A42"/>
+                </a:solidFill>
+                <a:effectLst/>
+                <a:latin typeface="Consolas" panose="020B0609020204030204" pitchFamily="49" charset="0"/>
+              </a:rPr>
+              <a:t> arr_number = </a:t>
+            </a:r>
+            <a:r>
+              <a:rPr lang="en-US" altLang="ko-KR" sz="2000" b="1" i="0" u="none" strike="noStrike" dirty="0">
                 <a:solidFill>
                   <a:srgbClr val="A626A4"/>
                 </a:solidFill>
@@ -42785,7 +40387,7 @@
               <a:t>sizeof</a:t>
             </a:r>
             <a:r>
-              <a:rPr lang="en-US" altLang="ko-KR" sz="2000" b="0" i="0" u="none" strike="noStrike" dirty="0">
+              <a:rPr lang="en-US" altLang="ko-KR" sz="2000" b="1" i="0" u="none" strike="noStrike" dirty="0">
                 <a:solidFill>
                   <a:srgbClr val="383A42"/>
                 </a:solidFill>
@@ -42795,7 +40397,7 @@
               <a:t>(arr) / </a:t>
             </a:r>
             <a:r>
-              <a:rPr lang="en-US" altLang="ko-KR" sz="2000" b="0" i="0" u="none" strike="noStrike" dirty="0">
+              <a:rPr lang="en-US" altLang="ko-KR" sz="2000" b="1" i="0" u="none" strike="noStrike" dirty="0">
                 <a:solidFill>
                   <a:srgbClr val="A626A4"/>
                 </a:solidFill>
@@ -42805,7 +40407,7 @@
               <a:t>sizeof</a:t>
             </a:r>
             <a:r>
-              <a:rPr lang="en-US" altLang="ko-KR" sz="2000" b="0" i="0" u="none" strike="noStrike" dirty="0">
+              <a:rPr lang="en-US" altLang="ko-KR" sz="2000" b="1" i="0" u="none" strike="noStrike" dirty="0">
                 <a:solidFill>
                   <a:srgbClr val="383A42"/>
                 </a:solidFill>
@@ -42815,7 +40417,7 @@
               <a:t>(arr[</a:t>
             </a:r>
             <a:r>
-              <a:rPr lang="en-US" altLang="ko-KR" sz="2000" b="0" i="0" u="none" strike="noStrike" dirty="0">
+              <a:rPr lang="en-US" altLang="ko-KR" sz="2000" b="1" i="0" u="none" strike="noStrike" dirty="0">
                 <a:solidFill>
                   <a:srgbClr val="986801"/>
                 </a:solidFill>
@@ -42825,7 +40427,7 @@
               <a:t>0</a:t>
             </a:r>
             <a:r>
-              <a:rPr lang="en-US" altLang="ko-KR" sz="2000" b="0" i="0" u="none" strike="noStrike" dirty="0">
+              <a:rPr lang="en-US" altLang="ko-KR" sz="2000" b="1" i="0" u="none" strike="noStrike" dirty="0">
                 <a:solidFill>
                   <a:srgbClr val="383A42"/>
                 </a:solidFill>
@@ -42835,7 +40437,7 @@
               <a:t>]); </a:t>
             </a:r>
             <a:r>
-              <a:rPr lang="en-US" altLang="ko-KR" sz="2000" b="0" i="1" u="none" strike="noStrike" dirty="0">
+              <a:rPr lang="en-US" altLang="ko-KR" sz="2000" b="1" i="1" u="none" strike="noStrike" dirty="0">
                 <a:solidFill>
                   <a:srgbClr val="A0A1A7"/>
                 </a:solidFill>
@@ -42844,7 +40446,7 @@
               </a:rPr>
               <a:t>// 128</a:t>
             </a:r>
-            <a:endParaRPr lang="ko-KR" altLang="en-US" sz="2000" dirty="0"/>
+            <a:endParaRPr lang="ko-KR" altLang="en-US" sz="2000" b="1" dirty="0"/>
           </a:p>
         </p:txBody>
       </p:sp>
@@ -42906,14 +40508,13 @@
           <a:lstStyle/>
           <a:p>
             <a:r>
-              <a:rPr lang="en-US" altLang="ko-KR" b="0" dirty="0"/>
+              <a:rPr lang="en-US" altLang="ko-KR" dirty="0"/>
               <a:t>8.1.4 1</a:t>
             </a:r>
             <a:r>
-              <a:rPr lang="ko-KR" altLang="en-US" b="0" dirty="0"/>
+              <a:rPr lang="ko-KR" altLang="en-US" dirty="0"/>
               <a:t>차원 배열 접근  예제</a:t>
             </a:r>
-            <a:endParaRPr lang="ko-KR" altLang="en-US" dirty="0"/>
           </a:p>
         </p:txBody>
       </p:sp>
@@ -42976,10 +40577,9 @@
               <a:defRPr/>
             </a:pPr>
             <a:r>
-              <a:rPr lang="ko-KR" altLang="en-US"/>
+              <a:rPr lang="ko-KR" altLang="en-US" dirty="0"/>
               <a:t>게임 프로그래밍 교육과정</a:t>
             </a:r>
-            <a:endParaRPr lang="ko-KR" altLang="en-US" dirty="0"/>
           </a:p>
         </p:txBody>
       </p:sp>
@@ -43292,27 +40892,7 @@
                 <a:effectLst/>
                 <a:latin typeface="Consolas" panose="020B0609020204030204" pitchFamily="49" charset="0"/>
               </a:rPr>
-              <a:t> </a:t>
-            </a:r>
-            <a:r>
-              <a:rPr lang="en-US" altLang="ko-KR" sz="1400" b="0" i="0" u="none" strike="noStrike" dirty="0" err="1">
-                <a:solidFill>
-                  <a:srgbClr val="383A42"/>
-                </a:solidFill>
-                <a:effectLst/>
-                <a:latin typeface="Consolas" panose="020B0609020204030204" pitchFamily="49" charset="0"/>
-              </a:rPr>
-              <a:t>arr_number</a:t>
-            </a:r>
-            <a:r>
-              <a:rPr lang="en-US" altLang="ko-KR" sz="1400" b="0" i="0" u="none" strike="noStrike" dirty="0">
-                <a:solidFill>
-                  <a:srgbClr val="383A42"/>
-                </a:solidFill>
-                <a:effectLst/>
-                <a:latin typeface="Consolas" panose="020B0609020204030204" pitchFamily="49" charset="0"/>
-              </a:rPr>
-              <a:t> = </a:t>
+              <a:t> arr_number = </a:t>
             </a:r>
             <a:r>
               <a:rPr lang="en-US" altLang="ko-KR" sz="1400" b="0" i="0" u="none" strike="noStrike" dirty="0">
@@ -43539,27 +41119,7 @@
                 <a:effectLst/>
                 <a:latin typeface="Consolas" panose="020B0609020204030204" pitchFamily="49" charset="0"/>
               </a:rPr>
-              <a:t>; i &lt; </a:t>
-            </a:r>
-            <a:r>
-              <a:rPr lang="en-US" altLang="ko-KR" sz="1400" b="0" i="0" u="none" strike="noStrike" dirty="0" err="1">
-                <a:solidFill>
-                  <a:srgbClr val="383A42"/>
-                </a:solidFill>
-                <a:effectLst/>
-                <a:latin typeface="Consolas" panose="020B0609020204030204" pitchFamily="49" charset="0"/>
-              </a:rPr>
-              <a:t>arr_number</a:t>
-            </a:r>
-            <a:r>
-              <a:rPr lang="en-US" altLang="ko-KR" sz="1400" b="0" i="0" u="none" strike="noStrike" dirty="0">
-                <a:solidFill>
-                  <a:srgbClr val="383A42"/>
-                </a:solidFill>
-                <a:effectLst/>
-                <a:latin typeface="Consolas" panose="020B0609020204030204" pitchFamily="49" charset="0"/>
-              </a:rPr>
-              <a:t>; ++i)</a:t>
+              <a:t>; i &lt; arr_number; ++i)</a:t>
             </a:r>
             <a:br>
               <a:rPr lang="en-US" altLang="ko-KR" sz="1400" b="0" i="0" u="none" strike="noStrike" dirty="0">
@@ -43822,27 +41382,7 @@
                 <a:effectLst/>
                 <a:latin typeface="Consolas" panose="020B0609020204030204" pitchFamily="49" charset="0"/>
               </a:rPr>
-              <a:t>; i &lt; </a:t>
-            </a:r>
-            <a:r>
-              <a:rPr lang="en-US" altLang="ko-KR" sz="1400" b="0" i="0" u="none" strike="noStrike" dirty="0" err="1">
-                <a:solidFill>
-                  <a:srgbClr val="383A42"/>
-                </a:solidFill>
-                <a:effectLst/>
-                <a:latin typeface="Consolas" panose="020B0609020204030204" pitchFamily="49" charset="0"/>
-              </a:rPr>
-              <a:t>arr_number</a:t>
-            </a:r>
-            <a:r>
-              <a:rPr lang="en-US" altLang="ko-KR" sz="1400" b="0" i="0" u="none" strike="noStrike" dirty="0">
-                <a:solidFill>
-                  <a:srgbClr val="383A42"/>
-                </a:solidFill>
-                <a:effectLst/>
-                <a:latin typeface="Consolas" panose="020B0609020204030204" pitchFamily="49" charset="0"/>
-              </a:rPr>
-              <a:t>; ++i)</a:t>
+              <a:t>; i &lt; arr_number; ++i)</a:t>
             </a:r>
             <a:br>
               <a:rPr lang="en-US" altLang="ko-KR" sz="1400" b="0" i="0" u="none" strike="noStrike" dirty="0">
@@ -44006,27 +41546,7 @@
                 <a:effectLst/>
                 <a:latin typeface="Consolas" panose="020B0609020204030204" pitchFamily="49" charset="0"/>
               </a:rPr>
-              <a:t>)sum / </a:t>
-            </a:r>
-            <a:r>
-              <a:rPr lang="en-US" altLang="ko-KR" sz="1400" b="0" i="0" u="none" strike="noStrike" dirty="0" err="1">
-                <a:solidFill>
-                  <a:srgbClr val="383A42"/>
-                </a:solidFill>
-                <a:effectLst/>
-                <a:latin typeface="Consolas" panose="020B0609020204030204" pitchFamily="49" charset="0"/>
-              </a:rPr>
-              <a:t>arr_number</a:t>
-            </a:r>
-            <a:r>
-              <a:rPr lang="en-US" altLang="ko-KR" sz="1400" b="0" i="0" u="none" strike="noStrike" dirty="0">
-                <a:solidFill>
-                  <a:srgbClr val="383A42"/>
-                </a:solidFill>
-                <a:effectLst/>
-                <a:latin typeface="Consolas" panose="020B0609020204030204" pitchFamily="49" charset="0"/>
-              </a:rPr>
-              <a:t>;</a:t>
+              <a:t>)sum / arr_number;</a:t>
             </a:r>
             <a:br>
               <a:rPr lang="en-US" altLang="ko-KR" sz="1400" b="0" i="0" u="none" strike="noStrike" dirty="0">
@@ -44252,15 +41772,15 @@
         <a:srgbClr val="B2B2B2"/>
       </a:folHlink>
     </a:clrScheme>
-    <a:fontScheme name="기본 디자인">
+    <a:fontScheme name="바른고딕">
       <a:majorFont>
-        <a:latin typeface="가을체"/>
-        <a:ea typeface="가을체"/>
+        <a:latin typeface="나눔바른고딕"/>
+        <a:ea typeface="나눔바른고딕"/>
         <a:cs typeface=""/>
       </a:majorFont>
       <a:minorFont>
-        <a:latin typeface="가을체"/>
-        <a:ea typeface="가을체"/>
+        <a:latin typeface="나눔바른고딕"/>
+        <a:ea typeface="나눔바른고딕"/>
         <a:cs typeface=""/>
       </a:minorFont>
     </a:fontScheme>
